--- a/LabBook_10.pptx
+++ b/LabBook_10.pptx
@@ -5,20 +5,30 @@
     <p:sldMasterId id="2147483648" r:id="rId1"/>
   </p:sldMasterIdLst>
   <p:notesMasterIdLst>
-    <p:notesMasterId r:id="rId10"/>
+    <p:notesMasterId r:id="rId20"/>
   </p:notesMasterIdLst>
   <p:handoutMasterIdLst>
-    <p:handoutMasterId r:id="rId11"/>
+    <p:handoutMasterId r:id="rId21"/>
   </p:handoutMasterIdLst>
   <p:sldIdLst>
     <p:sldId id="256" r:id="rId2"/>
     <p:sldId id="295" r:id="rId3"/>
     <p:sldId id="290" r:id="rId4"/>
-    <p:sldId id="291" r:id="rId5"/>
-    <p:sldId id="292" r:id="rId6"/>
-    <p:sldId id="297" r:id="rId7"/>
-    <p:sldId id="293" r:id="rId8"/>
-    <p:sldId id="288" r:id="rId9"/>
+    <p:sldId id="298" r:id="rId5"/>
+    <p:sldId id="291" r:id="rId6"/>
+    <p:sldId id="299" r:id="rId7"/>
+    <p:sldId id="292" r:id="rId8"/>
+    <p:sldId id="300" r:id="rId9"/>
+    <p:sldId id="297" r:id="rId10"/>
+    <p:sldId id="301" r:id="rId11"/>
+    <p:sldId id="293" r:id="rId12"/>
+    <p:sldId id="302" r:id="rId13"/>
+    <p:sldId id="303" r:id="rId14"/>
+    <p:sldId id="304" r:id="rId15"/>
+    <p:sldId id="305" r:id="rId16"/>
+    <p:sldId id="306" r:id="rId17"/>
+    <p:sldId id="307" r:id="rId18"/>
+    <p:sldId id="288" r:id="rId19"/>
   </p:sldIdLst>
   <p:sldSz cx="12192000" cy="6858000"/>
   <p:notesSz cx="12192000" cy="6858000"/>
@@ -233,7 +243,7 @@
           <a:p>
             <a:fld id="{8438F8DC-35B0-48E6-A86E-42F1F08DD00F}" type="datetimeFigureOut">
               <a:rPr lang="es-ES" smtClean="0"/>
-              <a:t>16/02/2026</a:t>
+              <a:t>12/03/2026</a:t>
             </a:fld>
             <a:endParaRPr lang="es-ES"/>
           </a:p>
@@ -410,7 +420,7 @@
           <a:p>
             <a:fld id="{FACBDC12-F39B-4B97-8F4D-6734F9D366FF}" type="datetimeFigureOut">
               <a:rPr lang="es-ES" smtClean="0"/>
-              <a:t>16/02/2026</a:t>
+              <a:t>12/03/2026</a:t>
             </a:fld>
             <a:endParaRPr lang="es-ES"/>
           </a:p>
@@ -761,7 +771,223 @@
 </p:notes>
 </file>
 
+<file path=ppt/notesSlides/notesSlide10.xml><?xml version="1.0" encoding="utf-8"?>
+<p:notes xmlns:a="http://schemas.openxmlformats.org/drawingml/2006/main" xmlns:r="http://schemas.openxmlformats.org/officeDocument/2006/relationships" xmlns:p="http://schemas.openxmlformats.org/presentationml/2006/main">
+  <p:cSld>
+    <p:spTree>
+      <p:nvGrpSpPr>
+        <p:cNvPr id="1" name="">
+          <a:extLst>
+            <a:ext uri="{FF2B5EF4-FFF2-40B4-BE49-F238E27FC236}">
+              <a16:creationId xmlns:a16="http://schemas.microsoft.com/office/drawing/2014/main" id="{92FF6EB6-A20F-C87D-9132-6D188F625663}"/>
+            </a:ext>
+          </a:extLst>
+        </p:cNvPr>
+        <p:cNvGrpSpPr/>
+        <p:nvPr/>
+      </p:nvGrpSpPr>
+      <p:grpSpPr>
+        <a:xfrm>
+          <a:off x="0" y="0"/>
+          <a:ext cx="0" cy="0"/>
+          <a:chOff x="0" y="0"/>
+          <a:chExt cx="0" cy="0"/>
+        </a:xfrm>
+      </p:grpSpPr>
+      <p:sp>
+        <p:nvSpPr>
+          <p:cNvPr id="2" name="Marcador de imagen de diapositiva 1">
+            <a:extLst>
+              <a:ext uri="{FF2B5EF4-FFF2-40B4-BE49-F238E27FC236}">
+                <a16:creationId xmlns:a16="http://schemas.microsoft.com/office/drawing/2014/main" id="{393B1AB4-E001-6F01-695B-6E87B86C90D8}"/>
+              </a:ext>
+            </a:extLst>
+          </p:cNvPr>
+          <p:cNvSpPr>
+            <a:spLocks noGrp="1" noRot="1" noChangeAspect="1"/>
+          </p:cNvSpPr>
+          <p:nvPr>
+            <p:ph type="sldImg"/>
+          </p:nvPr>
+        </p:nvSpPr>
+        <p:spPr/>
+      </p:sp>
+      <p:sp>
+        <p:nvSpPr>
+          <p:cNvPr id="3" name="Marcador de notas 2">
+            <a:extLst>
+              <a:ext uri="{FF2B5EF4-FFF2-40B4-BE49-F238E27FC236}">
+                <a16:creationId xmlns:a16="http://schemas.microsoft.com/office/drawing/2014/main" id="{D93187A6-C173-58B0-4C5E-AA3C987011A7}"/>
+              </a:ext>
+            </a:extLst>
+          </p:cNvPr>
+          <p:cNvSpPr>
+            <a:spLocks noGrp="1"/>
+          </p:cNvSpPr>
+          <p:nvPr>
+            <p:ph type="body" idx="1"/>
+          </p:nvPr>
+        </p:nvSpPr>
+        <p:spPr/>
+        <p:txBody>
+          <a:bodyPr/>
+          <a:lstStyle/>
+          <a:p>
+            <a:endParaRPr lang="es-ES" dirty="0"/>
+          </a:p>
+        </p:txBody>
+      </p:sp>
+      <p:sp>
+        <p:nvSpPr>
+          <p:cNvPr id="4" name="Marcador de número de diapositiva 3">
+            <a:extLst>
+              <a:ext uri="{FF2B5EF4-FFF2-40B4-BE49-F238E27FC236}">
+                <a16:creationId xmlns:a16="http://schemas.microsoft.com/office/drawing/2014/main" id="{8DE033B5-A7A0-87D1-925A-D33A560247F9}"/>
+              </a:ext>
+            </a:extLst>
+          </p:cNvPr>
+          <p:cNvSpPr>
+            <a:spLocks noGrp="1"/>
+          </p:cNvSpPr>
+          <p:nvPr>
+            <p:ph type="sldNum" sz="quarter" idx="5"/>
+          </p:nvPr>
+        </p:nvSpPr>
+        <p:spPr/>
+        <p:txBody>
+          <a:bodyPr/>
+          <a:lstStyle/>
+          <a:p>
+            <a:fld id="{676223B9-C868-4436-87D9-1A3152E1157A}" type="slidenum">
+              <a:rPr lang="es-ES" smtClean="0"/>
+              <a:t>12</a:t>
+            </a:fld>
+            <a:endParaRPr lang="es-ES"/>
+          </a:p>
+        </p:txBody>
+      </p:sp>
+    </p:spTree>
+    <p:extLst>
+      <p:ext uri="{BB962C8B-B14F-4D97-AF65-F5344CB8AC3E}">
+        <p14:creationId xmlns:p14="http://schemas.microsoft.com/office/powerpoint/2010/main" val="4139715440"/>
+      </p:ext>
+    </p:extLst>
+  </p:cSld>
+  <p:clrMapOvr>
+    <a:masterClrMapping/>
+  </p:clrMapOvr>
+</p:notes>
+</file>
+
 <file path=ppt/notesSlides/notesSlide2.xml><?xml version="1.0" encoding="utf-8"?>
+<p:notes xmlns:a="http://schemas.openxmlformats.org/drawingml/2006/main" xmlns:r="http://schemas.openxmlformats.org/officeDocument/2006/relationships" xmlns:p="http://schemas.openxmlformats.org/presentationml/2006/main">
+  <p:cSld>
+    <p:spTree>
+      <p:nvGrpSpPr>
+        <p:cNvPr id="1" name="">
+          <a:extLst>
+            <a:ext uri="{FF2B5EF4-FFF2-40B4-BE49-F238E27FC236}">
+              <a16:creationId xmlns:a16="http://schemas.microsoft.com/office/drawing/2014/main" id="{739F15B9-E28A-0CA6-2DBB-5D5C5428531A}"/>
+            </a:ext>
+          </a:extLst>
+        </p:cNvPr>
+        <p:cNvGrpSpPr/>
+        <p:nvPr/>
+      </p:nvGrpSpPr>
+      <p:grpSpPr>
+        <a:xfrm>
+          <a:off x="0" y="0"/>
+          <a:ext cx="0" cy="0"/>
+          <a:chOff x="0" y="0"/>
+          <a:chExt cx="0" cy="0"/>
+        </a:xfrm>
+      </p:grpSpPr>
+      <p:sp>
+        <p:nvSpPr>
+          <p:cNvPr id="2" name="Marcador de imagen de diapositiva 1">
+            <a:extLst>
+              <a:ext uri="{FF2B5EF4-FFF2-40B4-BE49-F238E27FC236}">
+                <a16:creationId xmlns:a16="http://schemas.microsoft.com/office/drawing/2014/main" id="{9A611433-0ED2-8FE6-71AE-B55104D3E10E}"/>
+              </a:ext>
+            </a:extLst>
+          </p:cNvPr>
+          <p:cNvSpPr>
+            <a:spLocks noGrp="1" noRot="1" noChangeAspect="1"/>
+          </p:cNvSpPr>
+          <p:nvPr>
+            <p:ph type="sldImg"/>
+          </p:nvPr>
+        </p:nvSpPr>
+        <p:spPr/>
+      </p:sp>
+      <p:sp>
+        <p:nvSpPr>
+          <p:cNvPr id="3" name="Marcador de notas 2">
+            <a:extLst>
+              <a:ext uri="{FF2B5EF4-FFF2-40B4-BE49-F238E27FC236}">
+                <a16:creationId xmlns:a16="http://schemas.microsoft.com/office/drawing/2014/main" id="{D07B52AF-326E-B5DE-2FED-A679DE77B311}"/>
+              </a:ext>
+            </a:extLst>
+          </p:cNvPr>
+          <p:cNvSpPr>
+            <a:spLocks noGrp="1"/>
+          </p:cNvSpPr>
+          <p:nvPr>
+            <p:ph type="body" idx="1"/>
+          </p:nvPr>
+        </p:nvSpPr>
+        <p:spPr/>
+        <p:txBody>
+          <a:bodyPr/>
+          <a:lstStyle/>
+          <a:p>
+            <a:endParaRPr lang="es-ES" dirty="0"/>
+          </a:p>
+        </p:txBody>
+      </p:sp>
+      <p:sp>
+        <p:nvSpPr>
+          <p:cNvPr id="4" name="Marcador de número de diapositiva 3">
+            <a:extLst>
+              <a:ext uri="{FF2B5EF4-FFF2-40B4-BE49-F238E27FC236}">
+                <a16:creationId xmlns:a16="http://schemas.microsoft.com/office/drawing/2014/main" id="{ECAC8D38-50ED-70C2-A111-3659741CF224}"/>
+              </a:ext>
+            </a:extLst>
+          </p:cNvPr>
+          <p:cNvSpPr>
+            <a:spLocks noGrp="1"/>
+          </p:cNvSpPr>
+          <p:nvPr>
+            <p:ph type="sldNum" sz="quarter" idx="5"/>
+          </p:nvPr>
+        </p:nvSpPr>
+        <p:spPr/>
+        <p:txBody>
+          <a:bodyPr/>
+          <a:lstStyle/>
+          <a:p>
+            <a:fld id="{676223B9-C868-4436-87D9-1A3152E1157A}" type="slidenum">
+              <a:rPr lang="es-ES" smtClean="0"/>
+              <a:t>4</a:t>
+            </a:fld>
+            <a:endParaRPr lang="es-ES"/>
+          </a:p>
+        </p:txBody>
+      </p:sp>
+    </p:spTree>
+    <p:extLst>
+      <p:ext uri="{BB962C8B-B14F-4D97-AF65-F5344CB8AC3E}">
+        <p14:creationId xmlns:p14="http://schemas.microsoft.com/office/powerpoint/2010/main" val="1530940054"/>
+      </p:ext>
+    </p:extLst>
+  </p:cSld>
+  <p:clrMapOvr>
+    <a:masterClrMapping/>
+  </p:clrMapOvr>
+</p:notes>
+</file>
+
+<file path=ppt/notesSlides/notesSlide3.xml><?xml version="1.0" encoding="utf-8"?>
 <p:notes xmlns:a="http://schemas.openxmlformats.org/drawingml/2006/main" xmlns:r="http://schemas.openxmlformats.org/officeDocument/2006/relationships" xmlns:p="http://schemas.openxmlformats.org/presentationml/2006/main">
   <p:cSld>
     <p:spTree>
@@ -850,7 +1076,7 @@
           <a:p>
             <a:fld id="{676223B9-C868-4436-87D9-1A3152E1157A}" type="slidenum">
               <a:rPr lang="es-ES" smtClean="0"/>
-              <a:t>4</a:t>
+              <a:t>5</a:t>
             </a:fld>
             <a:endParaRPr lang="es-ES"/>
           </a:p>
@@ -869,7 +1095,115 @@
 </p:notes>
 </file>
 
-<file path=ppt/notesSlides/notesSlide3.xml><?xml version="1.0" encoding="utf-8"?>
+<file path=ppt/notesSlides/notesSlide4.xml><?xml version="1.0" encoding="utf-8"?>
+<p:notes xmlns:a="http://schemas.openxmlformats.org/drawingml/2006/main" xmlns:r="http://schemas.openxmlformats.org/officeDocument/2006/relationships" xmlns:p="http://schemas.openxmlformats.org/presentationml/2006/main">
+  <p:cSld>
+    <p:spTree>
+      <p:nvGrpSpPr>
+        <p:cNvPr id="1" name="">
+          <a:extLst>
+            <a:ext uri="{FF2B5EF4-FFF2-40B4-BE49-F238E27FC236}">
+              <a16:creationId xmlns:a16="http://schemas.microsoft.com/office/drawing/2014/main" id="{5DD0C872-3E6D-E241-C7F5-325DCB3983C0}"/>
+            </a:ext>
+          </a:extLst>
+        </p:cNvPr>
+        <p:cNvGrpSpPr/>
+        <p:nvPr/>
+      </p:nvGrpSpPr>
+      <p:grpSpPr>
+        <a:xfrm>
+          <a:off x="0" y="0"/>
+          <a:ext cx="0" cy="0"/>
+          <a:chOff x="0" y="0"/>
+          <a:chExt cx="0" cy="0"/>
+        </a:xfrm>
+      </p:grpSpPr>
+      <p:sp>
+        <p:nvSpPr>
+          <p:cNvPr id="2" name="Marcador de imagen de diapositiva 1">
+            <a:extLst>
+              <a:ext uri="{FF2B5EF4-FFF2-40B4-BE49-F238E27FC236}">
+                <a16:creationId xmlns:a16="http://schemas.microsoft.com/office/drawing/2014/main" id="{06F1BBE0-FE52-49DB-6F94-36DFBD69AB3B}"/>
+              </a:ext>
+            </a:extLst>
+          </p:cNvPr>
+          <p:cNvSpPr>
+            <a:spLocks noGrp="1" noRot="1" noChangeAspect="1"/>
+          </p:cNvSpPr>
+          <p:nvPr>
+            <p:ph type="sldImg"/>
+          </p:nvPr>
+        </p:nvSpPr>
+        <p:spPr/>
+      </p:sp>
+      <p:sp>
+        <p:nvSpPr>
+          <p:cNvPr id="3" name="Marcador de notas 2">
+            <a:extLst>
+              <a:ext uri="{FF2B5EF4-FFF2-40B4-BE49-F238E27FC236}">
+                <a16:creationId xmlns:a16="http://schemas.microsoft.com/office/drawing/2014/main" id="{EC754419-1018-1831-F85F-34DE08B02211}"/>
+              </a:ext>
+            </a:extLst>
+          </p:cNvPr>
+          <p:cNvSpPr>
+            <a:spLocks noGrp="1"/>
+          </p:cNvSpPr>
+          <p:nvPr>
+            <p:ph type="body" idx="1"/>
+          </p:nvPr>
+        </p:nvSpPr>
+        <p:spPr/>
+        <p:txBody>
+          <a:bodyPr/>
+          <a:lstStyle/>
+          <a:p>
+            <a:endParaRPr lang="es-ES" dirty="0"/>
+          </a:p>
+        </p:txBody>
+      </p:sp>
+      <p:sp>
+        <p:nvSpPr>
+          <p:cNvPr id="4" name="Marcador de número de diapositiva 3">
+            <a:extLst>
+              <a:ext uri="{FF2B5EF4-FFF2-40B4-BE49-F238E27FC236}">
+                <a16:creationId xmlns:a16="http://schemas.microsoft.com/office/drawing/2014/main" id="{DAE0DACB-0AE7-6195-1427-D6E183A41053}"/>
+              </a:ext>
+            </a:extLst>
+          </p:cNvPr>
+          <p:cNvSpPr>
+            <a:spLocks noGrp="1"/>
+          </p:cNvSpPr>
+          <p:nvPr>
+            <p:ph type="sldNum" sz="quarter" idx="5"/>
+          </p:nvPr>
+        </p:nvSpPr>
+        <p:spPr/>
+        <p:txBody>
+          <a:bodyPr/>
+          <a:lstStyle/>
+          <a:p>
+            <a:fld id="{676223B9-C868-4436-87D9-1A3152E1157A}" type="slidenum">
+              <a:rPr lang="es-ES" smtClean="0"/>
+              <a:t>6</a:t>
+            </a:fld>
+            <a:endParaRPr lang="es-ES"/>
+          </a:p>
+        </p:txBody>
+      </p:sp>
+    </p:spTree>
+    <p:extLst>
+      <p:ext uri="{BB962C8B-B14F-4D97-AF65-F5344CB8AC3E}">
+        <p14:creationId xmlns:p14="http://schemas.microsoft.com/office/powerpoint/2010/main" val="385416856"/>
+      </p:ext>
+    </p:extLst>
+  </p:cSld>
+  <p:clrMapOvr>
+    <a:masterClrMapping/>
+  </p:clrMapOvr>
+</p:notes>
+</file>
+
+<file path=ppt/notesSlides/notesSlide5.xml><?xml version="1.0" encoding="utf-8"?>
 <p:notes xmlns:a="http://schemas.openxmlformats.org/drawingml/2006/main" xmlns:r="http://schemas.openxmlformats.org/officeDocument/2006/relationships" xmlns:p="http://schemas.openxmlformats.org/presentationml/2006/main">
   <p:cSld>
     <p:spTree>
@@ -958,7 +1292,7 @@
           <a:p>
             <a:fld id="{676223B9-C868-4436-87D9-1A3152E1157A}" type="slidenum">
               <a:rPr lang="es-ES" smtClean="0"/>
-              <a:t>5</a:t>
+              <a:t>7</a:t>
             </a:fld>
             <a:endParaRPr lang="es-ES"/>
           </a:p>
@@ -977,7 +1311,115 @@
 </p:notes>
 </file>
 
-<file path=ppt/notesSlides/notesSlide4.xml><?xml version="1.0" encoding="utf-8"?>
+<file path=ppt/notesSlides/notesSlide6.xml><?xml version="1.0" encoding="utf-8"?>
+<p:notes xmlns:a="http://schemas.openxmlformats.org/drawingml/2006/main" xmlns:r="http://schemas.openxmlformats.org/officeDocument/2006/relationships" xmlns:p="http://schemas.openxmlformats.org/presentationml/2006/main">
+  <p:cSld>
+    <p:spTree>
+      <p:nvGrpSpPr>
+        <p:cNvPr id="1" name="">
+          <a:extLst>
+            <a:ext uri="{FF2B5EF4-FFF2-40B4-BE49-F238E27FC236}">
+              <a16:creationId xmlns:a16="http://schemas.microsoft.com/office/drawing/2014/main" id="{85A51EA8-2E89-D101-134F-2C24995CE997}"/>
+            </a:ext>
+          </a:extLst>
+        </p:cNvPr>
+        <p:cNvGrpSpPr/>
+        <p:nvPr/>
+      </p:nvGrpSpPr>
+      <p:grpSpPr>
+        <a:xfrm>
+          <a:off x="0" y="0"/>
+          <a:ext cx="0" cy="0"/>
+          <a:chOff x="0" y="0"/>
+          <a:chExt cx="0" cy="0"/>
+        </a:xfrm>
+      </p:grpSpPr>
+      <p:sp>
+        <p:nvSpPr>
+          <p:cNvPr id="2" name="Marcador de imagen de diapositiva 1">
+            <a:extLst>
+              <a:ext uri="{FF2B5EF4-FFF2-40B4-BE49-F238E27FC236}">
+                <a16:creationId xmlns:a16="http://schemas.microsoft.com/office/drawing/2014/main" id="{D945EB39-229A-4DEE-0F4E-5E8CD2312C15}"/>
+              </a:ext>
+            </a:extLst>
+          </p:cNvPr>
+          <p:cNvSpPr>
+            <a:spLocks noGrp="1" noRot="1" noChangeAspect="1"/>
+          </p:cNvSpPr>
+          <p:nvPr>
+            <p:ph type="sldImg"/>
+          </p:nvPr>
+        </p:nvSpPr>
+        <p:spPr/>
+      </p:sp>
+      <p:sp>
+        <p:nvSpPr>
+          <p:cNvPr id="3" name="Marcador de notas 2">
+            <a:extLst>
+              <a:ext uri="{FF2B5EF4-FFF2-40B4-BE49-F238E27FC236}">
+                <a16:creationId xmlns:a16="http://schemas.microsoft.com/office/drawing/2014/main" id="{A19219D1-BE99-4406-50D0-411513DBFC27}"/>
+              </a:ext>
+            </a:extLst>
+          </p:cNvPr>
+          <p:cNvSpPr>
+            <a:spLocks noGrp="1"/>
+          </p:cNvSpPr>
+          <p:nvPr>
+            <p:ph type="body" idx="1"/>
+          </p:nvPr>
+        </p:nvSpPr>
+        <p:spPr/>
+        <p:txBody>
+          <a:bodyPr/>
+          <a:lstStyle/>
+          <a:p>
+            <a:endParaRPr lang="es-ES" dirty="0"/>
+          </a:p>
+        </p:txBody>
+      </p:sp>
+      <p:sp>
+        <p:nvSpPr>
+          <p:cNvPr id="4" name="Marcador de número de diapositiva 3">
+            <a:extLst>
+              <a:ext uri="{FF2B5EF4-FFF2-40B4-BE49-F238E27FC236}">
+                <a16:creationId xmlns:a16="http://schemas.microsoft.com/office/drawing/2014/main" id="{9D593A36-84B8-972F-5F98-8DE66E63B4A9}"/>
+              </a:ext>
+            </a:extLst>
+          </p:cNvPr>
+          <p:cNvSpPr>
+            <a:spLocks noGrp="1"/>
+          </p:cNvSpPr>
+          <p:nvPr>
+            <p:ph type="sldNum" sz="quarter" idx="5"/>
+          </p:nvPr>
+        </p:nvSpPr>
+        <p:spPr/>
+        <p:txBody>
+          <a:bodyPr/>
+          <a:lstStyle/>
+          <a:p>
+            <a:fld id="{676223B9-C868-4436-87D9-1A3152E1157A}" type="slidenum">
+              <a:rPr lang="es-ES" smtClean="0"/>
+              <a:t>8</a:t>
+            </a:fld>
+            <a:endParaRPr lang="es-ES"/>
+          </a:p>
+        </p:txBody>
+      </p:sp>
+    </p:spTree>
+    <p:extLst>
+      <p:ext uri="{BB962C8B-B14F-4D97-AF65-F5344CB8AC3E}">
+        <p14:creationId xmlns:p14="http://schemas.microsoft.com/office/powerpoint/2010/main" val="2903682009"/>
+      </p:ext>
+    </p:extLst>
+  </p:cSld>
+  <p:clrMapOvr>
+    <a:masterClrMapping/>
+  </p:clrMapOvr>
+</p:notes>
+</file>
+
+<file path=ppt/notesSlides/notesSlide7.xml><?xml version="1.0" encoding="utf-8"?>
 <p:notes xmlns:a="http://schemas.openxmlformats.org/drawingml/2006/main" xmlns:r="http://schemas.openxmlformats.org/officeDocument/2006/relationships" xmlns:p="http://schemas.openxmlformats.org/presentationml/2006/main">
   <p:cSld>
     <p:spTree>
@@ -1066,7 +1508,7 @@
           <a:p>
             <a:fld id="{676223B9-C868-4436-87D9-1A3152E1157A}" type="slidenum">
               <a:rPr lang="es-ES" smtClean="0"/>
-              <a:t>6</a:t>
+              <a:t>9</a:t>
             </a:fld>
             <a:endParaRPr lang="es-ES"/>
           </a:p>
@@ -1085,7 +1527,115 @@
 </p:notes>
 </file>
 
-<file path=ppt/notesSlides/notesSlide5.xml><?xml version="1.0" encoding="utf-8"?>
+<file path=ppt/notesSlides/notesSlide8.xml><?xml version="1.0" encoding="utf-8"?>
+<p:notes xmlns:a="http://schemas.openxmlformats.org/drawingml/2006/main" xmlns:r="http://schemas.openxmlformats.org/officeDocument/2006/relationships" xmlns:p="http://schemas.openxmlformats.org/presentationml/2006/main">
+  <p:cSld>
+    <p:spTree>
+      <p:nvGrpSpPr>
+        <p:cNvPr id="1" name="">
+          <a:extLst>
+            <a:ext uri="{FF2B5EF4-FFF2-40B4-BE49-F238E27FC236}">
+              <a16:creationId xmlns:a16="http://schemas.microsoft.com/office/drawing/2014/main" id="{EB13DF4D-A8A8-D4B9-4E2E-6AAE82AA0EF4}"/>
+            </a:ext>
+          </a:extLst>
+        </p:cNvPr>
+        <p:cNvGrpSpPr/>
+        <p:nvPr/>
+      </p:nvGrpSpPr>
+      <p:grpSpPr>
+        <a:xfrm>
+          <a:off x="0" y="0"/>
+          <a:ext cx="0" cy="0"/>
+          <a:chOff x="0" y="0"/>
+          <a:chExt cx="0" cy="0"/>
+        </a:xfrm>
+      </p:grpSpPr>
+      <p:sp>
+        <p:nvSpPr>
+          <p:cNvPr id="2" name="Marcador de imagen de diapositiva 1">
+            <a:extLst>
+              <a:ext uri="{FF2B5EF4-FFF2-40B4-BE49-F238E27FC236}">
+                <a16:creationId xmlns:a16="http://schemas.microsoft.com/office/drawing/2014/main" id="{4A5B34F7-91C5-263D-7CC2-A940C968D1C9}"/>
+              </a:ext>
+            </a:extLst>
+          </p:cNvPr>
+          <p:cNvSpPr>
+            <a:spLocks noGrp="1" noRot="1" noChangeAspect="1"/>
+          </p:cNvSpPr>
+          <p:nvPr>
+            <p:ph type="sldImg"/>
+          </p:nvPr>
+        </p:nvSpPr>
+        <p:spPr/>
+      </p:sp>
+      <p:sp>
+        <p:nvSpPr>
+          <p:cNvPr id="3" name="Marcador de notas 2">
+            <a:extLst>
+              <a:ext uri="{FF2B5EF4-FFF2-40B4-BE49-F238E27FC236}">
+                <a16:creationId xmlns:a16="http://schemas.microsoft.com/office/drawing/2014/main" id="{AD93D3A5-1F6A-4418-A597-9B1168B50CB3}"/>
+              </a:ext>
+            </a:extLst>
+          </p:cNvPr>
+          <p:cNvSpPr>
+            <a:spLocks noGrp="1"/>
+          </p:cNvSpPr>
+          <p:nvPr>
+            <p:ph type="body" idx="1"/>
+          </p:nvPr>
+        </p:nvSpPr>
+        <p:spPr/>
+        <p:txBody>
+          <a:bodyPr/>
+          <a:lstStyle/>
+          <a:p>
+            <a:endParaRPr lang="es-ES" dirty="0"/>
+          </a:p>
+        </p:txBody>
+      </p:sp>
+      <p:sp>
+        <p:nvSpPr>
+          <p:cNvPr id="4" name="Marcador de número de diapositiva 3">
+            <a:extLst>
+              <a:ext uri="{FF2B5EF4-FFF2-40B4-BE49-F238E27FC236}">
+                <a16:creationId xmlns:a16="http://schemas.microsoft.com/office/drawing/2014/main" id="{CB157109-D415-E5F0-33F6-A0D2C5D19233}"/>
+              </a:ext>
+            </a:extLst>
+          </p:cNvPr>
+          <p:cNvSpPr>
+            <a:spLocks noGrp="1"/>
+          </p:cNvSpPr>
+          <p:nvPr>
+            <p:ph type="sldNum" sz="quarter" idx="5"/>
+          </p:nvPr>
+        </p:nvSpPr>
+        <p:spPr/>
+        <p:txBody>
+          <a:bodyPr/>
+          <a:lstStyle/>
+          <a:p>
+            <a:fld id="{676223B9-C868-4436-87D9-1A3152E1157A}" type="slidenum">
+              <a:rPr lang="es-ES" smtClean="0"/>
+              <a:t>10</a:t>
+            </a:fld>
+            <a:endParaRPr lang="es-ES"/>
+          </a:p>
+        </p:txBody>
+      </p:sp>
+    </p:spTree>
+    <p:extLst>
+      <p:ext uri="{BB962C8B-B14F-4D97-AF65-F5344CB8AC3E}">
+        <p14:creationId xmlns:p14="http://schemas.microsoft.com/office/powerpoint/2010/main" val="4022889329"/>
+      </p:ext>
+    </p:extLst>
+  </p:cSld>
+  <p:clrMapOvr>
+    <a:masterClrMapping/>
+  </p:clrMapOvr>
+</p:notes>
+</file>
+
+<file path=ppt/notesSlides/notesSlide9.xml><?xml version="1.0" encoding="utf-8"?>
 <p:notes xmlns:a="http://schemas.openxmlformats.org/drawingml/2006/main" xmlns:r="http://schemas.openxmlformats.org/officeDocument/2006/relationships" xmlns:p="http://schemas.openxmlformats.org/presentationml/2006/main">
   <p:cSld>
     <p:spTree>
@@ -1174,7 +1724,7 @@
           <a:p>
             <a:fld id="{676223B9-C868-4436-87D9-1A3152E1157A}" type="slidenum">
               <a:rPr lang="es-ES" smtClean="0"/>
-              <a:t>7</a:t>
+              <a:t>11</a:t>
             </a:fld>
             <a:endParaRPr lang="es-ES"/>
           </a:p>
@@ -2703,14 +3253,14 @@
                 <a:latin typeface="Arial"/>
                 <a:cs typeface="Arial"/>
               </a:rPr>
-              <a:t>Student</a:t>
+              <a:t>Students</a:t>
             </a:r>
             <a:r>
               <a:rPr lang="es-ES" spc="165" dirty="0">
                 <a:latin typeface="Arial"/>
                 <a:cs typeface="Arial"/>
               </a:rPr>
-              <a:t>: </a:t>
+              <a:t>: Lucas N. Descalzo Puchalt, Francisco García Villar </a:t>
             </a:r>
             <a:endParaRPr sz="1800" dirty="0">
               <a:latin typeface="Arial"/>
@@ -2774,6 +3324,3826 @@
               <a:t>1</a:t>
             </a:fld>
             <a:endParaRPr lang="es-ES"/>
+          </a:p>
+        </p:txBody>
+      </p:sp>
+    </p:spTree>
+  </p:cSld>
+  <p:clrMapOvr>
+    <a:masterClrMapping/>
+  </p:clrMapOvr>
+</p:sld>
+</file>
+
+<file path=ppt/slides/slide10.xml><?xml version="1.0" encoding="utf-8"?>
+<p:sld xmlns:a="http://schemas.openxmlformats.org/drawingml/2006/main" xmlns:r="http://schemas.openxmlformats.org/officeDocument/2006/relationships" xmlns:p="http://schemas.openxmlformats.org/presentationml/2006/main">
+  <p:cSld>
+    <p:spTree>
+      <p:nvGrpSpPr>
+        <p:cNvPr id="1" name="">
+          <a:extLst>
+            <a:ext uri="{FF2B5EF4-FFF2-40B4-BE49-F238E27FC236}">
+              <a16:creationId xmlns:a16="http://schemas.microsoft.com/office/drawing/2014/main" id="{A978A23B-CB8D-7849-3996-9AEC7A3D3254}"/>
+            </a:ext>
+          </a:extLst>
+        </p:cNvPr>
+        <p:cNvGrpSpPr/>
+        <p:nvPr/>
+      </p:nvGrpSpPr>
+      <p:grpSpPr>
+        <a:xfrm>
+          <a:off x="0" y="0"/>
+          <a:ext cx="0" cy="0"/>
+          <a:chOff x="0" y="0"/>
+          <a:chExt cx="0" cy="0"/>
+        </a:xfrm>
+      </p:grpSpPr>
+      <p:sp>
+        <p:nvSpPr>
+          <p:cNvPr id="16" name="object 16">
+            <a:extLst>
+              <a:ext uri="{FF2B5EF4-FFF2-40B4-BE49-F238E27FC236}">
+                <a16:creationId xmlns:a16="http://schemas.microsoft.com/office/drawing/2014/main" id="{603DB863-F35B-4E8B-9FFD-253DA9A93FEA}"/>
+              </a:ext>
+            </a:extLst>
+          </p:cNvPr>
+          <p:cNvSpPr txBox="1">
+            <a:spLocks noGrp="1"/>
+          </p:cNvSpPr>
+          <p:nvPr>
+            <p:ph type="title"/>
+          </p:nvPr>
+        </p:nvSpPr>
+        <p:spPr>
+          <a:xfrm>
+            <a:off x="685800" y="408883"/>
+            <a:ext cx="10994410" cy="1397819"/>
+          </a:xfrm>
+          <a:prstGeom prst="rect">
+            <a:avLst/>
+          </a:prstGeom>
+        </p:spPr>
+        <p:txBody>
+          <a:bodyPr vert="horz" wrap="square" lIns="0" tIns="12700" rIns="0" bIns="0" rtlCol="0">
+            <a:spAutoFit/>
+          </a:bodyPr>
+          <a:lstStyle/>
+          <a:p>
+            <a:pPr marL="12700">
+              <a:lnSpc>
+                <a:spcPct val="100000"/>
+              </a:lnSpc>
+              <a:spcBef>
+                <a:spcPts val="100"/>
+              </a:spcBef>
+            </a:pPr>
+            <a:r>
+              <a:rPr lang="en-US" sz="2500" dirty="0"/>
+              <a:t>Learning outcome #4 </a:t>
+            </a:r>
+            <a:r>
+              <a:rPr lang="en-US" sz="2500" dirty="0" err="1"/>
+              <a:t>Continuación</a:t>
+            </a:r>
+            <a:r>
+              <a:rPr lang="en-US" sz="2500" dirty="0"/>
+              <a:t> – Waveguide compact model</a:t>
+            </a:r>
+            <a:br>
+              <a:rPr lang="en-US" sz="2500" spc="-5" dirty="0">
+                <a:latin typeface="+mj-lt"/>
+                <a:cs typeface="Lucida Sans"/>
+              </a:rPr>
+            </a:br>
+            <a:r>
+              <a:rPr lang="en-US" b="0" dirty="0"/>
+              <a:t>- Find the compact models of the following waveguides: </a:t>
+            </a:r>
+            <a:br>
+              <a:rPr lang="en-US" b="0" dirty="0"/>
+            </a:br>
+            <a:r>
+              <a:rPr lang="en-US" dirty="0"/>
+              <a:t>Deep</a:t>
+            </a:r>
+            <a:r>
+              <a:rPr lang="en-US" b="0" dirty="0"/>
+              <a:t> waveguide, h=300nm, w=1.2um   - </a:t>
+            </a:r>
+            <a:r>
+              <a:rPr lang="en-US" dirty="0"/>
+              <a:t>Shallow</a:t>
+            </a:r>
+            <a:r>
+              <a:rPr lang="en-US" b="0" dirty="0"/>
+              <a:t> waveguide, core h=300nm, slab h=150 nm, w = 1.2um </a:t>
+            </a:r>
+            <a:br>
+              <a:rPr lang="en-US" b="0" dirty="0"/>
+            </a:br>
+            <a:endParaRPr lang="en-US" sz="2500" b="0" dirty="0">
+              <a:latin typeface="+mj-lt"/>
+              <a:cs typeface="Lucida Sans"/>
+            </a:endParaRPr>
+          </a:p>
+        </p:txBody>
+      </p:sp>
+      <p:pic>
+        <p:nvPicPr>
+          <p:cNvPr id="83" name="Gráfico 82">
+            <a:extLst>
+              <a:ext uri="{FF2B5EF4-FFF2-40B4-BE49-F238E27FC236}">
+                <a16:creationId xmlns:a16="http://schemas.microsoft.com/office/drawing/2014/main" id="{47F286C5-FBB2-262F-A1DA-64B2E8B68BFD}"/>
+              </a:ext>
+            </a:extLst>
+          </p:cNvPr>
+          <p:cNvPicPr>
+            <a:picLocks noChangeAspect="1"/>
+          </p:cNvPicPr>
+          <p:nvPr/>
+        </p:nvPicPr>
+        <p:blipFill>
+          <a:blip r:embed="rId3">
+            <a:extLst>
+              <a:ext uri="{96DAC541-7B7A-43D3-8B79-37D633B846F1}">
+                <asvg:svgBlip xmlns:asvg="http://schemas.microsoft.com/office/drawing/2016/SVG/main" r:embed="rId4"/>
+              </a:ext>
+            </a:extLst>
+          </a:blip>
+          <a:stretch>
+            <a:fillRect/>
+          </a:stretch>
+        </p:blipFill>
+        <p:spPr>
+          <a:xfrm>
+            <a:off x="5045006" y="6356057"/>
+            <a:ext cx="6409575" cy="363174"/>
+          </a:xfrm>
+          <a:prstGeom prst="rect">
+            <a:avLst/>
+          </a:prstGeom>
+        </p:spPr>
+      </p:pic>
+      <p:sp>
+        <p:nvSpPr>
+          <p:cNvPr id="84" name="Marcador de número de diapositiva 83">
+            <a:extLst>
+              <a:ext uri="{FF2B5EF4-FFF2-40B4-BE49-F238E27FC236}">
+                <a16:creationId xmlns:a16="http://schemas.microsoft.com/office/drawing/2014/main" id="{D4429D2D-64B5-0548-A823-3C8D16FF6A96}"/>
+              </a:ext>
+            </a:extLst>
+          </p:cNvPr>
+          <p:cNvSpPr>
+            <a:spLocks noGrp="1"/>
+          </p:cNvSpPr>
+          <p:nvPr>
+            <p:ph type="sldNum" sz="quarter" idx="7"/>
+          </p:nvPr>
+        </p:nvSpPr>
+        <p:spPr/>
+        <p:txBody>
+          <a:bodyPr/>
+          <a:lstStyle/>
+          <a:p>
+            <a:fld id="{B6F15528-21DE-4FAA-801E-634DDDAF4B2B}" type="slidenum">
+              <a:rPr lang="es-ES" smtClean="0"/>
+              <a:t>10</a:t>
+            </a:fld>
+            <a:endParaRPr lang="es-ES"/>
+          </a:p>
+        </p:txBody>
+      </p:sp>
+      <p:sp>
+        <p:nvSpPr>
+          <p:cNvPr id="3" name="Marcador de pie de página 2">
+            <a:extLst>
+              <a:ext uri="{FF2B5EF4-FFF2-40B4-BE49-F238E27FC236}">
+                <a16:creationId xmlns:a16="http://schemas.microsoft.com/office/drawing/2014/main" id="{7AAF1D63-00B6-C3DA-107C-8E7297593F17}"/>
+              </a:ext>
+            </a:extLst>
+          </p:cNvPr>
+          <p:cNvSpPr>
+            <a:spLocks noGrp="1"/>
+          </p:cNvSpPr>
+          <p:nvPr>
+            <p:ph type="ftr" sz="quarter" idx="5"/>
+          </p:nvPr>
+        </p:nvSpPr>
+        <p:spPr/>
+        <p:txBody>
+          <a:bodyPr/>
+          <a:lstStyle/>
+          <a:p>
+            <a:pPr marL="12700">
+              <a:spcBef>
+                <a:spcPts val="15"/>
+              </a:spcBef>
+            </a:pPr>
+            <a:r>
+              <a:rPr lang="es-ES" spc="-5"/>
+              <a:t>LAB 1.0 WAVEGUIDES</a:t>
+            </a:r>
+            <a:endParaRPr lang="es-ES" spc="-5" dirty="0"/>
+          </a:p>
+        </p:txBody>
+      </p:sp>
+      <p:sp>
+        <p:nvSpPr>
+          <p:cNvPr id="2" name="CuadroTexto 1">
+            <a:extLst>
+              <a:ext uri="{FF2B5EF4-FFF2-40B4-BE49-F238E27FC236}">
+                <a16:creationId xmlns:a16="http://schemas.microsoft.com/office/drawing/2014/main" id="{5881E560-9F35-A059-65B0-A70D11432CE3}"/>
+              </a:ext>
+            </a:extLst>
+          </p:cNvPr>
+          <p:cNvSpPr txBox="1"/>
+          <p:nvPr/>
+        </p:nvSpPr>
+        <p:spPr>
+          <a:xfrm>
+            <a:off x="583734" y="1600200"/>
+            <a:ext cx="11198542" cy="1600438"/>
+          </a:xfrm>
+          <a:prstGeom prst="rect">
+            <a:avLst/>
+          </a:prstGeom>
+          <a:solidFill>
+            <a:schemeClr val="bg1">
+              <a:lumMod val="95000"/>
+            </a:schemeClr>
+          </a:solidFill>
+          <a:ln w="28575">
+            <a:solidFill>
+              <a:srgbClr val="E0700D"/>
+            </a:solidFill>
+          </a:ln>
+        </p:spPr>
+        <p:txBody>
+          <a:bodyPr wrap="square" rtlCol="0">
+            <a:spAutoFit/>
+          </a:bodyPr>
+          <a:lstStyle/>
+          <a:p>
+            <a:r>
+              <a:rPr lang="es-ES" sz="1400" dirty="0">
+                <a:latin typeface="Arial" panose="020B0604020202020204" pitchFamily="34" charset="0"/>
+                <a:cs typeface="Arial" panose="020B0604020202020204" pitchFamily="34" charset="0"/>
+              </a:rPr>
+              <a:t>Observando los resultados agrupados en forma de tabla, podemos afirmar que el modo TE0 destaca por un mayor </a:t>
+            </a:r>
+            <a:r>
+              <a:rPr lang="es-ES" sz="1400" dirty="0" err="1">
+                <a:latin typeface="Arial" panose="020B0604020202020204" pitchFamily="34" charset="0"/>
+                <a:cs typeface="Arial" panose="020B0604020202020204" pitchFamily="34" charset="0"/>
+              </a:rPr>
+              <a:t>n_eff</a:t>
+            </a:r>
+            <a:r>
+              <a:rPr lang="es-ES" sz="1400" dirty="0">
+                <a:latin typeface="Arial" panose="020B0604020202020204" pitchFamily="34" charset="0"/>
+                <a:cs typeface="Arial" panose="020B0604020202020204" pitchFamily="34" charset="0"/>
+              </a:rPr>
+              <a:t> y mayor </a:t>
+            </a:r>
+            <a:r>
+              <a:rPr lang="es-ES" sz="1400" dirty="0" err="1">
+                <a:latin typeface="Arial" panose="020B0604020202020204" pitchFamily="34" charset="0"/>
+                <a:cs typeface="Arial" panose="020B0604020202020204" pitchFamily="34" charset="0"/>
+              </a:rPr>
+              <a:t>n_g</a:t>
+            </a:r>
+            <a:r>
+              <a:rPr lang="es-ES" sz="1400" dirty="0">
+                <a:latin typeface="Arial" panose="020B0604020202020204" pitchFamily="34" charset="0"/>
+                <a:cs typeface="Arial" panose="020B0604020202020204" pitchFamily="34" charset="0"/>
+              </a:rPr>
+              <a:t> que el TM0. Esto sucede debido a que el modo TE está más confinado, por lo que su velocidad de fase y de grupo son menores, al verse más influenciadas por el núcleo. El TM0 es más dispersivo (|D| mayor) precisamente porque, al estar menos confinado, la variación de </a:t>
+            </a:r>
+            <a:r>
+              <a:rPr lang="es-ES" sz="1400" dirty="0" err="1">
+                <a:latin typeface="Arial" panose="020B0604020202020204" pitchFamily="34" charset="0"/>
+                <a:cs typeface="Arial" panose="020B0604020202020204" pitchFamily="34" charset="0"/>
+              </a:rPr>
+              <a:t>n_eff</a:t>
+            </a:r>
+            <a:r>
+              <a:rPr lang="es-ES" sz="1400" dirty="0">
+                <a:latin typeface="Arial" panose="020B0604020202020204" pitchFamily="34" charset="0"/>
+                <a:cs typeface="Arial" panose="020B0604020202020204" pitchFamily="34" charset="0"/>
+              </a:rPr>
+              <a:t> con λ es mayor.</a:t>
+            </a:r>
+          </a:p>
+          <a:p>
+            <a:endParaRPr lang="es-ES" sz="1400" dirty="0">
+              <a:latin typeface="Arial" panose="020B0604020202020204" pitchFamily="34" charset="0"/>
+              <a:cs typeface="Arial" panose="020B0604020202020204" pitchFamily="34" charset="0"/>
+            </a:endParaRPr>
+          </a:p>
+          <a:p>
+            <a:r>
+              <a:rPr lang="es-ES" sz="1400" dirty="0">
+                <a:latin typeface="Arial" panose="020B0604020202020204" pitchFamily="34" charset="0"/>
+                <a:cs typeface="Arial" panose="020B0604020202020204" pitchFamily="34" charset="0"/>
+              </a:rPr>
+              <a:t>En el </a:t>
+            </a:r>
+            <a:r>
+              <a:rPr lang="es-ES" sz="1400" dirty="0" err="1">
+                <a:latin typeface="Arial" panose="020B0604020202020204" pitchFamily="34" charset="0"/>
+                <a:cs typeface="Arial" panose="020B0604020202020204" pitchFamily="34" charset="0"/>
+              </a:rPr>
+              <a:t>Shallow</a:t>
+            </a:r>
+            <a:r>
+              <a:rPr lang="es-ES" sz="1400" dirty="0">
+                <a:latin typeface="Arial" panose="020B0604020202020204" pitchFamily="34" charset="0"/>
+                <a:cs typeface="Arial" panose="020B0604020202020204" pitchFamily="34" charset="0"/>
+              </a:rPr>
+              <a:t>, cabe destacar que el modo TM0 presenta un D notablemente menor que en la guía </a:t>
+            </a:r>
+            <a:r>
+              <a:rPr lang="es-ES" sz="1400" dirty="0" err="1">
+                <a:latin typeface="Arial" panose="020B0604020202020204" pitchFamily="34" charset="0"/>
+                <a:cs typeface="Arial" panose="020B0604020202020204" pitchFamily="34" charset="0"/>
+              </a:rPr>
+              <a:t>deep</a:t>
+            </a:r>
+            <a:r>
+              <a:rPr lang="es-ES" sz="1400" dirty="0">
+                <a:latin typeface="Arial" panose="020B0604020202020204" pitchFamily="34" charset="0"/>
+                <a:cs typeface="Arial" panose="020B0604020202020204" pitchFamily="34" charset="0"/>
+              </a:rPr>
+              <a:t>. El </a:t>
+            </a:r>
+            <a:r>
+              <a:rPr lang="es-ES" sz="1400" dirty="0" err="1">
+                <a:latin typeface="Arial" panose="020B0604020202020204" pitchFamily="34" charset="0"/>
+                <a:cs typeface="Arial" panose="020B0604020202020204" pitchFamily="34" charset="0"/>
+              </a:rPr>
+              <a:t>slab</a:t>
+            </a:r>
+            <a:r>
+              <a:rPr lang="es-ES" sz="1400" dirty="0">
+                <a:latin typeface="Arial" panose="020B0604020202020204" pitchFamily="34" charset="0"/>
+                <a:cs typeface="Arial" panose="020B0604020202020204" pitchFamily="34" charset="0"/>
+              </a:rPr>
+              <a:t> redistribuye espacialmente el modo TM, aumentando su confinamiento vertical y reduciendo así su sensibilidad a la longitud de onda.</a:t>
+            </a:r>
+          </a:p>
+        </p:txBody>
+      </p:sp>
+      <p:pic>
+        <p:nvPicPr>
+          <p:cNvPr id="5" name="Imagen 4">
+            <a:extLst>
+              <a:ext uri="{FF2B5EF4-FFF2-40B4-BE49-F238E27FC236}">
+                <a16:creationId xmlns:a16="http://schemas.microsoft.com/office/drawing/2014/main" id="{A52518F1-5F96-DD68-B0CE-C468A25BA906}"/>
+              </a:ext>
+            </a:extLst>
+          </p:cNvPr>
+          <p:cNvPicPr>
+            <a:picLocks noChangeAspect="1"/>
+          </p:cNvPicPr>
+          <p:nvPr/>
+        </p:nvPicPr>
+        <p:blipFill>
+          <a:blip r:embed="rId5"/>
+          <a:stretch>
+            <a:fillRect/>
+          </a:stretch>
+        </p:blipFill>
+        <p:spPr>
+          <a:xfrm>
+            <a:off x="4113883" y="3400392"/>
+            <a:ext cx="3964234" cy="2744470"/>
+          </a:xfrm>
+          <a:prstGeom prst="rect">
+            <a:avLst/>
+          </a:prstGeom>
+        </p:spPr>
+      </p:pic>
+    </p:spTree>
+    <p:extLst>
+      <p:ext uri="{BB962C8B-B14F-4D97-AF65-F5344CB8AC3E}">
+        <p14:creationId xmlns:p14="http://schemas.microsoft.com/office/powerpoint/2010/main" val="340221515"/>
+      </p:ext>
+    </p:extLst>
+  </p:cSld>
+  <p:clrMapOvr>
+    <a:masterClrMapping/>
+  </p:clrMapOvr>
+</p:sld>
+</file>
+
+<file path=ppt/slides/slide11.xml><?xml version="1.0" encoding="utf-8"?>
+<p:sld xmlns:a="http://schemas.openxmlformats.org/drawingml/2006/main" xmlns:r="http://schemas.openxmlformats.org/officeDocument/2006/relationships" xmlns:p="http://schemas.openxmlformats.org/presentationml/2006/main">
+  <p:cSld>
+    <p:spTree>
+      <p:nvGrpSpPr>
+        <p:cNvPr id="1" name="">
+          <a:extLst>
+            <a:ext uri="{FF2B5EF4-FFF2-40B4-BE49-F238E27FC236}">
+              <a16:creationId xmlns:a16="http://schemas.microsoft.com/office/drawing/2014/main" id="{25434E70-43B1-3881-1771-20FB4358471D}"/>
+            </a:ext>
+          </a:extLst>
+        </p:cNvPr>
+        <p:cNvGrpSpPr/>
+        <p:nvPr/>
+      </p:nvGrpSpPr>
+      <p:grpSpPr>
+        <a:xfrm>
+          <a:off x="0" y="0"/>
+          <a:ext cx="0" cy="0"/>
+          <a:chOff x="0" y="0"/>
+          <a:chExt cx="0" cy="0"/>
+        </a:xfrm>
+      </p:grpSpPr>
+      <p:sp>
+        <p:nvSpPr>
+          <p:cNvPr id="16" name="object 16">
+            <a:extLst>
+              <a:ext uri="{FF2B5EF4-FFF2-40B4-BE49-F238E27FC236}">
+                <a16:creationId xmlns:a16="http://schemas.microsoft.com/office/drawing/2014/main" id="{742C31CE-19F0-B995-0997-9A2D6A879BF7}"/>
+              </a:ext>
+            </a:extLst>
+          </p:cNvPr>
+          <p:cNvSpPr txBox="1">
+            <a:spLocks noGrp="1"/>
+          </p:cNvSpPr>
+          <p:nvPr>
+            <p:ph type="title"/>
+          </p:nvPr>
+        </p:nvSpPr>
+        <p:spPr>
+          <a:xfrm>
+            <a:off x="685800" y="408883"/>
+            <a:ext cx="10994410" cy="1090042"/>
+          </a:xfrm>
+          <a:prstGeom prst="rect">
+            <a:avLst/>
+          </a:prstGeom>
+        </p:spPr>
+        <p:txBody>
+          <a:bodyPr vert="horz" wrap="square" lIns="0" tIns="12700" rIns="0" bIns="0" rtlCol="0">
+            <a:spAutoFit/>
+          </a:bodyPr>
+          <a:lstStyle/>
+          <a:p>
+            <a:pPr marL="12700">
+              <a:lnSpc>
+                <a:spcPct val="100000"/>
+              </a:lnSpc>
+              <a:spcBef>
+                <a:spcPts val="100"/>
+              </a:spcBef>
+            </a:pPr>
+            <a:r>
+              <a:rPr lang="en-US" sz="2500" dirty="0"/>
+              <a:t>Learning outcome #5 – Bend waveguide radius vs. loss – deep</a:t>
+            </a:r>
+            <a:br>
+              <a:rPr lang="en-US" sz="2500" dirty="0"/>
+            </a:br>
+            <a:r>
+              <a:rPr lang="en-US" b="0" dirty="0"/>
+              <a:t>Find  neff_TE0 for </a:t>
+            </a:r>
+            <a:r>
+              <a:rPr lang="en-US" b="0" dirty="0" err="1"/>
+              <a:t>wvl</a:t>
+            </a:r>
+            <a:r>
+              <a:rPr lang="en-US" b="0" dirty="0"/>
+              <a:t> 1.55 µm, width 1.2 µm for R=25,50,75,100, 125,150 µm</a:t>
+            </a:r>
+            <a:br>
+              <a:rPr lang="en-US" sz="2500" dirty="0"/>
+            </a:br>
+            <a:endParaRPr lang="en-US" sz="2500" b="0" dirty="0">
+              <a:latin typeface="+mj-lt"/>
+              <a:cs typeface="Lucida Sans"/>
+            </a:endParaRPr>
+          </a:p>
+        </p:txBody>
+      </p:sp>
+      <p:pic>
+        <p:nvPicPr>
+          <p:cNvPr id="83" name="Gráfico 82">
+            <a:extLst>
+              <a:ext uri="{FF2B5EF4-FFF2-40B4-BE49-F238E27FC236}">
+                <a16:creationId xmlns:a16="http://schemas.microsoft.com/office/drawing/2014/main" id="{D688A609-F3DC-EE34-C536-683E70F32EAE}"/>
+              </a:ext>
+            </a:extLst>
+          </p:cNvPr>
+          <p:cNvPicPr>
+            <a:picLocks noChangeAspect="1"/>
+          </p:cNvPicPr>
+          <p:nvPr/>
+        </p:nvPicPr>
+        <p:blipFill>
+          <a:blip r:embed="rId3">
+            <a:extLst>
+              <a:ext uri="{96DAC541-7B7A-43D3-8B79-37D633B846F1}">
+                <asvg:svgBlip xmlns:asvg="http://schemas.microsoft.com/office/drawing/2016/SVG/main" r:embed="rId4"/>
+              </a:ext>
+            </a:extLst>
+          </a:blip>
+          <a:stretch>
+            <a:fillRect/>
+          </a:stretch>
+        </p:blipFill>
+        <p:spPr>
+          <a:xfrm>
+            <a:off x="5045006" y="6356057"/>
+            <a:ext cx="6409575" cy="363174"/>
+          </a:xfrm>
+          <a:prstGeom prst="rect">
+            <a:avLst/>
+          </a:prstGeom>
+        </p:spPr>
+      </p:pic>
+      <p:sp>
+        <p:nvSpPr>
+          <p:cNvPr id="84" name="Marcador de número de diapositiva 83">
+            <a:extLst>
+              <a:ext uri="{FF2B5EF4-FFF2-40B4-BE49-F238E27FC236}">
+                <a16:creationId xmlns:a16="http://schemas.microsoft.com/office/drawing/2014/main" id="{B6C672C6-89D4-7E67-2B94-811D081786A7}"/>
+              </a:ext>
+            </a:extLst>
+          </p:cNvPr>
+          <p:cNvSpPr>
+            <a:spLocks noGrp="1"/>
+          </p:cNvSpPr>
+          <p:nvPr>
+            <p:ph type="sldNum" sz="quarter" idx="7"/>
+          </p:nvPr>
+        </p:nvSpPr>
+        <p:spPr/>
+        <p:txBody>
+          <a:bodyPr/>
+          <a:lstStyle/>
+          <a:p>
+            <a:fld id="{B6F15528-21DE-4FAA-801E-634DDDAF4B2B}" type="slidenum">
+              <a:rPr lang="es-ES" smtClean="0"/>
+              <a:t>11</a:t>
+            </a:fld>
+            <a:endParaRPr lang="es-ES"/>
+          </a:p>
+        </p:txBody>
+      </p:sp>
+      <p:sp>
+        <p:nvSpPr>
+          <p:cNvPr id="3" name="Marcador de pie de página 2">
+            <a:extLst>
+              <a:ext uri="{FF2B5EF4-FFF2-40B4-BE49-F238E27FC236}">
+                <a16:creationId xmlns:a16="http://schemas.microsoft.com/office/drawing/2014/main" id="{AA1F4313-D710-7A3E-7A8F-EB77DEE3C1A7}"/>
+              </a:ext>
+            </a:extLst>
+          </p:cNvPr>
+          <p:cNvSpPr>
+            <a:spLocks noGrp="1"/>
+          </p:cNvSpPr>
+          <p:nvPr>
+            <p:ph type="ftr" sz="quarter" idx="5"/>
+          </p:nvPr>
+        </p:nvSpPr>
+        <p:spPr/>
+        <p:txBody>
+          <a:bodyPr/>
+          <a:lstStyle/>
+          <a:p>
+            <a:pPr marL="12700">
+              <a:spcBef>
+                <a:spcPts val="15"/>
+              </a:spcBef>
+            </a:pPr>
+            <a:r>
+              <a:rPr lang="es-ES" spc="-5"/>
+              <a:t>LAB 1.0 WAVEGUIDES</a:t>
+            </a:r>
+            <a:endParaRPr lang="es-ES" spc="-5" dirty="0"/>
+          </a:p>
+        </p:txBody>
+      </p:sp>
+      <p:sp>
+        <p:nvSpPr>
+          <p:cNvPr id="2" name="CuadroTexto 1">
+            <a:extLst>
+              <a:ext uri="{FF2B5EF4-FFF2-40B4-BE49-F238E27FC236}">
+                <a16:creationId xmlns:a16="http://schemas.microsoft.com/office/drawing/2014/main" id="{FDE3A197-9508-F9F1-1FEB-FF883D78C151}"/>
+              </a:ext>
+            </a:extLst>
+          </p:cNvPr>
+          <p:cNvSpPr txBox="1"/>
+          <p:nvPr/>
+        </p:nvSpPr>
+        <p:spPr>
+          <a:xfrm>
+            <a:off x="609441" y="4876800"/>
+            <a:ext cx="11199971" cy="738664"/>
+          </a:xfrm>
+          <a:prstGeom prst="rect">
+            <a:avLst/>
+          </a:prstGeom>
+          <a:solidFill>
+            <a:schemeClr val="bg1">
+              <a:lumMod val="95000"/>
+            </a:schemeClr>
+          </a:solidFill>
+          <a:ln w="28575">
+            <a:solidFill>
+              <a:srgbClr val="E0700D"/>
+            </a:solidFill>
+          </a:ln>
+        </p:spPr>
+        <p:txBody>
+          <a:bodyPr wrap="square" rtlCol="0">
+            <a:spAutoFit/>
+          </a:bodyPr>
+          <a:lstStyle/>
+          <a:p>
+            <a:pPr algn="just"/>
+            <a:r>
+              <a:rPr lang="es-ES" sz="1400" dirty="0">
+                <a:latin typeface="Arial" panose="020B0604020202020204" pitchFamily="34" charset="0"/>
+                <a:cs typeface="Arial" panose="020B0604020202020204" pitchFamily="34" charset="0"/>
+              </a:rPr>
+              <a:t>Como podemos apreciar, las pérdidas por curvatura disminuyen al aumentar el radio. A R=25µm la pérdida es ~0.135 dB/90°, superando el umbral seguro de 0.1 dB/90°. A partir de R ≥ 35µm ya no se sobrepasa ese umbral. En el caso de R≥50µm todas las pérdidas quedan por debajo, siendo un radio seguro para este </a:t>
+            </a:r>
+            <a:r>
+              <a:rPr lang="es-ES" sz="1400" dirty="0" err="1">
+                <a:latin typeface="Arial" panose="020B0604020202020204" pitchFamily="34" charset="0"/>
+                <a:cs typeface="Arial" panose="020B0604020202020204" pitchFamily="34" charset="0"/>
+              </a:rPr>
+              <a:t>waveguide</a:t>
+            </a:r>
+            <a:r>
+              <a:rPr lang="es-ES" sz="1400" dirty="0">
+                <a:latin typeface="Arial" panose="020B0604020202020204" pitchFamily="34" charset="0"/>
+                <a:cs typeface="Arial" panose="020B0604020202020204" pitchFamily="34" charset="0"/>
+              </a:rPr>
+              <a:t>.</a:t>
+            </a:r>
+            <a:endParaRPr lang="en-US" sz="1400" dirty="0">
+              <a:latin typeface="Arial" panose="020B0604020202020204" pitchFamily="34" charset="0"/>
+              <a:cs typeface="Arial" panose="020B0604020202020204" pitchFamily="34" charset="0"/>
+            </a:endParaRPr>
+          </a:p>
+        </p:txBody>
+      </p:sp>
+      <p:sp>
+        <p:nvSpPr>
+          <p:cNvPr id="7" name="Rectángulo 6">
+            <a:extLst>
+              <a:ext uri="{FF2B5EF4-FFF2-40B4-BE49-F238E27FC236}">
+                <a16:creationId xmlns:a16="http://schemas.microsoft.com/office/drawing/2014/main" id="{B5FE8755-B0BF-14B7-64E6-4BBB2560B9A6}"/>
+              </a:ext>
+            </a:extLst>
+          </p:cNvPr>
+          <p:cNvSpPr/>
+          <p:nvPr/>
+        </p:nvSpPr>
+        <p:spPr>
+          <a:xfrm>
+            <a:off x="609441" y="1418373"/>
+            <a:ext cx="11199971" cy="3306028"/>
+          </a:xfrm>
+          <a:prstGeom prst="rect">
+            <a:avLst/>
+          </a:prstGeom>
+          <a:noFill/>
+          <a:ln w="28575">
+            <a:solidFill>
+              <a:srgbClr val="E0700D"/>
+            </a:solidFill>
+          </a:ln>
+        </p:spPr>
+        <p:style>
+          <a:lnRef idx="2">
+            <a:schemeClr val="accent1">
+              <a:shade val="15000"/>
+            </a:schemeClr>
+          </a:lnRef>
+          <a:fillRef idx="1">
+            <a:schemeClr val="accent1"/>
+          </a:fillRef>
+          <a:effectRef idx="0">
+            <a:schemeClr val="accent1"/>
+          </a:effectRef>
+          <a:fontRef idx="minor">
+            <a:schemeClr val="lt1"/>
+          </a:fontRef>
+        </p:style>
+        <p:txBody>
+          <a:bodyPr rtlCol="0" anchor="ctr"/>
+          <a:lstStyle/>
+          <a:p>
+            <a:pPr algn="ctr"/>
+            <a:endParaRPr lang="en-US"/>
+          </a:p>
+        </p:txBody>
+      </p:sp>
+      <p:pic>
+        <p:nvPicPr>
+          <p:cNvPr id="5" name="Imagen 4" descr="Gráfico, Gráfico de líneas&#10;&#10;El contenido generado por IA puede ser incorrecto.">
+            <a:extLst>
+              <a:ext uri="{FF2B5EF4-FFF2-40B4-BE49-F238E27FC236}">
+                <a16:creationId xmlns:a16="http://schemas.microsoft.com/office/drawing/2014/main" id="{5B346FBF-8F55-8396-CBBD-60F2F4F5CD9F}"/>
+              </a:ext>
+            </a:extLst>
+          </p:cNvPr>
+          <p:cNvPicPr>
+            <a:picLocks noChangeAspect="1"/>
+          </p:cNvPicPr>
+          <p:nvPr/>
+        </p:nvPicPr>
+        <p:blipFill>
+          <a:blip r:embed="rId5"/>
+          <a:stretch>
+            <a:fillRect/>
+          </a:stretch>
+        </p:blipFill>
+        <p:spPr>
+          <a:xfrm>
+            <a:off x="723026" y="1498926"/>
+            <a:ext cx="5296773" cy="3174274"/>
+          </a:xfrm>
+          <a:prstGeom prst="rect">
+            <a:avLst/>
+          </a:prstGeom>
+        </p:spPr>
+      </p:pic>
+      <p:pic>
+        <p:nvPicPr>
+          <p:cNvPr id="9" name="Imagen 8" descr="Gráfico, Gráfico de líneas&#10;&#10;El contenido generado por IA puede ser incorrecto.">
+            <a:extLst>
+              <a:ext uri="{FF2B5EF4-FFF2-40B4-BE49-F238E27FC236}">
+                <a16:creationId xmlns:a16="http://schemas.microsoft.com/office/drawing/2014/main" id="{D9E85915-5F02-1B60-7721-B0320249878B}"/>
+              </a:ext>
+            </a:extLst>
+          </p:cNvPr>
+          <p:cNvPicPr>
+            <a:picLocks noChangeAspect="1"/>
+          </p:cNvPicPr>
+          <p:nvPr/>
+        </p:nvPicPr>
+        <p:blipFill>
+          <a:blip r:embed="rId6"/>
+          <a:stretch>
+            <a:fillRect/>
+          </a:stretch>
+        </p:blipFill>
+        <p:spPr>
+          <a:xfrm>
+            <a:off x="6246652" y="1520808"/>
+            <a:ext cx="5335907" cy="3196283"/>
+          </a:xfrm>
+          <a:prstGeom prst="rect">
+            <a:avLst/>
+          </a:prstGeom>
+        </p:spPr>
+      </p:pic>
+    </p:spTree>
+    <p:extLst>
+      <p:ext uri="{BB962C8B-B14F-4D97-AF65-F5344CB8AC3E}">
+        <p14:creationId xmlns:p14="http://schemas.microsoft.com/office/powerpoint/2010/main" val="3660438245"/>
+      </p:ext>
+    </p:extLst>
+  </p:cSld>
+  <p:clrMapOvr>
+    <a:masterClrMapping/>
+  </p:clrMapOvr>
+</p:sld>
+</file>
+
+<file path=ppt/slides/slide12.xml><?xml version="1.0" encoding="utf-8"?>
+<p:sld xmlns:a="http://schemas.openxmlformats.org/drawingml/2006/main" xmlns:r="http://schemas.openxmlformats.org/officeDocument/2006/relationships" xmlns:p="http://schemas.openxmlformats.org/presentationml/2006/main">
+  <p:cSld>
+    <p:spTree>
+      <p:nvGrpSpPr>
+        <p:cNvPr id="1" name="">
+          <a:extLst>
+            <a:ext uri="{FF2B5EF4-FFF2-40B4-BE49-F238E27FC236}">
+              <a16:creationId xmlns:a16="http://schemas.microsoft.com/office/drawing/2014/main" id="{3C5EAD66-DE64-FCB3-8F07-1816039A954F}"/>
+            </a:ext>
+          </a:extLst>
+        </p:cNvPr>
+        <p:cNvGrpSpPr/>
+        <p:nvPr/>
+      </p:nvGrpSpPr>
+      <p:grpSpPr>
+        <a:xfrm>
+          <a:off x="0" y="0"/>
+          <a:ext cx="0" cy="0"/>
+          <a:chOff x="0" y="0"/>
+          <a:chExt cx="0" cy="0"/>
+        </a:xfrm>
+      </p:grpSpPr>
+      <p:sp>
+        <p:nvSpPr>
+          <p:cNvPr id="16" name="object 16">
+            <a:extLst>
+              <a:ext uri="{FF2B5EF4-FFF2-40B4-BE49-F238E27FC236}">
+                <a16:creationId xmlns:a16="http://schemas.microsoft.com/office/drawing/2014/main" id="{6AB09F4F-8DFB-86BE-109C-0888912A4B72}"/>
+              </a:ext>
+            </a:extLst>
+          </p:cNvPr>
+          <p:cNvSpPr txBox="1">
+            <a:spLocks noGrp="1"/>
+          </p:cNvSpPr>
+          <p:nvPr>
+            <p:ph type="title"/>
+          </p:nvPr>
+        </p:nvSpPr>
+        <p:spPr>
+          <a:xfrm>
+            <a:off x="685800" y="408883"/>
+            <a:ext cx="10994410" cy="1090042"/>
+          </a:xfrm>
+          <a:prstGeom prst="rect">
+            <a:avLst/>
+          </a:prstGeom>
+        </p:spPr>
+        <p:txBody>
+          <a:bodyPr vert="horz" wrap="square" lIns="0" tIns="12700" rIns="0" bIns="0" rtlCol="0">
+            <a:spAutoFit/>
+          </a:bodyPr>
+          <a:lstStyle/>
+          <a:p>
+            <a:pPr marL="12700">
+              <a:lnSpc>
+                <a:spcPct val="100000"/>
+              </a:lnSpc>
+              <a:spcBef>
+                <a:spcPts val="100"/>
+              </a:spcBef>
+            </a:pPr>
+            <a:r>
+              <a:rPr lang="en-US" sz="2500" dirty="0"/>
+              <a:t>Learning outcome #5 </a:t>
+            </a:r>
+            <a:r>
+              <a:rPr lang="en-US" sz="2500" dirty="0" err="1"/>
+              <a:t>Continuación</a:t>
+            </a:r>
+            <a:r>
+              <a:rPr lang="en-US" sz="2500" dirty="0"/>
+              <a:t> – Bend waveguide radius vs. loss – deep</a:t>
+            </a:r>
+            <a:br>
+              <a:rPr lang="en-US" sz="2500" dirty="0"/>
+            </a:br>
+            <a:r>
+              <a:rPr lang="en-US" b="0" dirty="0"/>
+              <a:t>Find  neff_TE0 for </a:t>
+            </a:r>
+            <a:r>
+              <a:rPr lang="en-US" b="0" dirty="0" err="1"/>
+              <a:t>wvl</a:t>
+            </a:r>
+            <a:r>
+              <a:rPr lang="en-US" b="0" dirty="0"/>
+              <a:t> 1.55 µm, width 1.2 µm for R=25,50,75,100, 125,150 µm</a:t>
+            </a:r>
+            <a:br>
+              <a:rPr lang="en-US" sz="2500" dirty="0"/>
+            </a:br>
+            <a:endParaRPr lang="en-US" sz="2500" b="0" dirty="0">
+              <a:latin typeface="+mj-lt"/>
+              <a:cs typeface="Lucida Sans"/>
+            </a:endParaRPr>
+          </a:p>
+        </p:txBody>
+      </p:sp>
+      <p:pic>
+        <p:nvPicPr>
+          <p:cNvPr id="83" name="Gráfico 82">
+            <a:extLst>
+              <a:ext uri="{FF2B5EF4-FFF2-40B4-BE49-F238E27FC236}">
+                <a16:creationId xmlns:a16="http://schemas.microsoft.com/office/drawing/2014/main" id="{C61FEEF0-02EC-4543-412A-EBA43AAB003F}"/>
+              </a:ext>
+            </a:extLst>
+          </p:cNvPr>
+          <p:cNvPicPr>
+            <a:picLocks noChangeAspect="1"/>
+          </p:cNvPicPr>
+          <p:nvPr/>
+        </p:nvPicPr>
+        <p:blipFill>
+          <a:blip r:embed="rId3">
+            <a:extLst>
+              <a:ext uri="{96DAC541-7B7A-43D3-8B79-37D633B846F1}">
+                <asvg:svgBlip xmlns:asvg="http://schemas.microsoft.com/office/drawing/2016/SVG/main" r:embed="rId4"/>
+              </a:ext>
+            </a:extLst>
+          </a:blip>
+          <a:stretch>
+            <a:fillRect/>
+          </a:stretch>
+        </p:blipFill>
+        <p:spPr>
+          <a:xfrm>
+            <a:off x="5045006" y="6356057"/>
+            <a:ext cx="6409575" cy="363174"/>
+          </a:xfrm>
+          <a:prstGeom prst="rect">
+            <a:avLst/>
+          </a:prstGeom>
+        </p:spPr>
+      </p:pic>
+      <p:sp>
+        <p:nvSpPr>
+          <p:cNvPr id="84" name="Marcador de número de diapositiva 83">
+            <a:extLst>
+              <a:ext uri="{FF2B5EF4-FFF2-40B4-BE49-F238E27FC236}">
+                <a16:creationId xmlns:a16="http://schemas.microsoft.com/office/drawing/2014/main" id="{269C9C51-80DA-8ADF-026F-EAB48AE83C94}"/>
+              </a:ext>
+            </a:extLst>
+          </p:cNvPr>
+          <p:cNvSpPr>
+            <a:spLocks noGrp="1"/>
+          </p:cNvSpPr>
+          <p:nvPr>
+            <p:ph type="sldNum" sz="quarter" idx="7"/>
+          </p:nvPr>
+        </p:nvSpPr>
+        <p:spPr/>
+        <p:txBody>
+          <a:bodyPr/>
+          <a:lstStyle/>
+          <a:p>
+            <a:fld id="{B6F15528-21DE-4FAA-801E-634DDDAF4B2B}" type="slidenum">
+              <a:rPr lang="es-ES" smtClean="0"/>
+              <a:t>12</a:t>
+            </a:fld>
+            <a:endParaRPr lang="es-ES"/>
+          </a:p>
+        </p:txBody>
+      </p:sp>
+      <p:sp>
+        <p:nvSpPr>
+          <p:cNvPr id="3" name="Marcador de pie de página 2">
+            <a:extLst>
+              <a:ext uri="{FF2B5EF4-FFF2-40B4-BE49-F238E27FC236}">
+                <a16:creationId xmlns:a16="http://schemas.microsoft.com/office/drawing/2014/main" id="{84195BAB-D223-E8D2-EF12-768B7AC6E10F}"/>
+              </a:ext>
+            </a:extLst>
+          </p:cNvPr>
+          <p:cNvSpPr>
+            <a:spLocks noGrp="1"/>
+          </p:cNvSpPr>
+          <p:nvPr>
+            <p:ph type="ftr" sz="quarter" idx="5"/>
+          </p:nvPr>
+        </p:nvSpPr>
+        <p:spPr/>
+        <p:txBody>
+          <a:bodyPr/>
+          <a:lstStyle/>
+          <a:p>
+            <a:pPr marL="12700">
+              <a:spcBef>
+                <a:spcPts val="15"/>
+              </a:spcBef>
+            </a:pPr>
+            <a:r>
+              <a:rPr lang="es-ES" spc="-5"/>
+              <a:t>LAB 1.0 WAVEGUIDES</a:t>
+            </a:r>
+            <a:endParaRPr lang="es-ES" spc="-5" dirty="0"/>
+          </a:p>
+        </p:txBody>
+      </p:sp>
+      <p:sp>
+        <p:nvSpPr>
+          <p:cNvPr id="2" name="CuadroTexto 1">
+            <a:extLst>
+              <a:ext uri="{FF2B5EF4-FFF2-40B4-BE49-F238E27FC236}">
+                <a16:creationId xmlns:a16="http://schemas.microsoft.com/office/drawing/2014/main" id="{D232DE38-4FC3-D8CB-5472-2443A64F4000}"/>
+              </a:ext>
+            </a:extLst>
+          </p:cNvPr>
+          <p:cNvSpPr txBox="1"/>
+          <p:nvPr/>
+        </p:nvSpPr>
+        <p:spPr>
+          <a:xfrm>
+            <a:off x="496014" y="1371600"/>
+            <a:ext cx="11199971" cy="954107"/>
+          </a:xfrm>
+          <a:prstGeom prst="rect">
+            <a:avLst/>
+          </a:prstGeom>
+          <a:solidFill>
+            <a:schemeClr val="bg1">
+              <a:lumMod val="95000"/>
+            </a:schemeClr>
+          </a:solidFill>
+          <a:ln w="28575">
+            <a:solidFill>
+              <a:srgbClr val="E0700D"/>
+            </a:solidFill>
+          </a:ln>
+        </p:spPr>
+        <p:txBody>
+          <a:bodyPr wrap="square" rtlCol="0">
+            <a:spAutoFit/>
+          </a:bodyPr>
+          <a:lstStyle/>
+          <a:p>
+            <a:pPr algn="just"/>
+            <a:r>
+              <a:rPr lang="es-ES" sz="1400" dirty="0">
+                <a:latin typeface="Arial" panose="020B0604020202020204" pitchFamily="34" charset="0"/>
+                <a:cs typeface="Arial" panose="020B0604020202020204" pitchFamily="34" charset="0"/>
+              </a:rPr>
+              <a:t>Físicamente, en una curva el modo se desplaza hacia el exterior de la curva (como un coche afectado por la fuerza centrífuga en una curva a alta velocidad), y la parte exterior del campo viaja a mayor velocidad de fase que la interior. Para radios pequeños, parte del campo supera la velocidad de la luz en el </a:t>
+            </a:r>
+            <a:r>
+              <a:rPr lang="es-ES" sz="1400" dirty="0" err="1">
+                <a:latin typeface="Arial" panose="020B0604020202020204" pitchFamily="34" charset="0"/>
+                <a:cs typeface="Arial" panose="020B0604020202020204" pitchFamily="34" charset="0"/>
+              </a:rPr>
+              <a:t>cladding</a:t>
+            </a:r>
+            <a:r>
+              <a:rPr lang="es-ES" sz="1400" dirty="0">
+                <a:latin typeface="Arial" panose="020B0604020202020204" pitchFamily="34" charset="0"/>
+                <a:cs typeface="Arial" panose="020B0604020202020204" pitchFamily="34" charset="0"/>
+              </a:rPr>
+              <a:t>, escapando como radiación, de ahí las pérdidas por curvatura. Al aumentar R, este efecto se reduce.</a:t>
+            </a:r>
+            <a:endParaRPr lang="en-US" sz="1400" dirty="0">
+              <a:latin typeface="Arial" panose="020B0604020202020204" pitchFamily="34" charset="0"/>
+              <a:cs typeface="Arial" panose="020B0604020202020204" pitchFamily="34" charset="0"/>
+            </a:endParaRPr>
+          </a:p>
+        </p:txBody>
+      </p:sp>
+      <p:pic>
+        <p:nvPicPr>
+          <p:cNvPr id="6" name="Imagen 5">
+            <a:extLst>
+              <a:ext uri="{FF2B5EF4-FFF2-40B4-BE49-F238E27FC236}">
+                <a16:creationId xmlns:a16="http://schemas.microsoft.com/office/drawing/2014/main" id="{202656DC-3EC7-0595-3EC5-391866660F7E}"/>
+              </a:ext>
+            </a:extLst>
+          </p:cNvPr>
+          <p:cNvPicPr>
+            <a:picLocks noChangeAspect="1"/>
+          </p:cNvPicPr>
+          <p:nvPr/>
+        </p:nvPicPr>
+        <p:blipFill>
+          <a:blip r:embed="rId5"/>
+          <a:stretch>
+            <a:fillRect/>
+          </a:stretch>
+        </p:blipFill>
+        <p:spPr>
+          <a:xfrm>
+            <a:off x="609600" y="2590800"/>
+            <a:ext cx="6487113" cy="2544831"/>
+          </a:xfrm>
+          <a:prstGeom prst="rect">
+            <a:avLst/>
+          </a:prstGeom>
+        </p:spPr>
+      </p:pic>
+      <p:sp>
+        <p:nvSpPr>
+          <p:cNvPr id="8" name="CuadroTexto 7">
+            <a:extLst>
+              <a:ext uri="{FF2B5EF4-FFF2-40B4-BE49-F238E27FC236}">
+                <a16:creationId xmlns:a16="http://schemas.microsoft.com/office/drawing/2014/main" id="{DABF6B9F-E7A4-0AE0-AF44-4F2F7E3C5328}"/>
+              </a:ext>
+            </a:extLst>
+          </p:cNvPr>
+          <p:cNvSpPr txBox="1"/>
+          <p:nvPr/>
+        </p:nvSpPr>
+        <p:spPr>
+          <a:xfrm>
+            <a:off x="381000" y="5433536"/>
+            <a:ext cx="11199971" cy="738664"/>
+          </a:xfrm>
+          <a:prstGeom prst="rect">
+            <a:avLst/>
+          </a:prstGeom>
+          <a:solidFill>
+            <a:schemeClr val="bg1">
+              <a:lumMod val="95000"/>
+            </a:schemeClr>
+          </a:solidFill>
+          <a:ln w="28575">
+            <a:solidFill>
+              <a:srgbClr val="E0700D"/>
+            </a:solidFill>
+          </a:ln>
+        </p:spPr>
+        <p:txBody>
+          <a:bodyPr wrap="square" rtlCol="0">
+            <a:spAutoFit/>
+          </a:bodyPr>
+          <a:lstStyle/>
+          <a:p>
+            <a:pPr algn="just"/>
+            <a:r>
+              <a:rPr lang="es-ES" sz="1400" dirty="0">
+                <a:latin typeface="Arial" panose="020B0604020202020204" pitchFamily="34" charset="0"/>
+                <a:cs typeface="Arial" panose="020B0604020202020204" pitchFamily="34" charset="0"/>
+              </a:rPr>
+              <a:t>Por otro lado, el </a:t>
+            </a:r>
+            <a:r>
+              <a:rPr lang="es-ES" sz="1400" dirty="0" err="1">
+                <a:latin typeface="Arial" panose="020B0604020202020204" pitchFamily="34" charset="0"/>
+                <a:cs typeface="Arial" panose="020B0604020202020204" pitchFamily="34" charset="0"/>
+              </a:rPr>
+              <a:t>n_eff</a:t>
+            </a:r>
+            <a:r>
+              <a:rPr lang="es-ES" sz="1400" dirty="0">
+                <a:latin typeface="Arial" panose="020B0604020202020204" pitchFamily="34" charset="0"/>
+                <a:cs typeface="Arial" panose="020B0604020202020204" pitchFamily="34" charset="0"/>
+              </a:rPr>
+              <a:t> decrece ligeramente al reducir el radio, lo que refleja ese desplazamiento del modo hacia la región de menor índice, es decir, el exterior. Este fenómeno es relevante en diseño porque implica que, al transitar de un tramo recto a uno curvo, los perfiles de modo no coinciden exactamente, introduciéndose un </a:t>
+            </a:r>
+            <a:r>
+              <a:rPr lang="es-ES" sz="1400" dirty="0" err="1">
+                <a:latin typeface="Arial" panose="020B0604020202020204" pitchFamily="34" charset="0"/>
+                <a:cs typeface="Arial" panose="020B0604020202020204" pitchFamily="34" charset="0"/>
+              </a:rPr>
+              <a:t>mismatch</a:t>
+            </a:r>
+            <a:r>
+              <a:rPr lang="es-ES" sz="1400" dirty="0">
+                <a:latin typeface="Arial" panose="020B0604020202020204" pitchFamily="34" charset="0"/>
+                <a:cs typeface="Arial" panose="020B0604020202020204" pitchFamily="34" charset="0"/>
+              </a:rPr>
+              <a:t> que justifica el uso de </a:t>
+            </a:r>
+            <a:r>
+              <a:rPr lang="es-ES" sz="1400" dirty="0" err="1">
+                <a:latin typeface="Arial" panose="020B0604020202020204" pitchFamily="34" charset="0"/>
+                <a:cs typeface="Arial" panose="020B0604020202020204" pitchFamily="34" charset="0"/>
+              </a:rPr>
+              <a:t>offsets</a:t>
+            </a:r>
+            <a:r>
+              <a:rPr lang="es-ES" sz="1400" dirty="0">
+                <a:latin typeface="Arial" panose="020B0604020202020204" pitchFamily="34" charset="0"/>
+                <a:cs typeface="Arial" panose="020B0604020202020204" pitchFamily="34" charset="0"/>
+              </a:rPr>
+              <a:t> en la unión recta-curva.</a:t>
+            </a:r>
+          </a:p>
+        </p:txBody>
+      </p:sp>
+      <p:pic>
+        <p:nvPicPr>
+          <p:cNvPr id="11" name="Imagen 10">
+            <a:extLst>
+              <a:ext uri="{FF2B5EF4-FFF2-40B4-BE49-F238E27FC236}">
+                <a16:creationId xmlns:a16="http://schemas.microsoft.com/office/drawing/2014/main" id="{C4EBED4D-72A8-200D-6F11-75012AF61475}"/>
+              </a:ext>
+            </a:extLst>
+          </p:cNvPr>
+          <p:cNvPicPr>
+            <a:picLocks noChangeAspect="1"/>
+          </p:cNvPicPr>
+          <p:nvPr/>
+        </p:nvPicPr>
+        <p:blipFill>
+          <a:blip r:embed="rId6"/>
+          <a:stretch>
+            <a:fillRect/>
+          </a:stretch>
+        </p:blipFill>
+        <p:spPr>
+          <a:xfrm>
+            <a:off x="8153400" y="2605176"/>
+            <a:ext cx="3048000" cy="2543503"/>
+          </a:xfrm>
+          <a:prstGeom prst="rect">
+            <a:avLst/>
+          </a:prstGeom>
+        </p:spPr>
+      </p:pic>
+    </p:spTree>
+    <p:extLst>
+      <p:ext uri="{BB962C8B-B14F-4D97-AF65-F5344CB8AC3E}">
+        <p14:creationId xmlns:p14="http://schemas.microsoft.com/office/powerpoint/2010/main" val="2175439625"/>
+      </p:ext>
+    </p:extLst>
+  </p:cSld>
+  <p:clrMapOvr>
+    <a:masterClrMapping/>
+  </p:clrMapOvr>
+</p:sld>
+</file>
+
+<file path=ppt/slides/slide13.xml><?xml version="1.0" encoding="utf-8"?>
+<p:sld xmlns:a="http://schemas.openxmlformats.org/drawingml/2006/main" xmlns:r="http://schemas.openxmlformats.org/officeDocument/2006/relationships" xmlns:p="http://schemas.openxmlformats.org/presentationml/2006/main">
+  <p:cSld>
+    <p:spTree>
+      <p:nvGrpSpPr>
+        <p:cNvPr id="1" name=""/>
+        <p:cNvGrpSpPr/>
+        <p:nvPr/>
+      </p:nvGrpSpPr>
+      <p:grpSpPr>
+        <a:xfrm>
+          <a:off x="0" y="0"/>
+          <a:ext cx="0" cy="0"/>
+          <a:chOff x="0" y="0"/>
+          <a:chExt cx="0" cy="0"/>
+        </a:xfrm>
+      </p:grpSpPr>
+      <p:sp>
+        <p:nvSpPr>
+          <p:cNvPr id="4" name="Marcador de pie de página 3">
+            <a:extLst>
+              <a:ext uri="{FF2B5EF4-FFF2-40B4-BE49-F238E27FC236}">
+                <a16:creationId xmlns:a16="http://schemas.microsoft.com/office/drawing/2014/main" id="{3AADC859-FE69-8646-BC25-AD09963072CE}"/>
+              </a:ext>
+            </a:extLst>
+          </p:cNvPr>
+          <p:cNvSpPr>
+            <a:spLocks noGrp="1"/>
+          </p:cNvSpPr>
+          <p:nvPr>
+            <p:ph type="ftr" sz="quarter" idx="5"/>
+          </p:nvPr>
+        </p:nvSpPr>
+        <p:spPr/>
+        <p:txBody>
+          <a:bodyPr/>
+          <a:lstStyle/>
+          <a:p>
+            <a:pPr marL="12700">
+              <a:spcBef>
+                <a:spcPts val="15"/>
+              </a:spcBef>
+            </a:pPr>
+            <a:r>
+              <a:rPr lang="es-ES" spc="-5" dirty="0"/>
+              <a:t>LAB 1.0 WAVEGUIDES</a:t>
+            </a:r>
+          </a:p>
+        </p:txBody>
+      </p:sp>
+      <p:sp>
+        <p:nvSpPr>
+          <p:cNvPr id="5" name="Marcador de número de diapositiva 4">
+            <a:extLst>
+              <a:ext uri="{FF2B5EF4-FFF2-40B4-BE49-F238E27FC236}">
+                <a16:creationId xmlns:a16="http://schemas.microsoft.com/office/drawing/2014/main" id="{F00FD5A9-EB75-4B65-1393-4570FC209EFC}"/>
+              </a:ext>
+            </a:extLst>
+          </p:cNvPr>
+          <p:cNvSpPr>
+            <a:spLocks noGrp="1"/>
+          </p:cNvSpPr>
+          <p:nvPr>
+            <p:ph type="sldNum" sz="quarter" idx="7"/>
+          </p:nvPr>
+        </p:nvSpPr>
+        <p:spPr/>
+        <p:txBody>
+          <a:bodyPr/>
+          <a:lstStyle/>
+          <a:p>
+            <a:fld id="{B6F15528-21DE-4FAA-801E-634DDDAF4B2B}" type="slidenum">
+              <a:rPr lang="es-ES" smtClean="0"/>
+              <a:t>13</a:t>
+            </a:fld>
+            <a:endParaRPr lang="es-ES"/>
+          </a:p>
+        </p:txBody>
+      </p:sp>
+      <p:sp>
+        <p:nvSpPr>
+          <p:cNvPr id="6" name="object 16">
+            <a:extLst>
+              <a:ext uri="{FF2B5EF4-FFF2-40B4-BE49-F238E27FC236}">
+                <a16:creationId xmlns:a16="http://schemas.microsoft.com/office/drawing/2014/main" id="{52D32EFB-012D-6910-7F07-FF2E673AFD42}"/>
+              </a:ext>
+            </a:extLst>
+          </p:cNvPr>
+          <p:cNvSpPr txBox="1">
+            <a:spLocks noGrp="1"/>
+          </p:cNvSpPr>
+          <p:nvPr>
+            <p:ph type="title"/>
+          </p:nvPr>
+        </p:nvSpPr>
+        <p:spPr>
+          <a:xfrm>
+            <a:off x="590550" y="357758"/>
+            <a:ext cx="10991850" cy="705321"/>
+          </a:xfrm>
+          <a:prstGeom prst="rect">
+            <a:avLst/>
+          </a:prstGeom>
+        </p:spPr>
+        <p:txBody>
+          <a:bodyPr vert="horz" wrap="square" lIns="0" tIns="12700" rIns="0" bIns="0" rtlCol="0">
+            <a:spAutoFit/>
+          </a:bodyPr>
+          <a:lstStyle/>
+          <a:p>
+            <a:pPr marL="12700">
+              <a:lnSpc>
+                <a:spcPct val="100000"/>
+              </a:lnSpc>
+              <a:spcBef>
+                <a:spcPts val="100"/>
+              </a:spcBef>
+            </a:pPr>
+            <a:r>
+              <a:rPr lang="en-US" sz="2500" dirty="0"/>
+              <a:t>Learning outcome EXTRA – Silicon-On-Insulator technology</a:t>
+            </a:r>
+            <a:br>
+              <a:rPr lang="en-US" sz="2500" dirty="0"/>
+            </a:br>
+            <a:r>
+              <a:rPr lang="en-US" b="0" dirty="0"/>
+              <a:t>Wavelength behavior simulations (width = 500 nm ; height = 220 nm)</a:t>
+            </a:r>
+            <a:endParaRPr lang="en-US" sz="2500" b="0" dirty="0">
+              <a:latin typeface="+mj-lt"/>
+              <a:cs typeface="Lucida Sans"/>
+            </a:endParaRPr>
+          </a:p>
+        </p:txBody>
+      </p:sp>
+      <p:grpSp>
+        <p:nvGrpSpPr>
+          <p:cNvPr id="12" name="Grupo 11">
+            <a:extLst>
+              <a:ext uri="{FF2B5EF4-FFF2-40B4-BE49-F238E27FC236}">
+                <a16:creationId xmlns:a16="http://schemas.microsoft.com/office/drawing/2014/main" id="{00166760-8263-F19C-FB28-5FA075ABA53B}"/>
+              </a:ext>
+            </a:extLst>
+          </p:cNvPr>
+          <p:cNvGrpSpPr/>
+          <p:nvPr/>
+        </p:nvGrpSpPr>
+        <p:grpSpPr>
+          <a:xfrm>
+            <a:off x="590550" y="1630794"/>
+            <a:ext cx="4419600" cy="3779406"/>
+            <a:chOff x="1143000" y="1207236"/>
+            <a:chExt cx="4419600" cy="3745764"/>
+          </a:xfrm>
+        </p:grpSpPr>
+        <p:sp>
+          <p:nvSpPr>
+            <p:cNvPr id="9" name="Rectángulo 8">
+              <a:extLst>
+                <a:ext uri="{FF2B5EF4-FFF2-40B4-BE49-F238E27FC236}">
+                  <a16:creationId xmlns:a16="http://schemas.microsoft.com/office/drawing/2014/main" id="{BCAC1F61-632D-0391-FEE9-0ED036253481}"/>
+                </a:ext>
+              </a:extLst>
+            </p:cNvPr>
+            <p:cNvSpPr/>
+            <p:nvPr/>
+          </p:nvSpPr>
+          <p:spPr>
+            <a:xfrm>
+              <a:off x="1143000" y="1207236"/>
+              <a:ext cx="4419600" cy="3745764"/>
+            </a:xfrm>
+            <a:prstGeom prst="rect">
+              <a:avLst/>
+            </a:prstGeom>
+            <a:noFill/>
+            <a:ln w="28575">
+              <a:solidFill>
+                <a:srgbClr val="E0700D"/>
+              </a:solidFill>
+            </a:ln>
+          </p:spPr>
+          <p:style>
+            <a:lnRef idx="2">
+              <a:schemeClr val="accent1">
+                <a:shade val="15000"/>
+              </a:schemeClr>
+            </a:lnRef>
+            <a:fillRef idx="1">
+              <a:schemeClr val="accent1"/>
+            </a:fillRef>
+            <a:effectRef idx="0">
+              <a:schemeClr val="accent1"/>
+            </a:effectRef>
+            <a:fontRef idx="minor">
+              <a:schemeClr val="lt1"/>
+            </a:fontRef>
+          </p:style>
+          <p:txBody>
+            <a:bodyPr rtlCol="0" anchor="ctr"/>
+            <a:lstStyle/>
+            <a:p>
+              <a:pPr algn="ctr"/>
+              <a:endParaRPr lang="en-US"/>
+            </a:p>
+          </p:txBody>
+        </p:sp>
+        <p:pic>
+          <p:nvPicPr>
+            <p:cNvPr id="11" name="Imagen 10">
+              <a:extLst>
+                <a:ext uri="{FF2B5EF4-FFF2-40B4-BE49-F238E27FC236}">
+                  <a16:creationId xmlns:a16="http://schemas.microsoft.com/office/drawing/2014/main" id="{C9EC45DD-AB20-EAB4-B9C4-E0BCAB27CFD5}"/>
+                </a:ext>
+              </a:extLst>
+            </p:cNvPr>
+            <p:cNvPicPr>
+              <a:picLocks noChangeAspect="1"/>
+            </p:cNvPicPr>
+            <p:nvPr/>
+          </p:nvPicPr>
+          <p:blipFill>
+            <a:blip r:embed="rId2"/>
+            <a:stretch>
+              <a:fillRect/>
+            </a:stretch>
+          </p:blipFill>
+          <p:spPr>
+            <a:xfrm>
+              <a:off x="1219200" y="1327517"/>
+              <a:ext cx="4267040" cy="3546592"/>
+            </a:xfrm>
+            <a:prstGeom prst="rect">
+              <a:avLst/>
+            </a:prstGeom>
+          </p:spPr>
+        </p:pic>
+      </p:grpSp>
+      <p:sp>
+        <p:nvSpPr>
+          <p:cNvPr id="20" name="CuadroTexto 19">
+            <a:extLst>
+              <a:ext uri="{FF2B5EF4-FFF2-40B4-BE49-F238E27FC236}">
+                <a16:creationId xmlns:a16="http://schemas.microsoft.com/office/drawing/2014/main" id="{B682F70B-11EA-422F-F2D1-E2DACBA7D5D0}"/>
+              </a:ext>
+            </a:extLst>
+          </p:cNvPr>
+          <p:cNvSpPr txBox="1"/>
+          <p:nvPr/>
+        </p:nvSpPr>
+        <p:spPr>
+          <a:xfrm>
+            <a:off x="5333999" y="3657600"/>
+            <a:ext cx="6553201" cy="2677656"/>
+          </a:xfrm>
+          <a:prstGeom prst="rect">
+            <a:avLst/>
+          </a:prstGeom>
+          <a:solidFill>
+            <a:schemeClr val="bg1">
+              <a:lumMod val="95000"/>
+            </a:schemeClr>
+          </a:solidFill>
+          <a:ln w="28575">
+            <a:solidFill>
+              <a:srgbClr val="E0700D"/>
+            </a:solidFill>
+          </a:ln>
+        </p:spPr>
+        <p:txBody>
+          <a:bodyPr wrap="square" rtlCol="0">
+            <a:spAutoFit/>
+          </a:bodyPr>
+          <a:lstStyle/>
+          <a:p>
+            <a:r>
+              <a:rPr lang="es-ES" sz="1400" dirty="0">
+                <a:latin typeface="Arial" panose="020B0604020202020204" pitchFamily="34" charset="0"/>
+                <a:cs typeface="Arial" panose="020B0604020202020204" pitchFamily="34" charset="0"/>
+              </a:rPr>
+              <a:t>Analizando el </a:t>
+            </a:r>
+            <a:r>
+              <a:rPr lang="es-ES" sz="1400" dirty="0" err="1">
+                <a:latin typeface="Arial" panose="020B0604020202020204" pitchFamily="34" charset="0"/>
+                <a:cs typeface="Arial" panose="020B0604020202020204" pitchFamily="34" charset="0"/>
+              </a:rPr>
+              <a:t>n_eff</a:t>
+            </a:r>
+            <a:r>
+              <a:rPr lang="es-ES" sz="1400" dirty="0">
+                <a:latin typeface="Arial" panose="020B0604020202020204" pitchFamily="34" charset="0"/>
+                <a:cs typeface="Arial" panose="020B0604020202020204" pitchFamily="34" charset="0"/>
+              </a:rPr>
+              <a:t> en la tecnología SOI, podemos observar una reducción de estos en los diferentes modos de propagación según λ, indicando cierta dispersión.</a:t>
+            </a:r>
+          </a:p>
+          <a:p>
+            <a:endParaRPr lang="es-ES" sz="1400" dirty="0">
+              <a:latin typeface="Arial" panose="020B0604020202020204" pitchFamily="34" charset="0"/>
+              <a:cs typeface="Arial" panose="020B0604020202020204" pitchFamily="34" charset="0"/>
+            </a:endParaRPr>
+          </a:p>
+          <a:p>
+            <a:r>
+              <a:rPr lang="es-ES" sz="1400" dirty="0">
+                <a:latin typeface="Arial" panose="020B0604020202020204" pitchFamily="34" charset="0"/>
+                <a:cs typeface="Arial" panose="020B0604020202020204" pitchFamily="34" charset="0"/>
+              </a:rPr>
+              <a:t>Por otro lado, notamos un aumento global de los valores de </a:t>
+            </a:r>
+            <a:r>
+              <a:rPr lang="es-ES" sz="1400" dirty="0" err="1">
+                <a:latin typeface="Arial" panose="020B0604020202020204" pitchFamily="34" charset="0"/>
+                <a:cs typeface="Arial" panose="020B0604020202020204" pitchFamily="34" charset="0"/>
+              </a:rPr>
+              <a:t>n_eff</a:t>
+            </a:r>
+            <a:r>
+              <a:rPr lang="es-ES" sz="1400" dirty="0">
+                <a:latin typeface="Arial" panose="020B0604020202020204" pitchFamily="34" charset="0"/>
+                <a:cs typeface="Arial" panose="020B0604020202020204" pitchFamily="34" charset="0"/>
+              </a:rPr>
+              <a:t>, principalmente en los primeros modos. Esto se debe a que en la tecnología SOI el </a:t>
+            </a:r>
+            <a:r>
+              <a:rPr lang="es-ES" sz="1400" dirty="0" err="1">
+                <a:latin typeface="Arial" panose="020B0604020202020204" pitchFamily="34" charset="0"/>
+                <a:cs typeface="Arial" panose="020B0604020202020204" pitchFamily="34" charset="0"/>
+              </a:rPr>
+              <a:t>n_core</a:t>
+            </a:r>
+            <a:r>
+              <a:rPr lang="es-ES" sz="1400" dirty="0">
+                <a:latin typeface="Arial" panose="020B0604020202020204" pitchFamily="34" charset="0"/>
+                <a:cs typeface="Arial" panose="020B0604020202020204" pitchFamily="34" charset="0"/>
+              </a:rPr>
+              <a:t> es mayor que en </a:t>
+            </a:r>
+            <a:r>
+              <a:rPr lang="es-ES" sz="1400" dirty="0" err="1">
+                <a:latin typeface="Arial" panose="020B0604020202020204" pitchFamily="34" charset="0"/>
+                <a:cs typeface="Arial" panose="020B0604020202020204" pitchFamily="34" charset="0"/>
+              </a:rPr>
+              <a:t>SiNx</a:t>
+            </a:r>
+            <a:r>
+              <a:rPr lang="es-ES" sz="1400" dirty="0">
+                <a:latin typeface="Arial" panose="020B0604020202020204" pitchFamily="34" charset="0"/>
+                <a:cs typeface="Arial" panose="020B0604020202020204" pitchFamily="34" charset="0"/>
+              </a:rPr>
+              <a:t>.</a:t>
+            </a:r>
+          </a:p>
+          <a:p>
+            <a:endParaRPr lang="es-ES" sz="1400" dirty="0">
+              <a:latin typeface="Arial" panose="020B0604020202020204" pitchFamily="34" charset="0"/>
+              <a:cs typeface="Arial" panose="020B0604020202020204" pitchFamily="34" charset="0"/>
+            </a:endParaRPr>
+          </a:p>
+          <a:p>
+            <a:r>
+              <a:rPr lang="es-ES" sz="1400" dirty="0">
+                <a:latin typeface="Arial" panose="020B0604020202020204" pitchFamily="34" charset="0"/>
+                <a:cs typeface="Arial" panose="020B0604020202020204" pitchFamily="34" charset="0"/>
+              </a:rPr>
+              <a:t>Finalmente, el modo 3 en este caso, pasa a ser TE puro (</a:t>
+            </a:r>
+            <a:r>
+              <a:rPr lang="es-ES" sz="1400" dirty="0" err="1">
+                <a:latin typeface="Arial" panose="020B0604020202020204" pitchFamily="34" charset="0"/>
+                <a:cs typeface="Arial" panose="020B0604020202020204" pitchFamily="34" charset="0"/>
+              </a:rPr>
+              <a:t>fraction_TE</a:t>
+            </a:r>
+            <a:r>
+              <a:rPr lang="es-ES" sz="1400" dirty="0">
+                <a:latin typeface="Arial" panose="020B0604020202020204" pitchFamily="34" charset="0"/>
+                <a:cs typeface="Arial" panose="020B0604020202020204" pitchFamily="34" charset="0"/>
+              </a:rPr>
+              <a:t> = 0.99), diferenciándose del anterior el cual se caracterizaba por su propagación TM. No obstante, al tener el </a:t>
+            </a:r>
+            <a:r>
+              <a:rPr lang="es-ES" sz="1400" dirty="0" err="1">
+                <a:latin typeface="Arial" panose="020B0604020202020204" pitchFamily="34" charset="0"/>
+                <a:cs typeface="Arial" panose="020B0604020202020204" pitchFamily="34" charset="0"/>
+              </a:rPr>
+              <a:t>n_eff</a:t>
+            </a:r>
+            <a:r>
+              <a:rPr lang="es-ES" sz="1400" dirty="0">
+                <a:latin typeface="Arial" panose="020B0604020202020204" pitchFamily="34" charset="0"/>
+                <a:cs typeface="Arial" panose="020B0604020202020204" pitchFamily="34" charset="0"/>
+              </a:rPr>
+              <a:t> &lt; </a:t>
+            </a:r>
+            <a:r>
+              <a:rPr lang="es-ES" sz="1400" dirty="0" err="1">
+                <a:latin typeface="Arial" panose="020B0604020202020204" pitchFamily="34" charset="0"/>
+                <a:cs typeface="Arial" panose="020B0604020202020204" pitchFamily="34" charset="0"/>
+              </a:rPr>
+              <a:t>n_cladding</a:t>
+            </a:r>
+            <a:r>
+              <a:rPr lang="es-ES" sz="1400" dirty="0">
+                <a:latin typeface="Arial" panose="020B0604020202020204" pitchFamily="34" charset="0"/>
+                <a:cs typeface="Arial" panose="020B0604020202020204" pitchFamily="34" charset="0"/>
+              </a:rPr>
+              <a:t> a λ = 1.55µm (1.4346 &lt; 1.44) queda también descartado.</a:t>
+            </a:r>
+          </a:p>
+        </p:txBody>
+      </p:sp>
+      <p:pic>
+        <p:nvPicPr>
+          <p:cNvPr id="3" name="Imagen 2">
+            <a:extLst>
+              <a:ext uri="{FF2B5EF4-FFF2-40B4-BE49-F238E27FC236}">
+                <a16:creationId xmlns:a16="http://schemas.microsoft.com/office/drawing/2014/main" id="{E8A0D500-0A84-4C5A-BCA2-C3CED00123CD}"/>
+              </a:ext>
+            </a:extLst>
+          </p:cNvPr>
+          <p:cNvPicPr>
+            <a:picLocks noChangeAspect="1"/>
+          </p:cNvPicPr>
+          <p:nvPr/>
+        </p:nvPicPr>
+        <p:blipFill>
+          <a:blip r:embed="rId3"/>
+          <a:stretch>
+            <a:fillRect/>
+          </a:stretch>
+        </p:blipFill>
+        <p:spPr>
+          <a:xfrm>
+            <a:off x="7132216" y="1295400"/>
+            <a:ext cx="2956765" cy="2009936"/>
+          </a:xfrm>
+          <a:prstGeom prst="rect">
+            <a:avLst/>
+          </a:prstGeom>
+        </p:spPr>
+      </p:pic>
+    </p:spTree>
+    <p:extLst>
+      <p:ext uri="{BB962C8B-B14F-4D97-AF65-F5344CB8AC3E}">
+        <p14:creationId xmlns:p14="http://schemas.microsoft.com/office/powerpoint/2010/main" val="1704820626"/>
+      </p:ext>
+    </p:extLst>
+  </p:cSld>
+  <p:clrMapOvr>
+    <a:masterClrMapping/>
+  </p:clrMapOvr>
+</p:sld>
+</file>
+
+<file path=ppt/slides/slide14.xml><?xml version="1.0" encoding="utf-8"?>
+<p:sld xmlns:a="http://schemas.openxmlformats.org/drawingml/2006/main" xmlns:r="http://schemas.openxmlformats.org/officeDocument/2006/relationships" xmlns:p="http://schemas.openxmlformats.org/presentationml/2006/main">
+  <p:cSld>
+    <p:spTree>
+      <p:nvGrpSpPr>
+        <p:cNvPr id="1" name="">
+          <a:extLst>
+            <a:ext uri="{FF2B5EF4-FFF2-40B4-BE49-F238E27FC236}">
+              <a16:creationId xmlns:a16="http://schemas.microsoft.com/office/drawing/2014/main" id="{37AD035A-8E0F-ADDE-DD07-FCDFED367975}"/>
+            </a:ext>
+          </a:extLst>
+        </p:cNvPr>
+        <p:cNvGrpSpPr/>
+        <p:nvPr/>
+      </p:nvGrpSpPr>
+      <p:grpSpPr>
+        <a:xfrm>
+          <a:off x="0" y="0"/>
+          <a:ext cx="0" cy="0"/>
+          <a:chOff x="0" y="0"/>
+          <a:chExt cx="0" cy="0"/>
+        </a:xfrm>
+      </p:grpSpPr>
+      <p:sp>
+        <p:nvSpPr>
+          <p:cNvPr id="4" name="Marcador de pie de página 3">
+            <a:extLst>
+              <a:ext uri="{FF2B5EF4-FFF2-40B4-BE49-F238E27FC236}">
+                <a16:creationId xmlns:a16="http://schemas.microsoft.com/office/drawing/2014/main" id="{C62E1723-2F12-9D20-7F65-6A314CD42E7A}"/>
+              </a:ext>
+            </a:extLst>
+          </p:cNvPr>
+          <p:cNvSpPr>
+            <a:spLocks noGrp="1"/>
+          </p:cNvSpPr>
+          <p:nvPr>
+            <p:ph type="ftr" sz="quarter" idx="5"/>
+          </p:nvPr>
+        </p:nvSpPr>
+        <p:spPr/>
+        <p:txBody>
+          <a:bodyPr/>
+          <a:lstStyle/>
+          <a:p>
+            <a:pPr marL="12700">
+              <a:spcBef>
+                <a:spcPts val="15"/>
+              </a:spcBef>
+            </a:pPr>
+            <a:r>
+              <a:rPr lang="es-ES" spc="-5"/>
+              <a:t>LAB 1.0 WAVEGUIDES</a:t>
+            </a:r>
+            <a:endParaRPr lang="es-ES" spc="-5" dirty="0"/>
+          </a:p>
+        </p:txBody>
+      </p:sp>
+      <p:sp>
+        <p:nvSpPr>
+          <p:cNvPr id="5" name="Marcador de número de diapositiva 4">
+            <a:extLst>
+              <a:ext uri="{FF2B5EF4-FFF2-40B4-BE49-F238E27FC236}">
+                <a16:creationId xmlns:a16="http://schemas.microsoft.com/office/drawing/2014/main" id="{F4468CA6-EB69-20D5-DE70-B783FA5B2BFB}"/>
+              </a:ext>
+            </a:extLst>
+          </p:cNvPr>
+          <p:cNvSpPr>
+            <a:spLocks noGrp="1"/>
+          </p:cNvSpPr>
+          <p:nvPr>
+            <p:ph type="sldNum" sz="quarter" idx="7"/>
+          </p:nvPr>
+        </p:nvSpPr>
+        <p:spPr/>
+        <p:txBody>
+          <a:bodyPr/>
+          <a:lstStyle/>
+          <a:p>
+            <a:fld id="{B6F15528-21DE-4FAA-801E-634DDDAF4B2B}" type="slidenum">
+              <a:rPr lang="es-ES" smtClean="0"/>
+              <a:t>14</a:t>
+            </a:fld>
+            <a:endParaRPr lang="es-ES"/>
+          </a:p>
+        </p:txBody>
+      </p:sp>
+      <p:sp>
+        <p:nvSpPr>
+          <p:cNvPr id="6" name="object 16">
+            <a:extLst>
+              <a:ext uri="{FF2B5EF4-FFF2-40B4-BE49-F238E27FC236}">
+                <a16:creationId xmlns:a16="http://schemas.microsoft.com/office/drawing/2014/main" id="{1C7FDB15-2B87-3AFC-E851-3CFDF6EB4C38}"/>
+              </a:ext>
+            </a:extLst>
+          </p:cNvPr>
+          <p:cNvSpPr txBox="1">
+            <a:spLocks noGrp="1"/>
+          </p:cNvSpPr>
+          <p:nvPr>
+            <p:ph type="title"/>
+          </p:nvPr>
+        </p:nvSpPr>
+        <p:spPr>
+          <a:xfrm>
+            <a:off x="590550" y="357758"/>
+            <a:ext cx="10991850" cy="705321"/>
+          </a:xfrm>
+          <a:prstGeom prst="rect">
+            <a:avLst/>
+          </a:prstGeom>
+        </p:spPr>
+        <p:txBody>
+          <a:bodyPr vert="horz" wrap="square" lIns="0" tIns="12700" rIns="0" bIns="0" rtlCol="0">
+            <a:spAutoFit/>
+          </a:bodyPr>
+          <a:lstStyle/>
+          <a:p>
+            <a:pPr marL="12700">
+              <a:lnSpc>
+                <a:spcPct val="100000"/>
+              </a:lnSpc>
+              <a:spcBef>
+                <a:spcPts val="100"/>
+              </a:spcBef>
+            </a:pPr>
+            <a:r>
+              <a:rPr lang="en-US" sz="2500" dirty="0"/>
+              <a:t>Learning outcome EXTRA – Silicon-On-Insulator technology</a:t>
+            </a:r>
+            <a:br>
+              <a:rPr lang="en-US" sz="2500" dirty="0"/>
+            </a:br>
+            <a:r>
+              <a:rPr lang="en-US" b="0" dirty="0"/>
+              <a:t>Width behavior simulations. Range 300nm-1µm (width = 500 nm ; height = 220 nm)</a:t>
+            </a:r>
+            <a:endParaRPr lang="en-US" sz="2500" b="0" dirty="0">
+              <a:latin typeface="+mj-lt"/>
+              <a:cs typeface="Lucida Sans"/>
+            </a:endParaRPr>
+          </a:p>
+        </p:txBody>
+      </p:sp>
+      <p:pic>
+        <p:nvPicPr>
+          <p:cNvPr id="13" name="Imagen 12">
+            <a:extLst>
+              <a:ext uri="{FF2B5EF4-FFF2-40B4-BE49-F238E27FC236}">
+                <a16:creationId xmlns:a16="http://schemas.microsoft.com/office/drawing/2014/main" id="{33EB018D-526A-F715-200F-9393A21BB818}"/>
+              </a:ext>
+            </a:extLst>
+          </p:cNvPr>
+          <p:cNvPicPr>
+            <a:picLocks noChangeAspect="1"/>
+          </p:cNvPicPr>
+          <p:nvPr/>
+        </p:nvPicPr>
+        <p:blipFill>
+          <a:blip r:embed="rId2">
+            <a:extLst>
+              <a:ext uri="{28A0092B-C50C-407E-A947-70E740481C1C}">
+                <a14:useLocalDpi xmlns:a14="http://schemas.microsoft.com/office/drawing/2010/main" val="0"/>
+              </a:ext>
+            </a:extLst>
+          </a:blip>
+          <a:srcRect/>
+          <a:stretch/>
+        </p:blipFill>
+        <p:spPr>
+          <a:xfrm>
+            <a:off x="1348346" y="1219200"/>
+            <a:ext cx="3376054" cy="3745764"/>
+          </a:xfrm>
+          <a:prstGeom prst="rect">
+            <a:avLst/>
+          </a:prstGeom>
+        </p:spPr>
+      </p:pic>
+      <p:sp>
+        <p:nvSpPr>
+          <p:cNvPr id="16" name="CuadroTexto 15">
+            <a:extLst>
+              <a:ext uri="{FF2B5EF4-FFF2-40B4-BE49-F238E27FC236}">
+                <a16:creationId xmlns:a16="http://schemas.microsoft.com/office/drawing/2014/main" id="{6F8ADD37-2BB1-FF8B-F782-C54E7D8EC9C6}"/>
+              </a:ext>
+            </a:extLst>
+          </p:cNvPr>
+          <p:cNvSpPr txBox="1"/>
+          <p:nvPr/>
+        </p:nvSpPr>
+        <p:spPr>
+          <a:xfrm>
+            <a:off x="590550" y="5154451"/>
+            <a:ext cx="10991850" cy="738664"/>
+          </a:xfrm>
+          <a:prstGeom prst="rect">
+            <a:avLst/>
+          </a:prstGeom>
+          <a:solidFill>
+            <a:schemeClr val="bg1">
+              <a:lumMod val="95000"/>
+            </a:schemeClr>
+          </a:solidFill>
+          <a:ln w="28575">
+            <a:solidFill>
+              <a:srgbClr val="E0700D"/>
+            </a:solidFill>
+          </a:ln>
+        </p:spPr>
+        <p:txBody>
+          <a:bodyPr wrap="square" rtlCol="0">
+            <a:spAutoFit/>
+          </a:bodyPr>
+          <a:lstStyle/>
+          <a:p>
+            <a:r>
+              <a:rPr lang="es-ES" sz="1400" dirty="0">
+                <a:latin typeface="Arial" panose="020B0604020202020204" pitchFamily="34" charset="0"/>
+                <a:cs typeface="Arial" panose="020B0604020202020204" pitchFamily="34" charset="0"/>
+              </a:rPr>
+              <a:t>Analizando la evolución del </a:t>
+            </a:r>
+            <a:r>
+              <a:rPr lang="es-ES" sz="1400" dirty="0" err="1">
+                <a:latin typeface="Arial" panose="020B0604020202020204" pitchFamily="34" charset="0"/>
+                <a:cs typeface="Arial" panose="020B0604020202020204" pitchFamily="34" charset="0"/>
+              </a:rPr>
+              <a:t>n_eff</a:t>
+            </a:r>
+            <a:r>
+              <a:rPr lang="es-ES" sz="1400" dirty="0">
+                <a:latin typeface="Arial" panose="020B0604020202020204" pitchFamily="34" charset="0"/>
+                <a:cs typeface="Arial" panose="020B0604020202020204" pitchFamily="34" charset="0"/>
+              </a:rPr>
+              <a:t> respecto del ancho, observamos que el Modo 3 queda descartado a este ancho (</a:t>
+            </a:r>
+            <a:r>
+              <a:rPr lang="es-ES" sz="1400" dirty="0" err="1">
+                <a:latin typeface="Arial" panose="020B0604020202020204" pitchFamily="34" charset="0"/>
+                <a:cs typeface="Arial" panose="020B0604020202020204" pitchFamily="34" charset="0"/>
+              </a:rPr>
+              <a:t>width</a:t>
+            </a:r>
+            <a:r>
+              <a:rPr lang="es-ES" sz="1400" dirty="0">
+                <a:latin typeface="Arial" panose="020B0604020202020204" pitchFamily="34" charset="0"/>
+                <a:cs typeface="Arial" panose="020B0604020202020204" pitchFamily="34" charset="0"/>
+              </a:rPr>
+              <a:t> = 0.5µm) al ser inferior al </a:t>
+            </a:r>
+            <a:r>
+              <a:rPr lang="es-ES" sz="1400" dirty="0" err="1">
+                <a:latin typeface="Arial" panose="020B0604020202020204" pitchFamily="34" charset="0"/>
+                <a:cs typeface="Arial" panose="020B0604020202020204" pitchFamily="34" charset="0"/>
+              </a:rPr>
+              <a:t>n_cladding</a:t>
+            </a:r>
+            <a:r>
+              <a:rPr lang="es-ES" sz="1400" dirty="0">
+                <a:latin typeface="Arial" panose="020B0604020202020204" pitchFamily="34" charset="0"/>
+                <a:cs typeface="Arial" panose="020B0604020202020204" pitchFamily="34" charset="0"/>
+              </a:rPr>
+              <a:t> (1.433691 &lt; 1.44), mientras que el Modo 2 se queda cerca del corte. Por otro lado, los primeros modos quedan bien confinados en el núcleo a estos anchos y no suponen ningún problema.</a:t>
+            </a:r>
+          </a:p>
+        </p:txBody>
+      </p:sp>
+      <p:grpSp>
+        <p:nvGrpSpPr>
+          <p:cNvPr id="3" name="Grupo 2">
+            <a:extLst>
+              <a:ext uri="{FF2B5EF4-FFF2-40B4-BE49-F238E27FC236}">
+                <a16:creationId xmlns:a16="http://schemas.microsoft.com/office/drawing/2014/main" id="{597D7515-C4F2-EDF4-AEF6-1257DD8118C4}"/>
+              </a:ext>
+            </a:extLst>
+          </p:cNvPr>
+          <p:cNvGrpSpPr/>
+          <p:nvPr/>
+        </p:nvGrpSpPr>
+        <p:grpSpPr>
+          <a:xfrm>
+            <a:off x="5638800" y="1219200"/>
+            <a:ext cx="5943600" cy="3745764"/>
+            <a:chOff x="5638800" y="1219200"/>
+            <a:chExt cx="5943600" cy="3745764"/>
+          </a:xfrm>
+        </p:grpSpPr>
+        <p:sp>
+          <p:nvSpPr>
+            <p:cNvPr id="7" name="Rectángulo 6">
+              <a:extLst>
+                <a:ext uri="{FF2B5EF4-FFF2-40B4-BE49-F238E27FC236}">
+                  <a16:creationId xmlns:a16="http://schemas.microsoft.com/office/drawing/2014/main" id="{D3F6D91A-9C26-E18C-BC41-9E30795803B3}"/>
+                </a:ext>
+              </a:extLst>
+            </p:cNvPr>
+            <p:cNvSpPr/>
+            <p:nvPr/>
+          </p:nvSpPr>
+          <p:spPr>
+            <a:xfrm>
+              <a:off x="5638800" y="1219200"/>
+              <a:ext cx="5943600" cy="3745764"/>
+            </a:xfrm>
+            <a:prstGeom prst="rect">
+              <a:avLst/>
+            </a:prstGeom>
+            <a:noFill/>
+            <a:ln w="28575">
+              <a:solidFill>
+                <a:srgbClr val="E0700D"/>
+              </a:solidFill>
+            </a:ln>
+          </p:spPr>
+          <p:style>
+            <a:lnRef idx="2">
+              <a:schemeClr val="accent1">
+                <a:shade val="15000"/>
+              </a:schemeClr>
+            </a:lnRef>
+            <a:fillRef idx="1">
+              <a:schemeClr val="accent1"/>
+            </a:fillRef>
+            <a:effectRef idx="0">
+              <a:schemeClr val="accent1"/>
+            </a:effectRef>
+            <a:fontRef idx="minor">
+              <a:schemeClr val="lt1"/>
+            </a:fontRef>
+          </p:style>
+          <p:txBody>
+            <a:bodyPr rtlCol="0" anchor="ctr"/>
+            <a:lstStyle/>
+            <a:p>
+              <a:pPr algn="ctr"/>
+              <a:endParaRPr lang="en-US"/>
+            </a:p>
+          </p:txBody>
+        </p:sp>
+        <p:pic>
+          <p:nvPicPr>
+            <p:cNvPr id="18" name="Imagen 17">
+              <a:extLst>
+                <a:ext uri="{FF2B5EF4-FFF2-40B4-BE49-F238E27FC236}">
+                  <a16:creationId xmlns:a16="http://schemas.microsoft.com/office/drawing/2014/main" id="{BD9D937B-4290-7290-951B-7D74A31A6DF4}"/>
+                </a:ext>
+              </a:extLst>
+            </p:cNvPr>
+            <p:cNvPicPr>
+              <a:picLocks noChangeAspect="1"/>
+            </p:cNvPicPr>
+            <p:nvPr/>
+          </p:nvPicPr>
+          <p:blipFill>
+            <a:blip r:embed="rId3">
+              <a:extLst>
+                <a:ext uri="{28A0092B-C50C-407E-A947-70E740481C1C}">
+                  <a14:useLocalDpi xmlns:a14="http://schemas.microsoft.com/office/drawing/2010/main" val="0"/>
+                </a:ext>
+              </a:extLst>
+            </a:blip>
+            <a:srcRect/>
+            <a:stretch/>
+          </p:blipFill>
+          <p:spPr>
+            <a:xfrm>
+              <a:off x="5791200" y="1428609"/>
+              <a:ext cx="5715000" cy="3326946"/>
+            </a:xfrm>
+            <a:prstGeom prst="rect">
+              <a:avLst/>
+            </a:prstGeom>
+          </p:spPr>
+        </p:pic>
+      </p:grpSp>
+    </p:spTree>
+    <p:extLst>
+      <p:ext uri="{BB962C8B-B14F-4D97-AF65-F5344CB8AC3E}">
+        <p14:creationId xmlns:p14="http://schemas.microsoft.com/office/powerpoint/2010/main" val="2203831259"/>
+      </p:ext>
+    </p:extLst>
+  </p:cSld>
+  <p:clrMapOvr>
+    <a:masterClrMapping/>
+  </p:clrMapOvr>
+</p:sld>
+</file>
+
+<file path=ppt/slides/slide15.xml><?xml version="1.0" encoding="utf-8"?>
+<p:sld xmlns:a="http://schemas.openxmlformats.org/drawingml/2006/main" xmlns:r="http://schemas.openxmlformats.org/officeDocument/2006/relationships" xmlns:p="http://schemas.openxmlformats.org/presentationml/2006/main">
+  <p:cSld>
+    <p:spTree>
+      <p:nvGrpSpPr>
+        <p:cNvPr id="1" name="">
+          <a:extLst>
+            <a:ext uri="{FF2B5EF4-FFF2-40B4-BE49-F238E27FC236}">
+              <a16:creationId xmlns:a16="http://schemas.microsoft.com/office/drawing/2014/main" id="{A2963F78-0569-C57A-39B7-46ADC9445B52}"/>
+            </a:ext>
+          </a:extLst>
+        </p:cNvPr>
+        <p:cNvGrpSpPr/>
+        <p:nvPr/>
+      </p:nvGrpSpPr>
+      <p:grpSpPr>
+        <a:xfrm>
+          <a:off x="0" y="0"/>
+          <a:ext cx="0" cy="0"/>
+          <a:chOff x="0" y="0"/>
+          <a:chExt cx="0" cy="0"/>
+        </a:xfrm>
+      </p:grpSpPr>
+      <p:sp>
+        <p:nvSpPr>
+          <p:cNvPr id="4" name="Marcador de pie de página 3">
+            <a:extLst>
+              <a:ext uri="{FF2B5EF4-FFF2-40B4-BE49-F238E27FC236}">
+                <a16:creationId xmlns:a16="http://schemas.microsoft.com/office/drawing/2014/main" id="{6C8A3926-8BAC-9656-7A35-0354DC1B8C52}"/>
+              </a:ext>
+            </a:extLst>
+          </p:cNvPr>
+          <p:cNvSpPr>
+            <a:spLocks noGrp="1"/>
+          </p:cNvSpPr>
+          <p:nvPr>
+            <p:ph type="ftr" sz="quarter" idx="5"/>
+          </p:nvPr>
+        </p:nvSpPr>
+        <p:spPr/>
+        <p:txBody>
+          <a:bodyPr/>
+          <a:lstStyle/>
+          <a:p>
+            <a:pPr marL="12700">
+              <a:spcBef>
+                <a:spcPts val="15"/>
+              </a:spcBef>
+            </a:pPr>
+            <a:r>
+              <a:rPr lang="es-ES" spc="-5"/>
+              <a:t>LAB 1.0 WAVEGUIDES</a:t>
+            </a:r>
+            <a:endParaRPr lang="es-ES" spc="-5" dirty="0"/>
+          </a:p>
+        </p:txBody>
+      </p:sp>
+      <p:sp>
+        <p:nvSpPr>
+          <p:cNvPr id="5" name="Marcador de número de diapositiva 4">
+            <a:extLst>
+              <a:ext uri="{FF2B5EF4-FFF2-40B4-BE49-F238E27FC236}">
+                <a16:creationId xmlns:a16="http://schemas.microsoft.com/office/drawing/2014/main" id="{9B025756-A824-007E-8AD5-3AA6D873BB06}"/>
+              </a:ext>
+            </a:extLst>
+          </p:cNvPr>
+          <p:cNvSpPr>
+            <a:spLocks noGrp="1"/>
+          </p:cNvSpPr>
+          <p:nvPr>
+            <p:ph type="sldNum" sz="quarter" idx="7"/>
+          </p:nvPr>
+        </p:nvSpPr>
+        <p:spPr/>
+        <p:txBody>
+          <a:bodyPr/>
+          <a:lstStyle/>
+          <a:p>
+            <a:fld id="{B6F15528-21DE-4FAA-801E-634DDDAF4B2B}" type="slidenum">
+              <a:rPr lang="es-ES" smtClean="0"/>
+              <a:t>15</a:t>
+            </a:fld>
+            <a:endParaRPr lang="es-ES"/>
+          </a:p>
+        </p:txBody>
+      </p:sp>
+      <p:sp>
+        <p:nvSpPr>
+          <p:cNvPr id="6" name="object 16">
+            <a:extLst>
+              <a:ext uri="{FF2B5EF4-FFF2-40B4-BE49-F238E27FC236}">
+                <a16:creationId xmlns:a16="http://schemas.microsoft.com/office/drawing/2014/main" id="{FD567703-2391-F161-AA2C-38BB7364B19B}"/>
+              </a:ext>
+            </a:extLst>
+          </p:cNvPr>
+          <p:cNvSpPr txBox="1">
+            <a:spLocks noGrp="1"/>
+          </p:cNvSpPr>
+          <p:nvPr>
+            <p:ph type="title"/>
+          </p:nvPr>
+        </p:nvSpPr>
+        <p:spPr>
+          <a:xfrm>
+            <a:off x="590550" y="357758"/>
+            <a:ext cx="10991850" cy="705321"/>
+          </a:xfrm>
+          <a:prstGeom prst="rect">
+            <a:avLst/>
+          </a:prstGeom>
+        </p:spPr>
+        <p:txBody>
+          <a:bodyPr vert="horz" wrap="square" lIns="0" tIns="12700" rIns="0" bIns="0" rtlCol="0">
+            <a:spAutoFit/>
+          </a:bodyPr>
+          <a:lstStyle/>
+          <a:p>
+            <a:pPr marL="12700">
+              <a:lnSpc>
+                <a:spcPct val="100000"/>
+              </a:lnSpc>
+              <a:spcBef>
+                <a:spcPts val="100"/>
+              </a:spcBef>
+            </a:pPr>
+            <a:r>
+              <a:rPr lang="en-US" sz="2500" dirty="0"/>
+              <a:t>Learning outcome EXTRA – Silicon-On-Insulator technology</a:t>
+            </a:r>
+            <a:br>
+              <a:rPr lang="en-US" sz="2500" dirty="0"/>
+            </a:br>
+            <a:r>
+              <a:rPr lang="en-US" b="0" dirty="0"/>
+              <a:t>Width behavior simulations. Range 300nm-1µm (width = 500 nm ; height = 220 nm)</a:t>
+            </a:r>
+            <a:endParaRPr lang="en-US" sz="2500" b="0" dirty="0">
+              <a:latin typeface="+mj-lt"/>
+              <a:cs typeface="Lucida Sans"/>
+            </a:endParaRPr>
+          </a:p>
+        </p:txBody>
+      </p:sp>
+      <p:sp>
+        <p:nvSpPr>
+          <p:cNvPr id="16" name="CuadroTexto 15">
+            <a:extLst>
+              <a:ext uri="{FF2B5EF4-FFF2-40B4-BE49-F238E27FC236}">
+                <a16:creationId xmlns:a16="http://schemas.microsoft.com/office/drawing/2014/main" id="{F52DF1DA-C5CB-BB30-3E2F-9669BC55A531}"/>
+              </a:ext>
+            </a:extLst>
+          </p:cNvPr>
+          <p:cNvSpPr txBox="1"/>
+          <p:nvPr/>
+        </p:nvSpPr>
+        <p:spPr>
+          <a:xfrm>
+            <a:off x="152400" y="1219200"/>
+            <a:ext cx="3114848" cy="3754874"/>
+          </a:xfrm>
+          <a:prstGeom prst="rect">
+            <a:avLst/>
+          </a:prstGeom>
+          <a:solidFill>
+            <a:schemeClr val="bg1">
+              <a:lumMod val="95000"/>
+            </a:schemeClr>
+          </a:solidFill>
+          <a:ln w="28575">
+            <a:solidFill>
+              <a:srgbClr val="E0700D"/>
+            </a:solidFill>
+          </a:ln>
+        </p:spPr>
+        <p:txBody>
+          <a:bodyPr wrap="square" rtlCol="0">
+            <a:spAutoFit/>
+          </a:bodyPr>
+          <a:lstStyle/>
+          <a:p>
+            <a:r>
+              <a:rPr lang="es-ES" sz="1400" dirty="0">
+                <a:latin typeface="Arial" panose="020B0604020202020204" pitchFamily="34" charset="0"/>
+                <a:cs typeface="Arial" panose="020B0604020202020204" pitchFamily="34" charset="0"/>
+              </a:rPr>
+              <a:t>Si nos centramos en la polarización respecto del ancho, podemos observar alteraciones de polarización según el rango analizado. </a:t>
+            </a:r>
+          </a:p>
+          <a:p>
+            <a:endParaRPr lang="es-ES" sz="1400" dirty="0">
+              <a:latin typeface="Arial" panose="020B0604020202020204" pitchFamily="34" charset="0"/>
+              <a:cs typeface="Arial" panose="020B0604020202020204" pitchFamily="34" charset="0"/>
+            </a:endParaRPr>
+          </a:p>
+          <a:p>
+            <a:r>
+              <a:rPr lang="es-ES" sz="1400" dirty="0">
+                <a:latin typeface="Arial" panose="020B0604020202020204" pitchFamily="34" charset="0"/>
+                <a:cs typeface="Arial" panose="020B0604020202020204" pitchFamily="34" charset="0"/>
+              </a:rPr>
+              <a:t>En el ancho estudiado en esta ocasión (</a:t>
+            </a:r>
+            <a:r>
+              <a:rPr lang="es-ES" sz="1400" dirty="0" err="1">
+                <a:latin typeface="Arial" panose="020B0604020202020204" pitchFamily="34" charset="0"/>
+                <a:cs typeface="Arial" panose="020B0604020202020204" pitchFamily="34" charset="0"/>
+              </a:rPr>
+              <a:t>width</a:t>
+            </a:r>
+            <a:r>
+              <a:rPr lang="es-ES" sz="1400" dirty="0">
+                <a:latin typeface="Arial" panose="020B0604020202020204" pitchFamily="34" charset="0"/>
+                <a:cs typeface="Arial" panose="020B0604020202020204" pitchFamily="34" charset="0"/>
+              </a:rPr>
+              <a:t> = 0.5µm), los modos quedarían con la siguiente polarización:</a:t>
+            </a:r>
+          </a:p>
+          <a:p>
+            <a:pPr marL="285750" indent="-285750">
+              <a:buFont typeface="Arial" panose="020B0604020202020204" pitchFamily="34" charset="0"/>
+              <a:buChar char="•"/>
+            </a:pPr>
+            <a:r>
+              <a:rPr lang="es-ES" sz="1400" dirty="0" err="1">
+                <a:latin typeface="Arial" panose="020B0604020202020204" pitchFamily="34" charset="0"/>
+                <a:cs typeface="Arial" panose="020B0604020202020204" pitchFamily="34" charset="0"/>
+              </a:rPr>
+              <a:t>Mode</a:t>
+            </a:r>
+            <a:r>
+              <a:rPr lang="es-ES" sz="1400" dirty="0">
+                <a:latin typeface="Arial" panose="020B0604020202020204" pitchFamily="34" charset="0"/>
+                <a:cs typeface="Arial" panose="020B0604020202020204" pitchFamily="34" charset="0"/>
+              </a:rPr>
+              <a:t> 0: </a:t>
+            </a:r>
+            <a:r>
+              <a:rPr lang="es-ES" sz="1400" dirty="0">
+                <a:solidFill>
+                  <a:srgbClr val="0070C0"/>
+                </a:solidFill>
+                <a:latin typeface="Arial" panose="020B0604020202020204" pitchFamily="34" charset="0"/>
+                <a:cs typeface="Arial" panose="020B0604020202020204" pitchFamily="34" charset="0"/>
+              </a:rPr>
+              <a:t>TE</a:t>
+            </a:r>
+            <a:r>
+              <a:rPr lang="es-ES" sz="1400" dirty="0">
+                <a:latin typeface="Arial" panose="020B0604020202020204" pitchFamily="34" charset="0"/>
+                <a:cs typeface="Arial" panose="020B0604020202020204" pitchFamily="34" charset="0"/>
+              </a:rPr>
+              <a:t> puro (</a:t>
+            </a:r>
+            <a:r>
+              <a:rPr lang="es-ES" sz="1400" dirty="0" err="1">
+                <a:latin typeface="Arial" panose="020B0604020202020204" pitchFamily="34" charset="0"/>
+                <a:cs typeface="Arial" panose="020B0604020202020204" pitchFamily="34" charset="0"/>
+              </a:rPr>
+              <a:t>fraction_TE</a:t>
+            </a:r>
+            <a:r>
+              <a:rPr lang="es-ES" sz="1400" dirty="0">
+                <a:latin typeface="Arial" panose="020B0604020202020204" pitchFamily="34" charset="0"/>
+                <a:cs typeface="Arial" panose="020B0604020202020204" pitchFamily="34" charset="0"/>
+              </a:rPr>
+              <a:t> = 0.982)</a:t>
+            </a:r>
+          </a:p>
+          <a:p>
+            <a:pPr marL="285750" indent="-285750">
+              <a:buFont typeface="Arial" panose="020B0604020202020204" pitchFamily="34" charset="0"/>
+              <a:buChar char="•"/>
+            </a:pPr>
+            <a:r>
+              <a:rPr lang="es-ES" sz="1400" dirty="0" err="1">
+                <a:latin typeface="Arial" panose="020B0604020202020204" pitchFamily="34" charset="0"/>
+                <a:cs typeface="Arial" panose="020B0604020202020204" pitchFamily="34" charset="0"/>
+              </a:rPr>
+              <a:t>Mode</a:t>
+            </a:r>
+            <a:r>
+              <a:rPr lang="es-ES" sz="1400" dirty="0">
+                <a:latin typeface="Arial" panose="020B0604020202020204" pitchFamily="34" charset="0"/>
+                <a:cs typeface="Arial" panose="020B0604020202020204" pitchFamily="34" charset="0"/>
+              </a:rPr>
+              <a:t> 1: </a:t>
+            </a:r>
+            <a:r>
+              <a:rPr lang="es-ES" sz="1400" dirty="0">
+                <a:solidFill>
+                  <a:srgbClr val="C00000"/>
+                </a:solidFill>
+                <a:latin typeface="Arial" panose="020B0604020202020204" pitchFamily="34" charset="0"/>
+                <a:cs typeface="Arial" panose="020B0604020202020204" pitchFamily="34" charset="0"/>
+              </a:rPr>
+              <a:t>TM</a:t>
+            </a:r>
+            <a:r>
+              <a:rPr lang="es-ES" sz="1400" dirty="0">
+                <a:latin typeface="Arial" panose="020B0604020202020204" pitchFamily="34" charset="0"/>
+                <a:cs typeface="Arial" panose="020B0604020202020204" pitchFamily="34" charset="0"/>
+              </a:rPr>
+              <a:t> (</a:t>
+            </a:r>
+            <a:r>
+              <a:rPr lang="es-ES" sz="1400" dirty="0" err="1">
+                <a:latin typeface="Arial" panose="020B0604020202020204" pitchFamily="34" charset="0"/>
+                <a:cs typeface="Arial" panose="020B0604020202020204" pitchFamily="34" charset="0"/>
+              </a:rPr>
+              <a:t>fraction_TE</a:t>
+            </a:r>
+            <a:r>
+              <a:rPr lang="es-ES" sz="1400" dirty="0">
+                <a:latin typeface="Arial" panose="020B0604020202020204" pitchFamily="34" charset="0"/>
+                <a:cs typeface="Arial" panose="020B0604020202020204" pitchFamily="34" charset="0"/>
+              </a:rPr>
+              <a:t> = 0.058)</a:t>
+            </a:r>
+          </a:p>
+          <a:p>
+            <a:pPr marL="285750" indent="-285750">
+              <a:buFont typeface="Arial" panose="020B0604020202020204" pitchFamily="34" charset="0"/>
+              <a:buChar char="•"/>
+            </a:pPr>
+            <a:r>
+              <a:rPr lang="es-ES" sz="1400" dirty="0" err="1">
+                <a:latin typeface="Arial" panose="020B0604020202020204" pitchFamily="34" charset="0"/>
+                <a:cs typeface="Arial" panose="020B0604020202020204" pitchFamily="34" charset="0"/>
+              </a:rPr>
+              <a:t>Mode</a:t>
+            </a:r>
+            <a:r>
+              <a:rPr lang="es-ES" sz="1400" dirty="0">
+                <a:latin typeface="Arial" panose="020B0604020202020204" pitchFamily="34" charset="0"/>
+                <a:cs typeface="Arial" panose="020B0604020202020204" pitchFamily="34" charset="0"/>
+              </a:rPr>
+              <a:t> 2: </a:t>
+            </a:r>
+            <a:r>
+              <a:rPr lang="es-ES" sz="1400" dirty="0">
+                <a:solidFill>
+                  <a:srgbClr val="0070C0"/>
+                </a:solidFill>
+                <a:latin typeface="Arial" panose="020B0604020202020204" pitchFamily="34" charset="0"/>
+                <a:cs typeface="Arial" panose="020B0604020202020204" pitchFamily="34" charset="0"/>
+              </a:rPr>
+              <a:t>TE</a:t>
+            </a:r>
+            <a:r>
+              <a:rPr lang="es-ES" sz="1400" dirty="0">
+                <a:latin typeface="Arial" panose="020B0604020202020204" pitchFamily="34" charset="0"/>
+                <a:cs typeface="Arial" panose="020B0604020202020204" pitchFamily="34" charset="0"/>
+              </a:rPr>
+              <a:t> (</a:t>
+            </a:r>
+            <a:r>
+              <a:rPr lang="es-ES" sz="1400" dirty="0" err="1">
+                <a:latin typeface="Arial" panose="020B0604020202020204" pitchFamily="34" charset="0"/>
+                <a:cs typeface="Arial" panose="020B0604020202020204" pitchFamily="34" charset="0"/>
+              </a:rPr>
+              <a:t>fraction_TE</a:t>
+            </a:r>
+            <a:r>
+              <a:rPr lang="es-ES" sz="1400" dirty="0">
+                <a:latin typeface="Arial" panose="020B0604020202020204" pitchFamily="34" charset="0"/>
+                <a:cs typeface="Arial" panose="020B0604020202020204" pitchFamily="34" charset="0"/>
+              </a:rPr>
+              <a:t> = 0.746)</a:t>
+            </a:r>
+          </a:p>
+          <a:p>
+            <a:pPr marL="285750" indent="-285750">
+              <a:buFont typeface="Arial" panose="020B0604020202020204" pitchFamily="34" charset="0"/>
+              <a:buChar char="•"/>
+            </a:pPr>
+            <a:r>
+              <a:rPr lang="es-ES" sz="1400" dirty="0" err="1">
+                <a:latin typeface="Arial" panose="020B0604020202020204" pitchFamily="34" charset="0"/>
+                <a:cs typeface="Arial" panose="020B0604020202020204" pitchFamily="34" charset="0"/>
+              </a:rPr>
+              <a:t>Mode</a:t>
+            </a:r>
+            <a:r>
+              <a:rPr lang="es-ES" sz="1400" dirty="0">
+                <a:latin typeface="Arial" panose="020B0604020202020204" pitchFamily="34" charset="0"/>
+                <a:cs typeface="Arial" panose="020B0604020202020204" pitchFamily="34" charset="0"/>
+              </a:rPr>
+              <a:t> 3 (descartado): </a:t>
+            </a:r>
+            <a:r>
+              <a:rPr lang="es-ES" sz="1400" dirty="0">
+                <a:solidFill>
+                  <a:srgbClr val="0070C0"/>
+                </a:solidFill>
+                <a:latin typeface="Arial" panose="020B0604020202020204" pitchFamily="34" charset="0"/>
+                <a:cs typeface="Arial" panose="020B0604020202020204" pitchFamily="34" charset="0"/>
+              </a:rPr>
+              <a:t>TE</a:t>
+            </a:r>
+            <a:r>
+              <a:rPr lang="es-ES" sz="1400" dirty="0">
+                <a:latin typeface="Arial" panose="020B0604020202020204" pitchFamily="34" charset="0"/>
+                <a:cs typeface="Arial" panose="020B0604020202020204" pitchFamily="34" charset="0"/>
+              </a:rPr>
+              <a:t> puro (</a:t>
+            </a:r>
+            <a:r>
+              <a:rPr lang="es-ES" sz="1400" dirty="0" err="1">
+                <a:latin typeface="Arial" panose="020B0604020202020204" pitchFamily="34" charset="0"/>
+                <a:cs typeface="Arial" panose="020B0604020202020204" pitchFamily="34" charset="0"/>
+              </a:rPr>
+              <a:t>fraction_TE</a:t>
+            </a:r>
+            <a:r>
+              <a:rPr lang="es-ES" sz="1400" dirty="0">
+                <a:latin typeface="Arial" panose="020B0604020202020204" pitchFamily="34" charset="0"/>
+                <a:cs typeface="Arial" panose="020B0604020202020204" pitchFamily="34" charset="0"/>
+              </a:rPr>
+              <a:t> = 0.992)</a:t>
+            </a:r>
+          </a:p>
+        </p:txBody>
+      </p:sp>
+      <p:sp>
+        <p:nvSpPr>
+          <p:cNvPr id="7" name="Rectángulo 6">
+            <a:extLst>
+              <a:ext uri="{FF2B5EF4-FFF2-40B4-BE49-F238E27FC236}">
+                <a16:creationId xmlns:a16="http://schemas.microsoft.com/office/drawing/2014/main" id="{DA7900B3-F97A-7FFE-D4A2-7263C1DBE1DB}"/>
+              </a:ext>
+            </a:extLst>
+          </p:cNvPr>
+          <p:cNvSpPr/>
+          <p:nvPr/>
+        </p:nvSpPr>
+        <p:spPr>
+          <a:xfrm>
+            <a:off x="6019800" y="1219200"/>
+            <a:ext cx="5943600" cy="3745764"/>
+          </a:xfrm>
+          <a:prstGeom prst="rect">
+            <a:avLst/>
+          </a:prstGeom>
+          <a:noFill/>
+          <a:ln w="28575">
+            <a:solidFill>
+              <a:srgbClr val="E0700D"/>
+            </a:solidFill>
+          </a:ln>
+        </p:spPr>
+        <p:style>
+          <a:lnRef idx="2">
+            <a:schemeClr val="accent1">
+              <a:shade val="15000"/>
+            </a:schemeClr>
+          </a:lnRef>
+          <a:fillRef idx="1">
+            <a:schemeClr val="accent1"/>
+          </a:fillRef>
+          <a:effectRef idx="0">
+            <a:schemeClr val="accent1"/>
+          </a:effectRef>
+          <a:fontRef idx="minor">
+            <a:schemeClr val="lt1"/>
+          </a:fontRef>
+        </p:style>
+        <p:txBody>
+          <a:bodyPr rtlCol="0" anchor="ctr"/>
+          <a:lstStyle/>
+          <a:p>
+            <a:pPr algn="ctr"/>
+            <a:endParaRPr lang="en-US"/>
+          </a:p>
+        </p:txBody>
+      </p:sp>
+      <p:pic>
+        <p:nvPicPr>
+          <p:cNvPr id="18" name="Imagen 17">
+            <a:extLst>
+              <a:ext uri="{FF2B5EF4-FFF2-40B4-BE49-F238E27FC236}">
+                <a16:creationId xmlns:a16="http://schemas.microsoft.com/office/drawing/2014/main" id="{C7B23736-C344-46CE-F991-667E5337FA1F}"/>
+              </a:ext>
+            </a:extLst>
+          </p:cNvPr>
+          <p:cNvPicPr>
+            <a:picLocks noChangeAspect="1"/>
+          </p:cNvPicPr>
+          <p:nvPr/>
+        </p:nvPicPr>
+        <p:blipFill>
+          <a:blip r:embed="rId2">
+            <a:extLst>
+              <a:ext uri="{28A0092B-C50C-407E-A947-70E740481C1C}">
+                <a14:useLocalDpi xmlns:a14="http://schemas.microsoft.com/office/drawing/2010/main" val="0"/>
+              </a:ext>
+            </a:extLst>
+          </a:blip>
+          <a:srcRect/>
+          <a:stretch/>
+        </p:blipFill>
+        <p:spPr>
+          <a:xfrm>
+            <a:off x="6172200" y="1428761"/>
+            <a:ext cx="5715000" cy="3326641"/>
+          </a:xfrm>
+          <a:prstGeom prst="rect">
+            <a:avLst/>
+          </a:prstGeom>
+        </p:spPr>
+      </p:pic>
+      <p:pic>
+        <p:nvPicPr>
+          <p:cNvPr id="21" name="Imagen 20">
+            <a:extLst>
+              <a:ext uri="{FF2B5EF4-FFF2-40B4-BE49-F238E27FC236}">
+                <a16:creationId xmlns:a16="http://schemas.microsoft.com/office/drawing/2014/main" id="{4E8347BE-E9EF-3F91-9EA0-654FD339F759}"/>
+              </a:ext>
+            </a:extLst>
+          </p:cNvPr>
+          <p:cNvPicPr>
+            <a:picLocks noChangeAspect="1"/>
+          </p:cNvPicPr>
+          <p:nvPr/>
+        </p:nvPicPr>
+        <p:blipFill>
+          <a:blip r:embed="rId3">
+            <a:extLst>
+              <a:ext uri="{28A0092B-C50C-407E-A947-70E740481C1C}">
+                <a14:useLocalDpi xmlns:a14="http://schemas.microsoft.com/office/drawing/2010/main" val="0"/>
+              </a:ext>
+            </a:extLst>
+          </a:blip>
+          <a:srcRect/>
+          <a:stretch/>
+        </p:blipFill>
+        <p:spPr>
+          <a:xfrm>
+            <a:off x="3419649" y="1594413"/>
+            <a:ext cx="2343128" cy="2995338"/>
+          </a:xfrm>
+          <a:prstGeom prst="rect">
+            <a:avLst/>
+          </a:prstGeom>
+        </p:spPr>
+      </p:pic>
+      <p:sp>
+        <p:nvSpPr>
+          <p:cNvPr id="2" name="CuadroTexto 1">
+            <a:extLst>
+              <a:ext uri="{FF2B5EF4-FFF2-40B4-BE49-F238E27FC236}">
+                <a16:creationId xmlns:a16="http://schemas.microsoft.com/office/drawing/2014/main" id="{B971D8D5-FA1A-335A-A736-AA5D91BB2126}"/>
+              </a:ext>
+            </a:extLst>
+          </p:cNvPr>
+          <p:cNvSpPr txBox="1"/>
+          <p:nvPr/>
+        </p:nvSpPr>
+        <p:spPr>
+          <a:xfrm>
+            <a:off x="1890788" y="5284431"/>
+            <a:ext cx="8410423" cy="954107"/>
+          </a:xfrm>
+          <a:prstGeom prst="rect">
+            <a:avLst/>
+          </a:prstGeom>
+          <a:solidFill>
+            <a:schemeClr val="bg1">
+              <a:lumMod val="95000"/>
+            </a:schemeClr>
+          </a:solidFill>
+          <a:ln w="28575">
+            <a:solidFill>
+              <a:srgbClr val="E0700D"/>
+            </a:solidFill>
+          </a:ln>
+        </p:spPr>
+        <p:txBody>
+          <a:bodyPr wrap="square" rtlCol="0">
+            <a:spAutoFit/>
+          </a:bodyPr>
+          <a:lstStyle/>
+          <a:p>
+            <a:r>
+              <a:rPr lang="es-ES" sz="1400" dirty="0">
+                <a:latin typeface="Arial" panose="020B0604020202020204" pitchFamily="34" charset="0"/>
+                <a:cs typeface="Arial" panose="020B0604020202020204" pitchFamily="34" charset="0"/>
+              </a:rPr>
+              <a:t>Cabe destacar que, a diferencia de la </a:t>
+            </a:r>
+            <a:r>
+              <a:rPr lang="es-ES" sz="1400" dirty="0" err="1">
+                <a:latin typeface="Arial" panose="020B0604020202020204" pitchFamily="34" charset="0"/>
+                <a:cs typeface="Arial" panose="020B0604020202020204" pitchFamily="34" charset="0"/>
+              </a:rPr>
+              <a:t>waveguide</a:t>
+            </a:r>
+            <a:r>
+              <a:rPr lang="es-ES" sz="1400" dirty="0">
+                <a:latin typeface="Arial" panose="020B0604020202020204" pitchFamily="34" charset="0"/>
+                <a:cs typeface="Arial" panose="020B0604020202020204" pitchFamily="34" charset="0"/>
+              </a:rPr>
+              <a:t> estudiada anteriormente, en la tecnología SOI no queda tan claro la polarización de los diferentes modos de operación según variamos el ancho de la guía. En este caso podemos apreciar modos más híbridos, que incluso cambian de polarización en pequeñas variaciones de anchura.</a:t>
+            </a:r>
+          </a:p>
+        </p:txBody>
+      </p:sp>
+    </p:spTree>
+    <p:extLst>
+      <p:ext uri="{BB962C8B-B14F-4D97-AF65-F5344CB8AC3E}">
+        <p14:creationId xmlns:p14="http://schemas.microsoft.com/office/powerpoint/2010/main" val="3439693680"/>
+      </p:ext>
+    </p:extLst>
+  </p:cSld>
+  <p:clrMapOvr>
+    <a:masterClrMapping/>
+  </p:clrMapOvr>
+</p:sld>
+</file>
+
+<file path=ppt/slides/slide16.xml><?xml version="1.0" encoding="utf-8"?>
+<p:sld xmlns:a="http://schemas.openxmlformats.org/drawingml/2006/main" xmlns:r="http://schemas.openxmlformats.org/officeDocument/2006/relationships" xmlns:p="http://schemas.openxmlformats.org/presentationml/2006/main">
+  <p:cSld>
+    <p:spTree>
+      <p:nvGrpSpPr>
+        <p:cNvPr id="1" name="">
+          <a:extLst>
+            <a:ext uri="{FF2B5EF4-FFF2-40B4-BE49-F238E27FC236}">
+              <a16:creationId xmlns:a16="http://schemas.microsoft.com/office/drawing/2014/main" id="{689B43E1-F582-2F9C-CB8C-552154FB34B8}"/>
+            </a:ext>
+          </a:extLst>
+        </p:cNvPr>
+        <p:cNvGrpSpPr/>
+        <p:nvPr/>
+      </p:nvGrpSpPr>
+      <p:grpSpPr>
+        <a:xfrm>
+          <a:off x="0" y="0"/>
+          <a:ext cx="0" cy="0"/>
+          <a:chOff x="0" y="0"/>
+          <a:chExt cx="0" cy="0"/>
+        </a:xfrm>
+      </p:grpSpPr>
+      <p:sp>
+        <p:nvSpPr>
+          <p:cNvPr id="4" name="Marcador de pie de página 3">
+            <a:extLst>
+              <a:ext uri="{FF2B5EF4-FFF2-40B4-BE49-F238E27FC236}">
+                <a16:creationId xmlns:a16="http://schemas.microsoft.com/office/drawing/2014/main" id="{42C056BA-F403-5C6A-7713-FE946AE775EE}"/>
+              </a:ext>
+            </a:extLst>
+          </p:cNvPr>
+          <p:cNvSpPr>
+            <a:spLocks noGrp="1"/>
+          </p:cNvSpPr>
+          <p:nvPr>
+            <p:ph type="ftr" sz="quarter" idx="5"/>
+          </p:nvPr>
+        </p:nvSpPr>
+        <p:spPr/>
+        <p:txBody>
+          <a:bodyPr/>
+          <a:lstStyle/>
+          <a:p>
+            <a:pPr marL="12700">
+              <a:spcBef>
+                <a:spcPts val="15"/>
+              </a:spcBef>
+            </a:pPr>
+            <a:r>
+              <a:rPr lang="es-ES" spc="-5"/>
+              <a:t>LAB 1.0 WAVEGUIDES</a:t>
+            </a:r>
+            <a:endParaRPr lang="es-ES" spc="-5" dirty="0"/>
+          </a:p>
+        </p:txBody>
+      </p:sp>
+      <p:sp>
+        <p:nvSpPr>
+          <p:cNvPr id="5" name="Marcador de número de diapositiva 4">
+            <a:extLst>
+              <a:ext uri="{FF2B5EF4-FFF2-40B4-BE49-F238E27FC236}">
+                <a16:creationId xmlns:a16="http://schemas.microsoft.com/office/drawing/2014/main" id="{E007F704-206A-2717-E153-5B31B7DE31B3}"/>
+              </a:ext>
+            </a:extLst>
+          </p:cNvPr>
+          <p:cNvSpPr>
+            <a:spLocks noGrp="1"/>
+          </p:cNvSpPr>
+          <p:nvPr>
+            <p:ph type="sldNum" sz="quarter" idx="7"/>
+          </p:nvPr>
+        </p:nvSpPr>
+        <p:spPr/>
+        <p:txBody>
+          <a:bodyPr/>
+          <a:lstStyle/>
+          <a:p>
+            <a:fld id="{B6F15528-21DE-4FAA-801E-634DDDAF4B2B}" type="slidenum">
+              <a:rPr lang="es-ES" smtClean="0"/>
+              <a:t>16</a:t>
+            </a:fld>
+            <a:endParaRPr lang="es-ES"/>
+          </a:p>
+        </p:txBody>
+      </p:sp>
+      <p:sp>
+        <p:nvSpPr>
+          <p:cNvPr id="6" name="object 16">
+            <a:extLst>
+              <a:ext uri="{FF2B5EF4-FFF2-40B4-BE49-F238E27FC236}">
+                <a16:creationId xmlns:a16="http://schemas.microsoft.com/office/drawing/2014/main" id="{14239732-59FF-E327-FA61-F9407B923C80}"/>
+              </a:ext>
+            </a:extLst>
+          </p:cNvPr>
+          <p:cNvSpPr txBox="1">
+            <a:spLocks noGrp="1"/>
+          </p:cNvSpPr>
+          <p:nvPr>
+            <p:ph type="title"/>
+          </p:nvPr>
+        </p:nvSpPr>
+        <p:spPr>
+          <a:xfrm>
+            <a:off x="590550" y="357758"/>
+            <a:ext cx="10991850" cy="705321"/>
+          </a:xfrm>
+          <a:prstGeom prst="rect">
+            <a:avLst/>
+          </a:prstGeom>
+        </p:spPr>
+        <p:txBody>
+          <a:bodyPr vert="horz" wrap="square" lIns="0" tIns="12700" rIns="0" bIns="0" rtlCol="0">
+            <a:spAutoFit/>
+          </a:bodyPr>
+          <a:lstStyle/>
+          <a:p>
+            <a:pPr marL="12700">
+              <a:lnSpc>
+                <a:spcPct val="100000"/>
+              </a:lnSpc>
+              <a:spcBef>
+                <a:spcPts val="100"/>
+              </a:spcBef>
+            </a:pPr>
+            <a:r>
+              <a:rPr lang="en-US" sz="2500" dirty="0"/>
+              <a:t>Learning outcome EXTRA – Silicon-On-Insulator technology</a:t>
+            </a:r>
+            <a:br>
+              <a:rPr lang="en-US" sz="2500" dirty="0"/>
+            </a:br>
+            <a:r>
+              <a:rPr lang="en-US" b="0" dirty="0"/>
+              <a:t>Radius behavior simulations. Range 5µm-30µm (width = 500 nm ; height = 220 nm)</a:t>
+            </a:r>
+            <a:endParaRPr lang="en-US" sz="2500" b="0" dirty="0">
+              <a:latin typeface="+mj-lt"/>
+              <a:cs typeface="Lucida Sans"/>
+            </a:endParaRPr>
+          </a:p>
+        </p:txBody>
+      </p:sp>
+      <p:sp>
+        <p:nvSpPr>
+          <p:cNvPr id="20" name="CuadroTexto 19">
+            <a:extLst>
+              <a:ext uri="{FF2B5EF4-FFF2-40B4-BE49-F238E27FC236}">
+                <a16:creationId xmlns:a16="http://schemas.microsoft.com/office/drawing/2014/main" id="{23E4CF9B-F3B8-49BC-806D-269DF51FE11D}"/>
+              </a:ext>
+            </a:extLst>
+          </p:cNvPr>
+          <p:cNvSpPr txBox="1"/>
+          <p:nvPr/>
+        </p:nvSpPr>
+        <p:spPr>
+          <a:xfrm>
+            <a:off x="889105" y="5155049"/>
+            <a:ext cx="6730895" cy="1169551"/>
+          </a:xfrm>
+          <a:prstGeom prst="rect">
+            <a:avLst/>
+          </a:prstGeom>
+          <a:solidFill>
+            <a:schemeClr val="bg1">
+              <a:lumMod val="95000"/>
+            </a:schemeClr>
+          </a:solidFill>
+          <a:ln w="28575">
+            <a:solidFill>
+              <a:srgbClr val="E0700D"/>
+            </a:solidFill>
+          </a:ln>
+        </p:spPr>
+        <p:txBody>
+          <a:bodyPr wrap="square" rtlCol="0">
+            <a:spAutoFit/>
+          </a:bodyPr>
+          <a:lstStyle/>
+          <a:p>
+            <a:r>
+              <a:rPr lang="es-ES" sz="1400" dirty="0">
+                <a:latin typeface="Arial" panose="020B0604020202020204" pitchFamily="34" charset="0"/>
+                <a:cs typeface="Arial" panose="020B0604020202020204" pitchFamily="34" charset="0"/>
+              </a:rPr>
+              <a:t>Analizando las pérdidas por curvatura, podemos apreciar como la tecnología SOI es mucho menos susceptible a este suceso. Observando la tabla de pérdidas frente al radio de curvatura, observamos que todos los valores de pérdidas en el rango analizado permanecen dentro de la zona segura, es decir, sin superar el umbral de pérdidas de 0.1dB/90º.</a:t>
+            </a:r>
+          </a:p>
+        </p:txBody>
+      </p:sp>
+      <p:grpSp>
+        <p:nvGrpSpPr>
+          <p:cNvPr id="14" name="Grupo 13">
+            <a:extLst>
+              <a:ext uri="{FF2B5EF4-FFF2-40B4-BE49-F238E27FC236}">
+                <a16:creationId xmlns:a16="http://schemas.microsoft.com/office/drawing/2014/main" id="{28A96152-9A1B-D43C-04F7-38D6F177634E}"/>
+              </a:ext>
+            </a:extLst>
+          </p:cNvPr>
+          <p:cNvGrpSpPr/>
+          <p:nvPr/>
+        </p:nvGrpSpPr>
+        <p:grpSpPr>
+          <a:xfrm>
+            <a:off x="889105" y="1152525"/>
+            <a:ext cx="4927390" cy="3779406"/>
+            <a:chOff x="1143000" y="1102474"/>
+            <a:chExt cx="4927390" cy="3779406"/>
+          </a:xfrm>
+        </p:grpSpPr>
+        <p:sp>
+          <p:nvSpPr>
+            <p:cNvPr id="9" name="Rectángulo 8">
+              <a:extLst>
+                <a:ext uri="{FF2B5EF4-FFF2-40B4-BE49-F238E27FC236}">
+                  <a16:creationId xmlns:a16="http://schemas.microsoft.com/office/drawing/2014/main" id="{2EEFD53D-31F1-9BF1-13CA-A749287C45D5}"/>
+                </a:ext>
+              </a:extLst>
+            </p:cNvPr>
+            <p:cNvSpPr/>
+            <p:nvPr/>
+          </p:nvSpPr>
+          <p:spPr>
+            <a:xfrm>
+              <a:off x="1143000" y="1102474"/>
+              <a:ext cx="4927390" cy="3779406"/>
+            </a:xfrm>
+            <a:prstGeom prst="rect">
+              <a:avLst/>
+            </a:prstGeom>
+            <a:noFill/>
+            <a:ln w="28575">
+              <a:solidFill>
+                <a:srgbClr val="E0700D"/>
+              </a:solidFill>
+            </a:ln>
+          </p:spPr>
+          <p:style>
+            <a:lnRef idx="2">
+              <a:schemeClr val="accent1">
+                <a:shade val="15000"/>
+              </a:schemeClr>
+            </a:lnRef>
+            <a:fillRef idx="1">
+              <a:schemeClr val="accent1"/>
+            </a:fillRef>
+            <a:effectRef idx="0">
+              <a:schemeClr val="accent1"/>
+            </a:effectRef>
+            <a:fontRef idx="minor">
+              <a:schemeClr val="lt1"/>
+            </a:fontRef>
+          </p:style>
+          <p:txBody>
+            <a:bodyPr rtlCol="0" anchor="ctr"/>
+            <a:lstStyle/>
+            <a:p>
+              <a:pPr algn="ctr"/>
+              <a:endParaRPr lang="en-US"/>
+            </a:p>
+          </p:txBody>
+        </p:sp>
+        <p:pic>
+          <p:nvPicPr>
+            <p:cNvPr id="8" name="Imagen 7">
+              <a:extLst>
+                <a:ext uri="{FF2B5EF4-FFF2-40B4-BE49-F238E27FC236}">
+                  <a16:creationId xmlns:a16="http://schemas.microsoft.com/office/drawing/2014/main" id="{1410ACAA-BBE5-D206-0E0C-BA902B61158F}"/>
+                </a:ext>
+              </a:extLst>
+            </p:cNvPr>
+            <p:cNvPicPr>
+              <a:picLocks noChangeAspect="1"/>
+            </p:cNvPicPr>
+            <p:nvPr/>
+          </p:nvPicPr>
+          <p:blipFill>
+            <a:blip r:embed="rId2"/>
+            <a:stretch>
+              <a:fillRect/>
+            </a:stretch>
+          </p:blipFill>
+          <p:spPr>
+            <a:xfrm>
+              <a:off x="1219200" y="1152525"/>
+              <a:ext cx="4690682" cy="3705313"/>
+            </a:xfrm>
+            <a:prstGeom prst="rect">
+              <a:avLst/>
+            </a:prstGeom>
+          </p:spPr>
+        </p:pic>
+      </p:grpSp>
+      <p:grpSp>
+        <p:nvGrpSpPr>
+          <p:cNvPr id="15" name="Grupo 14">
+            <a:extLst>
+              <a:ext uri="{FF2B5EF4-FFF2-40B4-BE49-F238E27FC236}">
+                <a16:creationId xmlns:a16="http://schemas.microsoft.com/office/drawing/2014/main" id="{14CD90C2-D4EE-E6AF-C323-E71405BA973F}"/>
+              </a:ext>
+            </a:extLst>
+          </p:cNvPr>
+          <p:cNvGrpSpPr/>
+          <p:nvPr/>
+        </p:nvGrpSpPr>
+        <p:grpSpPr>
+          <a:xfrm>
+            <a:off x="6197497" y="1152525"/>
+            <a:ext cx="5105398" cy="3779406"/>
+            <a:chOff x="6629402" y="1093672"/>
+            <a:chExt cx="5105398" cy="3779406"/>
+          </a:xfrm>
+        </p:grpSpPr>
+        <p:sp>
+          <p:nvSpPr>
+            <p:cNvPr id="2" name="Rectángulo 1">
+              <a:extLst>
+                <a:ext uri="{FF2B5EF4-FFF2-40B4-BE49-F238E27FC236}">
+                  <a16:creationId xmlns:a16="http://schemas.microsoft.com/office/drawing/2014/main" id="{90328FFD-CB43-5B01-0E88-60EA9A3FAE92}"/>
+                </a:ext>
+              </a:extLst>
+            </p:cNvPr>
+            <p:cNvSpPr/>
+            <p:nvPr/>
+          </p:nvSpPr>
+          <p:spPr>
+            <a:xfrm>
+              <a:off x="6629402" y="1093672"/>
+              <a:ext cx="5105398" cy="3779406"/>
+            </a:xfrm>
+            <a:prstGeom prst="rect">
+              <a:avLst/>
+            </a:prstGeom>
+            <a:noFill/>
+            <a:ln w="28575">
+              <a:solidFill>
+                <a:srgbClr val="E0700D"/>
+              </a:solidFill>
+            </a:ln>
+          </p:spPr>
+          <p:style>
+            <a:lnRef idx="2">
+              <a:schemeClr val="accent1">
+                <a:shade val="15000"/>
+              </a:schemeClr>
+            </a:lnRef>
+            <a:fillRef idx="1">
+              <a:schemeClr val="accent1"/>
+            </a:fillRef>
+            <a:effectRef idx="0">
+              <a:schemeClr val="accent1"/>
+            </a:effectRef>
+            <a:fontRef idx="minor">
+              <a:schemeClr val="lt1"/>
+            </a:fontRef>
+          </p:style>
+          <p:txBody>
+            <a:bodyPr rtlCol="0" anchor="ctr"/>
+            <a:lstStyle/>
+            <a:p>
+              <a:pPr algn="ctr"/>
+              <a:endParaRPr lang="en-US"/>
+            </a:p>
+          </p:txBody>
+        </p:sp>
+        <p:pic>
+          <p:nvPicPr>
+            <p:cNvPr id="13" name="Imagen 12">
+              <a:extLst>
+                <a:ext uri="{FF2B5EF4-FFF2-40B4-BE49-F238E27FC236}">
+                  <a16:creationId xmlns:a16="http://schemas.microsoft.com/office/drawing/2014/main" id="{D8A4CADE-B5C1-CA80-9CAD-845DD1499522}"/>
+                </a:ext>
+              </a:extLst>
+            </p:cNvPr>
+            <p:cNvPicPr>
+              <a:picLocks noChangeAspect="1"/>
+            </p:cNvPicPr>
+            <p:nvPr/>
+          </p:nvPicPr>
+          <p:blipFill>
+            <a:blip r:embed="rId3"/>
+            <a:stretch>
+              <a:fillRect/>
+            </a:stretch>
+          </p:blipFill>
+          <p:spPr>
+            <a:xfrm>
+              <a:off x="6705600" y="1152525"/>
+              <a:ext cx="4902414" cy="3705313"/>
+            </a:xfrm>
+            <a:prstGeom prst="rect">
+              <a:avLst/>
+            </a:prstGeom>
+          </p:spPr>
+        </p:pic>
+      </p:grpSp>
+      <p:sp>
+        <p:nvSpPr>
+          <p:cNvPr id="16" name="CuadroTexto 15">
+            <a:extLst>
+              <a:ext uri="{FF2B5EF4-FFF2-40B4-BE49-F238E27FC236}">
+                <a16:creationId xmlns:a16="http://schemas.microsoft.com/office/drawing/2014/main" id="{26BD97C7-4D9F-446B-BECC-FE3A680B4CC4}"/>
+              </a:ext>
+            </a:extLst>
+          </p:cNvPr>
+          <p:cNvSpPr txBox="1"/>
+          <p:nvPr/>
+        </p:nvSpPr>
+        <p:spPr>
+          <a:xfrm>
+            <a:off x="8178696" y="5041285"/>
+            <a:ext cx="3124199" cy="1600438"/>
+          </a:xfrm>
+          <a:prstGeom prst="rect">
+            <a:avLst/>
+          </a:prstGeom>
+          <a:solidFill>
+            <a:schemeClr val="bg1">
+              <a:lumMod val="95000"/>
+            </a:schemeClr>
+          </a:solidFill>
+          <a:ln w="28575">
+            <a:solidFill>
+              <a:srgbClr val="E0700D"/>
+            </a:solidFill>
+          </a:ln>
+        </p:spPr>
+        <p:txBody>
+          <a:bodyPr wrap="square" rtlCol="0">
+            <a:spAutoFit/>
+          </a:bodyPr>
+          <a:lstStyle/>
+          <a:p>
+            <a:r>
+              <a:rPr lang="es-ES" sz="1400">
+                <a:latin typeface="Arial" panose="020B0604020202020204" pitchFamily="34" charset="0"/>
+                <a:cs typeface="Arial" panose="020B0604020202020204" pitchFamily="34" charset="0"/>
+              </a:rPr>
+              <a:t>=== SOI - Total loss per radius ===</a:t>
+            </a:r>
+          </a:p>
+          <a:p>
+            <a:r>
+              <a:rPr lang="es-ES" sz="1400">
+                <a:latin typeface="Arial" panose="020B0604020202020204" pitchFamily="34" charset="0"/>
+                <a:cs typeface="Arial" panose="020B0604020202020204" pitchFamily="34" charset="0"/>
+              </a:rPr>
+              <a:t>R =   5 µm: 0.0139 dB/90º ✓ SAFE</a:t>
+            </a:r>
+          </a:p>
+          <a:p>
+            <a:r>
+              <a:rPr lang="es-ES" sz="1400">
+                <a:latin typeface="Arial" panose="020B0604020202020204" pitchFamily="34" charset="0"/>
+                <a:cs typeface="Arial" panose="020B0604020202020204" pitchFamily="34" charset="0"/>
+              </a:rPr>
+              <a:t>R =  10 µm: 0.0062 dB/90º ✓ SAFE</a:t>
+            </a:r>
+          </a:p>
+          <a:p>
+            <a:r>
+              <a:rPr lang="es-ES" sz="1400">
+                <a:latin typeface="Arial" panose="020B0604020202020204" pitchFamily="34" charset="0"/>
+                <a:cs typeface="Arial" panose="020B0604020202020204" pitchFamily="34" charset="0"/>
+              </a:rPr>
+              <a:t>R =  15 µm: 0.0061 dB/90º ✓ SAFE</a:t>
+            </a:r>
+          </a:p>
+          <a:p>
+            <a:r>
+              <a:rPr lang="es-ES" sz="1400">
+                <a:latin typeface="Arial" panose="020B0604020202020204" pitchFamily="34" charset="0"/>
+                <a:cs typeface="Arial" panose="020B0604020202020204" pitchFamily="34" charset="0"/>
+              </a:rPr>
+              <a:t>R =  20 µm: 0.0070 dB/90º ✓ SAFE</a:t>
+            </a:r>
+          </a:p>
+          <a:p>
+            <a:r>
+              <a:rPr lang="es-ES" sz="1400">
+                <a:latin typeface="Arial" panose="020B0604020202020204" pitchFamily="34" charset="0"/>
+                <a:cs typeface="Arial" panose="020B0604020202020204" pitchFamily="34" charset="0"/>
+              </a:rPr>
+              <a:t>R =  25 µm: 0.0083 dB/90º ✓ SAFE</a:t>
+            </a:r>
+          </a:p>
+          <a:p>
+            <a:r>
+              <a:rPr lang="es-ES" sz="1400">
+                <a:latin typeface="Arial" panose="020B0604020202020204" pitchFamily="34" charset="0"/>
+                <a:cs typeface="Arial" panose="020B0604020202020204" pitchFamily="34" charset="0"/>
+              </a:rPr>
+              <a:t>R =  30 µm: 0.0098 dB/90º ✓ SAFE</a:t>
+            </a:r>
+            <a:endParaRPr lang="es-ES" sz="1400" dirty="0">
+              <a:latin typeface="Arial" panose="020B0604020202020204" pitchFamily="34" charset="0"/>
+              <a:cs typeface="Arial" panose="020B0604020202020204" pitchFamily="34" charset="0"/>
+            </a:endParaRPr>
+          </a:p>
+        </p:txBody>
+      </p:sp>
+    </p:spTree>
+    <p:extLst>
+      <p:ext uri="{BB962C8B-B14F-4D97-AF65-F5344CB8AC3E}">
+        <p14:creationId xmlns:p14="http://schemas.microsoft.com/office/powerpoint/2010/main" val="1115360538"/>
+      </p:ext>
+    </p:extLst>
+  </p:cSld>
+  <p:clrMapOvr>
+    <a:masterClrMapping/>
+  </p:clrMapOvr>
+</p:sld>
+</file>
+
+<file path=ppt/slides/slide17.xml><?xml version="1.0" encoding="utf-8"?>
+<p:sld xmlns:a="http://schemas.openxmlformats.org/drawingml/2006/main" xmlns:r="http://schemas.openxmlformats.org/officeDocument/2006/relationships" xmlns:p="http://schemas.openxmlformats.org/presentationml/2006/main">
+  <p:cSld>
+    <p:spTree>
+      <p:nvGrpSpPr>
+        <p:cNvPr id="1" name=""/>
+        <p:cNvGrpSpPr/>
+        <p:nvPr/>
+      </p:nvGrpSpPr>
+      <p:grpSpPr>
+        <a:xfrm>
+          <a:off x="0" y="0"/>
+          <a:ext cx="0" cy="0"/>
+          <a:chOff x="0" y="0"/>
+          <a:chExt cx="0" cy="0"/>
+        </a:xfrm>
+      </p:grpSpPr>
+      <p:sp>
+        <p:nvSpPr>
+          <p:cNvPr id="4" name="Marcador de pie de página 3">
+            <a:extLst>
+              <a:ext uri="{FF2B5EF4-FFF2-40B4-BE49-F238E27FC236}">
+                <a16:creationId xmlns:a16="http://schemas.microsoft.com/office/drawing/2014/main" id="{411C3CAB-6215-13FB-3BED-F163A3E3D79B}"/>
+              </a:ext>
+            </a:extLst>
+          </p:cNvPr>
+          <p:cNvSpPr>
+            <a:spLocks noGrp="1"/>
+          </p:cNvSpPr>
+          <p:nvPr>
+            <p:ph type="ftr" sz="quarter" idx="5"/>
+          </p:nvPr>
+        </p:nvSpPr>
+        <p:spPr/>
+        <p:txBody>
+          <a:bodyPr/>
+          <a:lstStyle/>
+          <a:p>
+            <a:pPr marL="12700">
+              <a:spcBef>
+                <a:spcPts val="15"/>
+              </a:spcBef>
+            </a:pPr>
+            <a:r>
+              <a:rPr lang="es-ES" spc="-5"/>
+              <a:t>LAB 1.0 WAVEGUIDES</a:t>
+            </a:r>
+            <a:endParaRPr lang="es-ES" spc="-5" dirty="0"/>
+          </a:p>
+        </p:txBody>
+      </p:sp>
+      <p:sp>
+        <p:nvSpPr>
+          <p:cNvPr id="5" name="Marcador de número de diapositiva 4">
+            <a:extLst>
+              <a:ext uri="{FF2B5EF4-FFF2-40B4-BE49-F238E27FC236}">
+                <a16:creationId xmlns:a16="http://schemas.microsoft.com/office/drawing/2014/main" id="{93F65A27-BF3E-2FBD-85B7-6EFC484D2F47}"/>
+              </a:ext>
+            </a:extLst>
+          </p:cNvPr>
+          <p:cNvSpPr>
+            <a:spLocks noGrp="1"/>
+          </p:cNvSpPr>
+          <p:nvPr>
+            <p:ph type="sldNum" sz="quarter" idx="7"/>
+          </p:nvPr>
+        </p:nvSpPr>
+        <p:spPr/>
+        <p:txBody>
+          <a:bodyPr/>
+          <a:lstStyle/>
+          <a:p>
+            <a:fld id="{B6F15528-21DE-4FAA-801E-634DDDAF4B2B}" type="slidenum">
+              <a:rPr lang="es-ES" smtClean="0"/>
+              <a:t>17</a:t>
+            </a:fld>
+            <a:endParaRPr lang="es-ES"/>
+          </a:p>
+        </p:txBody>
+      </p:sp>
+      <p:sp>
+        <p:nvSpPr>
+          <p:cNvPr id="6" name="object 16">
+            <a:extLst>
+              <a:ext uri="{FF2B5EF4-FFF2-40B4-BE49-F238E27FC236}">
+                <a16:creationId xmlns:a16="http://schemas.microsoft.com/office/drawing/2014/main" id="{97461548-AD2B-9EAB-F4CA-CB23D87631C3}"/>
+              </a:ext>
+            </a:extLst>
+          </p:cNvPr>
+          <p:cNvSpPr txBox="1">
+            <a:spLocks noGrp="1"/>
+          </p:cNvSpPr>
+          <p:nvPr>
+            <p:ph type="title"/>
+          </p:nvPr>
+        </p:nvSpPr>
+        <p:spPr>
+          <a:xfrm>
+            <a:off x="590550" y="357758"/>
+            <a:ext cx="10991850" cy="705321"/>
+          </a:xfrm>
+          <a:prstGeom prst="rect">
+            <a:avLst/>
+          </a:prstGeom>
+        </p:spPr>
+        <p:txBody>
+          <a:bodyPr vert="horz" wrap="square" lIns="0" tIns="12700" rIns="0" bIns="0" rtlCol="0">
+            <a:spAutoFit/>
+          </a:bodyPr>
+          <a:lstStyle/>
+          <a:p>
+            <a:pPr marL="12700">
+              <a:lnSpc>
+                <a:spcPct val="100000"/>
+              </a:lnSpc>
+              <a:spcBef>
+                <a:spcPts val="100"/>
+              </a:spcBef>
+            </a:pPr>
+            <a:r>
+              <a:rPr lang="en-US" sz="2500" dirty="0"/>
+              <a:t>Learning outcome EXTRA – Silicon-On-Insulator technology</a:t>
+            </a:r>
+            <a:br>
+              <a:rPr lang="en-US" sz="2500" dirty="0"/>
+            </a:br>
+            <a:r>
+              <a:rPr lang="en-US" b="0" dirty="0"/>
+              <a:t>Conclusions and comparative</a:t>
+            </a:r>
+            <a:endParaRPr lang="en-US" sz="2500" b="0" dirty="0">
+              <a:latin typeface="+mj-lt"/>
+              <a:cs typeface="Lucida Sans"/>
+            </a:endParaRPr>
+          </a:p>
+        </p:txBody>
+      </p:sp>
+      <p:sp>
+        <p:nvSpPr>
+          <p:cNvPr id="7" name="CuadroTexto 6">
+            <a:extLst>
+              <a:ext uri="{FF2B5EF4-FFF2-40B4-BE49-F238E27FC236}">
+                <a16:creationId xmlns:a16="http://schemas.microsoft.com/office/drawing/2014/main" id="{97D0CC71-CEF3-EE08-2D66-EA2E09DD844D}"/>
+              </a:ext>
+            </a:extLst>
+          </p:cNvPr>
+          <p:cNvSpPr txBox="1"/>
+          <p:nvPr/>
+        </p:nvSpPr>
+        <p:spPr>
+          <a:xfrm>
+            <a:off x="990600" y="1882631"/>
+            <a:ext cx="10210800" cy="3754874"/>
+          </a:xfrm>
+          <a:prstGeom prst="rect">
+            <a:avLst/>
+          </a:prstGeom>
+          <a:solidFill>
+            <a:schemeClr val="bg1">
+              <a:lumMod val="95000"/>
+            </a:schemeClr>
+          </a:solidFill>
+          <a:ln w="28575">
+            <a:solidFill>
+              <a:srgbClr val="E0700D"/>
+            </a:solidFill>
+          </a:ln>
+        </p:spPr>
+        <p:txBody>
+          <a:bodyPr wrap="square" rtlCol="0">
+            <a:spAutoFit/>
+          </a:bodyPr>
+          <a:lstStyle/>
+          <a:p>
+            <a:pPr algn="just"/>
+            <a:r>
+              <a:rPr lang="es-ES" sz="1400" dirty="0">
+                <a:latin typeface="Arial" panose="020B0604020202020204" pitchFamily="34" charset="0"/>
+                <a:cs typeface="Arial" panose="020B0604020202020204" pitchFamily="34" charset="0"/>
+              </a:rPr>
+              <a:t>A lo largo de esta práctica hemos caracterizado dos tecnologías fotónicas integradas con diferencias fundamentales derivadas del contraste de índice entre núcleo y </a:t>
+            </a:r>
+            <a:r>
+              <a:rPr lang="es-ES" sz="1400" dirty="0" err="1">
+                <a:latin typeface="Arial" panose="020B0604020202020204" pitchFamily="34" charset="0"/>
+                <a:cs typeface="Arial" panose="020B0604020202020204" pitchFamily="34" charset="0"/>
+              </a:rPr>
+              <a:t>cladding</a:t>
+            </a:r>
+            <a:r>
+              <a:rPr lang="es-ES" sz="1400" dirty="0">
+                <a:latin typeface="Arial" panose="020B0604020202020204" pitchFamily="34" charset="0"/>
+                <a:cs typeface="Arial" panose="020B0604020202020204" pitchFamily="34" charset="0"/>
+              </a:rPr>
+              <a:t>. </a:t>
+            </a:r>
+          </a:p>
+          <a:p>
+            <a:pPr algn="just"/>
+            <a:endParaRPr lang="es-ES" sz="1400" dirty="0">
+              <a:latin typeface="Arial" panose="020B0604020202020204" pitchFamily="34" charset="0"/>
+              <a:cs typeface="Arial" panose="020B0604020202020204" pitchFamily="34" charset="0"/>
+            </a:endParaRPr>
+          </a:p>
+          <a:p>
+            <a:pPr algn="just"/>
+            <a:r>
+              <a:rPr lang="es-ES" sz="1400" dirty="0">
+                <a:latin typeface="Arial" panose="020B0604020202020204" pitchFamily="34" charset="0"/>
+                <a:cs typeface="Arial" panose="020B0604020202020204" pitchFamily="34" charset="0"/>
+              </a:rPr>
+              <a:t>La tecnología </a:t>
+            </a:r>
+            <a:r>
+              <a:rPr lang="es-ES" sz="1400" dirty="0" err="1">
+                <a:latin typeface="Arial" panose="020B0604020202020204" pitchFamily="34" charset="0"/>
+                <a:cs typeface="Arial" panose="020B0604020202020204" pitchFamily="34" charset="0"/>
+              </a:rPr>
+              <a:t>SiNx</a:t>
+            </a:r>
+            <a:r>
+              <a:rPr lang="es-ES" sz="1400" dirty="0">
+                <a:latin typeface="Arial" panose="020B0604020202020204" pitchFamily="34" charset="0"/>
+                <a:cs typeface="Arial" panose="020B0604020202020204" pitchFamily="34" charset="0"/>
+              </a:rPr>
+              <a:t> (</a:t>
+            </a:r>
+            <a:r>
+              <a:rPr lang="es-ES" sz="1400" dirty="0" err="1">
+                <a:latin typeface="Arial" panose="020B0604020202020204" pitchFamily="34" charset="0"/>
+                <a:cs typeface="Arial" panose="020B0604020202020204" pitchFamily="34" charset="0"/>
+              </a:rPr>
+              <a:t>n_core</a:t>
+            </a:r>
+            <a:r>
+              <a:rPr lang="es-ES" sz="1400" dirty="0">
+                <a:latin typeface="Arial" panose="020B0604020202020204" pitchFamily="34" charset="0"/>
+                <a:cs typeface="Arial" panose="020B0604020202020204" pitchFamily="34" charset="0"/>
+              </a:rPr>
+              <a:t> ≈ 1.99, </a:t>
+            </a:r>
+            <a:r>
+              <a:rPr lang="es-ES" sz="1400" dirty="0" err="1">
+                <a:latin typeface="Arial" panose="020B0604020202020204" pitchFamily="34" charset="0"/>
+                <a:cs typeface="Arial" panose="020B0604020202020204" pitchFamily="34" charset="0"/>
+              </a:rPr>
+              <a:t>Δn</a:t>
+            </a:r>
+            <a:r>
+              <a:rPr lang="es-ES" sz="1400" dirty="0">
+                <a:latin typeface="Arial" panose="020B0604020202020204" pitchFamily="34" charset="0"/>
+                <a:cs typeface="Arial" panose="020B0604020202020204" pitchFamily="34" charset="0"/>
+              </a:rPr>
+              <a:t> ≈ 0.55) presenta un confinamiento moderado, lo que se traduce en modos bien definidos y con polarización clara. El </a:t>
+            </a:r>
+            <a:r>
+              <a:rPr lang="es-ES" sz="1400" dirty="0" err="1">
+                <a:latin typeface="Arial" panose="020B0604020202020204" pitchFamily="34" charset="0"/>
+                <a:cs typeface="Arial" panose="020B0604020202020204" pitchFamily="34" charset="0"/>
+              </a:rPr>
+              <a:t>n_eff</a:t>
+            </a:r>
+            <a:r>
+              <a:rPr lang="es-ES" sz="1400" dirty="0">
+                <a:latin typeface="Arial" panose="020B0604020202020204" pitchFamily="34" charset="0"/>
+                <a:cs typeface="Arial" panose="020B0604020202020204" pitchFamily="34" charset="0"/>
+              </a:rPr>
+              <a:t> del modo TE0 a λ=1.55µm es de 1.605, con una sensibilidad al ancho relativamente baja (</a:t>
+            </a:r>
+            <a:r>
+              <a:rPr lang="es-ES" sz="1400" dirty="0" err="1">
+                <a:latin typeface="Arial" panose="020B0604020202020204" pitchFamily="34" charset="0"/>
+                <a:cs typeface="Arial" panose="020B0604020202020204" pitchFamily="34" charset="0"/>
+              </a:rPr>
+              <a:t>Δneff</a:t>
+            </a:r>
+            <a:r>
+              <a:rPr lang="es-ES" sz="1400" dirty="0">
+                <a:latin typeface="Arial" panose="020B0604020202020204" pitchFamily="34" charset="0"/>
+                <a:cs typeface="Arial" panose="020B0604020202020204" pitchFamily="34" charset="0"/>
+              </a:rPr>
+              <a:t> ≈ 0.12 en el rango 0.6–1.6µm). Esto implica mayor tolerancia dimensional en fabricación. No obstante, requiere radios de curvatura mayores (R ≥ 35µm para pérdidas &lt; 0.1 dB/90°), lo que limita la densidad de integración.</a:t>
+            </a:r>
+          </a:p>
+          <a:p>
+            <a:pPr algn="just"/>
+            <a:endParaRPr lang="es-ES" sz="1400" dirty="0">
+              <a:latin typeface="Arial" panose="020B0604020202020204" pitchFamily="34" charset="0"/>
+              <a:cs typeface="Arial" panose="020B0604020202020204" pitchFamily="34" charset="0"/>
+            </a:endParaRPr>
+          </a:p>
+          <a:p>
+            <a:pPr algn="just"/>
+            <a:r>
+              <a:rPr lang="es-ES" sz="1400" dirty="0">
+                <a:latin typeface="Arial" panose="020B0604020202020204" pitchFamily="34" charset="0"/>
+                <a:cs typeface="Arial" panose="020B0604020202020204" pitchFamily="34" charset="0"/>
+              </a:rPr>
+              <a:t>La tecnología SOI (</a:t>
+            </a:r>
+            <a:r>
+              <a:rPr lang="es-ES" sz="1400" dirty="0" err="1">
+                <a:latin typeface="Arial" panose="020B0604020202020204" pitchFamily="34" charset="0"/>
+                <a:cs typeface="Arial" panose="020B0604020202020204" pitchFamily="34" charset="0"/>
+              </a:rPr>
+              <a:t>n_core</a:t>
+            </a:r>
+            <a:r>
+              <a:rPr lang="es-ES" sz="1400" dirty="0">
+                <a:latin typeface="Arial" panose="020B0604020202020204" pitchFamily="34" charset="0"/>
+                <a:cs typeface="Arial" panose="020B0604020202020204" pitchFamily="34" charset="0"/>
+              </a:rPr>
+              <a:t> ≈ 3.48, </a:t>
+            </a:r>
+            <a:r>
+              <a:rPr lang="es-ES" sz="1400" dirty="0" err="1">
+                <a:latin typeface="Arial" panose="020B0604020202020204" pitchFamily="34" charset="0"/>
+                <a:cs typeface="Arial" panose="020B0604020202020204" pitchFamily="34" charset="0"/>
+              </a:rPr>
+              <a:t>Δn</a:t>
+            </a:r>
+            <a:r>
+              <a:rPr lang="es-ES" sz="1400" dirty="0">
+                <a:latin typeface="Arial" panose="020B0604020202020204" pitchFamily="34" charset="0"/>
+                <a:cs typeface="Arial" panose="020B0604020202020204" pitchFamily="34" charset="0"/>
+              </a:rPr>
+              <a:t> ≈ 2.04) ofrece un confinamiento muy superior, con un </a:t>
+            </a:r>
+            <a:r>
+              <a:rPr lang="es-ES" sz="1400" dirty="0" err="1">
+                <a:latin typeface="Arial" panose="020B0604020202020204" pitchFamily="34" charset="0"/>
+                <a:cs typeface="Arial" panose="020B0604020202020204" pitchFamily="34" charset="0"/>
+              </a:rPr>
+              <a:t>n_eff</a:t>
+            </a:r>
+            <a:r>
+              <a:rPr lang="es-ES" sz="1400" dirty="0">
+                <a:latin typeface="Arial" panose="020B0604020202020204" pitchFamily="34" charset="0"/>
+                <a:cs typeface="Arial" panose="020B0604020202020204" pitchFamily="34" charset="0"/>
+              </a:rPr>
+              <a:t> del modo TE0 de 2.4499. Este alto contraste permite radios de curvatura extremadamente reducidos: todos los radios analizados (5–30µm) permanecen por debajo del umbral seguro de 0.1 dB/90°, lo que posibilita circuitos fotónicos mucho más compactos. Sin embargo, el alto </a:t>
+            </a:r>
+            <a:r>
+              <a:rPr lang="es-ES" sz="1400" dirty="0" err="1">
+                <a:latin typeface="Arial" panose="020B0604020202020204" pitchFamily="34" charset="0"/>
+                <a:cs typeface="Arial" panose="020B0604020202020204" pitchFamily="34" charset="0"/>
+              </a:rPr>
+              <a:t>Δn</a:t>
+            </a:r>
+            <a:r>
+              <a:rPr lang="es-ES" sz="1400" dirty="0">
+                <a:latin typeface="Arial" panose="020B0604020202020204" pitchFamily="34" charset="0"/>
+                <a:cs typeface="Arial" panose="020B0604020202020204" pitchFamily="34" charset="0"/>
+              </a:rPr>
+              <a:t> hace que los modos sean muy sensibles a variaciones de anchura, con modos más híbridos que incluso cambian de polarización dominante en pequeñas variaciones de w. Esto impone tolerancias de fabricación más estrictas.</a:t>
+            </a:r>
+          </a:p>
+          <a:p>
+            <a:pPr algn="just"/>
+            <a:endParaRPr lang="es-ES" sz="1400" dirty="0">
+              <a:latin typeface="Arial" panose="020B0604020202020204" pitchFamily="34" charset="0"/>
+              <a:cs typeface="Arial" panose="020B0604020202020204" pitchFamily="34" charset="0"/>
+            </a:endParaRPr>
+          </a:p>
+          <a:p>
+            <a:pPr algn="just"/>
+            <a:r>
+              <a:rPr lang="es-ES" sz="1400" dirty="0">
+                <a:latin typeface="Arial" panose="020B0604020202020204" pitchFamily="34" charset="0"/>
+                <a:cs typeface="Arial" panose="020B0604020202020204" pitchFamily="34" charset="0"/>
+              </a:rPr>
+              <a:t>En definitiva, </a:t>
+            </a:r>
+            <a:r>
+              <a:rPr lang="es-ES" sz="1400" dirty="0" err="1">
+                <a:latin typeface="Arial" panose="020B0604020202020204" pitchFamily="34" charset="0"/>
+                <a:cs typeface="Arial" panose="020B0604020202020204" pitchFamily="34" charset="0"/>
+              </a:rPr>
+              <a:t>SiNx</a:t>
+            </a:r>
+            <a:r>
+              <a:rPr lang="es-ES" sz="1400" dirty="0">
+                <a:latin typeface="Arial" panose="020B0604020202020204" pitchFamily="34" charset="0"/>
+                <a:cs typeface="Arial" panose="020B0604020202020204" pitchFamily="34" charset="0"/>
+              </a:rPr>
+              <a:t> es preferible cuando se prioriza la robustez frente a variaciones de proceso, mientras que SOI es una buena opción cuando la densidad de integración es el factor crítico, como en interconexiones ópticas de alta densidad o sensores compactos.</a:t>
+            </a:r>
+          </a:p>
+        </p:txBody>
+      </p:sp>
+    </p:spTree>
+    <p:extLst>
+      <p:ext uri="{BB962C8B-B14F-4D97-AF65-F5344CB8AC3E}">
+        <p14:creationId xmlns:p14="http://schemas.microsoft.com/office/powerpoint/2010/main" val="3309189033"/>
+      </p:ext>
+    </p:extLst>
+  </p:cSld>
+  <p:clrMapOvr>
+    <a:masterClrMapping/>
+  </p:clrMapOvr>
+</p:sld>
+</file>
+
+<file path=ppt/slides/slide18.xml><?xml version="1.0" encoding="utf-8"?>
+<p:sld xmlns:a="http://schemas.openxmlformats.org/drawingml/2006/main" xmlns:r="http://schemas.openxmlformats.org/officeDocument/2006/relationships" xmlns:p="http://schemas.openxmlformats.org/presentationml/2006/main">
+  <p:cSld>
+    <p:spTree>
+      <p:nvGrpSpPr>
+        <p:cNvPr id="1" name=""/>
+        <p:cNvGrpSpPr/>
+        <p:nvPr/>
+      </p:nvGrpSpPr>
+      <p:grpSpPr>
+        <a:xfrm>
+          <a:off x="0" y="0"/>
+          <a:ext cx="0" cy="0"/>
+          <a:chOff x="0" y="0"/>
+          <a:chExt cx="0" cy="0"/>
+        </a:xfrm>
+      </p:grpSpPr>
+      <p:sp>
+        <p:nvSpPr>
+          <p:cNvPr id="3" name="object 3"/>
+          <p:cNvSpPr/>
+          <p:nvPr/>
+        </p:nvSpPr>
+        <p:spPr>
+          <a:xfrm>
+            <a:off x="3945635" y="2636520"/>
+            <a:ext cx="8246363" cy="1584959"/>
+          </a:xfrm>
+          <a:prstGeom prst="rect">
+            <a:avLst/>
+          </a:prstGeom>
+          <a:blipFill>
+            <a:blip r:embed="rId2" cstate="print"/>
+            <a:stretch>
+              <a:fillRect/>
+            </a:stretch>
+          </a:blipFill>
+        </p:spPr>
+        <p:txBody>
+          <a:bodyPr wrap="square" lIns="0" tIns="0" rIns="0" bIns="0" rtlCol="0"/>
+          <a:lstStyle/>
+          <a:p>
+            <a:endParaRPr/>
+          </a:p>
+        </p:txBody>
+      </p:sp>
+      <p:sp>
+        <p:nvSpPr>
+          <p:cNvPr id="4" name="object 4"/>
+          <p:cNvSpPr txBox="1">
+            <a:spLocks noGrp="1"/>
+          </p:cNvSpPr>
+          <p:nvPr>
+            <p:ph type="title"/>
+          </p:nvPr>
+        </p:nvSpPr>
+        <p:spPr>
+          <a:xfrm>
+            <a:off x="4513326" y="3165729"/>
+            <a:ext cx="2233295" cy="513715"/>
+          </a:xfrm>
+          <a:prstGeom prst="rect">
+            <a:avLst/>
+          </a:prstGeom>
+        </p:spPr>
+        <p:txBody>
+          <a:bodyPr vert="horz" wrap="square" lIns="0" tIns="13335" rIns="0" bIns="0" rtlCol="0">
+            <a:spAutoFit/>
+          </a:bodyPr>
+          <a:lstStyle/>
+          <a:p>
+            <a:pPr marL="12700">
+              <a:lnSpc>
+                <a:spcPct val="100000"/>
+              </a:lnSpc>
+              <a:spcBef>
+                <a:spcPts val="105"/>
+              </a:spcBef>
+            </a:pPr>
+            <a:r>
+              <a:rPr lang="es-ES" sz="3200" b="1" spc="-5" dirty="0">
+                <a:solidFill>
+                  <a:srgbClr val="FFFFFF"/>
+                </a:solidFill>
+                <a:latin typeface="Lucida Sans"/>
+                <a:cs typeface="Lucida Sans"/>
+              </a:rPr>
+              <a:t>Fin</a:t>
+            </a:r>
+            <a:endParaRPr sz="3200" dirty="0">
+              <a:latin typeface="Lucida Sans"/>
+              <a:cs typeface="Lucida Sans"/>
+            </a:endParaRPr>
+          </a:p>
+        </p:txBody>
+      </p:sp>
+      <p:sp>
+        <p:nvSpPr>
+          <p:cNvPr id="5" name="Marcador de número de diapositiva 4">
+            <a:extLst>
+              <a:ext uri="{FF2B5EF4-FFF2-40B4-BE49-F238E27FC236}">
+                <a16:creationId xmlns:a16="http://schemas.microsoft.com/office/drawing/2014/main" id="{B052DA19-AD24-7D24-2AE9-51F8F5A7F5E0}"/>
+              </a:ext>
+            </a:extLst>
+          </p:cNvPr>
+          <p:cNvSpPr>
+            <a:spLocks noGrp="1"/>
+          </p:cNvSpPr>
+          <p:nvPr>
+            <p:ph type="sldNum" sz="quarter" idx="7"/>
+          </p:nvPr>
+        </p:nvSpPr>
+        <p:spPr/>
+        <p:txBody>
+          <a:bodyPr/>
+          <a:lstStyle/>
+          <a:p>
+            <a:fld id="{B6F15528-21DE-4FAA-801E-634DDDAF4B2B}" type="slidenum">
+              <a:rPr lang="es-ES" smtClean="0"/>
+              <a:t>18</a:t>
+            </a:fld>
+            <a:endParaRPr lang="es-ES"/>
+          </a:p>
+        </p:txBody>
+      </p:sp>
+      <p:sp>
+        <p:nvSpPr>
+          <p:cNvPr id="2" name="object 3">
+            <a:extLst>
+              <a:ext uri="{FF2B5EF4-FFF2-40B4-BE49-F238E27FC236}">
+                <a16:creationId xmlns:a16="http://schemas.microsoft.com/office/drawing/2014/main" id="{289506BA-7E95-D14D-69D4-E6920BDA683D}"/>
+              </a:ext>
+            </a:extLst>
+          </p:cNvPr>
+          <p:cNvSpPr txBox="1"/>
+          <p:nvPr/>
+        </p:nvSpPr>
+        <p:spPr>
+          <a:xfrm>
+            <a:off x="2746438" y="4412287"/>
+            <a:ext cx="6699124" cy="1774845"/>
+          </a:xfrm>
+          <a:prstGeom prst="rect">
+            <a:avLst/>
+          </a:prstGeom>
+        </p:spPr>
+        <p:txBody>
+          <a:bodyPr vert="horz" wrap="square" lIns="0" tIns="12700" rIns="0" bIns="0" rtlCol="0">
+            <a:spAutoFit/>
+          </a:bodyPr>
+          <a:lstStyle/>
+          <a:p>
+            <a:pPr marL="12700">
+              <a:lnSpc>
+                <a:spcPct val="100000"/>
+              </a:lnSpc>
+              <a:spcBef>
+                <a:spcPts val="100"/>
+              </a:spcBef>
+            </a:pPr>
+            <a:r>
+              <a:rPr lang="es-ES" sz="3200" b="1" dirty="0">
+                <a:latin typeface="Lucida Sans"/>
+                <a:cs typeface="Lucida Sans"/>
+              </a:rPr>
+              <a:t>Lucas Nicolás Descalzo Puchalt</a:t>
+            </a:r>
+          </a:p>
+          <a:p>
+            <a:pPr marL="12700">
+              <a:lnSpc>
+                <a:spcPct val="100000"/>
+              </a:lnSpc>
+              <a:spcBef>
+                <a:spcPts val="100"/>
+              </a:spcBef>
+            </a:pPr>
+            <a:r>
+              <a:rPr lang="es-ES" sz="3200" b="1" dirty="0">
+                <a:latin typeface="Lucida Sans"/>
+                <a:cs typeface="Lucida Sans"/>
+              </a:rPr>
+              <a:t>Francisco García Villar</a:t>
+            </a:r>
+          </a:p>
+          <a:p>
+            <a:pPr marL="12700">
+              <a:lnSpc>
+                <a:spcPct val="100000"/>
+              </a:lnSpc>
+              <a:spcBef>
+                <a:spcPts val="100"/>
+              </a:spcBef>
+            </a:pPr>
+            <a:endParaRPr lang="es-ES" sz="2000" b="1" dirty="0">
+              <a:latin typeface="Lucida Sans"/>
+              <a:cs typeface="Lucida Sans"/>
+            </a:endParaRPr>
+          </a:p>
+          <a:p>
+            <a:pPr marL="12700">
+              <a:lnSpc>
+                <a:spcPct val="100000"/>
+              </a:lnSpc>
+              <a:spcBef>
+                <a:spcPts val="100"/>
+              </a:spcBef>
+            </a:pPr>
+            <a:r>
+              <a:rPr lang="es-ES" sz="2400" b="1" dirty="0">
+                <a:latin typeface="Lucida Sans"/>
+                <a:cs typeface="Lucida Sans"/>
+              </a:rPr>
+              <a:t>Grupo B1</a:t>
+            </a:r>
+            <a:endParaRPr sz="2400" dirty="0">
+              <a:latin typeface="Lucida Sans"/>
+              <a:cs typeface="Lucida Sans"/>
+            </a:endParaRPr>
           </a:p>
         </p:txBody>
       </p:sp>
@@ -5133,7 +9503,7 @@
         <p:spPr>
           <a:xfrm>
             <a:off x="609441" y="4860334"/>
-            <a:ext cx="11199971" cy="1200329"/>
+            <a:ext cx="11199971" cy="954107"/>
           </a:xfrm>
           <a:prstGeom prst="rect">
             <a:avLst/>
@@ -5157,72 +9527,97 @@
           <a:p>
             <a:pPr algn="just"/>
             <a:r>
-              <a:rPr lang="en-US" sz="1200" dirty="0">
-                <a:latin typeface="Arial" panose="020B0604020202020204" pitchFamily="34" charset="0"/>
-                <a:cs typeface="Arial" panose="020B0604020202020204" pitchFamily="34" charset="0"/>
-              </a:rPr>
-              <a:t>Document all your results (neff, plot fields </a:t>
-            </a:r>
-            <a:r>
-              <a:rPr lang="en-US" sz="1200">
-                <a:latin typeface="Arial" panose="020B0604020202020204" pitchFamily="34" charset="0"/>
-                <a:cs typeface="Arial" panose="020B0604020202020204" pitchFamily="34" charset="0"/>
-              </a:rPr>
-              <a:t>of different modes, </a:t>
-            </a:r>
-            <a:r>
-              <a:rPr lang="en-US" sz="1200" dirty="0">
-                <a:latin typeface="Arial" panose="020B0604020202020204" pitchFamily="34" charset="0"/>
-                <a:cs typeface="Arial" panose="020B0604020202020204" pitchFamily="34" charset="0"/>
-              </a:rPr>
-              <a:t>comparison between </a:t>
-            </a:r>
-            <a:r>
-              <a:rPr lang="en-US" sz="1200">
-                <a:latin typeface="Arial" panose="020B0604020202020204" pitchFamily="34" charset="0"/>
-                <a:cs typeface="Arial" panose="020B0604020202020204" pitchFamily="34" charset="0"/>
-              </a:rPr>
-              <a:t>different polarizations…)</a:t>
-            </a:r>
-            <a:endParaRPr lang="en-US" sz="1200" dirty="0">
-              <a:latin typeface="Arial" panose="020B0604020202020204" pitchFamily="34" charset="0"/>
-              <a:cs typeface="Arial" panose="020B0604020202020204" pitchFamily="34" charset="0"/>
-            </a:endParaRPr>
-          </a:p>
-          <a:p>
-            <a:pPr algn="just"/>
-            <a:endParaRPr lang="en-US" sz="1200" dirty="0">
-              <a:latin typeface="Arial" panose="020B0604020202020204" pitchFamily="34" charset="0"/>
-              <a:cs typeface="Arial" panose="020B0604020202020204" pitchFamily="34" charset="0"/>
-            </a:endParaRPr>
-          </a:p>
-          <a:p>
-            <a:pPr algn="just"/>
-            <a:endParaRPr lang="en-US" sz="1200" dirty="0">
-              <a:latin typeface="Arial" panose="020B0604020202020204" pitchFamily="34" charset="0"/>
-              <a:cs typeface="Arial" panose="020B0604020202020204" pitchFamily="34" charset="0"/>
-            </a:endParaRPr>
-          </a:p>
-          <a:p>
-            <a:pPr algn="just"/>
-            <a:endParaRPr lang="en-US" sz="1200" dirty="0">
-              <a:latin typeface="Arial" panose="020B0604020202020204" pitchFamily="34" charset="0"/>
-              <a:cs typeface="Arial" panose="020B0604020202020204" pitchFamily="34" charset="0"/>
-            </a:endParaRPr>
-          </a:p>
-          <a:p>
-            <a:pPr algn="just"/>
-            <a:endParaRPr lang="en-US" sz="1200" dirty="0">
-              <a:latin typeface="Arial" panose="020B0604020202020204" pitchFamily="34" charset="0"/>
-              <a:cs typeface="Arial" panose="020B0604020202020204" pitchFamily="34" charset="0"/>
-            </a:endParaRPr>
-          </a:p>
-          <a:p>
-            <a:pPr algn="just"/>
-            <a:endParaRPr lang="en-US" sz="1200" dirty="0">
-              <a:latin typeface="Arial" panose="020B0604020202020204" pitchFamily="34" charset="0"/>
-              <a:cs typeface="Arial" panose="020B0604020202020204" pitchFamily="34" charset="0"/>
-            </a:endParaRPr>
+              <a:rPr lang="en-US" sz="1400" dirty="0" err="1">
+                <a:latin typeface="Arial" panose="020B0604020202020204" pitchFamily="34" charset="0"/>
+                <a:cs typeface="Arial" panose="020B0604020202020204" pitchFamily="34" charset="0"/>
+              </a:rPr>
+              <a:t>Resultados</a:t>
+            </a:r>
+            <a:r>
+              <a:rPr lang="en-US" sz="1400" dirty="0">
+                <a:latin typeface="Arial" panose="020B0604020202020204" pitchFamily="34" charset="0"/>
+                <a:cs typeface="Arial" panose="020B0604020202020204" pitchFamily="34" charset="0"/>
+              </a:rPr>
+              <a:t>:</a:t>
+            </a:r>
+          </a:p>
+          <a:p>
+            <a:pPr marL="171450" indent="-171450" algn="just">
+              <a:buFont typeface="Arial" panose="020B0604020202020204" pitchFamily="34" charset="0"/>
+              <a:buChar char="•"/>
+            </a:pPr>
+            <a:r>
+              <a:rPr lang="en-US" sz="1400" dirty="0" err="1">
+                <a:latin typeface="Arial" panose="020B0604020202020204" pitchFamily="34" charset="0"/>
+                <a:cs typeface="Arial" panose="020B0604020202020204" pitchFamily="34" charset="0"/>
+              </a:rPr>
+              <a:t>neff</a:t>
+            </a:r>
+            <a:r>
+              <a:rPr lang="en-US" sz="1400" dirty="0">
+                <a:latin typeface="Arial" panose="020B0604020202020204" pitchFamily="34" charset="0"/>
+                <a:cs typeface="Arial" panose="020B0604020202020204" pitchFamily="34" charset="0"/>
+              </a:rPr>
+              <a:t> = [1.60524792+0.00010066j, 1.52829803+0.00017753j, 1.45072999+0.00019228j, </a:t>
+            </a:r>
+            <a:r>
+              <a:rPr lang="en-US" sz="1400" dirty="0">
+                <a:solidFill>
+                  <a:srgbClr val="FF0000"/>
+                </a:solidFill>
+                <a:latin typeface="Arial" panose="020B0604020202020204" pitchFamily="34" charset="0"/>
+                <a:cs typeface="Arial" panose="020B0604020202020204" pitchFamily="34" charset="0"/>
+              </a:rPr>
+              <a:t>1.43325817 </a:t>
+            </a:r>
+            <a:r>
+              <a:rPr lang="en-US" sz="1400" dirty="0">
+                <a:latin typeface="Arial" panose="020B0604020202020204" pitchFamily="34" charset="0"/>
+                <a:cs typeface="Arial" panose="020B0604020202020204" pitchFamily="34" charset="0"/>
+              </a:rPr>
+              <a:t>+0.00021838j]</a:t>
+            </a:r>
+          </a:p>
+          <a:p>
+            <a:pPr marL="171450" indent="-171450" algn="just">
+              <a:buFont typeface="Arial" panose="020B0604020202020204" pitchFamily="34" charset="0"/>
+              <a:buChar char="•"/>
+            </a:pPr>
+            <a:r>
+              <a:rPr lang="en-US" sz="1400" dirty="0" err="1">
+                <a:latin typeface="Arial" panose="020B0604020202020204" pitchFamily="34" charset="0"/>
+                <a:cs typeface="Arial" panose="020B0604020202020204" pitchFamily="34" charset="0"/>
+              </a:rPr>
+              <a:t>fraction_te</a:t>
+            </a:r>
+            <a:r>
+              <a:rPr lang="en-US" sz="1400" dirty="0">
+                <a:latin typeface="Arial" panose="020B0604020202020204" pitchFamily="34" charset="0"/>
+                <a:cs typeface="Arial" panose="020B0604020202020204" pitchFamily="34" charset="0"/>
+              </a:rPr>
+              <a:t> = [0.99505426, 0.01004259, 0.96264794, 0.047651  ]</a:t>
+            </a:r>
+          </a:p>
+          <a:p>
+            <a:pPr marL="171450" indent="-171450" algn="just">
+              <a:buFont typeface="Arial" panose="020B0604020202020204" pitchFamily="34" charset="0"/>
+              <a:buChar char="•"/>
+            </a:pPr>
+            <a:r>
+              <a:rPr lang="en-US" sz="1400" dirty="0" err="1">
+                <a:latin typeface="Arial" panose="020B0604020202020204" pitchFamily="34" charset="0"/>
+                <a:cs typeface="Arial" panose="020B0604020202020204" pitchFamily="34" charset="0"/>
+              </a:rPr>
+              <a:t>fraction_tm</a:t>
+            </a:r>
+            <a:r>
+              <a:rPr lang="en-US" sz="1400" dirty="0">
+                <a:latin typeface="Arial" panose="020B0604020202020204" pitchFamily="34" charset="0"/>
+                <a:cs typeface="Arial" panose="020B0604020202020204" pitchFamily="34" charset="0"/>
+              </a:rPr>
+              <a:t> = [0.00494574, 0.98995741, 0.03735206, 0.952349  ]</a:t>
+            </a:r>
+            <a:endParaRPr lang="es-ES" sz="1400" dirty="0"/>
           </a:p>
         </p:txBody>
       </p:sp>
@@ -5240,6 +9635,422 @@
 </file>
 
 <file path=ppt/slides/slide4.xml><?xml version="1.0" encoding="utf-8"?>
+<p:sld xmlns:a="http://schemas.openxmlformats.org/drawingml/2006/main" xmlns:r="http://schemas.openxmlformats.org/officeDocument/2006/relationships" xmlns:p="http://schemas.openxmlformats.org/presentationml/2006/main">
+  <p:cSld>
+    <p:spTree>
+      <p:nvGrpSpPr>
+        <p:cNvPr id="1" name="">
+          <a:extLst>
+            <a:ext uri="{FF2B5EF4-FFF2-40B4-BE49-F238E27FC236}">
+              <a16:creationId xmlns:a16="http://schemas.microsoft.com/office/drawing/2014/main" id="{B69C9638-EA38-9794-A097-AB3BDC7D4317}"/>
+            </a:ext>
+          </a:extLst>
+        </p:cNvPr>
+        <p:cNvGrpSpPr/>
+        <p:nvPr/>
+      </p:nvGrpSpPr>
+      <p:grpSpPr>
+        <a:xfrm>
+          <a:off x="0" y="0"/>
+          <a:ext cx="0" cy="0"/>
+          <a:chOff x="0" y="0"/>
+          <a:chExt cx="0" cy="0"/>
+        </a:xfrm>
+      </p:grpSpPr>
+      <p:sp>
+        <p:nvSpPr>
+          <p:cNvPr id="16" name="object 16">
+            <a:extLst>
+              <a:ext uri="{FF2B5EF4-FFF2-40B4-BE49-F238E27FC236}">
+                <a16:creationId xmlns:a16="http://schemas.microsoft.com/office/drawing/2014/main" id="{A0FCA029-0F9C-9482-5CCA-9DC8A343BAB6}"/>
+              </a:ext>
+            </a:extLst>
+          </p:cNvPr>
+          <p:cNvSpPr txBox="1">
+            <a:spLocks noGrp="1"/>
+          </p:cNvSpPr>
+          <p:nvPr>
+            <p:ph type="title"/>
+          </p:nvPr>
+        </p:nvSpPr>
+        <p:spPr>
+          <a:xfrm>
+            <a:off x="685800" y="408883"/>
+            <a:ext cx="10994410" cy="782265"/>
+          </a:xfrm>
+          <a:prstGeom prst="rect">
+            <a:avLst/>
+          </a:prstGeom>
+        </p:spPr>
+        <p:txBody>
+          <a:bodyPr vert="horz" wrap="square" lIns="0" tIns="12700" rIns="0" bIns="0" rtlCol="0">
+            <a:spAutoFit/>
+          </a:bodyPr>
+          <a:lstStyle/>
+          <a:p>
+            <a:pPr marL="12700">
+              <a:lnSpc>
+                <a:spcPct val="100000"/>
+              </a:lnSpc>
+              <a:spcBef>
+                <a:spcPts val="100"/>
+              </a:spcBef>
+            </a:pPr>
+            <a:r>
+              <a:rPr lang="en-US" sz="2500" dirty="0"/>
+              <a:t>Learning outcome #1. </a:t>
+            </a:r>
+            <a:r>
+              <a:rPr lang="en-US" sz="2500" dirty="0" err="1"/>
+              <a:t>Continuación</a:t>
+            </a:r>
+            <a:r>
+              <a:rPr lang="en-US" sz="2500" dirty="0"/>
+              <a:t> – Effective index of a waveguide</a:t>
+            </a:r>
+            <a:br>
+              <a:rPr lang="es-ES" sz="2500" spc="-5" dirty="0">
+                <a:latin typeface="+mj-lt"/>
+                <a:cs typeface="Lucida Sans"/>
+              </a:rPr>
+            </a:br>
+            <a:endParaRPr sz="2500" b="0" dirty="0">
+              <a:latin typeface="+mj-lt"/>
+              <a:cs typeface="Lucida Sans"/>
+            </a:endParaRPr>
+          </a:p>
+        </p:txBody>
+      </p:sp>
+      <p:pic>
+        <p:nvPicPr>
+          <p:cNvPr id="83" name="Gráfico 82">
+            <a:extLst>
+              <a:ext uri="{FF2B5EF4-FFF2-40B4-BE49-F238E27FC236}">
+                <a16:creationId xmlns:a16="http://schemas.microsoft.com/office/drawing/2014/main" id="{0D6A569C-A642-EAB8-3DF3-764381DD68B5}"/>
+              </a:ext>
+            </a:extLst>
+          </p:cNvPr>
+          <p:cNvPicPr>
+            <a:picLocks noChangeAspect="1"/>
+          </p:cNvPicPr>
+          <p:nvPr/>
+        </p:nvPicPr>
+        <p:blipFill>
+          <a:blip r:embed="rId3">
+            <a:extLst>
+              <a:ext uri="{96DAC541-7B7A-43D3-8B79-37D633B846F1}">
+                <asvg:svgBlip xmlns:asvg="http://schemas.microsoft.com/office/drawing/2016/SVG/main" r:embed="rId4"/>
+              </a:ext>
+            </a:extLst>
+          </a:blip>
+          <a:stretch>
+            <a:fillRect/>
+          </a:stretch>
+        </p:blipFill>
+        <p:spPr>
+          <a:xfrm>
+            <a:off x="5045006" y="6356057"/>
+            <a:ext cx="6409575" cy="363174"/>
+          </a:xfrm>
+          <a:prstGeom prst="rect">
+            <a:avLst/>
+          </a:prstGeom>
+        </p:spPr>
+      </p:pic>
+      <p:sp>
+        <p:nvSpPr>
+          <p:cNvPr id="84" name="Marcador de número de diapositiva 83">
+            <a:extLst>
+              <a:ext uri="{FF2B5EF4-FFF2-40B4-BE49-F238E27FC236}">
+                <a16:creationId xmlns:a16="http://schemas.microsoft.com/office/drawing/2014/main" id="{5A433AC2-14F9-6F26-8583-1223DB739793}"/>
+              </a:ext>
+            </a:extLst>
+          </p:cNvPr>
+          <p:cNvSpPr>
+            <a:spLocks noGrp="1"/>
+          </p:cNvSpPr>
+          <p:nvPr>
+            <p:ph type="sldNum" sz="quarter" idx="7"/>
+          </p:nvPr>
+        </p:nvSpPr>
+        <p:spPr/>
+        <p:txBody>
+          <a:bodyPr/>
+          <a:lstStyle/>
+          <a:p>
+            <a:fld id="{B6F15528-21DE-4FAA-801E-634DDDAF4B2B}" type="slidenum">
+              <a:rPr lang="es-ES" smtClean="0"/>
+              <a:t>4</a:t>
+            </a:fld>
+            <a:endParaRPr lang="es-ES"/>
+          </a:p>
+        </p:txBody>
+      </p:sp>
+      <p:sp>
+        <p:nvSpPr>
+          <p:cNvPr id="3" name="Marcador de pie de página 2">
+            <a:extLst>
+              <a:ext uri="{FF2B5EF4-FFF2-40B4-BE49-F238E27FC236}">
+                <a16:creationId xmlns:a16="http://schemas.microsoft.com/office/drawing/2014/main" id="{D00B4EB8-4ACE-94EB-847A-9AED0C792245}"/>
+              </a:ext>
+            </a:extLst>
+          </p:cNvPr>
+          <p:cNvSpPr>
+            <a:spLocks noGrp="1"/>
+          </p:cNvSpPr>
+          <p:nvPr>
+            <p:ph type="ftr" sz="quarter" idx="5"/>
+          </p:nvPr>
+        </p:nvSpPr>
+        <p:spPr/>
+        <p:txBody>
+          <a:bodyPr/>
+          <a:lstStyle/>
+          <a:p>
+            <a:pPr marL="12700">
+              <a:spcBef>
+                <a:spcPts val="15"/>
+              </a:spcBef>
+            </a:pPr>
+            <a:r>
+              <a:rPr lang="es-ES" spc="-5"/>
+              <a:t>LAB 1.0 WAVEGUIDES</a:t>
+            </a:r>
+            <a:endParaRPr lang="es-ES" spc="-5" dirty="0"/>
+          </a:p>
+        </p:txBody>
+      </p:sp>
+      <p:sp>
+        <p:nvSpPr>
+          <p:cNvPr id="2" name="CuadroTexto 1">
+            <a:extLst>
+              <a:ext uri="{FF2B5EF4-FFF2-40B4-BE49-F238E27FC236}">
+                <a16:creationId xmlns:a16="http://schemas.microsoft.com/office/drawing/2014/main" id="{A6C6B5C9-E151-026B-D85C-45EF30984ABB}"/>
+              </a:ext>
+            </a:extLst>
+          </p:cNvPr>
+          <p:cNvSpPr txBox="1"/>
+          <p:nvPr/>
+        </p:nvSpPr>
+        <p:spPr>
+          <a:xfrm>
+            <a:off x="583019" y="1186068"/>
+            <a:ext cx="11199971" cy="2246769"/>
+          </a:xfrm>
+          <a:prstGeom prst="rect">
+            <a:avLst/>
+          </a:prstGeom>
+          <a:solidFill>
+            <a:schemeClr val="bg1">
+              <a:lumMod val="95000"/>
+            </a:schemeClr>
+          </a:solidFill>
+          <a:ln w="28575">
+            <a:solidFill>
+              <a:srgbClr val="E0700D"/>
+            </a:solidFill>
+          </a:ln>
+        </p:spPr>
+        <p:txBody>
+          <a:bodyPr wrap="square" rtlCol="0">
+            <a:spAutoFit/>
+          </a:bodyPr>
+          <a:lstStyle/>
+          <a:p>
+            <a:r>
+              <a:rPr lang="es-ES" sz="1400" dirty="0">
+                <a:latin typeface="Arial" panose="020B0604020202020204" pitchFamily="34" charset="0"/>
+                <a:cs typeface="Arial" panose="020B0604020202020204" pitchFamily="34" charset="0"/>
+              </a:rPr>
+              <a:t>El </a:t>
+            </a:r>
+            <a:r>
+              <a:rPr lang="es-ES" sz="1400" dirty="0" err="1">
+                <a:latin typeface="Arial" panose="020B0604020202020204" pitchFamily="34" charset="0"/>
+                <a:cs typeface="Arial" panose="020B0604020202020204" pitchFamily="34" charset="0"/>
+              </a:rPr>
+              <a:t>n_eff</a:t>
+            </a:r>
+            <a:r>
+              <a:rPr lang="es-ES" sz="1400" dirty="0">
+                <a:latin typeface="Arial" panose="020B0604020202020204" pitchFamily="34" charset="0"/>
+                <a:cs typeface="Arial" panose="020B0604020202020204" pitchFamily="34" charset="0"/>
+              </a:rPr>
+              <a:t> de un modo guiado siempre se sitúa entre el índice del núcleo y el del </a:t>
+            </a:r>
+            <a:r>
+              <a:rPr lang="es-ES" sz="1400" dirty="0" err="1">
+                <a:latin typeface="Arial" panose="020B0604020202020204" pitchFamily="34" charset="0"/>
+                <a:cs typeface="Arial" panose="020B0604020202020204" pitchFamily="34" charset="0"/>
+              </a:rPr>
+              <a:t>cladding</a:t>
+            </a:r>
+            <a:r>
+              <a:rPr lang="es-ES" sz="1400" dirty="0">
+                <a:latin typeface="Arial" panose="020B0604020202020204" pitchFamily="34" charset="0"/>
+                <a:cs typeface="Arial" panose="020B0604020202020204" pitchFamily="34" charset="0"/>
+              </a:rPr>
+              <a:t>, representando la "velocidad de fase efectiva" del modo en la guía. Como podemos apreciar en los resultados, queda descartado el </a:t>
+            </a:r>
+            <a:r>
+              <a:rPr lang="es-ES" sz="1400" dirty="0" err="1">
+                <a:latin typeface="Arial" panose="020B0604020202020204" pitchFamily="34" charset="0"/>
+                <a:cs typeface="Arial" panose="020B0604020202020204" pitchFamily="34" charset="0"/>
+              </a:rPr>
+              <a:t>n_eff</a:t>
+            </a:r>
+            <a:r>
+              <a:rPr lang="es-ES" sz="1400" dirty="0">
+                <a:latin typeface="Arial" panose="020B0604020202020204" pitchFamily="34" charset="0"/>
+                <a:cs typeface="Arial" panose="020B0604020202020204" pitchFamily="34" charset="0"/>
+              </a:rPr>
+              <a:t> del 4to modo, al ser menor que el </a:t>
+            </a:r>
+            <a:r>
+              <a:rPr lang="es-ES" sz="1400" dirty="0" err="1">
+                <a:latin typeface="Arial" panose="020B0604020202020204" pitchFamily="34" charset="0"/>
+                <a:cs typeface="Arial" panose="020B0604020202020204" pitchFamily="34" charset="0"/>
+              </a:rPr>
+              <a:t>n_cladding</a:t>
+            </a:r>
+            <a:r>
+              <a:rPr lang="es-ES" sz="1400" dirty="0">
+                <a:latin typeface="Arial" panose="020B0604020202020204" pitchFamily="34" charset="0"/>
+                <a:cs typeface="Arial" panose="020B0604020202020204" pitchFamily="34" charset="0"/>
+              </a:rPr>
+              <a:t> (</a:t>
+            </a:r>
+            <a:r>
+              <a:rPr lang="en-US" sz="1400" dirty="0">
+                <a:latin typeface="Arial" panose="020B0604020202020204" pitchFamily="34" charset="0"/>
+                <a:cs typeface="Arial" panose="020B0604020202020204" pitchFamily="34" charset="0"/>
+              </a:rPr>
+              <a:t>1.4332 &lt; 1.44) para </a:t>
+            </a:r>
+            <a:r>
+              <a:rPr lang="es-ES" sz="1400" dirty="0">
+                <a:latin typeface="Arial" panose="020B0604020202020204" pitchFamily="34" charset="0"/>
+                <a:cs typeface="Arial" panose="020B0604020202020204" pitchFamily="34" charset="0"/>
+              </a:rPr>
+              <a:t>λ = 1.55µm.</a:t>
+            </a:r>
+          </a:p>
+          <a:p>
+            <a:endParaRPr lang="es-ES" sz="1400" dirty="0">
+              <a:latin typeface="Arial" panose="020B0604020202020204" pitchFamily="34" charset="0"/>
+              <a:cs typeface="Arial" panose="020B0604020202020204" pitchFamily="34" charset="0"/>
+            </a:endParaRPr>
+          </a:p>
+          <a:p>
+            <a:r>
+              <a:rPr lang="es-ES" sz="1400" dirty="0">
+                <a:latin typeface="Arial" panose="020B0604020202020204" pitchFamily="34" charset="0"/>
+                <a:cs typeface="Arial" panose="020B0604020202020204" pitchFamily="34" charset="0"/>
+              </a:rPr>
+              <a:t>Los modos 0 y 2 son predominantemente TE (</a:t>
+            </a:r>
+            <a:r>
+              <a:rPr lang="es-ES" sz="1400" dirty="0" err="1">
+                <a:latin typeface="Arial" panose="020B0604020202020204" pitchFamily="34" charset="0"/>
+                <a:cs typeface="Arial" panose="020B0604020202020204" pitchFamily="34" charset="0"/>
+              </a:rPr>
+              <a:t>fraction_TE</a:t>
+            </a:r>
+            <a:r>
+              <a:rPr lang="es-ES" sz="1400" dirty="0">
+                <a:latin typeface="Arial" panose="020B0604020202020204" pitchFamily="34" charset="0"/>
+                <a:cs typeface="Arial" panose="020B0604020202020204" pitchFamily="34" charset="0"/>
+              </a:rPr>
+              <a:t> ≈ 0.995 y 0.963), mientras que los modos 1 y 3 son TM (</a:t>
+            </a:r>
+            <a:r>
+              <a:rPr lang="es-ES" sz="1400" dirty="0" err="1">
+                <a:latin typeface="Arial" panose="020B0604020202020204" pitchFamily="34" charset="0"/>
+                <a:cs typeface="Arial" panose="020B0604020202020204" pitchFamily="34" charset="0"/>
+              </a:rPr>
+              <a:t>fraction_TE</a:t>
+            </a:r>
+            <a:r>
+              <a:rPr lang="es-ES" sz="1400" dirty="0">
+                <a:latin typeface="Arial" panose="020B0604020202020204" pitchFamily="34" charset="0"/>
+                <a:cs typeface="Arial" panose="020B0604020202020204" pitchFamily="34" charset="0"/>
+              </a:rPr>
+              <a:t> ≈ 0.010 y 0.048). El modo TE0 presenta el </a:t>
+            </a:r>
+            <a:r>
+              <a:rPr lang="es-ES" sz="1400" dirty="0" err="1">
+                <a:latin typeface="Arial" panose="020B0604020202020204" pitchFamily="34" charset="0"/>
+                <a:cs typeface="Arial" panose="020B0604020202020204" pitchFamily="34" charset="0"/>
+              </a:rPr>
+              <a:t>n_eff</a:t>
+            </a:r>
+            <a:r>
+              <a:rPr lang="es-ES" sz="1400" dirty="0">
+                <a:latin typeface="Arial" panose="020B0604020202020204" pitchFamily="34" charset="0"/>
+                <a:cs typeface="Arial" panose="020B0604020202020204" pitchFamily="34" charset="0"/>
+              </a:rPr>
+              <a:t> más alto (1.605), lo que confirma que es el modo fundamental, viajando con menor ángulo de rebote respecto al eje de propagación. Los modos de orden superior son más oblicuos y, por tanto, tendrán menor β y menor </a:t>
+            </a:r>
+            <a:r>
+              <a:rPr lang="es-ES" sz="1400" dirty="0" err="1">
+                <a:latin typeface="Arial" panose="020B0604020202020204" pitchFamily="34" charset="0"/>
+                <a:cs typeface="Arial" panose="020B0604020202020204" pitchFamily="34" charset="0"/>
+              </a:rPr>
+              <a:t>n_eff</a:t>
+            </a:r>
+            <a:r>
+              <a:rPr lang="es-ES" sz="1400" dirty="0">
+                <a:latin typeface="Arial" panose="020B0604020202020204" pitchFamily="34" charset="0"/>
+                <a:cs typeface="Arial" panose="020B0604020202020204" pitchFamily="34" charset="0"/>
+              </a:rPr>
+              <a:t>.</a:t>
+            </a:r>
+          </a:p>
+          <a:p>
+            <a:endParaRPr lang="es-ES" sz="1400" dirty="0">
+              <a:latin typeface="Arial" panose="020B0604020202020204" pitchFamily="34" charset="0"/>
+              <a:cs typeface="Arial" panose="020B0604020202020204" pitchFamily="34" charset="0"/>
+            </a:endParaRPr>
+          </a:p>
+          <a:p>
+            <a:r>
+              <a:rPr lang="es-ES" sz="1400" dirty="0">
+                <a:latin typeface="Arial" panose="020B0604020202020204" pitchFamily="34" charset="0"/>
+                <a:cs typeface="Arial" panose="020B0604020202020204" pitchFamily="34" charset="0"/>
+              </a:rPr>
+              <a:t>La parte imaginaria de los distintos </a:t>
+            </a:r>
+            <a:r>
+              <a:rPr lang="es-ES" sz="1400" dirty="0" err="1">
+                <a:latin typeface="Arial" panose="020B0604020202020204" pitchFamily="34" charset="0"/>
+                <a:cs typeface="Arial" panose="020B0604020202020204" pitchFamily="34" charset="0"/>
+              </a:rPr>
+              <a:t>n_eff</a:t>
+            </a:r>
+            <a:r>
+              <a:rPr lang="es-ES" sz="1400" dirty="0">
+                <a:latin typeface="Arial" panose="020B0604020202020204" pitchFamily="34" charset="0"/>
+                <a:cs typeface="Arial" panose="020B0604020202020204" pitchFamily="34" charset="0"/>
+              </a:rPr>
+              <a:t> no es nula, lo que implica cierta atenuación finita del modo. Esto significa, según la función de transferencia, en que la amplitud del campo se atenuará de forma exponencial a lo largo de la guía.</a:t>
+            </a:r>
+          </a:p>
+        </p:txBody>
+      </p:sp>
+    </p:spTree>
+    <p:extLst>
+      <p:ext uri="{BB962C8B-B14F-4D97-AF65-F5344CB8AC3E}">
+        <p14:creationId xmlns:p14="http://schemas.microsoft.com/office/powerpoint/2010/main" val="1107578631"/>
+      </p:ext>
+    </p:extLst>
+  </p:cSld>
+  <p:clrMapOvr>
+    <a:masterClrMapping/>
+  </p:clrMapOvr>
+</p:sld>
+</file>
+
+<file path=ppt/slides/slide5.xml><?xml version="1.0" encoding="utf-8"?>
 <p:sld xmlns:a="http://schemas.openxmlformats.org/drawingml/2006/main" xmlns:r="http://schemas.openxmlformats.org/officeDocument/2006/relationships" xmlns:p="http://schemas.openxmlformats.org/presentationml/2006/main">
   <p:cSld>
     <p:spTree>
@@ -5381,7 +10192,7 @@
           <a:p>
             <a:fld id="{B6F15528-21DE-4FAA-801E-634DDDAF4B2B}" type="slidenum">
               <a:rPr lang="es-ES" smtClean="0"/>
-              <a:t>4</a:t>
+              <a:t>5</a:t>
             </a:fld>
             <a:endParaRPr lang="es-ES"/>
           </a:p>
@@ -5436,7 +10247,7 @@
         <p:spPr>
           <a:xfrm>
             <a:off x="609441" y="4860334"/>
-            <a:ext cx="11199971" cy="1200329"/>
+            <a:ext cx="11199971" cy="738664"/>
           </a:xfrm>
           <a:prstGeom prst="rect">
             <a:avLst/>
@@ -5460,58 +10271,114 @@
           <a:p>
             <a:pPr algn="just"/>
             <a:r>
-              <a:rPr lang="en-US" sz="1200" dirty="0">
-                <a:latin typeface="Arial" panose="020B0604020202020204" pitchFamily="34" charset="0"/>
-                <a:cs typeface="Arial" panose="020B0604020202020204" pitchFamily="34" charset="0"/>
-              </a:rPr>
-              <a:t>Comment results (neff changes this way with wavelength, comparison between different waveguide cross-sections …</a:t>
-            </a:r>
-            <a:r>
-              <a:rPr lang="en-US" sz="1200" dirty="0" err="1">
-                <a:latin typeface="Arial" panose="020B0604020202020204" pitchFamily="34" charset="0"/>
-                <a:cs typeface="Arial" panose="020B0604020202020204" pitchFamily="34" charset="0"/>
-              </a:rPr>
-              <a:t>etc</a:t>
-            </a:r>
-            <a:r>
-              <a:rPr lang="en-US" sz="1200" dirty="0">
-                <a:latin typeface="Arial" panose="020B0604020202020204" pitchFamily="34" charset="0"/>
-                <a:cs typeface="Arial" panose="020B0604020202020204" pitchFamily="34" charset="0"/>
-              </a:rPr>
-              <a:t>)</a:t>
-            </a:r>
-          </a:p>
-          <a:p>
-            <a:pPr algn="just"/>
-            <a:endParaRPr lang="en-US" sz="1200" dirty="0">
-              <a:latin typeface="Arial" panose="020B0604020202020204" pitchFamily="34" charset="0"/>
-              <a:cs typeface="Arial" panose="020B0604020202020204" pitchFamily="34" charset="0"/>
-            </a:endParaRPr>
-          </a:p>
-          <a:p>
-            <a:pPr algn="just"/>
-            <a:endParaRPr lang="en-US" sz="1200" dirty="0">
-              <a:latin typeface="Arial" panose="020B0604020202020204" pitchFamily="34" charset="0"/>
-              <a:cs typeface="Arial" panose="020B0604020202020204" pitchFamily="34" charset="0"/>
-            </a:endParaRPr>
-          </a:p>
-          <a:p>
-            <a:pPr algn="just"/>
-            <a:endParaRPr lang="en-US" sz="1200" dirty="0">
-              <a:latin typeface="Arial" panose="020B0604020202020204" pitchFamily="34" charset="0"/>
-              <a:cs typeface="Arial" panose="020B0604020202020204" pitchFamily="34" charset="0"/>
-            </a:endParaRPr>
-          </a:p>
-          <a:p>
-            <a:pPr algn="just"/>
-            <a:endParaRPr lang="en-US" sz="1200" dirty="0">
-              <a:latin typeface="Arial" panose="020B0604020202020204" pitchFamily="34" charset="0"/>
-              <a:cs typeface="Arial" panose="020B0604020202020204" pitchFamily="34" charset="0"/>
-            </a:endParaRPr>
-          </a:p>
-          <a:p>
-            <a:pPr algn="just"/>
-            <a:endParaRPr lang="en-US" sz="1200" dirty="0">
+              <a:rPr lang="es-ES" sz="1400" dirty="0">
+                <a:latin typeface="Arial" panose="020B0604020202020204" pitchFamily="34" charset="0"/>
+                <a:cs typeface="Arial" panose="020B0604020202020204" pitchFamily="34" charset="0"/>
+              </a:rPr>
+              <a:t>En ambas guías (</a:t>
+            </a:r>
+            <a:r>
+              <a:rPr lang="es-ES" sz="1400" dirty="0" err="1">
+                <a:latin typeface="Arial" panose="020B0604020202020204" pitchFamily="34" charset="0"/>
+                <a:cs typeface="Arial" panose="020B0604020202020204" pitchFamily="34" charset="0"/>
+              </a:rPr>
+              <a:t>Shallow</a:t>
+            </a:r>
+            <a:r>
+              <a:rPr lang="es-ES" sz="1400" dirty="0">
+                <a:latin typeface="Arial" panose="020B0604020202020204" pitchFamily="34" charset="0"/>
+                <a:cs typeface="Arial" panose="020B0604020202020204" pitchFamily="34" charset="0"/>
+              </a:rPr>
+              <a:t> y Deep) se observa cierta dispersión, ya que el </a:t>
+            </a:r>
+            <a:r>
+              <a:rPr lang="es-ES" sz="1400" dirty="0" err="1">
+                <a:latin typeface="Arial" panose="020B0604020202020204" pitchFamily="34" charset="0"/>
+                <a:cs typeface="Arial" panose="020B0604020202020204" pitchFamily="34" charset="0"/>
+              </a:rPr>
+              <a:t>n_eff</a:t>
+            </a:r>
+            <a:r>
+              <a:rPr lang="es-ES" sz="1400" dirty="0">
+                <a:latin typeface="Arial" panose="020B0604020202020204" pitchFamily="34" charset="0"/>
+                <a:cs typeface="Arial" panose="020B0604020202020204" pitchFamily="34" charset="0"/>
+              </a:rPr>
+              <a:t> decrece al aumentar λ. Esto se debe principalmente a la dispersión del material, donde según la ecuación de </a:t>
+            </a:r>
+            <a:r>
+              <a:rPr lang="es-ES" sz="1400" dirty="0" err="1">
+                <a:latin typeface="Arial" panose="020B0604020202020204" pitchFamily="34" charset="0"/>
+                <a:cs typeface="Arial" panose="020B0604020202020204" pitchFamily="34" charset="0"/>
+              </a:rPr>
+              <a:t>Sellmeier</a:t>
+            </a:r>
+            <a:r>
+              <a:rPr lang="es-ES" sz="1400" dirty="0">
+                <a:latin typeface="Arial" panose="020B0604020202020204" pitchFamily="34" charset="0"/>
+                <a:cs typeface="Arial" panose="020B0604020202020204" pitchFamily="34" charset="0"/>
+              </a:rPr>
+              <a:t> </a:t>
+            </a:r>
+            <a:r>
+              <a:rPr lang="es-ES" sz="1400" dirty="0">
+                <a:solidFill>
+                  <a:srgbClr val="C00000"/>
+                </a:solidFill>
+                <a:latin typeface="Arial" panose="020B0604020202020204" pitchFamily="34" charset="0"/>
+                <a:cs typeface="Arial" panose="020B0604020202020204" pitchFamily="34" charset="0"/>
+              </a:rPr>
+              <a:t>(1), </a:t>
+            </a:r>
+            <a:r>
+              <a:rPr lang="es-ES" sz="1400" dirty="0">
+                <a:latin typeface="Arial" panose="020B0604020202020204" pitchFamily="34" charset="0"/>
+                <a:cs typeface="Arial" panose="020B0604020202020204" pitchFamily="34" charset="0"/>
+              </a:rPr>
+              <a:t>en el propio n del </a:t>
+            </a:r>
+            <a:r>
+              <a:rPr lang="es-ES" sz="1400" dirty="0" err="1">
+                <a:latin typeface="Arial" panose="020B0604020202020204" pitchFamily="34" charset="0"/>
+                <a:cs typeface="Arial" panose="020B0604020202020204" pitchFamily="34" charset="0"/>
+              </a:rPr>
+              <a:t>SiNx</a:t>
+            </a:r>
+            <a:r>
+              <a:rPr lang="es-ES" sz="1400" dirty="0">
+                <a:latin typeface="Arial" panose="020B0604020202020204" pitchFamily="34" charset="0"/>
+                <a:cs typeface="Arial" panose="020B0604020202020204" pitchFamily="34" charset="0"/>
+              </a:rPr>
+              <a:t> es inversamente proporcional a λ. A su vez, la dispersión </a:t>
+            </a:r>
+            <a:r>
+              <a:rPr lang="es-ES" sz="1400" dirty="0" err="1">
+                <a:latin typeface="Arial" panose="020B0604020202020204" pitchFamily="34" charset="0"/>
+                <a:cs typeface="Arial" panose="020B0604020202020204" pitchFamily="34" charset="0"/>
+              </a:rPr>
+              <a:t>waveguide</a:t>
+            </a:r>
+            <a:r>
+              <a:rPr lang="es-ES" sz="1400" dirty="0">
+                <a:latin typeface="Arial" panose="020B0604020202020204" pitchFamily="34" charset="0"/>
+                <a:cs typeface="Arial" panose="020B0604020202020204" pitchFamily="34" charset="0"/>
+              </a:rPr>
+              <a:t> hace efecto, donde a λ más grande, el modo está menos confinado en el núcleo y su </a:t>
+            </a:r>
+            <a:r>
+              <a:rPr lang="es-ES" sz="1400" dirty="0" err="1">
+                <a:latin typeface="Arial" panose="020B0604020202020204" pitchFamily="34" charset="0"/>
+                <a:cs typeface="Arial" panose="020B0604020202020204" pitchFamily="34" charset="0"/>
+              </a:rPr>
+              <a:t>n_eff</a:t>
+            </a:r>
+            <a:r>
+              <a:rPr lang="es-ES" sz="1400" dirty="0">
+                <a:latin typeface="Arial" panose="020B0604020202020204" pitchFamily="34" charset="0"/>
+                <a:cs typeface="Arial" panose="020B0604020202020204" pitchFamily="34" charset="0"/>
+              </a:rPr>
+              <a:t> se aproxima al de la SiO2. </a:t>
+            </a:r>
+            <a:endParaRPr lang="en-US" sz="1400" dirty="0">
               <a:latin typeface="Arial" panose="020B0604020202020204" pitchFamily="34" charset="0"/>
               <a:cs typeface="Arial" panose="020B0604020202020204" pitchFamily="34" charset="0"/>
             </a:endParaRPr>
@@ -5572,57 +10439,6 @@
       </p:sp>
       <p:sp>
         <p:nvSpPr>
-          <p:cNvPr id="6" name="CuadroTexto 5">
-            <a:extLst>
-              <a:ext uri="{FF2B5EF4-FFF2-40B4-BE49-F238E27FC236}">
-                <a16:creationId xmlns:a16="http://schemas.microsoft.com/office/drawing/2014/main" id="{3C4E7A47-20E2-3C27-D841-5A665642F6E2}"/>
-              </a:ext>
-            </a:extLst>
-          </p:cNvPr>
-          <p:cNvSpPr txBox="1"/>
-          <p:nvPr/>
-        </p:nvSpPr>
-        <p:spPr>
-          <a:xfrm>
-            <a:off x="2285455" y="2671278"/>
-            <a:ext cx="1980542" cy="923330"/>
-          </a:xfrm>
-          <a:prstGeom prst="rect">
-            <a:avLst/>
-          </a:prstGeom>
-          <a:noFill/>
-        </p:spPr>
-        <p:txBody>
-          <a:bodyPr wrap="none" rtlCol="0">
-            <a:spAutoFit/>
-          </a:bodyPr>
-          <a:lstStyle/>
-          <a:p>
-            <a:pPr algn="ctr"/>
-            <a:r>
-              <a:rPr lang="en-US" b="1" dirty="0"/>
-              <a:t>shallow</a:t>
-            </a:r>
-            <a:r>
-              <a:rPr lang="en-US" dirty="0"/>
-              <a:t> waveguide</a:t>
-            </a:r>
-          </a:p>
-          <a:p>
-            <a:pPr algn="ctr"/>
-            <a:endParaRPr lang="en-US" dirty="0"/>
-          </a:p>
-          <a:p>
-            <a:pPr algn="ctr"/>
-            <a:r>
-              <a:rPr lang="en-US" dirty="0"/>
-              <a:t>Paste plot here</a:t>
-            </a:r>
-          </a:p>
-        </p:txBody>
-      </p:sp>
-      <p:sp>
-        <p:nvSpPr>
           <p:cNvPr id="7" name="Rectángulo 6">
             <a:extLst>
               <a:ext uri="{FF2B5EF4-FFF2-40B4-BE49-F238E27FC236}">
@@ -5673,12 +10489,102 @@
           </a:p>
         </p:txBody>
       </p:sp>
-      <p:sp>
-        <p:nvSpPr>
-          <p:cNvPr id="8" name="CuadroTexto 7">
-            <a:extLst>
-              <a:ext uri="{FF2B5EF4-FFF2-40B4-BE49-F238E27FC236}">
-                <a16:creationId xmlns:a16="http://schemas.microsoft.com/office/drawing/2014/main" id="{CD9C65D4-5494-F5CE-1094-CB0A32C33876}"/>
+      <p:pic>
+        <p:nvPicPr>
+          <p:cNvPr id="10" name="Imagen 9" descr="Gráfico, Gráfico de líneas&#10;&#10;El contenido generado por IA puede ser incorrecto.">
+            <a:extLst>
+              <a:ext uri="{FF2B5EF4-FFF2-40B4-BE49-F238E27FC236}">
+                <a16:creationId xmlns:a16="http://schemas.microsoft.com/office/drawing/2014/main" id="{0EA5F8FD-8881-D425-5675-46FBA697379A}"/>
+              </a:ext>
+            </a:extLst>
+          </p:cNvPr>
+          <p:cNvPicPr>
+            <a:picLocks noChangeAspect="1"/>
+          </p:cNvPicPr>
+          <p:nvPr/>
+        </p:nvPicPr>
+        <p:blipFill>
+          <a:blip r:embed="rId5"/>
+          <a:stretch>
+            <a:fillRect/>
+          </a:stretch>
+        </p:blipFill>
+        <p:spPr>
+          <a:xfrm>
+            <a:off x="6529822" y="1447800"/>
+            <a:ext cx="5204978" cy="3200401"/>
+          </a:xfrm>
+          <a:prstGeom prst="rect">
+            <a:avLst/>
+          </a:prstGeom>
+        </p:spPr>
+      </p:pic>
+      <p:pic>
+        <p:nvPicPr>
+          <p:cNvPr id="12" name="Imagen 11" descr="Gráfico, Gráfico de líneas&#10;&#10;El contenido generado por IA puede ser incorrecto.">
+            <a:extLst>
+              <a:ext uri="{FF2B5EF4-FFF2-40B4-BE49-F238E27FC236}">
+                <a16:creationId xmlns:a16="http://schemas.microsoft.com/office/drawing/2014/main" id="{48126703-B4C9-15BF-F3CE-228ADCEC8C05}"/>
+              </a:ext>
+            </a:extLst>
+          </p:cNvPr>
+          <p:cNvPicPr>
+            <a:picLocks noChangeAspect="1"/>
+          </p:cNvPicPr>
+          <p:nvPr/>
+        </p:nvPicPr>
+        <p:blipFill>
+          <a:blip r:embed="rId6"/>
+          <a:stretch>
+            <a:fillRect/>
+          </a:stretch>
+        </p:blipFill>
+        <p:spPr>
+          <a:xfrm>
+            <a:off x="719930" y="1510598"/>
+            <a:ext cx="5111591" cy="3137603"/>
+          </a:xfrm>
+          <a:prstGeom prst="rect">
+            <a:avLst/>
+          </a:prstGeom>
+        </p:spPr>
+      </p:pic>
+      <p:pic>
+        <p:nvPicPr>
+          <p:cNvPr id="9" name="Imagen 8">
+            <a:extLst>
+              <a:ext uri="{FF2B5EF4-FFF2-40B4-BE49-F238E27FC236}">
+                <a16:creationId xmlns:a16="http://schemas.microsoft.com/office/drawing/2014/main" id="{5314185E-623D-6F81-205B-398E3965AE01}"/>
+              </a:ext>
+            </a:extLst>
+          </p:cNvPr>
+          <p:cNvPicPr>
+            <a:picLocks noChangeAspect="1"/>
+          </p:cNvPicPr>
+          <p:nvPr/>
+        </p:nvPicPr>
+        <p:blipFill>
+          <a:blip r:embed="rId7"/>
+          <a:stretch>
+            <a:fillRect/>
+          </a:stretch>
+        </p:blipFill>
+        <p:spPr>
+          <a:xfrm>
+            <a:off x="2330751" y="5653160"/>
+            <a:ext cx="2698449" cy="1014940"/>
+          </a:xfrm>
+          <a:prstGeom prst="rect">
+            <a:avLst/>
+          </a:prstGeom>
+        </p:spPr>
+      </p:pic>
+      <p:sp>
+        <p:nvSpPr>
+          <p:cNvPr id="11" name="CuadroTexto 10">
+            <a:extLst>
+              <a:ext uri="{FF2B5EF4-FFF2-40B4-BE49-F238E27FC236}">
+                <a16:creationId xmlns:a16="http://schemas.microsoft.com/office/drawing/2014/main" id="{F9D57E72-28F7-72A4-851E-ECEFB9D1773B}"/>
               </a:ext>
             </a:extLst>
           </p:cNvPr>
@@ -5687,8 +10593,8 @@
         </p:nvSpPr>
         <p:spPr>
           <a:xfrm>
-            <a:off x="8281672" y="2671278"/>
-            <a:ext cx="1722908" cy="923330"/>
+            <a:off x="2440085" y="6056947"/>
+            <a:ext cx="471604" cy="400110"/>
           </a:xfrm>
           <a:prstGeom prst="rect">
             <a:avLst/>
@@ -5701,66 +10607,14 @@
           </a:bodyPr>
           <a:lstStyle/>
           <a:p>
-            <a:pPr algn="ctr"/>
-            <a:r>
-              <a:rPr lang="en-US" b="1" dirty="0"/>
-              <a:t>deep</a:t>
-            </a:r>
-            <a:r>
-              <a:rPr lang="en-US" dirty="0"/>
-              <a:t> waveguide</a:t>
-            </a:r>
-          </a:p>
-          <a:p>
-            <a:pPr algn="ctr"/>
-            <a:endParaRPr lang="en-US" dirty="0"/>
-          </a:p>
-          <a:p>
-            <a:pPr algn="ctr"/>
-            <a:r>
-              <a:rPr lang="en-US" dirty="0"/>
-              <a:t>Paste plot here</a:t>
-            </a:r>
-          </a:p>
-        </p:txBody>
-      </p:sp>
-      <p:sp>
-        <p:nvSpPr>
-          <p:cNvPr id="9" name="CuadroTexto 8">
-            <a:extLst>
-              <a:ext uri="{FF2B5EF4-FFF2-40B4-BE49-F238E27FC236}">
-                <a16:creationId xmlns:a16="http://schemas.microsoft.com/office/drawing/2014/main" id="{8BD4C233-B5D9-B6AA-93A8-CF2F130CFF9C}"/>
-              </a:ext>
-            </a:extLst>
-          </p:cNvPr>
-          <p:cNvSpPr txBox="1"/>
-          <p:nvPr/>
-        </p:nvSpPr>
-        <p:spPr>
-          <a:xfrm>
-            <a:off x="642989" y="4402885"/>
-            <a:ext cx="2269787" cy="369332"/>
-          </a:xfrm>
-          <a:prstGeom prst="rect">
-            <a:avLst/>
-          </a:prstGeom>
-          <a:noFill/>
-        </p:spPr>
-        <p:txBody>
-          <a:bodyPr wrap="square">
-            <a:spAutoFit/>
-          </a:bodyPr>
-          <a:lstStyle/>
-          <a:p>
-            <a:r>
-              <a:rPr lang="en-US"/>
-              <a:t>slab </a:t>
-            </a:r>
-            <a:r>
-              <a:rPr lang="en-US" dirty="0"/>
-              <a:t>= 150nm</a:t>
-            </a:r>
-            <a:endParaRPr lang="es-ES" dirty="0"/>
+            <a:r>
+              <a:rPr lang="es-ES" sz="2000" dirty="0">
+                <a:solidFill>
+                  <a:srgbClr val="C00000"/>
+                </a:solidFill>
+              </a:rPr>
+              <a:t>(1)</a:t>
+            </a:r>
           </a:p>
         </p:txBody>
       </p:sp>
@@ -5777,7 +10631,451 @@
 </p:sld>
 </file>
 
-<file path=ppt/slides/slide5.xml><?xml version="1.0" encoding="utf-8"?>
+<file path=ppt/slides/slide6.xml><?xml version="1.0" encoding="utf-8"?>
+<p:sld xmlns:a="http://schemas.openxmlformats.org/drawingml/2006/main" xmlns:r="http://schemas.openxmlformats.org/officeDocument/2006/relationships" xmlns:p="http://schemas.openxmlformats.org/presentationml/2006/main">
+  <p:cSld>
+    <p:spTree>
+      <p:nvGrpSpPr>
+        <p:cNvPr id="1" name="">
+          <a:extLst>
+            <a:ext uri="{FF2B5EF4-FFF2-40B4-BE49-F238E27FC236}">
+              <a16:creationId xmlns:a16="http://schemas.microsoft.com/office/drawing/2014/main" id="{C9EAC1F8-BD33-2C8B-A002-BAC307977FCB}"/>
+            </a:ext>
+          </a:extLst>
+        </p:cNvPr>
+        <p:cNvGrpSpPr/>
+        <p:nvPr/>
+      </p:nvGrpSpPr>
+      <p:grpSpPr>
+        <a:xfrm>
+          <a:off x="0" y="0"/>
+          <a:ext cx="0" cy="0"/>
+          <a:chOff x="0" y="0"/>
+          <a:chExt cx="0" cy="0"/>
+        </a:xfrm>
+      </p:grpSpPr>
+      <p:sp>
+        <p:nvSpPr>
+          <p:cNvPr id="16" name="object 16">
+            <a:extLst>
+              <a:ext uri="{FF2B5EF4-FFF2-40B4-BE49-F238E27FC236}">
+                <a16:creationId xmlns:a16="http://schemas.microsoft.com/office/drawing/2014/main" id="{AAE41594-9606-B852-97E5-9E0ACB1B0FEE}"/>
+              </a:ext>
+            </a:extLst>
+          </p:cNvPr>
+          <p:cNvSpPr txBox="1">
+            <a:spLocks noGrp="1"/>
+          </p:cNvSpPr>
+          <p:nvPr>
+            <p:ph type="title"/>
+          </p:nvPr>
+        </p:nvSpPr>
+        <p:spPr>
+          <a:xfrm>
+            <a:off x="685800" y="408883"/>
+            <a:ext cx="10994410" cy="705321"/>
+          </a:xfrm>
+          <a:prstGeom prst="rect">
+            <a:avLst/>
+          </a:prstGeom>
+        </p:spPr>
+        <p:txBody>
+          <a:bodyPr vert="horz" wrap="square" lIns="0" tIns="12700" rIns="0" bIns="0" rtlCol="0">
+            <a:spAutoFit/>
+          </a:bodyPr>
+          <a:lstStyle/>
+          <a:p>
+            <a:pPr marL="12700">
+              <a:lnSpc>
+                <a:spcPct val="100000"/>
+              </a:lnSpc>
+              <a:spcBef>
+                <a:spcPts val="100"/>
+              </a:spcBef>
+            </a:pPr>
+            <a:r>
+              <a:rPr lang="en-US" sz="2500" dirty="0"/>
+              <a:t>Learning outcome #2 </a:t>
+            </a:r>
+            <a:r>
+              <a:rPr lang="en-US" sz="2500" dirty="0" err="1"/>
+              <a:t>Continuación</a:t>
+            </a:r>
+            <a:r>
+              <a:rPr lang="en-US" sz="2500" dirty="0"/>
+              <a:t> – Wavelength behavior</a:t>
+            </a:r>
+            <a:br>
+              <a:rPr lang="es-ES" sz="2500" spc="-5" dirty="0">
+                <a:latin typeface="+mj-lt"/>
+                <a:cs typeface="Lucida Sans"/>
+              </a:rPr>
+            </a:br>
+            <a:r>
+              <a:rPr lang="en-US" b="0" dirty="0"/>
+              <a:t>Wavelength 1.5-1.6 µm (step 0.01 µm) – width 1.2 µm</a:t>
+            </a:r>
+            <a:endParaRPr sz="2500" b="0" dirty="0">
+              <a:latin typeface="+mj-lt"/>
+              <a:cs typeface="Lucida Sans"/>
+            </a:endParaRPr>
+          </a:p>
+        </p:txBody>
+      </p:sp>
+      <p:pic>
+        <p:nvPicPr>
+          <p:cNvPr id="83" name="Gráfico 82">
+            <a:extLst>
+              <a:ext uri="{FF2B5EF4-FFF2-40B4-BE49-F238E27FC236}">
+                <a16:creationId xmlns:a16="http://schemas.microsoft.com/office/drawing/2014/main" id="{5C30E9EF-DE76-5513-A066-9229EA47E94D}"/>
+              </a:ext>
+            </a:extLst>
+          </p:cNvPr>
+          <p:cNvPicPr>
+            <a:picLocks noChangeAspect="1"/>
+          </p:cNvPicPr>
+          <p:nvPr/>
+        </p:nvPicPr>
+        <p:blipFill>
+          <a:blip r:embed="rId3">
+            <a:extLst>
+              <a:ext uri="{96DAC541-7B7A-43D3-8B79-37D633B846F1}">
+                <asvg:svgBlip xmlns:asvg="http://schemas.microsoft.com/office/drawing/2016/SVG/main" r:embed="rId4"/>
+              </a:ext>
+            </a:extLst>
+          </a:blip>
+          <a:stretch>
+            <a:fillRect/>
+          </a:stretch>
+        </p:blipFill>
+        <p:spPr>
+          <a:xfrm>
+            <a:off x="5045006" y="6356057"/>
+            <a:ext cx="6409575" cy="363174"/>
+          </a:xfrm>
+          <a:prstGeom prst="rect">
+            <a:avLst/>
+          </a:prstGeom>
+        </p:spPr>
+      </p:pic>
+      <p:sp>
+        <p:nvSpPr>
+          <p:cNvPr id="84" name="Marcador de número de diapositiva 83">
+            <a:extLst>
+              <a:ext uri="{FF2B5EF4-FFF2-40B4-BE49-F238E27FC236}">
+                <a16:creationId xmlns:a16="http://schemas.microsoft.com/office/drawing/2014/main" id="{925A3330-1313-7F34-4B15-C5E7C2F9E00A}"/>
+              </a:ext>
+            </a:extLst>
+          </p:cNvPr>
+          <p:cNvSpPr>
+            <a:spLocks noGrp="1"/>
+          </p:cNvSpPr>
+          <p:nvPr>
+            <p:ph type="sldNum" sz="quarter" idx="7"/>
+          </p:nvPr>
+        </p:nvSpPr>
+        <p:spPr/>
+        <p:txBody>
+          <a:bodyPr/>
+          <a:lstStyle/>
+          <a:p>
+            <a:fld id="{B6F15528-21DE-4FAA-801E-634DDDAF4B2B}" type="slidenum">
+              <a:rPr lang="es-ES" smtClean="0"/>
+              <a:t>6</a:t>
+            </a:fld>
+            <a:endParaRPr lang="es-ES"/>
+          </a:p>
+        </p:txBody>
+      </p:sp>
+      <p:sp>
+        <p:nvSpPr>
+          <p:cNvPr id="3" name="Marcador de pie de página 2">
+            <a:extLst>
+              <a:ext uri="{FF2B5EF4-FFF2-40B4-BE49-F238E27FC236}">
+                <a16:creationId xmlns:a16="http://schemas.microsoft.com/office/drawing/2014/main" id="{EAF81561-6788-3FDA-4D15-1C0186987DA9}"/>
+              </a:ext>
+            </a:extLst>
+          </p:cNvPr>
+          <p:cNvSpPr>
+            <a:spLocks noGrp="1"/>
+          </p:cNvSpPr>
+          <p:nvPr>
+            <p:ph type="ftr" sz="quarter" idx="5"/>
+          </p:nvPr>
+        </p:nvSpPr>
+        <p:spPr/>
+        <p:txBody>
+          <a:bodyPr/>
+          <a:lstStyle/>
+          <a:p>
+            <a:pPr marL="12700">
+              <a:spcBef>
+                <a:spcPts val="15"/>
+              </a:spcBef>
+            </a:pPr>
+            <a:r>
+              <a:rPr lang="es-ES" spc="-5"/>
+              <a:t>LAB 1.0 WAVEGUIDES</a:t>
+            </a:r>
+            <a:endParaRPr lang="es-ES" spc="-5" dirty="0"/>
+          </a:p>
+        </p:txBody>
+      </p:sp>
+      <p:sp>
+        <p:nvSpPr>
+          <p:cNvPr id="2" name="CuadroTexto 1">
+            <a:extLst>
+              <a:ext uri="{FF2B5EF4-FFF2-40B4-BE49-F238E27FC236}">
+                <a16:creationId xmlns:a16="http://schemas.microsoft.com/office/drawing/2014/main" id="{54AF25C7-6A94-41C1-403D-B4FFA92D0FF5}"/>
+              </a:ext>
+            </a:extLst>
+          </p:cNvPr>
+          <p:cNvSpPr txBox="1"/>
+          <p:nvPr/>
+        </p:nvSpPr>
+        <p:spPr>
+          <a:xfrm>
+            <a:off x="609600" y="1371600"/>
+            <a:ext cx="11199971" cy="1384995"/>
+          </a:xfrm>
+          <a:prstGeom prst="rect">
+            <a:avLst/>
+          </a:prstGeom>
+          <a:solidFill>
+            <a:schemeClr val="bg1">
+              <a:lumMod val="95000"/>
+            </a:schemeClr>
+          </a:solidFill>
+          <a:ln w="28575">
+            <a:solidFill>
+              <a:srgbClr val="E0700D"/>
+            </a:solidFill>
+          </a:ln>
+        </p:spPr>
+        <p:txBody>
+          <a:bodyPr wrap="square" rtlCol="0">
+            <a:spAutoFit/>
+          </a:bodyPr>
+          <a:lstStyle/>
+          <a:p>
+            <a:pPr algn="just"/>
+            <a:r>
+              <a:rPr lang="es-ES" sz="1400" dirty="0">
+                <a:latin typeface="Arial" panose="020B0604020202020204" pitchFamily="34" charset="0"/>
+                <a:cs typeface="Arial" panose="020B0604020202020204" pitchFamily="34" charset="0"/>
+              </a:rPr>
+              <a:t>La guía </a:t>
+            </a:r>
+            <a:r>
+              <a:rPr lang="es-ES" sz="1400" dirty="0" err="1">
+                <a:latin typeface="Arial" panose="020B0604020202020204" pitchFamily="34" charset="0"/>
+                <a:cs typeface="Arial" panose="020B0604020202020204" pitchFamily="34" charset="0"/>
+              </a:rPr>
+              <a:t>Shallow</a:t>
+            </a:r>
+            <a:r>
+              <a:rPr lang="es-ES" sz="1400" dirty="0">
+                <a:latin typeface="Arial" panose="020B0604020202020204" pitchFamily="34" charset="0"/>
+                <a:cs typeface="Arial" panose="020B0604020202020204" pitchFamily="34" charset="0"/>
+              </a:rPr>
+              <a:t> presenta </a:t>
+            </a:r>
+            <a:r>
+              <a:rPr lang="es-ES" sz="1400" dirty="0" err="1">
+                <a:latin typeface="Arial" panose="020B0604020202020204" pitchFamily="34" charset="0"/>
+                <a:cs typeface="Arial" panose="020B0604020202020204" pitchFamily="34" charset="0"/>
+              </a:rPr>
+              <a:t>n_eff</a:t>
+            </a:r>
+            <a:r>
+              <a:rPr lang="es-ES" sz="1400" dirty="0">
+                <a:latin typeface="Arial" panose="020B0604020202020204" pitchFamily="34" charset="0"/>
+                <a:cs typeface="Arial" panose="020B0604020202020204" pitchFamily="34" charset="0"/>
+              </a:rPr>
+              <a:t> ligeramente mayor que la </a:t>
+            </a:r>
+            <a:r>
+              <a:rPr lang="es-ES" sz="1400" dirty="0" err="1">
+                <a:latin typeface="Arial" panose="020B0604020202020204" pitchFamily="34" charset="0"/>
+                <a:cs typeface="Arial" panose="020B0604020202020204" pitchFamily="34" charset="0"/>
+              </a:rPr>
+              <a:t>deep</a:t>
+            </a:r>
+            <a:r>
+              <a:rPr lang="es-ES" sz="1400" dirty="0">
+                <a:latin typeface="Arial" panose="020B0604020202020204" pitchFamily="34" charset="0"/>
+                <a:cs typeface="Arial" panose="020B0604020202020204" pitchFamily="34" charset="0"/>
+              </a:rPr>
+              <a:t> para los modos de orden superior. El </a:t>
+            </a:r>
+            <a:r>
+              <a:rPr lang="es-ES" sz="1400" dirty="0" err="1">
+                <a:latin typeface="Arial" panose="020B0604020202020204" pitchFamily="34" charset="0"/>
+                <a:cs typeface="Arial" panose="020B0604020202020204" pitchFamily="34" charset="0"/>
+              </a:rPr>
+              <a:t>slab</a:t>
+            </a:r>
+            <a:r>
+              <a:rPr lang="es-ES" sz="1400" dirty="0">
+                <a:latin typeface="Arial" panose="020B0604020202020204" pitchFamily="34" charset="0"/>
+                <a:cs typeface="Arial" panose="020B0604020202020204" pitchFamily="34" charset="0"/>
+              </a:rPr>
+              <a:t> de 150nm actúa como una capa de guía adicional que incrementa el confinamiento en el eje vertical, elevando los índices efectivos de los modos híbridos.</a:t>
+            </a:r>
+          </a:p>
+          <a:p>
+            <a:pPr algn="just"/>
+            <a:endParaRPr lang="es-ES" sz="1400" dirty="0">
+              <a:latin typeface="Arial" panose="020B0604020202020204" pitchFamily="34" charset="0"/>
+              <a:cs typeface="Arial" panose="020B0604020202020204" pitchFamily="34" charset="0"/>
+            </a:endParaRPr>
+          </a:p>
+          <a:p>
+            <a:pPr algn="just"/>
+            <a:r>
+              <a:rPr lang="es-ES" sz="1400" dirty="0">
+                <a:latin typeface="Arial" panose="020B0604020202020204" pitchFamily="34" charset="0"/>
+                <a:cs typeface="Arial" panose="020B0604020202020204" pitchFamily="34" charset="0"/>
+              </a:rPr>
+              <a:t>Adicionalmente, en la guía </a:t>
+            </a:r>
+            <a:r>
+              <a:rPr lang="es-ES" sz="1400" dirty="0" err="1">
+                <a:latin typeface="Arial" panose="020B0604020202020204" pitchFamily="34" charset="0"/>
+                <a:cs typeface="Arial" panose="020B0604020202020204" pitchFamily="34" charset="0"/>
+              </a:rPr>
+              <a:t>Shallow</a:t>
+            </a:r>
+            <a:r>
+              <a:rPr lang="es-ES" sz="1400" dirty="0">
+                <a:latin typeface="Arial" panose="020B0604020202020204" pitchFamily="34" charset="0"/>
+                <a:cs typeface="Arial" panose="020B0604020202020204" pitchFamily="34" charset="0"/>
+              </a:rPr>
+              <a:t> aparecen modos con </a:t>
+            </a:r>
+            <a:r>
+              <a:rPr lang="es-ES" sz="1400" dirty="0" err="1">
+                <a:latin typeface="Arial" panose="020B0604020202020204" pitchFamily="34" charset="0"/>
+                <a:cs typeface="Arial" panose="020B0604020202020204" pitchFamily="34" charset="0"/>
+              </a:rPr>
+              <a:t>fraction_TE</a:t>
+            </a:r>
+            <a:r>
+              <a:rPr lang="es-ES" sz="1400" dirty="0">
+                <a:latin typeface="Arial" panose="020B0604020202020204" pitchFamily="34" charset="0"/>
+                <a:cs typeface="Arial" panose="020B0604020202020204" pitchFamily="34" charset="0"/>
+              </a:rPr>
+              <a:t> intermedia (0.71, 0.18), indicando hibridación modal. La asimetría introducida por el </a:t>
+            </a:r>
+            <a:r>
+              <a:rPr lang="es-ES" sz="1400" dirty="0" err="1">
+                <a:latin typeface="Arial" panose="020B0604020202020204" pitchFamily="34" charset="0"/>
+                <a:cs typeface="Arial" panose="020B0604020202020204" pitchFamily="34" charset="0"/>
+              </a:rPr>
+              <a:t>slab</a:t>
+            </a:r>
+            <a:r>
+              <a:rPr lang="es-ES" sz="1400" dirty="0">
+                <a:latin typeface="Arial" panose="020B0604020202020204" pitchFamily="34" charset="0"/>
+                <a:cs typeface="Arial" panose="020B0604020202020204" pitchFamily="34" charset="0"/>
+              </a:rPr>
+              <a:t> rompe la separación limpia entre polarizaciones TE y TM, generando modos que mezclan ambas. En la guía </a:t>
+            </a:r>
+            <a:r>
+              <a:rPr lang="es-ES" sz="1400" dirty="0" err="1">
+                <a:latin typeface="Arial" panose="020B0604020202020204" pitchFamily="34" charset="0"/>
+                <a:cs typeface="Arial" panose="020B0604020202020204" pitchFamily="34" charset="0"/>
+              </a:rPr>
+              <a:t>deep</a:t>
+            </a:r>
+            <a:r>
+              <a:rPr lang="es-ES" sz="1400" dirty="0">
+                <a:latin typeface="Arial" panose="020B0604020202020204" pitchFamily="34" charset="0"/>
+                <a:cs typeface="Arial" panose="020B0604020202020204" pitchFamily="34" charset="0"/>
+              </a:rPr>
+              <a:t>, perfectamente simétrica verticalmente, los modos mantienen polarizaciones bien definidas.</a:t>
+            </a:r>
+            <a:endParaRPr lang="en-US" sz="1400" dirty="0">
+              <a:latin typeface="Arial" panose="020B0604020202020204" pitchFamily="34" charset="0"/>
+              <a:cs typeface="Arial" panose="020B0604020202020204" pitchFamily="34" charset="0"/>
+            </a:endParaRPr>
+          </a:p>
+        </p:txBody>
+      </p:sp>
+      <p:pic>
+        <p:nvPicPr>
+          <p:cNvPr id="6" name="Imagen 5">
+            <a:extLst>
+              <a:ext uri="{FF2B5EF4-FFF2-40B4-BE49-F238E27FC236}">
+                <a16:creationId xmlns:a16="http://schemas.microsoft.com/office/drawing/2014/main" id="{51EA2BE4-239D-EDBB-CB8B-9E2E1F685FF8}"/>
+              </a:ext>
+            </a:extLst>
+          </p:cNvPr>
+          <p:cNvPicPr>
+            <a:picLocks noChangeAspect="1"/>
+          </p:cNvPicPr>
+          <p:nvPr/>
+        </p:nvPicPr>
+        <p:blipFill>
+          <a:blip r:embed="rId5"/>
+          <a:stretch>
+            <a:fillRect/>
+          </a:stretch>
+        </p:blipFill>
+        <p:spPr>
+          <a:xfrm>
+            <a:off x="6858000" y="3129280"/>
+            <a:ext cx="3141518" cy="2548779"/>
+          </a:xfrm>
+          <a:prstGeom prst="rect">
+            <a:avLst/>
+          </a:prstGeom>
+        </p:spPr>
+      </p:pic>
+      <p:pic>
+        <p:nvPicPr>
+          <p:cNvPr id="13" name="Imagen 12">
+            <a:extLst>
+              <a:ext uri="{FF2B5EF4-FFF2-40B4-BE49-F238E27FC236}">
+                <a16:creationId xmlns:a16="http://schemas.microsoft.com/office/drawing/2014/main" id="{6CCA4AFE-E963-CA67-8C2E-902E9BA067D4}"/>
+              </a:ext>
+            </a:extLst>
+          </p:cNvPr>
+          <p:cNvPicPr>
+            <a:picLocks noChangeAspect="1"/>
+          </p:cNvPicPr>
+          <p:nvPr/>
+        </p:nvPicPr>
+        <p:blipFill>
+          <a:blip r:embed="rId6"/>
+          <a:stretch>
+            <a:fillRect/>
+          </a:stretch>
+        </p:blipFill>
+        <p:spPr>
+          <a:xfrm>
+            <a:off x="1843618" y="3136165"/>
+            <a:ext cx="3141518" cy="2536813"/>
+          </a:xfrm>
+          <a:prstGeom prst="rect">
+            <a:avLst/>
+          </a:prstGeom>
+        </p:spPr>
+      </p:pic>
+    </p:spTree>
+    <p:extLst>
+      <p:ext uri="{BB962C8B-B14F-4D97-AF65-F5344CB8AC3E}">
+        <p14:creationId xmlns:p14="http://schemas.microsoft.com/office/powerpoint/2010/main" val="1985738880"/>
+      </p:ext>
+    </p:extLst>
+  </p:cSld>
+  <p:clrMapOvr>
+    <a:masterClrMapping/>
+  </p:clrMapOvr>
+</p:sld>
+</file>
+
+<file path=ppt/slides/slide7.xml><?xml version="1.0" encoding="utf-8"?>
 <p:sld xmlns:a="http://schemas.openxmlformats.org/drawingml/2006/main" xmlns:r="http://schemas.openxmlformats.org/officeDocument/2006/relationships" xmlns:p="http://schemas.openxmlformats.org/presentationml/2006/main">
   <p:cSld>
     <p:spTree>
@@ -5919,7 +11217,7 @@
           <a:p>
             <a:fld id="{B6F15528-21DE-4FAA-801E-634DDDAF4B2B}" type="slidenum">
               <a:rPr lang="es-ES" smtClean="0"/>
-              <a:t>5</a:t>
+              <a:t>7</a:t>
             </a:fld>
             <a:endParaRPr lang="es-ES"/>
           </a:p>
@@ -5973,8 +11271,8 @@
         </p:nvSpPr>
         <p:spPr>
           <a:xfrm>
-            <a:off x="609441" y="4860334"/>
-            <a:ext cx="11199971" cy="1200329"/>
+            <a:off x="609441" y="4648200"/>
+            <a:ext cx="11199971" cy="1600438"/>
           </a:xfrm>
           <a:prstGeom prst="rect">
             <a:avLst/>
@@ -5998,62 +11296,130 @@
           <a:p>
             <a:pPr algn="just"/>
             <a:r>
-              <a:rPr lang="en-US" sz="1200" dirty="0">
-                <a:latin typeface="Arial" panose="020B0604020202020204" pitchFamily="34" charset="0"/>
-                <a:cs typeface="Arial" panose="020B0604020202020204" pitchFamily="34" charset="0"/>
-              </a:rPr>
-              <a:t>Comment results (neff changes this way with width, polarization behavior, </a:t>
-            </a:r>
-            <a:r>
-              <a:rPr lang="en-US" sz="1200" dirty="0" err="1">
-                <a:latin typeface="Arial" panose="020B0604020202020204" pitchFamily="34" charset="0"/>
-                <a:cs typeface="Arial" panose="020B0604020202020204" pitchFamily="34" charset="0"/>
-              </a:rPr>
-              <a:t>etc</a:t>
-            </a:r>
-            <a:r>
-              <a:rPr lang="en-US" sz="1200" dirty="0">
-                <a:latin typeface="Arial" panose="020B0604020202020204" pitchFamily="34" charset="0"/>
-                <a:cs typeface="Arial" panose="020B0604020202020204" pitchFamily="34" charset="0"/>
-              </a:rPr>
-              <a:t>…)</a:t>
+              <a:rPr lang="es-ES" sz="1400" dirty="0">
+                <a:latin typeface="Arial" panose="020B0604020202020204" pitchFamily="34" charset="0"/>
+                <a:cs typeface="Arial" panose="020B0604020202020204" pitchFamily="34" charset="0"/>
+              </a:rPr>
+              <a:t>A medida que incrementamos el ancho de la guía, </a:t>
+            </a:r>
+            <a:r>
+              <a:rPr lang="es-ES" sz="1400" dirty="0" err="1">
+                <a:latin typeface="Arial" panose="020B0604020202020204" pitchFamily="34" charset="0"/>
+                <a:cs typeface="Arial" panose="020B0604020202020204" pitchFamily="34" charset="0"/>
+              </a:rPr>
+              <a:t>n_eff</a:t>
+            </a:r>
+            <a:r>
+              <a:rPr lang="es-ES" sz="1400" dirty="0">
+                <a:latin typeface="Arial" panose="020B0604020202020204" pitchFamily="34" charset="0"/>
+                <a:cs typeface="Arial" panose="020B0604020202020204" pitchFamily="34" charset="0"/>
+              </a:rPr>
+              <a:t> crece para todos los modos al quedar el campo más confinado en el núcleo (mayor n). En este caso, el efecto es más pronunciado en los modos TE que en TM, dado que TE tiene su campo eléctrico en el eje horizontal, por lo que el ancho lateral afecta directamente su confinamiento.</a:t>
             </a:r>
           </a:p>
           <a:p>
             <a:pPr algn="just"/>
-            <a:endParaRPr lang="en-US" sz="1200" dirty="0">
+            <a:endParaRPr lang="es-ES" sz="1400" dirty="0">
               <a:latin typeface="Arial" panose="020B0604020202020204" pitchFamily="34" charset="0"/>
               <a:cs typeface="Arial" panose="020B0604020202020204" pitchFamily="34" charset="0"/>
             </a:endParaRPr>
           </a:p>
           <a:p>
             <a:pPr algn="just"/>
-            <a:endParaRPr lang="en-US" sz="1200" dirty="0">
+            <a:r>
+              <a:rPr lang="es-ES" sz="1400" dirty="0">
+                <a:latin typeface="Arial" panose="020B0604020202020204" pitchFamily="34" charset="0"/>
+                <a:cs typeface="Arial" panose="020B0604020202020204" pitchFamily="34" charset="0"/>
+              </a:rPr>
+              <a:t>Centrándonos en la polarización, a anchos pequeños, los modos de orden superior (</a:t>
+            </a:r>
+            <a:r>
+              <a:rPr lang="es-ES" sz="1400" dirty="0" err="1">
+                <a:solidFill>
+                  <a:srgbClr val="00B050"/>
+                </a:solidFill>
+                <a:latin typeface="Arial" panose="020B0604020202020204" pitchFamily="34" charset="0"/>
+                <a:cs typeface="Arial" panose="020B0604020202020204" pitchFamily="34" charset="0"/>
+              </a:rPr>
+              <a:t>Mode</a:t>
+            </a:r>
+            <a:r>
+              <a:rPr lang="es-ES" sz="1400" dirty="0">
+                <a:solidFill>
+                  <a:srgbClr val="00B050"/>
+                </a:solidFill>
+                <a:latin typeface="Arial" panose="020B0604020202020204" pitchFamily="34" charset="0"/>
+                <a:cs typeface="Arial" panose="020B0604020202020204" pitchFamily="34" charset="0"/>
+              </a:rPr>
+              <a:t> 2</a:t>
+            </a:r>
+            <a:r>
+              <a:rPr lang="es-ES" sz="1400" dirty="0">
+                <a:latin typeface="Arial" panose="020B0604020202020204" pitchFamily="34" charset="0"/>
+                <a:cs typeface="Arial" panose="020B0604020202020204" pitchFamily="34" charset="0"/>
+              </a:rPr>
+              <a:t>, </a:t>
+            </a:r>
+            <a:r>
+              <a:rPr lang="es-ES" sz="1400" dirty="0" err="1">
+                <a:solidFill>
+                  <a:srgbClr val="FF0000"/>
+                </a:solidFill>
+                <a:latin typeface="Arial" panose="020B0604020202020204" pitchFamily="34" charset="0"/>
+                <a:cs typeface="Arial" panose="020B0604020202020204" pitchFamily="34" charset="0"/>
+              </a:rPr>
+              <a:t>Mode</a:t>
+            </a:r>
+            <a:r>
+              <a:rPr lang="es-ES" sz="1400" dirty="0">
+                <a:solidFill>
+                  <a:srgbClr val="FF0000"/>
+                </a:solidFill>
+                <a:latin typeface="Arial" panose="020B0604020202020204" pitchFamily="34" charset="0"/>
+                <a:cs typeface="Arial" panose="020B0604020202020204" pitchFamily="34" charset="0"/>
+              </a:rPr>
+              <a:t> 3 </a:t>
+            </a:r>
+            <a:r>
+              <a:rPr lang="es-ES" sz="1400" dirty="0">
+                <a:latin typeface="Arial" panose="020B0604020202020204" pitchFamily="34" charset="0"/>
+                <a:cs typeface="Arial" panose="020B0604020202020204" pitchFamily="34" charset="0"/>
+              </a:rPr>
+              <a:t>en la gráfica) presentan TE </a:t>
+            </a:r>
+            <a:r>
+              <a:rPr lang="es-ES" sz="1400" dirty="0" err="1">
+                <a:latin typeface="Arial" panose="020B0604020202020204" pitchFamily="34" charset="0"/>
+                <a:cs typeface="Arial" panose="020B0604020202020204" pitchFamily="34" charset="0"/>
+              </a:rPr>
+              <a:t>Fraction</a:t>
+            </a:r>
+            <a:r>
+              <a:rPr lang="es-ES" sz="1400" dirty="0">
+                <a:latin typeface="Arial" panose="020B0604020202020204" pitchFamily="34" charset="0"/>
+                <a:cs typeface="Arial" panose="020B0604020202020204" pitchFamily="34" charset="0"/>
+              </a:rPr>
+              <a:t> intermedia, indicando hibridación. Al aumentar el ancho, el confinamiento lateral aumenta y la separación en </a:t>
+            </a:r>
+            <a:r>
+              <a:rPr lang="es-ES" sz="1400" dirty="0" err="1">
+                <a:latin typeface="Arial" panose="020B0604020202020204" pitchFamily="34" charset="0"/>
+                <a:cs typeface="Arial" panose="020B0604020202020204" pitchFamily="34" charset="0"/>
+              </a:rPr>
+              <a:t>n_eff</a:t>
+            </a:r>
+            <a:r>
+              <a:rPr lang="es-ES" sz="1400" dirty="0">
+                <a:latin typeface="Arial" panose="020B0604020202020204" pitchFamily="34" charset="0"/>
+                <a:cs typeface="Arial" panose="020B0604020202020204" pitchFamily="34" charset="0"/>
+              </a:rPr>
+              <a:t> entre modos crece, reduciendo el acoplamiento entre polarizaciones y generando modos más puros.</a:t>
+            </a:r>
+            <a:endParaRPr lang="en-US" sz="1400" dirty="0">
               <a:latin typeface="Arial" panose="020B0604020202020204" pitchFamily="34" charset="0"/>
               <a:cs typeface="Arial" panose="020B0604020202020204" pitchFamily="34" charset="0"/>
             </a:endParaRPr>
           </a:p>
-          <a:p>
-            <a:pPr algn="just"/>
-            <a:endParaRPr lang="en-US" sz="1200" dirty="0">
-              <a:latin typeface="Arial" panose="020B0604020202020204" pitchFamily="34" charset="0"/>
-              <a:cs typeface="Arial" panose="020B0604020202020204" pitchFamily="34" charset="0"/>
-            </a:endParaRPr>
-          </a:p>
-          <a:p>
-            <a:pPr algn="just"/>
-            <a:endParaRPr lang="en-US" sz="1200" dirty="0">
-              <a:latin typeface="Arial" panose="020B0604020202020204" pitchFamily="34" charset="0"/>
-              <a:cs typeface="Arial" panose="020B0604020202020204" pitchFamily="34" charset="0"/>
-            </a:endParaRPr>
-          </a:p>
-          <a:p>
-            <a:pPr algn="just"/>
-            <a:endParaRPr lang="en-US" sz="1200" dirty="0">
-              <a:latin typeface="Arial" panose="020B0604020202020204" pitchFamily="34" charset="0"/>
-              <a:cs typeface="Arial" panose="020B0604020202020204" pitchFamily="34" charset="0"/>
-            </a:endParaRPr>
-          </a:p>
         </p:txBody>
       </p:sp>
       <p:sp>
@@ -6070,7 +11436,7 @@
         </p:nvSpPr>
         <p:spPr>
           <a:xfrm>
-            <a:off x="609441" y="1418373"/>
+            <a:off x="609441" y="1219200"/>
             <a:ext cx="11199971" cy="3306028"/>
           </a:xfrm>
           <a:prstGeom prst="rect">
@@ -6108,57 +11474,36 @@
           </a:p>
         </p:txBody>
       </p:sp>
-      <p:sp>
-        <p:nvSpPr>
-          <p:cNvPr id="8" name="CuadroTexto 7">
-            <a:extLst>
-              <a:ext uri="{FF2B5EF4-FFF2-40B4-BE49-F238E27FC236}">
-                <a16:creationId xmlns:a16="http://schemas.microsoft.com/office/drawing/2014/main" id="{1EF5BFDA-8EC1-8C73-A932-F36C4DB93C73}"/>
-              </a:ext>
-            </a:extLst>
-          </p:cNvPr>
-          <p:cNvSpPr txBox="1"/>
+      <p:pic>
+        <p:nvPicPr>
+          <p:cNvPr id="5" name="Imagen 4" descr="Gráfico, Gráfico de líneas&#10;&#10;El contenido generado por IA puede ser incorrecto.">
+            <a:extLst>
+              <a:ext uri="{FF2B5EF4-FFF2-40B4-BE49-F238E27FC236}">
+                <a16:creationId xmlns:a16="http://schemas.microsoft.com/office/drawing/2014/main" id="{6739BB79-2B32-46C1-2450-9CF595B171B6}"/>
+              </a:ext>
+            </a:extLst>
+          </p:cNvPr>
+          <p:cNvPicPr>
+            <a:picLocks noChangeAspect="1"/>
+          </p:cNvPicPr>
           <p:nvPr/>
-        </p:nvSpPr>
+        </p:nvPicPr>
+        <p:blipFill>
+          <a:blip r:embed="rId5"/>
+          <a:stretch>
+            <a:fillRect/>
+          </a:stretch>
+        </p:blipFill>
         <p:spPr>
           <a:xfrm>
-            <a:off x="2286000" y="2671278"/>
-            <a:ext cx="7718580" cy="923330"/>
+            <a:off x="3533775" y="1382605"/>
+            <a:ext cx="5124450" cy="2983162"/>
           </a:xfrm>
           <a:prstGeom prst="rect">
             <a:avLst/>
           </a:prstGeom>
-          <a:noFill/>
         </p:spPr>
-        <p:txBody>
-          <a:bodyPr wrap="square" rtlCol="0">
-            <a:spAutoFit/>
-          </a:bodyPr>
-          <a:lstStyle/>
-          <a:p>
-            <a:pPr algn="ctr"/>
-            <a:r>
-              <a:rPr lang="en-US" b="1" dirty="0"/>
-              <a:t>deep</a:t>
-            </a:r>
-            <a:r>
-              <a:rPr lang="en-US" dirty="0"/>
-              <a:t> waveguide</a:t>
-            </a:r>
-          </a:p>
-          <a:p>
-            <a:pPr algn="ctr"/>
-            <a:endParaRPr lang="en-US" dirty="0"/>
-          </a:p>
-          <a:p>
-            <a:pPr algn="ctr"/>
-            <a:r>
-              <a:rPr lang="en-US" dirty="0"/>
-              <a:t>Paste plot here</a:t>
-            </a:r>
-          </a:p>
-        </p:txBody>
-      </p:sp>
+      </p:pic>
     </p:spTree>
     <p:extLst>
       <p:ext uri="{BB962C8B-B14F-4D97-AF65-F5344CB8AC3E}">
@@ -6172,7 +11517,378 @@
 </p:sld>
 </file>
 
-<file path=ppt/slides/slide6.xml><?xml version="1.0" encoding="utf-8"?>
+<file path=ppt/slides/slide8.xml><?xml version="1.0" encoding="utf-8"?>
+<p:sld xmlns:a="http://schemas.openxmlformats.org/drawingml/2006/main" xmlns:r="http://schemas.openxmlformats.org/officeDocument/2006/relationships" xmlns:p="http://schemas.openxmlformats.org/presentationml/2006/main">
+  <p:cSld>
+    <p:spTree>
+      <p:nvGrpSpPr>
+        <p:cNvPr id="1" name="">
+          <a:extLst>
+            <a:ext uri="{FF2B5EF4-FFF2-40B4-BE49-F238E27FC236}">
+              <a16:creationId xmlns:a16="http://schemas.microsoft.com/office/drawing/2014/main" id="{28DE74BE-AED3-40CD-F06E-F9809FE996BA}"/>
+            </a:ext>
+          </a:extLst>
+        </p:cNvPr>
+        <p:cNvGrpSpPr/>
+        <p:nvPr/>
+      </p:nvGrpSpPr>
+      <p:grpSpPr>
+        <a:xfrm>
+          <a:off x="0" y="0"/>
+          <a:ext cx="0" cy="0"/>
+          <a:chOff x="0" y="0"/>
+          <a:chExt cx="0" cy="0"/>
+        </a:xfrm>
+      </p:grpSpPr>
+      <p:sp>
+        <p:nvSpPr>
+          <p:cNvPr id="16" name="object 16">
+            <a:extLst>
+              <a:ext uri="{FF2B5EF4-FFF2-40B4-BE49-F238E27FC236}">
+                <a16:creationId xmlns:a16="http://schemas.microsoft.com/office/drawing/2014/main" id="{0E575FC1-3816-9330-F834-EE4E5930B3B9}"/>
+              </a:ext>
+            </a:extLst>
+          </p:cNvPr>
+          <p:cNvSpPr txBox="1">
+            <a:spLocks noGrp="1"/>
+          </p:cNvSpPr>
+          <p:nvPr>
+            <p:ph type="title"/>
+          </p:nvPr>
+        </p:nvSpPr>
+        <p:spPr>
+          <a:xfrm>
+            <a:off x="685800" y="408883"/>
+            <a:ext cx="10994410" cy="705321"/>
+          </a:xfrm>
+          <a:prstGeom prst="rect">
+            <a:avLst/>
+          </a:prstGeom>
+        </p:spPr>
+        <p:txBody>
+          <a:bodyPr vert="horz" wrap="square" lIns="0" tIns="12700" rIns="0" bIns="0" rtlCol="0">
+            <a:spAutoFit/>
+          </a:bodyPr>
+          <a:lstStyle/>
+          <a:p>
+            <a:pPr marL="12700">
+              <a:lnSpc>
+                <a:spcPct val="100000"/>
+              </a:lnSpc>
+              <a:spcBef>
+                <a:spcPts val="100"/>
+              </a:spcBef>
+            </a:pPr>
+            <a:r>
+              <a:rPr lang="en-US" sz="2500" dirty="0"/>
+              <a:t>Learning outcome #3 </a:t>
+            </a:r>
+            <a:r>
+              <a:rPr lang="en-US" sz="2500" dirty="0" err="1"/>
+              <a:t>Continuación</a:t>
+            </a:r>
+            <a:r>
+              <a:rPr lang="en-US" sz="2500" dirty="0"/>
+              <a:t> – Width dependence</a:t>
+            </a:r>
+            <a:br>
+              <a:rPr lang="es-ES" sz="2500" spc="-5" dirty="0">
+                <a:latin typeface="+mj-lt"/>
+                <a:cs typeface="Lucida Sans"/>
+              </a:rPr>
+            </a:br>
+            <a:r>
+              <a:rPr lang="en-US" b="0" dirty="0"/>
+              <a:t>Width 0.6 - 1.6 µm (step 0.1 µm) – Wavelength 1.55 µm </a:t>
+            </a:r>
+            <a:endParaRPr sz="2500" b="0" dirty="0">
+              <a:latin typeface="+mj-lt"/>
+              <a:cs typeface="Lucida Sans"/>
+            </a:endParaRPr>
+          </a:p>
+        </p:txBody>
+      </p:sp>
+      <p:pic>
+        <p:nvPicPr>
+          <p:cNvPr id="83" name="Gráfico 82">
+            <a:extLst>
+              <a:ext uri="{FF2B5EF4-FFF2-40B4-BE49-F238E27FC236}">
+                <a16:creationId xmlns:a16="http://schemas.microsoft.com/office/drawing/2014/main" id="{90782868-1987-D926-5A68-BF8ADB7600A1}"/>
+              </a:ext>
+            </a:extLst>
+          </p:cNvPr>
+          <p:cNvPicPr>
+            <a:picLocks noChangeAspect="1"/>
+          </p:cNvPicPr>
+          <p:nvPr/>
+        </p:nvPicPr>
+        <p:blipFill>
+          <a:blip r:embed="rId3">
+            <a:extLst>
+              <a:ext uri="{96DAC541-7B7A-43D3-8B79-37D633B846F1}">
+                <asvg:svgBlip xmlns:asvg="http://schemas.microsoft.com/office/drawing/2016/SVG/main" r:embed="rId4"/>
+              </a:ext>
+            </a:extLst>
+          </a:blip>
+          <a:stretch>
+            <a:fillRect/>
+          </a:stretch>
+        </p:blipFill>
+        <p:spPr>
+          <a:xfrm>
+            <a:off x="5045006" y="6356057"/>
+            <a:ext cx="6409575" cy="363174"/>
+          </a:xfrm>
+          <a:prstGeom prst="rect">
+            <a:avLst/>
+          </a:prstGeom>
+        </p:spPr>
+      </p:pic>
+      <p:sp>
+        <p:nvSpPr>
+          <p:cNvPr id="84" name="Marcador de número de diapositiva 83">
+            <a:extLst>
+              <a:ext uri="{FF2B5EF4-FFF2-40B4-BE49-F238E27FC236}">
+                <a16:creationId xmlns:a16="http://schemas.microsoft.com/office/drawing/2014/main" id="{CBE78DD7-E5C0-C87D-AC2F-4F5F2E1CDC4F}"/>
+              </a:ext>
+            </a:extLst>
+          </p:cNvPr>
+          <p:cNvSpPr>
+            <a:spLocks noGrp="1"/>
+          </p:cNvSpPr>
+          <p:nvPr>
+            <p:ph type="sldNum" sz="quarter" idx="7"/>
+          </p:nvPr>
+        </p:nvSpPr>
+        <p:spPr/>
+        <p:txBody>
+          <a:bodyPr/>
+          <a:lstStyle/>
+          <a:p>
+            <a:fld id="{B6F15528-21DE-4FAA-801E-634DDDAF4B2B}" type="slidenum">
+              <a:rPr lang="es-ES" smtClean="0"/>
+              <a:t>8</a:t>
+            </a:fld>
+            <a:endParaRPr lang="es-ES"/>
+          </a:p>
+        </p:txBody>
+      </p:sp>
+      <p:sp>
+        <p:nvSpPr>
+          <p:cNvPr id="3" name="Marcador de pie de página 2">
+            <a:extLst>
+              <a:ext uri="{FF2B5EF4-FFF2-40B4-BE49-F238E27FC236}">
+                <a16:creationId xmlns:a16="http://schemas.microsoft.com/office/drawing/2014/main" id="{DE0DF6EE-927B-235B-0BB7-5C347948A681}"/>
+              </a:ext>
+            </a:extLst>
+          </p:cNvPr>
+          <p:cNvSpPr>
+            <a:spLocks noGrp="1"/>
+          </p:cNvSpPr>
+          <p:nvPr>
+            <p:ph type="ftr" sz="quarter" idx="5"/>
+          </p:nvPr>
+        </p:nvSpPr>
+        <p:spPr/>
+        <p:txBody>
+          <a:bodyPr/>
+          <a:lstStyle/>
+          <a:p>
+            <a:pPr marL="12700">
+              <a:spcBef>
+                <a:spcPts val="15"/>
+              </a:spcBef>
+            </a:pPr>
+            <a:r>
+              <a:rPr lang="es-ES" spc="-5"/>
+              <a:t>LAB 1.0 WAVEGUIDES</a:t>
+            </a:r>
+            <a:endParaRPr lang="es-ES" spc="-5" dirty="0"/>
+          </a:p>
+        </p:txBody>
+      </p:sp>
+      <p:sp>
+        <p:nvSpPr>
+          <p:cNvPr id="2" name="CuadroTexto 1">
+            <a:extLst>
+              <a:ext uri="{FF2B5EF4-FFF2-40B4-BE49-F238E27FC236}">
+                <a16:creationId xmlns:a16="http://schemas.microsoft.com/office/drawing/2014/main" id="{35762BB9-02DE-374A-6AD2-B5F5CAE884B7}"/>
+              </a:ext>
+            </a:extLst>
+          </p:cNvPr>
+          <p:cNvSpPr txBox="1"/>
+          <p:nvPr/>
+        </p:nvSpPr>
+        <p:spPr>
+          <a:xfrm>
+            <a:off x="496014" y="1219200"/>
+            <a:ext cx="11199971" cy="738664"/>
+          </a:xfrm>
+          <a:prstGeom prst="rect">
+            <a:avLst/>
+          </a:prstGeom>
+          <a:solidFill>
+            <a:schemeClr val="bg1">
+              <a:lumMod val="95000"/>
+            </a:schemeClr>
+          </a:solidFill>
+          <a:ln w="28575">
+            <a:solidFill>
+              <a:srgbClr val="E0700D"/>
+            </a:solidFill>
+          </a:ln>
+        </p:spPr>
+        <p:txBody>
+          <a:bodyPr wrap="square" rtlCol="0">
+            <a:spAutoFit/>
+          </a:bodyPr>
+          <a:lstStyle/>
+          <a:p>
+            <a:pPr algn="just"/>
+            <a:r>
+              <a:rPr lang="es-ES" sz="1400" dirty="0">
+                <a:latin typeface="Arial" panose="020B0604020202020204" pitchFamily="34" charset="0"/>
+                <a:cs typeface="Arial" panose="020B0604020202020204" pitchFamily="34" charset="0"/>
+              </a:rPr>
+              <a:t>Finalmente, para anchos pequeños observamos que los modos 2 y 3 tienen </a:t>
+            </a:r>
+            <a:r>
+              <a:rPr lang="es-ES" sz="1400" dirty="0" err="1">
+                <a:latin typeface="Arial" panose="020B0604020202020204" pitchFamily="34" charset="0"/>
+                <a:cs typeface="Arial" panose="020B0604020202020204" pitchFamily="34" charset="0"/>
+              </a:rPr>
+              <a:t>n_eff</a:t>
+            </a:r>
+            <a:r>
+              <a:rPr lang="es-ES" sz="1400" dirty="0">
+                <a:latin typeface="Arial" panose="020B0604020202020204" pitchFamily="34" charset="0"/>
+                <a:cs typeface="Arial" panose="020B0604020202020204" pitchFamily="34" charset="0"/>
+              </a:rPr>
+              <a:t> muy próximo al </a:t>
+            </a:r>
+            <a:r>
+              <a:rPr lang="es-ES" sz="1400" dirty="0" err="1">
+                <a:latin typeface="Arial" panose="020B0604020202020204" pitchFamily="34" charset="0"/>
+                <a:cs typeface="Arial" panose="020B0604020202020204" pitchFamily="34" charset="0"/>
+              </a:rPr>
+              <a:t>n_cladding</a:t>
+            </a:r>
+            <a:r>
+              <a:rPr lang="es-ES" sz="1400" dirty="0">
+                <a:latin typeface="Arial" panose="020B0604020202020204" pitchFamily="34" charset="0"/>
+                <a:cs typeface="Arial" panose="020B0604020202020204" pitchFamily="34" charset="0"/>
+              </a:rPr>
+              <a:t>, lo que significa que están próximos al corte. Esto significa que cerca de 1.1µm para el Modo 2, y 1.4µm para el Modo 3, se alcanzaría la condición de guía monomodo, descartando los anchos menores a estos al ser </a:t>
+            </a:r>
+            <a:r>
+              <a:rPr lang="es-ES" sz="1400" dirty="0" err="1">
+                <a:latin typeface="Arial" panose="020B0604020202020204" pitchFamily="34" charset="0"/>
+                <a:cs typeface="Arial" panose="020B0604020202020204" pitchFamily="34" charset="0"/>
+              </a:rPr>
+              <a:t>n_eff</a:t>
+            </a:r>
+            <a:r>
+              <a:rPr lang="es-ES" sz="1400" dirty="0">
+                <a:latin typeface="Arial" panose="020B0604020202020204" pitchFamily="34" charset="0"/>
+                <a:cs typeface="Arial" panose="020B0604020202020204" pitchFamily="34" charset="0"/>
+              </a:rPr>
+              <a:t> &lt; </a:t>
+            </a:r>
+            <a:r>
+              <a:rPr lang="es-ES" sz="1400" dirty="0" err="1">
+                <a:latin typeface="Arial" panose="020B0604020202020204" pitchFamily="34" charset="0"/>
+                <a:cs typeface="Arial" panose="020B0604020202020204" pitchFamily="34" charset="0"/>
+              </a:rPr>
+              <a:t>n_cladding</a:t>
+            </a:r>
+            <a:r>
+              <a:rPr lang="es-ES" sz="1400" dirty="0">
+                <a:latin typeface="Arial" panose="020B0604020202020204" pitchFamily="34" charset="0"/>
+                <a:cs typeface="Arial" panose="020B0604020202020204" pitchFamily="34" charset="0"/>
+              </a:rPr>
+              <a:t>. </a:t>
+            </a:r>
+            <a:endParaRPr lang="en-US" sz="1400" dirty="0">
+              <a:latin typeface="Arial" panose="020B0604020202020204" pitchFamily="34" charset="0"/>
+              <a:cs typeface="Arial" panose="020B0604020202020204" pitchFamily="34" charset="0"/>
+            </a:endParaRPr>
+          </a:p>
+        </p:txBody>
+      </p:sp>
+      <p:pic>
+        <p:nvPicPr>
+          <p:cNvPr id="15" name="Imagen 14">
+            <a:extLst>
+              <a:ext uri="{FF2B5EF4-FFF2-40B4-BE49-F238E27FC236}">
+                <a16:creationId xmlns:a16="http://schemas.microsoft.com/office/drawing/2014/main" id="{212E71D2-7D2D-2BAD-2718-436476440756}"/>
+              </a:ext>
+            </a:extLst>
+          </p:cNvPr>
+          <p:cNvPicPr>
+            <a:picLocks noChangeAspect="1"/>
+          </p:cNvPicPr>
+          <p:nvPr/>
+        </p:nvPicPr>
+        <p:blipFill>
+          <a:blip r:embed="rId5"/>
+          <a:stretch>
+            <a:fillRect/>
+          </a:stretch>
+        </p:blipFill>
+        <p:spPr>
+          <a:xfrm>
+            <a:off x="1905711" y="2062860"/>
+            <a:ext cx="2894178" cy="4054217"/>
+          </a:xfrm>
+          <a:prstGeom prst="rect">
+            <a:avLst/>
+          </a:prstGeom>
+        </p:spPr>
+      </p:pic>
+      <p:pic>
+        <p:nvPicPr>
+          <p:cNvPr id="18" name="Imagen 17">
+            <a:extLst>
+              <a:ext uri="{FF2B5EF4-FFF2-40B4-BE49-F238E27FC236}">
+                <a16:creationId xmlns:a16="http://schemas.microsoft.com/office/drawing/2014/main" id="{44426684-88D9-3D1D-F9E1-2A1347EC6C7A}"/>
+              </a:ext>
+            </a:extLst>
+          </p:cNvPr>
+          <p:cNvPicPr>
+            <a:picLocks noChangeAspect="1"/>
+          </p:cNvPicPr>
+          <p:nvPr/>
+        </p:nvPicPr>
+        <p:blipFill>
+          <a:blip r:embed="rId6"/>
+          <a:stretch>
+            <a:fillRect/>
+          </a:stretch>
+        </p:blipFill>
+        <p:spPr>
+          <a:xfrm>
+            <a:off x="7392113" y="2062859"/>
+            <a:ext cx="2541188" cy="4054217"/>
+          </a:xfrm>
+          <a:prstGeom prst="rect">
+            <a:avLst/>
+          </a:prstGeom>
+        </p:spPr>
+      </p:pic>
+    </p:spTree>
+    <p:extLst>
+      <p:ext uri="{BB962C8B-B14F-4D97-AF65-F5344CB8AC3E}">
+        <p14:creationId xmlns:p14="http://schemas.microsoft.com/office/powerpoint/2010/main" val="3617963141"/>
+      </p:ext>
+    </p:extLst>
+  </p:cSld>
+  <p:clrMapOvr>
+    <a:masterClrMapping/>
+  </p:clrMapOvr>
+</p:sld>
+</file>
+
+<file path=ppt/slides/slide9.xml><?xml version="1.0" encoding="utf-8"?>
 <p:sld xmlns:a="http://schemas.openxmlformats.org/drawingml/2006/main" xmlns:r="http://schemas.openxmlformats.org/officeDocument/2006/relationships" xmlns:p="http://schemas.openxmlformats.org/presentationml/2006/main">
   <p:cSld>
     <p:spTree>
@@ -6336,7 +12052,7 @@
           <a:p>
             <a:fld id="{B6F15528-21DE-4FAA-801E-634DDDAF4B2B}" type="slidenum">
               <a:rPr lang="es-ES" smtClean="0"/>
-              <a:t>6</a:t>
+              <a:t>9</a:t>
             </a:fld>
             <a:endParaRPr lang="es-ES"/>
           </a:p>
@@ -6376,522 +12092,160 @@
           </a:p>
         </p:txBody>
       </p:sp>
-      <mc:AlternateContent xmlns:mc="http://schemas.openxmlformats.org/markup-compatibility/2006" xmlns:a14="http://schemas.microsoft.com/office/drawing/2010/main">
-        <mc:Choice Requires="a14">
-          <p:sp>
-            <p:nvSpPr>
-              <p:cNvPr id="2" name="CuadroTexto 1">
-                <a:extLst>
-                  <a:ext uri="{FF2B5EF4-FFF2-40B4-BE49-F238E27FC236}">
-                    <a16:creationId xmlns:a16="http://schemas.microsoft.com/office/drawing/2014/main" id="{A440F587-93A3-E474-C0B0-883BB9DAFD85}"/>
-                  </a:ext>
-                </a:extLst>
-              </p:cNvPr>
-              <p:cNvSpPr txBox="1"/>
-              <p:nvPr/>
-            </p:nvSpPr>
-            <p:spPr>
-              <a:xfrm>
-                <a:off x="609441" y="4860334"/>
-                <a:ext cx="11198542" cy="1361911"/>
-              </a:xfrm>
-              <a:prstGeom prst="rect">
-                <a:avLst/>
-              </a:prstGeom>
-              <a:solidFill>
-                <a:schemeClr val="bg1">
-                  <a:lumMod val="95000"/>
-                </a:schemeClr>
-              </a:solidFill>
-              <a:ln w="28575">
+      <p:sp>
+        <p:nvSpPr>
+          <p:cNvPr id="2" name="CuadroTexto 1">
+            <a:extLst>
+              <a:ext uri="{FF2B5EF4-FFF2-40B4-BE49-F238E27FC236}">
+                <a16:creationId xmlns:a16="http://schemas.microsoft.com/office/drawing/2014/main" id="{A440F587-93A3-E474-C0B0-883BB9DAFD85}"/>
+              </a:ext>
+            </a:extLst>
+          </p:cNvPr>
+          <p:cNvSpPr txBox="1"/>
+          <p:nvPr/>
+        </p:nvSpPr>
+        <p:spPr>
+          <a:xfrm>
+            <a:off x="609441" y="4860334"/>
+            <a:ext cx="11198542" cy="738664"/>
+          </a:xfrm>
+          <a:prstGeom prst="rect">
+            <a:avLst/>
+          </a:prstGeom>
+          <a:solidFill>
+            <a:schemeClr val="bg1">
+              <a:lumMod val="95000"/>
+            </a:schemeClr>
+          </a:solidFill>
+          <a:ln w="28575">
+            <a:solidFill>
+              <a:srgbClr val="E0700D"/>
+            </a:solidFill>
+          </a:ln>
+        </p:spPr>
+        <p:txBody>
+          <a:bodyPr wrap="square" rtlCol="0">
+            <a:spAutoFit/>
+          </a:bodyPr>
+          <a:lstStyle/>
+          <a:p>
+            <a:r>
+              <a:rPr lang="es-ES" sz="1400" dirty="0">
+                <a:latin typeface="Arial" panose="020B0604020202020204" pitchFamily="34" charset="0"/>
+                <a:cs typeface="Arial" panose="020B0604020202020204" pitchFamily="34" charset="0"/>
+              </a:rPr>
+              <a:t>El modelo compacto ajusta </a:t>
+            </a:r>
+            <a:r>
+              <a:rPr lang="es-ES" sz="1400" dirty="0" err="1">
+                <a:latin typeface="Arial" panose="020B0604020202020204" pitchFamily="34" charset="0"/>
+                <a:cs typeface="Arial" panose="020B0604020202020204" pitchFamily="34" charset="0"/>
+              </a:rPr>
+              <a:t>n_eff</a:t>
+            </a:r>
+            <a:r>
+              <a:rPr lang="es-ES" sz="1400" dirty="0">
+                <a:latin typeface="Arial" panose="020B0604020202020204" pitchFamily="34" charset="0"/>
+                <a:cs typeface="Arial" panose="020B0604020202020204" pitchFamily="34" charset="0"/>
+              </a:rPr>
+              <a:t>(λ) con un polinomio de segundo orden, del que se extraen directamente: </a:t>
+            </a:r>
+            <a:r>
+              <a:rPr lang="es-ES" sz="1400" dirty="0" err="1">
+                <a:latin typeface="Arial" panose="020B0604020202020204" pitchFamily="34" charset="0"/>
+                <a:cs typeface="Arial" panose="020B0604020202020204" pitchFamily="34" charset="0"/>
+              </a:rPr>
+              <a:t>n_eff</a:t>
+            </a:r>
+            <a:r>
+              <a:rPr lang="es-ES" sz="1400" dirty="0">
+                <a:latin typeface="Arial" panose="020B0604020202020204" pitchFamily="34" charset="0"/>
+                <a:cs typeface="Arial" panose="020B0604020202020204" pitchFamily="34" charset="0"/>
+              </a:rPr>
+              <a:t> a λ₀ </a:t>
+            </a:r>
+            <a:r>
+              <a:rPr lang="es-ES" sz="1400" dirty="0">
                 <a:solidFill>
-                  <a:srgbClr val="E0700D"/>
+                  <a:srgbClr val="C00000"/>
                 </a:solidFill>
-              </a:ln>
-            </p:spPr>
-            <p:txBody>
-              <a:bodyPr wrap="square" rtlCol="0">
-                <a:spAutoFit/>
-              </a:bodyPr>
-              <a:lstStyle/>
-              <a:p>
-                <a:pPr algn="just"/>
-                <a:r>
-                  <a:rPr lang="en-US" sz="1200" dirty="0">
-                    <a:latin typeface="Arial" panose="020B0604020202020204" pitchFamily="34" charset="0"/>
-                    <a:cs typeface="Arial" panose="020B0604020202020204" pitchFamily="34" charset="0"/>
-                  </a:rPr>
-                  <a:t>Find the second-degree polynomial coefficients and relate them with the group index and the dispersion parameter. </a:t>
-                </a:r>
-                <a14:m>
-                  <m:oMath xmlns:m="http://schemas.openxmlformats.org/officeDocument/2006/math">
-                    <m:d>
-                      <m:dPr>
-                        <m:begChr m:val="{"/>
-                        <m:endChr m:val=""/>
-                        <m:ctrlPr>
-                          <a:rPr lang="es-ES" sz="1200" b="0" i="1" smtClean="0">
-                            <a:latin typeface="Cambria Math" panose="02040503050406030204" pitchFamily="18" charset="0"/>
-                            <a:cs typeface="Arial" panose="020B0604020202020204" pitchFamily="34" charset="0"/>
-                          </a:rPr>
-                        </m:ctrlPr>
-                      </m:dPr>
-                      <m:e>
-                        <m:eqArr>
-                          <m:eqArrPr>
-                            <m:ctrlPr>
-                              <a:rPr lang="es-ES" sz="1200" b="0" i="1" smtClean="0">
-                                <a:latin typeface="Cambria Math" panose="02040503050406030204" pitchFamily="18" charset="0"/>
-                                <a:cs typeface="Arial" panose="020B0604020202020204" pitchFamily="34" charset="0"/>
-                              </a:rPr>
-                            </m:ctrlPr>
-                          </m:eqArrPr>
-                          <m:e>
-                            <m:sSub>
-                              <m:sSubPr>
-                                <m:ctrlPr>
-                                  <a:rPr lang="es-ES" sz="1200" b="0" i="1" smtClean="0">
-                                    <a:latin typeface="Cambria Math" panose="02040503050406030204" pitchFamily="18" charset="0"/>
-                                    <a:cs typeface="Arial" panose="020B0604020202020204" pitchFamily="34" charset="0"/>
-                                  </a:rPr>
-                                </m:ctrlPr>
-                              </m:sSubPr>
-                              <m:e>
-                                <m:r>
-                                  <a:rPr lang="es-ES" sz="1200" b="0" i="1" smtClean="0">
-                                    <a:latin typeface="Cambria Math" panose="02040503050406030204" pitchFamily="18" charset="0"/>
-                                    <a:cs typeface="Arial" panose="020B0604020202020204" pitchFamily="34" charset="0"/>
-                                  </a:rPr>
-                                  <m:t>𝑛</m:t>
-                                </m:r>
-                              </m:e>
-                              <m:sub>
-                                <m:r>
-                                  <a:rPr lang="es-ES" sz="1200" b="0" i="1" smtClean="0">
-                                    <a:latin typeface="Cambria Math" panose="02040503050406030204" pitchFamily="18" charset="0"/>
-                                    <a:cs typeface="Arial" panose="020B0604020202020204" pitchFamily="34" charset="0"/>
-                                  </a:rPr>
-                                  <m:t>𝑒𝑓𝑓</m:t>
-                                </m:r>
-                              </m:sub>
-                            </m:sSub>
-                            <m:r>
-                              <a:rPr lang="es-ES" sz="1200" b="0" i="1" smtClean="0">
-                                <a:latin typeface="Cambria Math" panose="02040503050406030204" pitchFamily="18" charset="0"/>
-                                <a:cs typeface="Arial" panose="020B0604020202020204" pitchFamily="34" charset="0"/>
-                              </a:rPr>
-                              <m:t>=</m:t>
-                            </m:r>
-                            <m:sSub>
-                              <m:sSubPr>
-                                <m:ctrlPr>
-                                  <a:rPr lang="es-ES" sz="1200" b="0" i="1" smtClean="0">
-                                    <a:latin typeface="Cambria Math" panose="02040503050406030204" pitchFamily="18" charset="0"/>
-                                    <a:cs typeface="Arial" panose="020B0604020202020204" pitchFamily="34" charset="0"/>
-                                  </a:rPr>
-                                </m:ctrlPr>
-                              </m:sSubPr>
-                              <m:e>
-                                <m:r>
-                                  <a:rPr lang="es-ES" sz="1200" b="0" i="1" smtClean="0">
-                                    <a:latin typeface="Cambria Math" panose="02040503050406030204" pitchFamily="18" charset="0"/>
-                                    <a:cs typeface="Arial" panose="020B0604020202020204" pitchFamily="34" charset="0"/>
-                                  </a:rPr>
-                                  <m:t>𝑛</m:t>
-                                </m:r>
-                              </m:e>
-                              <m:sub>
-                                <m:r>
-                                  <a:rPr lang="es-ES" sz="1200" b="0" i="1" smtClean="0">
-                                    <a:latin typeface="Cambria Math" panose="02040503050406030204" pitchFamily="18" charset="0"/>
-                                    <a:cs typeface="Arial" panose="020B0604020202020204" pitchFamily="34" charset="0"/>
-                                  </a:rPr>
-                                  <m:t>1</m:t>
-                                </m:r>
-                              </m:sub>
-                            </m:sSub>
-                          </m:e>
-                          <m:e>
-                            <m:sSub>
-                              <m:sSubPr>
-                                <m:ctrlPr>
-                                  <a:rPr lang="es-ES" sz="1200" b="0" i="1" smtClean="0">
-                                    <a:latin typeface="Cambria Math" panose="02040503050406030204" pitchFamily="18" charset="0"/>
-                                    <a:cs typeface="Arial" panose="020B0604020202020204" pitchFamily="34" charset="0"/>
-                                  </a:rPr>
-                                </m:ctrlPr>
-                              </m:sSubPr>
-                              <m:e>
-                                <m:r>
-                                  <a:rPr lang="es-ES" sz="1200" b="0" i="1" smtClean="0">
-                                    <a:latin typeface="Cambria Math" panose="02040503050406030204" pitchFamily="18" charset="0"/>
-                                    <a:cs typeface="Arial" panose="020B0604020202020204" pitchFamily="34" charset="0"/>
-                                  </a:rPr>
-                                  <m:t>𝑛</m:t>
-                                </m:r>
-                              </m:e>
-                              <m:sub>
-                                <m:r>
-                                  <a:rPr lang="es-ES" sz="1200" b="0" i="1" smtClean="0">
-                                    <a:latin typeface="Cambria Math" panose="02040503050406030204" pitchFamily="18" charset="0"/>
-                                    <a:cs typeface="Arial" panose="020B0604020202020204" pitchFamily="34" charset="0"/>
-                                  </a:rPr>
-                                  <m:t>𝑔</m:t>
-                                </m:r>
-                              </m:sub>
-                            </m:sSub>
-                            <m:r>
-                              <a:rPr lang="es-ES" sz="1200" b="0" i="1" smtClean="0">
-                                <a:latin typeface="Cambria Math" panose="02040503050406030204" pitchFamily="18" charset="0"/>
-                                <a:cs typeface="Arial" panose="020B0604020202020204" pitchFamily="34" charset="0"/>
-                              </a:rPr>
-                              <m:t>=</m:t>
-                            </m:r>
-                            <m:sSub>
-                              <m:sSubPr>
-                                <m:ctrlPr>
-                                  <a:rPr lang="es-ES" sz="1200" b="0" i="1" smtClean="0">
-                                    <a:latin typeface="Cambria Math" panose="02040503050406030204" pitchFamily="18" charset="0"/>
-                                    <a:cs typeface="Arial" panose="020B0604020202020204" pitchFamily="34" charset="0"/>
-                                  </a:rPr>
-                                </m:ctrlPr>
-                              </m:sSubPr>
-                              <m:e>
-                                <m:r>
-                                  <a:rPr lang="es-ES" sz="1200" b="0" i="1" smtClean="0">
-                                    <a:latin typeface="Cambria Math" panose="02040503050406030204" pitchFamily="18" charset="0"/>
-                                    <a:cs typeface="Arial" panose="020B0604020202020204" pitchFamily="34" charset="0"/>
-                                  </a:rPr>
-                                  <m:t>𝑛</m:t>
-                                </m:r>
-                              </m:e>
-                              <m:sub>
-                                <m:r>
-                                  <a:rPr lang="es-ES" sz="1200" b="0" i="1" smtClean="0">
-                                    <a:latin typeface="Cambria Math" panose="02040503050406030204" pitchFamily="18" charset="0"/>
-                                    <a:cs typeface="Arial" panose="020B0604020202020204" pitchFamily="34" charset="0"/>
-                                  </a:rPr>
-                                  <m:t>1</m:t>
-                                </m:r>
-                              </m:sub>
-                            </m:sSub>
-                            <m:r>
-                              <a:rPr lang="es-ES" sz="1200" b="0" i="1" smtClean="0">
-                                <a:latin typeface="Cambria Math" panose="02040503050406030204" pitchFamily="18" charset="0"/>
-                                <a:cs typeface="Arial" panose="020B0604020202020204" pitchFamily="34" charset="0"/>
-                              </a:rPr>
-                              <m:t>−</m:t>
-                            </m:r>
-                            <m:sSub>
-                              <m:sSubPr>
-                                <m:ctrlPr>
-                                  <a:rPr lang="es-ES" sz="1200" b="0" i="1" smtClean="0">
-                                    <a:latin typeface="Cambria Math" panose="02040503050406030204" pitchFamily="18" charset="0"/>
-                                    <a:cs typeface="Arial" panose="020B0604020202020204" pitchFamily="34" charset="0"/>
-                                  </a:rPr>
-                                </m:ctrlPr>
-                              </m:sSubPr>
-                              <m:e>
-                                <m:r>
-                                  <a:rPr lang="es-ES" sz="1200" b="0" i="1" smtClean="0">
-                                    <a:latin typeface="Cambria Math" panose="02040503050406030204" pitchFamily="18" charset="0"/>
-                                    <a:cs typeface="Arial" panose="020B0604020202020204" pitchFamily="34" charset="0"/>
-                                  </a:rPr>
-                                  <m:t>𝑛</m:t>
-                                </m:r>
-                              </m:e>
-                              <m:sub>
-                                <m:r>
-                                  <a:rPr lang="es-ES" sz="1200" b="0" i="1" smtClean="0">
-                                    <a:latin typeface="Cambria Math" panose="02040503050406030204" pitchFamily="18" charset="0"/>
-                                    <a:cs typeface="Arial" panose="020B0604020202020204" pitchFamily="34" charset="0"/>
-                                  </a:rPr>
-                                  <m:t>2</m:t>
-                                </m:r>
-                              </m:sub>
-                            </m:sSub>
-                            <m:sSub>
-                              <m:sSubPr>
-                                <m:ctrlPr>
-                                  <a:rPr lang="es-ES" sz="1200" b="0" i="1" smtClean="0">
-                                    <a:latin typeface="Cambria Math" panose="02040503050406030204" pitchFamily="18" charset="0"/>
-                                    <a:cs typeface="Arial" panose="020B0604020202020204" pitchFamily="34" charset="0"/>
-                                  </a:rPr>
-                                </m:ctrlPr>
-                              </m:sSubPr>
-                              <m:e>
-                                <m:r>
-                                  <a:rPr lang="es-ES" sz="1200" b="0" i="1" smtClean="0">
-                                    <a:latin typeface="Cambria Math" panose="02040503050406030204" pitchFamily="18" charset="0"/>
-                                    <a:cs typeface="Arial" panose="020B0604020202020204" pitchFamily="34" charset="0"/>
-                                  </a:rPr>
-                                  <m:t>𝜆</m:t>
-                                </m:r>
-                              </m:e>
-                              <m:sub>
-                                <m:r>
-                                  <a:rPr lang="es-ES" sz="1200" b="0" i="1" smtClean="0">
-                                    <a:latin typeface="Cambria Math" panose="02040503050406030204" pitchFamily="18" charset="0"/>
-                                    <a:cs typeface="Arial" panose="020B0604020202020204" pitchFamily="34" charset="0"/>
-                                  </a:rPr>
-                                  <m:t>0</m:t>
-                                </m:r>
-                              </m:sub>
-                            </m:sSub>
-                          </m:e>
-                          <m:e>
-                            <m:r>
-                              <a:rPr lang="es-ES" sz="1200" b="0" i="1" smtClean="0">
-                                <a:latin typeface="Cambria Math" panose="02040503050406030204" pitchFamily="18" charset="0"/>
-                                <a:cs typeface="Arial" panose="020B0604020202020204" pitchFamily="34" charset="0"/>
-                              </a:rPr>
-                              <m:t>𝐷</m:t>
-                            </m:r>
-                            <m:r>
-                              <a:rPr lang="es-ES" sz="1200" b="0" i="1" smtClean="0">
-                                <a:latin typeface="Cambria Math" panose="02040503050406030204" pitchFamily="18" charset="0"/>
-                                <a:cs typeface="Arial" panose="020B0604020202020204" pitchFamily="34" charset="0"/>
-                              </a:rPr>
-                              <m:t>=−</m:t>
-                            </m:r>
-                            <m:f>
-                              <m:fPr>
-                                <m:ctrlPr>
-                                  <a:rPr lang="es-ES" sz="1200" b="0" i="1" smtClean="0">
-                                    <a:latin typeface="Cambria Math" panose="02040503050406030204" pitchFamily="18" charset="0"/>
-                                    <a:cs typeface="Arial" panose="020B0604020202020204" pitchFamily="34" charset="0"/>
-                                  </a:rPr>
-                                </m:ctrlPr>
-                              </m:fPr>
-                              <m:num>
-                                <m:r>
-                                  <a:rPr lang="es-ES" sz="1200" b="0" i="1" smtClean="0">
-                                    <a:latin typeface="Cambria Math" panose="02040503050406030204" pitchFamily="18" charset="0"/>
-                                    <a:cs typeface="Arial" panose="020B0604020202020204" pitchFamily="34" charset="0"/>
-                                  </a:rPr>
-                                  <m:t>2</m:t>
-                                </m:r>
-                                <m:sSub>
-                                  <m:sSubPr>
-                                    <m:ctrlPr>
-                                      <a:rPr lang="es-ES" sz="1200" b="0" i="1" smtClean="0">
-                                        <a:latin typeface="Cambria Math" panose="02040503050406030204" pitchFamily="18" charset="0"/>
-                                        <a:cs typeface="Arial" panose="020B0604020202020204" pitchFamily="34" charset="0"/>
-                                      </a:rPr>
-                                    </m:ctrlPr>
-                                  </m:sSubPr>
-                                  <m:e>
-                                    <m:r>
-                                      <a:rPr lang="es-ES" sz="1200" b="0" i="1" smtClean="0">
-                                        <a:latin typeface="Cambria Math" panose="02040503050406030204" pitchFamily="18" charset="0"/>
-                                        <a:cs typeface="Arial" panose="020B0604020202020204" pitchFamily="34" charset="0"/>
-                                      </a:rPr>
-                                      <m:t>𝜆</m:t>
-                                    </m:r>
-                                  </m:e>
-                                  <m:sub>
-                                    <m:r>
-                                      <a:rPr lang="es-ES" sz="1200" b="0" i="1" smtClean="0">
-                                        <a:latin typeface="Cambria Math" panose="02040503050406030204" pitchFamily="18" charset="0"/>
-                                        <a:cs typeface="Arial" panose="020B0604020202020204" pitchFamily="34" charset="0"/>
-                                      </a:rPr>
-                                      <m:t>0</m:t>
-                                    </m:r>
-                                  </m:sub>
-                                </m:sSub>
-                                <m:sSub>
-                                  <m:sSubPr>
-                                    <m:ctrlPr>
-                                      <a:rPr lang="es-ES" sz="1200" b="0" i="1" smtClean="0">
-                                        <a:latin typeface="Cambria Math" panose="02040503050406030204" pitchFamily="18" charset="0"/>
-                                        <a:cs typeface="Arial" panose="020B0604020202020204" pitchFamily="34" charset="0"/>
-                                      </a:rPr>
-                                    </m:ctrlPr>
-                                  </m:sSubPr>
-                                  <m:e>
-                                    <m:r>
-                                      <a:rPr lang="es-ES" sz="1200" b="0" i="1" smtClean="0">
-                                        <a:latin typeface="Cambria Math" panose="02040503050406030204" pitchFamily="18" charset="0"/>
-                                        <a:cs typeface="Arial" panose="020B0604020202020204" pitchFamily="34" charset="0"/>
-                                      </a:rPr>
-                                      <m:t>𝑛</m:t>
-                                    </m:r>
-                                  </m:e>
-                                  <m:sub>
-                                    <m:r>
-                                      <a:rPr lang="es-ES" sz="1200" b="0" i="1" smtClean="0">
-                                        <a:latin typeface="Cambria Math" panose="02040503050406030204" pitchFamily="18" charset="0"/>
-                                        <a:cs typeface="Arial" panose="020B0604020202020204" pitchFamily="34" charset="0"/>
-                                      </a:rPr>
-                                      <m:t>3</m:t>
-                                    </m:r>
-                                  </m:sub>
-                                </m:sSub>
-                              </m:num>
-                              <m:den>
-                                <m:r>
-                                  <a:rPr lang="es-ES" sz="1200" b="0" i="1" smtClean="0">
-                                    <a:latin typeface="Cambria Math" panose="02040503050406030204" pitchFamily="18" charset="0"/>
-                                    <a:cs typeface="Arial" panose="020B0604020202020204" pitchFamily="34" charset="0"/>
-                                  </a:rPr>
-                                  <m:t>𝑐</m:t>
-                                </m:r>
-                              </m:den>
-                            </m:f>
-                            <m:d>
-                              <m:dPr>
-                                <m:begChr m:val="["/>
-                                <m:endChr m:val="]"/>
-                                <m:ctrlPr>
-                                  <a:rPr lang="es-ES" sz="1200" b="0" i="1" smtClean="0">
-                                    <a:latin typeface="Cambria Math" panose="02040503050406030204" pitchFamily="18" charset="0"/>
-                                    <a:cs typeface="Arial" panose="020B0604020202020204" pitchFamily="34" charset="0"/>
-                                  </a:rPr>
-                                </m:ctrlPr>
-                              </m:dPr>
-                              <m:e>
-                                <m:f>
-                                  <m:fPr>
-                                    <m:ctrlPr>
-                                      <a:rPr lang="es-ES" sz="1200" b="0" i="1" smtClean="0">
-                                        <a:latin typeface="Cambria Math" panose="02040503050406030204" pitchFamily="18" charset="0"/>
-                                        <a:cs typeface="Arial" panose="020B0604020202020204" pitchFamily="34" charset="0"/>
-                                      </a:rPr>
-                                    </m:ctrlPr>
-                                  </m:fPr>
-                                  <m:num>
-                                    <m:sSup>
-                                      <m:sSupPr>
-                                        <m:ctrlPr>
-                                          <a:rPr lang="es-ES" sz="1200" b="0" i="1" smtClean="0">
-                                            <a:latin typeface="Cambria Math" panose="02040503050406030204" pitchFamily="18" charset="0"/>
-                                            <a:cs typeface="Arial" panose="020B0604020202020204" pitchFamily="34" charset="0"/>
-                                          </a:rPr>
-                                        </m:ctrlPr>
-                                      </m:sSupPr>
-                                      <m:e>
-                                        <m:r>
-                                          <a:rPr lang="es-ES" sz="1200" b="0" i="1" smtClean="0">
-                                            <a:latin typeface="Cambria Math" panose="02040503050406030204" pitchFamily="18" charset="0"/>
-                                            <a:cs typeface="Arial" panose="020B0604020202020204" pitchFamily="34" charset="0"/>
-                                          </a:rPr>
-                                          <m:t>𝑠</m:t>
-                                        </m:r>
-                                      </m:e>
-                                      <m:sup>
-                                        <m:r>
-                                          <a:rPr lang="es-ES" sz="1200" b="0" i="1" smtClean="0">
-                                            <a:latin typeface="Cambria Math" panose="02040503050406030204" pitchFamily="18" charset="0"/>
-                                            <a:cs typeface="Arial" panose="020B0604020202020204" pitchFamily="34" charset="0"/>
-                                          </a:rPr>
-                                          <m:t>2</m:t>
-                                        </m:r>
-                                      </m:sup>
-                                    </m:sSup>
-                                  </m:num>
-                                  <m:den>
-                                    <m:r>
-                                      <a:rPr lang="es-ES" sz="1200" b="0" i="1" smtClean="0">
-                                        <a:latin typeface="Cambria Math" panose="02040503050406030204" pitchFamily="18" charset="0"/>
-                                        <a:cs typeface="Arial" panose="020B0604020202020204" pitchFamily="34" charset="0"/>
-                                      </a:rPr>
-                                      <m:t>𝑚</m:t>
-                                    </m:r>
-                                  </m:den>
-                                </m:f>
-                              </m:e>
-                            </m:d>
-                          </m:e>
-                        </m:eqArr>
-                      </m:e>
-                    </m:d>
-                  </m:oMath>
-                </a14:m>
-                <a:endParaRPr lang="es-ES" sz="1200" b="0" dirty="0">
-                  <a:latin typeface="Arial" panose="020B0604020202020204" pitchFamily="34" charset="0"/>
-                  <a:cs typeface="Arial" panose="020B0604020202020204" pitchFamily="34" charset="0"/>
-                </a:endParaRPr>
-              </a:p>
-              <a:p>
-                <a:pPr algn="just"/>
-                <a:r>
-                  <a:rPr lang="en-US" sz="1200" dirty="0">
-                    <a:latin typeface="Arial" panose="020B0604020202020204" pitchFamily="34" charset="0"/>
-                    <a:cs typeface="Arial" panose="020B0604020202020204" pitchFamily="34" charset="0"/>
-                  </a:rPr>
-                  <a:t> </a:t>
-                </a:r>
-              </a:p>
-              <a:p>
-                <a:pPr algn="just"/>
-                <a:r>
-                  <a:rPr lang="en-US" sz="1200" dirty="0">
-                    <a:latin typeface="Arial" panose="020B0604020202020204" pitchFamily="34" charset="0"/>
-                    <a:cs typeface="Arial" panose="020B0604020202020204" pitchFamily="34" charset="0"/>
-                  </a:rPr>
-                  <a:t>Comment on the results found for the TE0 and TM0 for both deep and shallow waveguides. </a:t>
-                </a:r>
-              </a:p>
-              <a:p>
-                <a:pPr algn="just"/>
-                <a:endParaRPr lang="en-US" sz="1200" dirty="0">
-                  <a:latin typeface="Arial" panose="020B0604020202020204" pitchFamily="34" charset="0"/>
-                  <a:cs typeface="Arial" panose="020B0604020202020204" pitchFamily="34" charset="0"/>
-                </a:endParaRPr>
-              </a:p>
-            </p:txBody>
-          </p:sp>
-        </mc:Choice>
-        <mc:Fallback xmlns="">
-          <p:sp>
-            <p:nvSpPr>
-              <p:cNvPr id="2" name="CuadroTexto 1">
-                <a:extLst>
-                  <a:ext uri="{FF2B5EF4-FFF2-40B4-BE49-F238E27FC236}">
-                    <a16:creationId xmlns:a16="http://schemas.microsoft.com/office/drawing/2014/main" id="{A440F587-93A3-E474-C0B0-883BB9DAFD85}"/>
-                  </a:ext>
-                </a:extLst>
-              </p:cNvPr>
-              <p:cNvSpPr txBox="1">
-                <a:spLocks noRot="1" noChangeAspect="1" noMove="1" noResize="1" noEditPoints="1" noAdjustHandles="1" noChangeArrowheads="1" noChangeShapeType="1" noTextEdit="1"/>
-              </p:cNvSpPr>
-              <p:nvPr/>
-            </p:nvSpPr>
-            <p:spPr>
-              <a:xfrm>
-                <a:off x="609441" y="4860334"/>
-                <a:ext cx="11198542" cy="1361911"/>
-              </a:xfrm>
-              <a:prstGeom prst="rect">
-                <a:avLst/>
-              </a:prstGeom>
-              <a:blipFill>
-                <a:blip r:embed="rId6"/>
-                <a:stretch>
-                  <a:fillRect/>
-                </a:stretch>
-              </a:blipFill>
-              <a:ln w="28575">
+                <a:latin typeface="Arial" panose="020B0604020202020204" pitchFamily="34" charset="0"/>
+                <a:cs typeface="Arial" panose="020B0604020202020204" pitchFamily="34" charset="0"/>
+              </a:rPr>
+              <a:t>(2) </a:t>
+            </a:r>
+            <a:r>
+              <a:rPr lang="es-ES" sz="1400" dirty="0">
+                <a:latin typeface="Arial" panose="020B0604020202020204" pitchFamily="34" charset="0"/>
+                <a:cs typeface="Arial" panose="020B0604020202020204" pitchFamily="34" charset="0"/>
+              </a:rPr>
+              <a:t>, el índice de grupo </a:t>
+            </a:r>
+            <a:r>
+              <a:rPr lang="es-ES" sz="1400" dirty="0" err="1">
+                <a:latin typeface="Arial" panose="020B0604020202020204" pitchFamily="34" charset="0"/>
+                <a:cs typeface="Arial" panose="020B0604020202020204" pitchFamily="34" charset="0"/>
+              </a:rPr>
+              <a:t>n_g</a:t>
+            </a:r>
+            <a:r>
+              <a:rPr lang="es-ES" sz="1400" dirty="0">
+                <a:latin typeface="Arial" panose="020B0604020202020204" pitchFamily="34" charset="0"/>
+                <a:cs typeface="Arial" panose="020B0604020202020204" pitchFamily="34" charset="0"/>
+              </a:rPr>
+              <a:t> </a:t>
+            </a:r>
+            <a:r>
+              <a:rPr lang="es-ES" sz="1400" dirty="0">
                 <a:solidFill>
-                  <a:srgbClr val="E0700D"/>
+                  <a:srgbClr val="C00000"/>
                 </a:solidFill>
-              </a:ln>
-            </p:spPr>
-            <p:txBody>
-              <a:bodyPr/>
-              <a:lstStyle/>
-              <a:p>
-                <a:r>
-                  <a:rPr lang="es-ES">
-                    <a:noFill/>
-                  </a:rPr>
-                  <a:t> </a:t>
-                </a:r>
-              </a:p>
-            </p:txBody>
-          </p:sp>
-        </mc:Fallback>
-      </mc:AlternateContent>
+                <a:latin typeface="Arial" panose="020B0604020202020204" pitchFamily="34" charset="0"/>
+                <a:cs typeface="Arial" panose="020B0604020202020204" pitchFamily="34" charset="0"/>
+              </a:rPr>
+              <a:t>(3) </a:t>
+            </a:r>
+            <a:r>
+              <a:rPr lang="es-ES" sz="1400" dirty="0">
+                <a:latin typeface="Arial" panose="020B0604020202020204" pitchFamily="34" charset="0"/>
+                <a:cs typeface="Arial" panose="020B0604020202020204" pitchFamily="34" charset="0"/>
+              </a:rPr>
+              <a:t>y el parámetro de dispersión D </a:t>
+            </a:r>
+            <a:r>
+              <a:rPr lang="es-ES" sz="1400" dirty="0">
+                <a:solidFill>
+                  <a:srgbClr val="C00000"/>
+                </a:solidFill>
+                <a:latin typeface="Arial" panose="020B0604020202020204" pitchFamily="34" charset="0"/>
+                <a:cs typeface="Arial" panose="020B0604020202020204" pitchFamily="34" charset="0"/>
+              </a:rPr>
+              <a:t>(4)</a:t>
+            </a:r>
+            <a:r>
+              <a:rPr lang="es-ES" sz="1400" dirty="0">
+                <a:latin typeface="Arial" panose="020B0604020202020204" pitchFamily="34" charset="0"/>
+                <a:cs typeface="Arial" panose="020B0604020202020204" pitchFamily="34" charset="0"/>
+              </a:rPr>
+              <a:t>. Este modelo es la base de la función de transferencia del </a:t>
+            </a:r>
+            <a:r>
+              <a:rPr lang="es-ES" sz="1400" dirty="0" err="1">
+                <a:latin typeface="Arial" panose="020B0604020202020204" pitchFamily="34" charset="0"/>
+                <a:cs typeface="Arial" panose="020B0604020202020204" pitchFamily="34" charset="0"/>
+              </a:rPr>
+              <a:t>waveguide</a:t>
+            </a:r>
+            <a:r>
+              <a:rPr lang="es-ES" sz="1400" dirty="0">
+                <a:latin typeface="Arial" panose="020B0604020202020204" pitchFamily="34" charset="0"/>
+                <a:cs typeface="Arial" panose="020B0604020202020204" pitchFamily="34" charset="0"/>
+              </a:rPr>
+              <a:t> en simulaciones de circuitos.</a:t>
+            </a:r>
+          </a:p>
+        </p:txBody>
+      </p:sp>
       <p:sp>
         <p:nvSpPr>
           <p:cNvPr id="5" name="Rectángulo 4">
@@ -6996,14 +12350,162 @@
           </a:p>
         </p:txBody>
       </p:sp>
+      <p:sp>
+        <p:nvSpPr>
+          <p:cNvPr id="8" name="CuadroTexto 7">
+            <a:extLst>
+              <a:ext uri="{FF2B5EF4-FFF2-40B4-BE49-F238E27FC236}">
+                <a16:creationId xmlns:a16="http://schemas.microsoft.com/office/drawing/2014/main" id="{0F38E924-A0E7-A039-C837-916BA77FE89B}"/>
+              </a:ext>
+            </a:extLst>
+          </p:cNvPr>
+          <p:cNvSpPr txBox="1"/>
+          <p:nvPr/>
+        </p:nvSpPr>
+        <p:spPr>
+          <a:xfrm>
+            <a:off x="6347361" y="4498712"/>
+            <a:ext cx="5486560" cy="276999"/>
+          </a:xfrm>
+          <a:prstGeom prst="rect">
+            <a:avLst/>
+          </a:prstGeom>
+          <a:noFill/>
+        </p:spPr>
+        <p:txBody>
+          <a:bodyPr wrap="square">
+            <a:spAutoFit/>
+          </a:bodyPr>
+          <a:lstStyle/>
+          <a:p>
+            <a:pPr algn="r"/>
+            <a:r>
+              <a:rPr lang="en-US" sz="1200" b="1" dirty="0">
+                <a:solidFill>
+                  <a:schemeClr val="tx1"/>
+                </a:solidFill>
+                <a:latin typeface="Arial" panose="020B0604020202020204" pitchFamily="34" charset="0"/>
+                <a:cs typeface="Arial" panose="020B0604020202020204" pitchFamily="34" charset="0"/>
+              </a:rPr>
+              <a:t>slab: 150nm</a:t>
+            </a:r>
+            <a:endParaRPr lang="en-US" sz="1200" dirty="0">
+              <a:solidFill>
+                <a:schemeClr val="tx1"/>
+              </a:solidFill>
+              <a:latin typeface="Arial" panose="020B0604020202020204" pitchFamily="34" charset="0"/>
+              <a:cs typeface="Arial" panose="020B0604020202020204" pitchFamily="34" charset="0"/>
+            </a:endParaRPr>
+          </a:p>
+        </p:txBody>
+      </p:sp>
+      <p:pic>
+        <p:nvPicPr>
+          <p:cNvPr id="7" name="Imagen 6" descr="Gráfico, Gráfico de líneas&#10;&#10;El contenido generado por IA puede ser incorrecto.">
+            <a:extLst>
+              <a:ext uri="{FF2B5EF4-FFF2-40B4-BE49-F238E27FC236}">
+                <a16:creationId xmlns:a16="http://schemas.microsoft.com/office/drawing/2014/main" id="{67547D36-F5E9-054E-B6D4-79E858A9BA0E}"/>
+              </a:ext>
+            </a:extLst>
+          </p:cNvPr>
+          <p:cNvPicPr>
+            <a:picLocks noChangeAspect="1"/>
+          </p:cNvPicPr>
+          <p:nvPr/>
+        </p:nvPicPr>
+        <p:blipFill>
+          <a:blip r:embed="rId5"/>
+          <a:stretch>
+            <a:fillRect/>
+          </a:stretch>
+        </p:blipFill>
+        <p:spPr>
+          <a:xfrm>
+            <a:off x="736499" y="1511995"/>
+            <a:ext cx="5232441" cy="3113527"/>
+          </a:xfrm>
+          <a:prstGeom prst="rect">
+            <a:avLst/>
+          </a:prstGeom>
+        </p:spPr>
+      </p:pic>
+      <p:pic>
+        <p:nvPicPr>
+          <p:cNvPr id="12" name="Imagen 11" descr="Gráfico, Gráfico de líneas&#10;&#10;El contenido generado por IA puede ser incorrecto.">
+            <a:extLst>
+              <a:ext uri="{FF2B5EF4-FFF2-40B4-BE49-F238E27FC236}">
+                <a16:creationId xmlns:a16="http://schemas.microsoft.com/office/drawing/2014/main" id="{A089519D-A28D-F47F-F05B-1215E214A69D}"/>
+              </a:ext>
+            </a:extLst>
+          </p:cNvPr>
+          <p:cNvPicPr>
+            <a:picLocks noChangeAspect="1"/>
+          </p:cNvPicPr>
+          <p:nvPr/>
+        </p:nvPicPr>
+        <p:blipFill>
+          <a:blip r:embed="rId6"/>
+          <a:stretch>
+            <a:fillRect/>
+          </a:stretch>
+        </p:blipFill>
+        <p:spPr>
+          <a:xfrm>
+            <a:off x="6455032" y="1520446"/>
+            <a:ext cx="5321857" cy="3213723"/>
+          </a:xfrm>
+          <a:prstGeom prst="rect">
+            <a:avLst/>
+          </a:prstGeom>
+        </p:spPr>
+      </p:pic>
+      <p:sp>
+        <p:nvSpPr>
+          <p:cNvPr id="10" name="CuadroTexto 9">
+            <a:extLst>
+              <a:ext uri="{FF2B5EF4-FFF2-40B4-BE49-F238E27FC236}">
+                <a16:creationId xmlns:a16="http://schemas.microsoft.com/office/drawing/2014/main" id="{9D261FD0-5BD5-F32A-8D50-731D8DF2E23B}"/>
+              </a:ext>
+            </a:extLst>
+          </p:cNvPr>
+          <p:cNvSpPr txBox="1"/>
+          <p:nvPr/>
+        </p:nvSpPr>
+        <p:spPr>
+          <a:xfrm>
+            <a:off x="4780280" y="5762644"/>
+            <a:ext cx="442750" cy="369332"/>
+          </a:xfrm>
+          <a:prstGeom prst="rect">
+            <a:avLst/>
+          </a:prstGeom>
+          <a:noFill/>
+        </p:spPr>
+        <p:txBody>
+          <a:bodyPr wrap="none" rtlCol="0">
+            <a:spAutoFit/>
+          </a:bodyPr>
+          <a:lstStyle/>
+          <a:p>
+            <a:r>
+              <a:rPr lang="es-ES" dirty="0">
+                <a:solidFill>
+                  <a:srgbClr val="C00000"/>
+                </a:solidFill>
+              </a:rPr>
+              <a:t>(3)</a:t>
+            </a:r>
+          </a:p>
+        </p:txBody>
+      </p:sp>
       <mc:AlternateContent xmlns:mc="http://schemas.openxmlformats.org/markup-compatibility/2006" xmlns:a14="http://schemas.microsoft.com/office/drawing/2010/main">
         <mc:Choice Requires="a14">
           <p:sp>
             <p:nvSpPr>
-              <p:cNvPr id="9" name="CuadroTexto 8">
+              <p:cNvPr id="4" name="CuadroTexto 3">
                 <a:extLst>
                   <a:ext uri="{FF2B5EF4-FFF2-40B4-BE49-F238E27FC236}">
-                    <a16:creationId xmlns:a16="http://schemas.microsoft.com/office/drawing/2014/main" id="{C59B6428-4395-242F-54D8-A9FC610F2D7A}"/>
+                    <a16:creationId xmlns:a16="http://schemas.microsoft.com/office/drawing/2014/main" id="{D5CD8482-DF01-3958-20CA-E3324323D78F}"/>
                   </a:ext>
                 </a:extLst>
               </p:cNvPr>
@@ -7012,8 +12514,8 @@
             </p:nvSpPr>
             <p:spPr>
               <a:xfrm>
-                <a:off x="609440" y="2709096"/>
-                <a:ext cx="5486559" cy="1200329"/>
+                <a:off x="5186781" y="5805390"/>
+                <a:ext cx="2204619" cy="299249"/>
               </a:xfrm>
               <a:prstGeom prst="rect">
                 <a:avLst/>
@@ -7021,78 +12523,179 @@
               <a:noFill/>
             </p:spPr>
             <p:txBody>
-              <a:bodyPr wrap="square" rtlCol="0">
+              <a:bodyPr wrap="square" lIns="0" tIns="0" rIns="0" bIns="0" rtlCol="0">
                 <a:spAutoFit/>
               </a:bodyPr>
               <a:lstStyle/>
               <a:p>
-                <a:pPr algn="ctr"/>
-                <a:r>
-                  <a:rPr lang="en-US" b="1" dirty="0"/>
-                  <a:t>deep</a:t>
-                </a:r>
-                <a:r>
-                  <a:rPr lang="en-US" dirty="0"/>
-                  <a:t> waveguide</a:t>
-                </a:r>
-              </a:p>
-              <a:p>
-                <a:pPr algn="ctr"/>
-                <a:endParaRPr lang="en-US" dirty="0"/>
-              </a:p>
-              <a:p>
-                <a:pPr algn="ctr"/>
-                <a:r>
-                  <a:rPr lang="en-US" b="1" dirty="0"/>
-                  <a:t>neff_TE0 vs </a:t>
-                </a:r>
                 <a14:m>
                   <m:oMath xmlns:m="http://schemas.openxmlformats.org/officeDocument/2006/math">
+                    <m:sSub>
+                      <m:sSubPr>
+                        <m:ctrlPr>
+                          <a:rPr lang="es-ES" i="1" smtClean="0">
+                            <a:latin typeface="Cambria Math" panose="02040503050406030204" pitchFamily="18" charset="0"/>
+                          </a:rPr>
+                        </m:ctrlPr>
+                      </m:sSubPr>
+                      <m:e>
+                        <m:r>
+                          <a:rPr lang="es-ES" b="0" i="1" smtClean="0">
+                            <a:latin typeface="Cambria Math" panose="02040503050406030204" pitchFamily="18" charset="0"/>
+                          </a:rPr>
+                          <m:t>𝑛</m:t>
+                        </m:r>
+                      </m:e>
+                      <m:sub>
+                        <m:r>
+                          <a:rPr lang="es-ES" b="0" i="1" smtClean="0">
+                            <a:latin typeface="Cambria Math" panose="02040503050406030204" pitchFamily="18" charset="0"/>
+                          </a:rPr>
+                          <m:t>𝑔</m:t>
+                        </m:r>
+                      </m:sub>
+                    </m:sSub>
+                    <m:d>
+                      <m:dPr>
+                        <m:ctrlPr>
+                          <a:rPr lang="es-ES" b="0" i="1" smtClean="0">
+                            <a:latin typeface="Cambria Math" panose="02040503050406030204" pitchFamily="18" charset="0"/>
+                          </a:rPr>
+                        </m:ctrlPr>
+                      </m:dPr>
+                      <m:e>
+                        <m:sSub>
+                          <m:sSubPr>
+                            <m:ctrlPr>
+                              <a:rPr lang="es-ES" b="0" i="1" smtClean="0">
+                                <a:latin typeface="Cambria Math" panose="02040503050406030204" pitchFamily="18" charset="0"/>
+                              </a:rPr>
+                            </m:ctrlPr>
+                          </m:sSubPr>
+                          <m:e>
+                            <m:r>
+                              <a:rPr lang="el-GR" i="1">
+                                <a:latin typeface="Cambria Math" panose="02040503050406030204" pitchFamily="18" charset="0"/>
+                              </a:rPr>
+                              <m:t>𝜆</m:t>
+                            </m:r>
+                          </m:e>
+                          <m:sub>
+                            <m:r>
+                              <a:rPr lang="es-ES" b="0" i="1" smtClean="0">
+                                <a:latin typeface="Cambria Math" panose="02040503050406030204" pitchFamily="18" charset="0"/>
+                              </a:rPr>
+                              <m:t>0</m:t>
+                            </m:r>
+                          </m:sub>
+                        </m:sSub>
+                      </m:e>
+                    </m:d>
                     <m:r>
-                      <a:rPr lang="es-ES" b="1" i="1" smtClean="0">
+                      <a:rPr lang="es-ES" b="0" i="1" smtClean="0">
                         <a:latin typeface="Cambria Math" panose="02040503050406030204" pitchFamily="18" charset="0"/>
                       </a:rPr>
-                      <m:t>𝝀</m:t>
+                      <m:t>=</m:t>
+                    </m:r>
+                    <m:sSub>
+                      <m:sSubPr>
+                        <m:ctrlPr>
+                          <a:rPr lang="es-ES" b="0" i="1" smtClean="0">
+                            <a:latin typeface="Cambria Math" panose="02040503050406030204" pitchFamily="18" charset="0"/>
+                          </a:rPr>
+                        </m:ctrlPr>
+                      </m:sSubPr>
+                      <m:e>
+                        <m:r>
+                          <a:rPr lang="es-ES" b="0" i="1" smtClean="0">
+                            <a:latin typeface="Cambria Math" panose="02040503050406030204" pitchFamily="18" charset="0"/>
+                          </a:rPr>
+                          <m:t>𝑛</m:t>
+                        </m:r>
+                      </m:e>
+                      <m:sub>
+                        <m:r>
+                          <a:rPr lang="es-ES" b="0" i="1" smtClean="0">
+                            <a:latin typeface="Cambria Math" panose="02040503050406030204" pitchFamily="18" charset="0"/>
+                          </a:rPr>
+                          <m:t>1</m:t>
+                        </m:r>
+                      </m:sub>
+                    </m:sSub>
+                    <m:r>
+                      <a:rPr lang="es-ES" b="0" i="1" smtClean="0">
+                        <a:latin typeface="Cambria Math" panose="02040503050406030204" pitchFamily="18" charset="0"/>
+                      </a:rPr>
+                      <m:t>− </m:t>
+                    </m:r>
+                    <m:sSub>
+                      <m:sSubPr>
+                        <m:ctrlPr>
+                          <a:rPr lang="es-ES" b="0" i="1" smtClean="0">
+                            <a:latin typeface="Cambria Math" panose="02040503050406030204" pitchFamily="18" charset="0"/>
+                          </a:rPr>
+                        </m:ctrlPr>
+                      </m:sSubPr>
+                      <m:e>
+                        <m:r>
+                          <a:rPr lang="es-ES" b="0" i="1" smtClean="0">
+                            <a:latin typeface="Cambria Math" panose="02040503050406030204" pitchFamily="18" charset="0"/>
+                          </a:rPr>
+                          <m:t>𝑛</m:t>
+                        </m:r>
+                      </m:e>
+                      <m:sub>
+                        <m:r>
+                          <a:rPr lang="es-ES" b="0" i="1" smtClean="0">
+                            <a:latin typeface="Cambria Math" panose="02040503050406030204" pitchFamily="18" charset="0"/>
+                          </a:rPr>
+                          <m:t>2</m:t>
+                        </m:r>
+                      </m:sub>
+                    </m:sSub>
+                    <m:r>
+                      <a:rPr lang="es-ES" b="0" i="1" smtClean="0">
+                        <a:latin typeface="Cambria Math" panose="02040503050406030204" pitchFamily="18" charset="0"/>
+                        <a:ea typeface="Cambria Math" panose="02040503050406030204" pitchFamily="18" charset="0"/>
+                      </a:rPr>
+                      <m:t>∙</m:t>
                     </m:r>
                   </m:oMath>
                 </a14:m>
                 <a:r>
-                  <a:rPr lang="en-US" b="1" dirty="0"/>
+                  <a:rPr lang="es-ES" dirty="0"/>
                   <a:t> </a:t>
-                </a:r>
-                <a:r>
-                  <a:rPr lang="en-US" dirty="0"/>
-                  <a:t>with the second-degree polynomial fit  </a:t>
-                </a:r>
-              </a:p>
-              <a:p>
-                <a:pPr algn="ctr"/>
-                <a:r>
-                  <a:rPr lang="en-US" dirty="0"/>
-                  <a:t>&amp; </a:t>
-                </a:r>
-                <a:r>
-                  <a:rPr lang="en-US" b="1" dirty="0"/>
-                  <a:t>neff_TM0 vs </a:t>
                 </a:r>
                 <a14:m>
                   <m:oMath xmlns:m="http://schemas.openxmlformats.org/officeDocument/2006/math">
-                    <m:r>
-                      <a:rPr lang="es-ES" b="1" i="1">
-                        <a:latin typeface="Cambria Math" panose="02040503050406030204" pitchFamily="18" charset="0"/>
-                      </a:rPr>
-                      <m:t>𝝀</m:t>
-                    </m:r>
+                    <m:sSub>
+                      <m:sSubPr>
+                        <m:ctrlPr>
+                          <a:rPr lang="es-ES" i="1">
+                            <a:latin typeface="Cambria Math" panose="02040503050406030204" pitchFamily="18" charset="0"/>
+                          </a:rPr>
+                        </m:ctrlPr>
+                      </m:sSubPr>
+                      <m:e>
+                        <m:r>
+                          <a:rPr lang="el-GR" i="1">
+                            <a:latin typeface="Cambria Math" panose="02040503050406030204" pitchFamily="18" charset="0"/>
+                          </a:rPr>
+                          <m:t>𝜆</m:t>
+                        </m:r>
+                      </m:e>
+                      <m:sub>
+                        <m:r>
+                          <a:rPr lang="es-ES" i="1">
+                            <a:latin typeface="Cambria Math" panose="02040503050406030204" pitchFamily="18" charset="0"/>
+                          </a:rPr>
+                          <m:t>0</m:t>
+                        </m:r>
+                      </m:sub>
+                    </m:sSub>
                   </m:oMath>
                 </a14:m>
-                <a:r>
-                  <a:rPr lang="en-US" b="1" dirty="0"/>
-                  <a:t> </a:t>
-                </a:r>
-                <a:r>
-                  <a:rPr lang="en-US" dirty="0"/>
-                  <a:t>with the second-degree polynomial fit </a:t>
-                </a:r>
+                <a:endParaRPr lang="es-ES" dirty="0"/>
               </a:p>
             </p:txBody>
           </p:sp>
@@ -7100,10 +12703,10 @@
         <mc:Fallback xmlns="">
           <p:sp>
             <p:nvSpPr>
-              <p:cNvPr id="9" name="CuadroTexto 8">
+              <p:cNvPr id="4" name="CuadroTexto 3">
                 <a:extLst>
                   <a:ext uri="{FF2B5EF4-FFF2-40B4-BE49-F238E27FC236}">
-                    <a16:creationId xmlns:a16="http://schemas.microsoft.com/office/drawing/2014/main" id="{C59B6428-4395-242F-54D8-A9FC610F2D7A}"/>
+                    <a16:creationId xmlns:a16="http://schemas.microsoft.com/office/drawing/2014/main" id="{D5CD8482-DF01-3958-20CA-E3324323D78F}"/>
                   </a:ext>
                 </a:extLst>
               </p:cNvPr>
@@ -7114,8 +12717,8 @@
             </p:nvSpPr>
             <p:spPr>
               <a:xfrm>
-                <a:off x="609440" y="2709096"/>
-                <a:ext cx="5486559" cy="1200329"/>
+                <a:off x="5186781" y="5805390"/>
+                <a:ext cx="2204619" cy="299249"/>
               </a:xfrm>
               <a:prstGeom prst="rect">
                 <a:avLst/>
@@ -7123,7 +12726,287 @@
               <a:blipFill>
                 <a:blip r:embed="rId7"/>
                 <a:stretch>
-                  <a:fillRect t="-2538" r="-556" b="-7107"/>
+                  <a:fillRect l="-2762" b="-22449"/>
+                </a:stretch>
+              </a:blipFill>
+            </p:spPr>
+            <p:txBody>
+              <a:bodyPr/>
+              <a:lstStyle/>
+              <a:p>
+                <a:r>
+                  <a:rPr lang="es-ES">
+                    <a:noFill/>
+                  </a:rPr>
+                  <a:t> </a:t>
+                </a:r>
+              </a:p>
+            </p:txBody>
+          </p:sp>
+        </mc:Fallback>
+      </mc:AlternateContent>
+      <p:sp>
+        <p:nvSpPr>
+          <p:cNvPr id="11" name="CuadroTexto 10">
+            <a:extLst>
+              <a:ext uri="{FF2B5EF4-FFF2-40B4-BE49-F238E27FC236}">
+                <a16:creationId xmlns:a16="http://schemas.microsoft.com/office/drawing/2014/main" id="{7359F9D9-2704-53E6-7754-381F5300BE80}"/>
+              </a:ext>
+            </a:extLst>
+          </p:cNvPr>
+          <p:cNvSpPr txBox="1"/>
+          <p:nvPr/>
+        </p:nvSpPr>
+        <p:spPr>
+          <a:xfrm>
+            <a:off x="8310981" y="5762643"/>
+            <a:ext cx="442750" cy="369332"/>
+          </a:xfrm>
+          <a:prstGeom prst="rect">
+            <a:avLst/>
+          </a:prstGeom>
+          <a:noFill/>
+        </p:spPr>
+        <p:txBody>
+          <a:bodyPr wrap="none" rtlCol="0">
+            <a:spAutoFit/>
+          </a:bodyPr>
+          <a:lstStyle/>
+          <a:p>
+            <a:r>
+              <a:rPr lang="es-ES" dirty="0">
+                <a:solidFill>
+                  <a:srgbClr val="C00000"/>
+                </a:solidFill>
+              </a:rPr>
+              <a:t>(4)</a:t>
+            </a:r>
+          </a:p>
+        </p:txBody>
+      </p:sp>
+      <mc:AlternateContent xmlns:mc="http://schemas.openxmlformats.org/markup-compatibility/2006" xmlns:a14="http://schemas.microsoft.com/office/drawing/2010/main">
+        <mc:Choice Requires="a14">
+          <p:sp>
+            <p:nvSpPr>
+              <p:cNvPr id="13" name="CuadroTexto 12">
+                <a:extLst>
+                  <a:ext uri="{FF2B5EF4-FFF2-40B4-BE49-F238E27FC236}">
+                    <a16:creationId xmlns:a16="http://schemas.microsoft.com/office/drawing/2014/main" id="{ACA74DC3-0AFD-FA50-FAE4-659ABEB80790}"/>
+                  </a:ext>
+                </a:extLst>
+              </p:cNvPr>
+              <p:cNvSpPr txBox="1"/>
+              <p:nvPr/>
+            </p:nvSpPr>
+            <p:spPr>
+              <a:xfrm>
+                <a:off x="8753731" y="5684289"/>
+                <a:ext cx="2417200" cy="526041"/>
+              </a:xfrm>
+              <a:prstGeom prst="rect">
+                <a:avLst/>
+              </a:prstGeom>
+              <a:noFill/>
+            </p:spPr>
+            <p:txBody>
+              <a:bodyPr wrap="none" lIns="0" tIns="0" rIns="0" bIns="0" rtlCol="0">
+                <a:spAutoFit/>
+              </a:bodyPr>
+              <a:lstStyle/>
+              <a:p>
+                <a:pPr/>
+                <a14:m>
+                  <m:oMathPara xmlns:m="http://schemas.openxmlformats.org/officeDocument/2006/math">
+                    <m:oMathParaPr>
+                      <m:jc m:val="centerGroup"/>
+                    </m:oMathParaPr>
+                    <m:oMath xmlns:m="http://schemas.openxmlformats.org/officeDocument/2006/math">
+                      <m:r>
+                        <a:rPr lang="es-ES" i="1" smtClean="0">
+                          <a:latin typeface="Cambria Math" panose="02040503050406030204" pitchFamily="18" charset="0"/>
+                        </a:rPr>
+                        <m:t>𝐷</m:t>
+                      </m:r>
+                      <m:r>
+                        <a:rPr lang="es-ES" i="0">
+                          <a:latin typeface="Cambria Math" panose="02040503050406030204" pitchFamily="18" charset="0"/>
+                        </a:rPr>
+                        <m:t>=−</m:t>
+                      </m:r>
+                      <m:f>
+                        <m:fPr>
+                          <m:ctrlPr>
+                            <a:rPr lang="es-ES" i="1">
+                              <a:latin typeface="Cambria Math" panose="02040503050406030204" pitchFamily="18" charset="0"/>
+                            </a:rPr>
+                          </m:ctrlPr>
+                        </m:fPr>
+                        <m:num>
+                          <m:r>
+                            <a:rPr lang="es-ES" i="0">
+                              <a:latin typeface="Cambria Math" panose="02040503050406030204" pitchFamily="18" charset="0"/>
+                            </a:rPr>
+                            <m:t>2⋅</m:t>
+                          </m:r>
+                          <m:sSub>
+                            <m:sSubPr>
+                              <m:ctrlPr>
+                                <a:rPr lang="es-ES" i="1">
+                                  <a:latin typeface="Cambria Math" panose="02040503050406030204" pitchFamily="18" charset="0"/>
+                                </a:rPr>
+                              </m:ctrlPr>
+                            </m:sSubPr>
+                            <m:e>
+                              <m:r>
+                                <a:rPr lang="es-ES" i="1">
+                                  <a:latin typeface="Cambria Math" panose="02040503050406030204" pitchFamily="18" charset="0"/>
+                                </a:rPr>
+                                <m:t>𝜆</m:t>
+                              </m:r>
+                            </m:e>
+                            <m:sub>
+                              <m:r>
+                                <a:rPr lang="es-ES" i="0">
+                                  <a:latin typeface="Cambria Math" panose="02040503050406030204" pitchFamily="18" charset="0"/>
+                                </a:rPr>
+                                <m:t>0</m:t>
+                              </m:r>
+                            </m:sub>
+                          </m:sSub>
+                          <m:r>
+                            <a:rPr lang="es-ES" i="0">
+                              <a:latin typeface="Cambria Math" panose="02040503050406030204" pitchFamily="18" charset="0"/>
+                            </a:rPr>
+                            <m:t>⋅</m:t>
+                          </m:r>
+                          <m:sSub>
+                            <m:sSubPr>
+                              <m:ctrlPr>
+                                <a:rPr lang="es-ES" i="1">
+                                  <a:latin typeface="Cambria Math" panose="02040503050406030204" pitchFamily="18" charset="0"/>
+                                </a:rPr>
+                              </m:ctrlPr>
+                            </m:sSubPr>
+                            <m:e>
+                              <m:r>
+                                <a:rPr lang="es-ES" i="1">
+                                  <a:latin typeface="Cambria Math" panose="02040503050406030204" pitchFamily="18" charset="0"/>
+                                </a:rPr>
+                                <m:t>𝑛</m:t>
+                              </m:r>
+                            </m:e>
+                            <m:sub>
+                              <m:r>
+                                <a:rPr lang="es-ES" i="0">
+                                  <a:latin typeface="Cambria Math" panose="02040503050406030204" pitchFamily="18" charset="0"/>
+                                </a:rPr>
+                                <m:t>3</m:t>
+                              </m:r>
+                            </m:sub>
+                          </m:sSub>
+                        </m:num>
+                        <m:den>
+                          <m:r>
+                            <a:rPr lang="es-ES" i="1">
+                              <a:latin typeface="Cambria Math" panose="02040503050406030204" pitchFamily="18" charset="0"/>
+                            </a:rPr>
+                            <m:t>𝑐</m:t>
+                          </m:r>
+                        </m:den>
+                      </m:f>
+                      <m:d>
+                        <m:dPr>
+                          <m:begChr m:val="["/>
+                          <m:endChr m:val="]"/>
+                          <m:ctrlPr>
+                            <a:rPr lang="es-ES" i="1">
+                              <a:latin typeface="Cambria Math" panose="02040503050406030204" pitchFamily="18" charset="0"/>
+                            </a:rPr>
+                          </m:ctrlPr>
+                        </m:dPr>
+                        <m:e>
+                          <m:f>
+                            <m:fPr>
+                              <m:type m:val="lin"/>
+                              <m:ctrlPr>
+                                <a:rPr lang="es-ES" i="1">
+                                  <a:latin typeface="Cambria Math" panose="02040503050406030204" pitchFamily="18" charset="0"/>
+                                </a:rPr>
+                              </m:ctrlPr>
+                            </m:fPr>
+                            <m:num>
+                              <m:sSup>
+                                <m:sSupPr>
+                                  <m:ctrlPr>
+                                    <a:rPr lang="es-ES" i="1">
+                                      <a:latin typeface="Cambria Math" panose="02040503050406030204" pitchFamily="18" charset="0"/>
+                                    </a:rPr>
+                                  </m:ctrlPr>
+                                </m:sSupPr>
+                                <m:e>
+                                  <m:r>
+                                    <a:rPr lang="es-ES" i="1">
+                                      <a:latin typeface="Cambria Math" panose="02040503050406030204" pitchFamily="18" charset="0"/>
+                                    </a:rPr>
+                                    <m:t>𝑠</m:t>
+                                  </m:r>
+                                </m:e>
+                                <m:sup>
+                                  <m:r>
+                                    <a:rPr lang="es-ES" i="0">
+                                      <a:latin typeface="Cambria Math" panose="02040503050406030204" pitchFamily="18" charset="0"/>
+                                    </a:rPr>
+                                    <m:t>2</m:t>
+                                  </m:r>
+                                </m:sup>
+                              </m:sSup>
+                            </m:num>
+                            <m:den>
+                              <m:r>
+                                <a:rPr lang="es-ES" i="1">
+                                  <a:latin typeface="Cambria Math" panose="02040503050406030204" pitchFamily="18" charset="0"/>
+                                </a:rPr>
+                                <m:t>𝑚</m:t>
+                              </m:r>
+                            </m:den>
+                          </m:f>
+                        </m:e>
+                      </m:d>
+                    </m:oMath>
+                  </m:oMathPara>
+                </a14:m>
+                <a:endParaRPr lang="es-ES" dirty="0"/>
+              </a:p>
+            </p:txBody>
+          </p:sp>
+        </mc:Choice>
+        <mc:Fallback xmlns="">
+          <p:sp>
+            <p:nvSpPr>
+              <p:cNvPr id="13" name="CuadroTexto 12">
+                <a:extLst>
+                  <a:ext uri="{FF2B5EF4-FFF2-40B4-BE49-F238E27FC236}">
+                    <a16:creationId xmlns:a16="http://schemas.microsoft.com/office/drawing/2014/main" id="{ACA74DC3-0AFD-FA50-FAE4-659ABEB80790}"/>
+                  </a:ext>
+                </a:extLst>
+              </p:cNvPr>
+              <p:cNvSpPr txBox="1">
+                <a:spLocks noRot="1" noChangeAspect="1" noMove="1" noResize="1" noEditPoints="1" noAdjustHandles="1" noChangeArrowheads="1" noChangeShapeType="1" noTextEdit="1"/>
+              </p:cNvSpPr>
+              <p:nvPr/>
+            </p:nvSpPr>
+            <p:spPr>
+              <a:xfrm>
+                <a:off x="8753731" y="5684289"/>
+                <a:ext cx="2417200" cy="526041"/>
+              </a:xfrm>
+              <a:prstGeom prst="rect">
+                <a:avLst/>
+              </a:prstGeom>
+              <a:blipFill>
+                <a:blip r:embed="rId8"/>
+                <a:stretch>
+                  <a:fillRect/>
                 </a:stretch>
               </a:blipFill>
             </p:spPr>
@@ -7146,10 +13029,10 @@
         <mc:Choice Requires="a14">
           <p:sp>
             <p:nvSpPr>
-              <p:cNvPr id="10" name="CuadroTexto 9">
+              <p:cNvPr id="15" name="CuadroTexto 14">
                 <a:extLst>
                   <a:ext uri="{FF2B5EF4-FFF2-40B4-BE49-F238E27FC236}">
-                    <a16:creationId xmlns:a16="http://schemas.microsoft.com/office/drawing/2014/main" id="{9320AF78-1FC6-19F4-8E0B-8A414F20C6DE}"/>
+                    <a16:creationId xmlns:a16="http://schemas.microsoft.com/office/drawing/2014/main" id="{D06457B3-B672-E3F6-7406-1BE635CA202E}"/>
                   </a:ext>
                 </a:extLst>
               </p:cNvPr>
@@ -7158,8 +13041,8 @@
             </p:nvSpPr>
             <p:spPr>
               <a:xfrm>
-                <a:off x="6321421" y="2709096"/>
-                <a:ext cx="5486559" cy="1200329"/>
+                <a:off x="1854287" y="5805390"/>
+                <a:ext cx="1830004" cy="299249"/>
               </a:xfrm>
               <a:prstGeom prst="rect">
                 <a:avLst/>
@@ -7167,78 +13050,114 @@
               <a:noFill/>
             </p:spPr>
             <p:txBody>
-              <a:bodyPr wrap="square" rtlCol="0">
+              <a:bodyPr wrap="square" lIns="0" tIns="0" rIns="0" bIns="0" rtlCol="0">
                 <a:spAutoFit/>
               </a:bodyPr>
               <a:lstStyle/>
               <a:p>
-                <a:pPr algn="ctr"/>
-                <a:r>
-                  <a:rPr lang="en-US" b="1" dirty="0"/>
-                  <a:t>shallow</a:t>
-                </a:r>
-                <a:r>
-                  <a:rPr lang="en-US" dirty="0"/>
-                  <a:t> waveguide</a:t>
-                </a:r>
-              </a:p>
-              <a:p>
-                <a:pPr algn="ctr"/>
-                <a:endParaRPr lang="en-US" dirty="0"/>
-              </a:p>
-              <a:p>
-                <a:pPr algn="ctr"/>
-                <a:r>
-                  <a:rPr lang="en-US" b="1" dirty="0"/>
-                  <a:t>neff_TE0 vs </a:t>
-                </a:r>
+                <a:pPr/>
                 <a14:m>
-                  <m:oMath xmlns:m="http://schemas.openxmlformats.org/officeDocument/2006/math">
-                    <m:r>
-                      <a:rPr lang="es-ES" b="1" i="1">
-                        <a:latin typeface="Cambria Math" panose="02040503050406030204" pitchFamily="18" charset="0"/>
-                      </a:rPr>
-                      <m:t>𝝀</m:t>
-                    </m:r>
-                  </m:oMath>
+                  <m:oMathPara xmlns:m="http://schemas.openxmlformats.org/officeDocument/2006/math">
+                    <m:oMathParaPr>
+                      <m:jc m:val="centerGroup"/>
+                    </m:oMathParaPr>
+                    <m:oMath xmlns:m="http://schemas.openxmlformats.org/officeDocument/2006/math">
+                      <m:sSub>
+                        <m:sSubPr>
+                          <m:ctrlPr>
+                            <a:rPr lang="es-ES" i="1" smtClean="0">
+                              <a:latin typeface="Cambria Math" panose="02040503050406030204" pitchFamily="18" charset="0"/>
+                            </a:rPr>
+                          </m:ctrlPr>
+                        </m:sSubPr>
+                        <m:e>
+                          <m:r>
+                            <a:rPr lang="es-ES" i="1">
+                              <a:latin typeface="Cambria Math" panose="02040503050406030204" pitchFamily="18" charset="0"/>
+                            </a:rPr>
+                            <m:t>𝑛</m:t>
+                          </m:r>
+                        </m:e>
+                        <m:sub>
+                          <m:r>
+                            <a:rPr lang="es-ES" i="1">
+                              <a:latin typeface="Cambria Math" panose="02040503050406030204" pitchFamily="18" charset="0"/>
+                            </a:rPr>
+                            <m:t>𝑒𝑓𝑓</m:t>
+                          </m:r>
+                        </m:sub>
+                      </m:sSub>
+                      <m:d>
+                        <m:dPr>
+                          <m:ctrlPr>
+                            <a:rPr lang="es-ES" i="1">
+                              <a:latin typeface="Cambria Math" panose="02040503050406030204" pitchFamily="18" charset="0"/>
+                            </a:rPr>
+                          </m:ctrlPr>
+                        </m:dPr>
+                        <m:e>
+                          <m:sSub>
+                            <m:sSubPr>
+                              <m:ctrlPr>
+                                <a:rPr lang="es-ES" i="1">
+                                  <a:latin typeface="Cambria Math" panose="02040503050406030204" pitchFamily="18" charset="0"/>
+                                </a:rPr>
+                              </m:ctrlPr>
+                            </m:sSubPr>
+                            <m:e>
+                              <m:r>
+                                <a:rPr lang="es-ES" i="1">
+                                  <a:latin typeface="Cambria Math" panose="02040503050406030204" pitchFamily="18" charset="0"/>
+                                </a:rPr>
+                                <m:t>𝜆</m:t>
+                              </m:r>
+                            </m:e>
+                            <m:sub>
+                              <m:r>
+                                <a:rPr lang="es-ES" i="0">
+                                  <a:latin typeface="Cambria Math" panose="02040503050406030204" pitchFamily="18" charset="0"/>
+                                </a:rPr>
+                                <m:t>0</m:t>
+                              </m:r>
+                            </m:sub>
+                          </m:sSub>
+                        </m:e>
+                      </m:d>
+                      <m:r>
+                        <a:rPr lang="es-ES" i="0">
+                          <a:latin typeface="Cambria Math" panose="02040503050406030204" pitchFamily="18" charset="0"/>
+                        </a:rPr>
+                        <m:t>=</m:t>
+                      </m:r>
+                      <m:sSub>
+                        <m:sSubPr>
+                          <m:ctrlPr>
+                            <a:rPr lang="es-ES" i="1">
+                              <a:latin typeface="Cambria Math" panose="02040503050406030204" pitchFamily="18" charset="0"/>
+                            </a:rPr>
+                          </m:ctrlPr>
+                        </m:sSubPr>
+                        <m:e>
+                          <m:r>
+                            <a:rPr lang="es-ES" i="1">
+                              <a:latin typeface="Cambria Math" panose="02040503050406030204" pitchFamily="18" charset="0"/>
+                            </a:rPr>
+                            <m:t>𝑛</m:t>
+                          </m:r>
+                        </m:e>
+                        <m:sub>
+                          <m:r>
+                            <a:rPr lang="es-ES" i="0">
+                              <a:latin typeface="Cambria Math" panose="02040503050406030204" pitchFamily="18" charset="0"/>
+                            </a:rPr>
+                            <m:t>1</m:t>
+                          </m:r>
+                        </m:sub>
+                      </m:sSub>
+                    </m:oMath>
+                  </m:oMathPara>
                 </a14:m>
-                <a:r>
-                  <a:rPr lang="en-US" b="1" dirty="0"/>
-                  <a:t> </a:t>
-                </a:r>
-                <a:r>
-                  <a:rPr lang="en-US" dirty="0"/>
-                  <a:t>with the second-degree polynomial fit  </a:t>
-                </a:r>
-              </a:p>
-              <a:p>
-                <a:pPr algn="ctr"/>
-                <a:r>
-                  <a:rPr lang="en-US" dirty="0"/>
-                  <a:t>&amp; </a:t>
-                </a:r>
-                <a:r>
-                  <a:rPr lang="en-US" b="1" dirty="0"/>
-                  <a:t>neff_TM0 vs </a:t>
-                </a:r>
-                <a14:m>
-                  <m:oMath xmlns:m="http://schemas.openxmlformats.org/officeDocument/2006/math">
-                    <m:r>
-                      <a:rPr lang="es-ES" b="1" i="1">
-                        <a:latin typeface="Cambria Math" panose="02040503050406030204" pitchFamily="18" charset="0"/>
-                      </a:rPr>
-                      <m:t>𝝀</m:t>
-                    </m:r>
-                  </m:oMath>
-                </a14:m>
-                <a:r>
-                  <a:rPr lang="en-US" b="1" dirty="0"/>
-                  <a:t> </a:t>
-                </a:r>
-                <a:r>
-                  <a:rPr lang="en-US" dirty="0"/>
-                  <a:t>with the second-degree polynomial fit </a:t>
-                </a:r>
+                <a:endParaRPr lang="es-ES" dirty="0"/>
               </a:p>
             </p:txBody>
           </p:sp>
@@ -7246,10 +13165,10 @@
         <mc:Fallback xmlns="">
           <p:sp>
             <p:nvSpPr>
-              <p:cNvPr id="10" name="CuadroTexto 9">
+              <p:cNvPr id="15" name="CuadroTexto 14">
                 <a:extLst>
                   <a:ext uri="{FF2B5EF4-FFF2-40B4-BE49-F238E27FC236}">
-                    <a16:creationId xmlns:a16="http://schemas.microsoft.com/office/drawing/2014/main" id="{9320AF78-1FC6-19F4-8E0B-8A414F20C6DE}"/>
+                    <a16:creationId xmlns:a16="http://schemas.microsoft.com/office/drawing/2014/main" id="{D06457B3-B672-E3F6-7406-1BE635CA202E}"/>
                   </a:ext>
                 </a:extLst>
               </p:cNvPr>
@@ -7260,16 +13179,16 @@
             </p:nvSpPr>
             <p:spPr>
               <a:xfrm>
-                <a:off x="6321421" y="2709096"/>
-                <a:ext cx="5486559" cy="1200329"/>
+                <a:off x="1854287" y="5805390"/>
+                <a:ext cx="1830004" cy="299249"/>
               </a:xfrm>
               <a:prstGeom prst="rect">
                 <a:avLst/>
               </a:prstGeom>
               <a:blipFill>
-                <a:blip r:embed="rId8"/>
+                <a:blip r:embed="rId9"/>
                 <a:stretch>
-                  <a:fillRect t="-2538" r="-556" b="-7107"/>
+                  <a:fillRect b="-28571"/>
                 </a:stretch>
               </a:blipFill>
             </p:spPr>
@@ -7290,10 +13209,10 @@
       </mc:AlternateContent>
       <p:sp>
         <p:nvSpPr>
-          <p:cNvPr id="8" name="CuadroTexto 7">
-            <a:extLst>
-              <a:ext uri="{FF2B5EF4-FFF2-40B4-BE49-F238E27FC236}">
-                <a16:creationId xmlns:a16="http://schemas.microsoft.com/office/drawing/2014/main" id="{0F38E924-A0E7-A039-C837-916BA77FE89B}"/>
+          <p:cNvPr id="17" name="CuadroTexto 16">
+            <a:extLst>
+              <a:ext uri="{FF2B5EF4-FFF2-40B4-BE49-F238E27FC236}">
+                <a16:creationId xmlns:a16="http://schemas.microsoft.com/office/drawing/2014/main" id="{7C175B47-B914-5646-7C40-03CE2721C1AD}"/>
               </a:ext>
             </a:extLst>
           </p:cNvPr>
@@ -7302,8 +13221,8 @@
         </p:nvSpPr>
         <p:spPr>
           <a:xfrm>
-            <a:off x="6347361" y="4498712"/>
-            <a:ext cx="5486560" cy="276999"/>
+            <a:off x="1632912" y="5770188"/>
+            <a:ext cx="442750" cy="369332"/>
           </a:xfrm>
           <a:prstGeom prst="rect">
             <a:avLst/>
@@ -7311,29 +13230,19 @@
           <a:noFill/>
         </p:spPr>
         <p:txBody>
-          <a:bodyPr wrap="square">
+          <a:bodyPr wrap="none" rtlCol="0">
             <a:spAutoFit/>
           </a:bodyPr>
           <a:lstStyle/>
           <a:p>
-            <a:pPr algn="r"/>
-            <a:r>
-              <a:rPr lang="en-US" sz="1200" b="1" dirty="0">
+            <a:r>
+              <a:rPr lang="es-ES" dirty="0">
                 <a:solidFill>
-                  <a:schemeClr val="tx1"/>
+                  <a:srgbClr val="C00000"/>
                 </a:solidFill>
-                <a:latin typeface="Arial" panose="020B0604020202020204" pitchFamily="34" charset="0"/>
-                <a:cs typeface="Arial" panose="020B0604020202020204" pitchFamily="34" charset="0"/>
-              </a:rPr>
-              <a:t>slab: 150nm</a:t>
-            </a:r>
-            <a:endParaRPr lang="en-US" sz="1200" dirty="0">
-              <a:solidFill>
-                <a:schemeClr val="tx1"/>
-              </a:solidFill>
-              <a:latin typeface="Arial" panose="020B0604020202020204" pitchFamily="34" charset="0"/>
-              <a:cs typeface="Arial" panose="020B0604020202020204" pitchFamily="34" charset="0"/>
-            </a:endParaRPr>
+              </a:rPr>
+              <a:t>(2)</a:t>
+            </a:r>
           </a:p>
         </p:txBody>
       </p:sp>
@@ -7343,548 +13252,6 @@
         <p14:creationId xmlns:p14="http://schemas.microsoft.com/office/powerpoint/2010/main" val="236054401"/>
       </p:ext>
     </p:extLst>
-  </p:cSld>
-  <p:clrMapOvr>
-    <a:masterClrMapping/>
-  </p:clrMapOvr>
-</p:sld>
-</file>
-
-<file path=ppt/slides/slide7.xml><?xml version="1.0" encoding="utf-8"?>
-<p:sld xmlns:a="http://schemas.openxmlformats.org/drawingml/2006/main" xmlns:r="http://schemas.openxmlformats.org/officeDocument/2006/relationships" xmlns:p="http://schemas.openxmlformats.org/presentationml/2006/main">
-  <p:cSld>
-    <p:spTree>
-      <p:nvGrpSpPr>
-        <p:cNvPr id="1" name="">
-          <a:extLst>
-            <a:ext uri="{FF2B5EF4-FFF2-40B4-BE49-F238E27FC236}">
-              <a16:creationId xmlns:a16="http://schemas.microsoft.com/office/drawing/2014/main" id="{25434E70-43B1-3881-1771-20FB4358471D}"/>
-            </a:ext>
-          </a:extLst>
-        </p:cNvPr>
-        <p:cNvGrpSpPr/>
-        <p:nvPr/>
-      </p:nvGrpSpPr>
-      <p:grpSpPr>
-        <a:xfrm>
-          <a:off x="0" y="0"/>
-          <a:ext cx="0" cy="0"/>
-          <a:chOff x="0" y="0"/>
-          <a:chExt cx="0" cy="0"/>
-        </a:xfrm>
-      </p:grpSpPr>
-      <p:sp>
-        <p:nvSpPr>
-          <p:cNvPr id="16" name="object 16">
-            <a:extLst>
-              <a:ext uri="{FF2B5EF4-FFF2-40B4-BE49-F238E27FC236}">
-                <a16:creationId xmlns:a16="http://schemas.microsoft.com/office/drawing/2014/main" id="{742C31CE-19F0-B995-0997-9A2D6A879BF7}"/>
-              </a:ext>
-            </a:extLst>
-          </p:cNvPr>
-          <p:cNvSpPr txBox="1">
-            <a:spLocks noGrp="1"/>
-          </p:cNvSpPr>
-          <p:nvPr>
-            <p:ph type="title"/>
-          </p:nvPr>
-        </p:nvSpPr>
-        <p:spPr>
-          <a:xfrm>
-            <a:off x="685800" y="408883"/>
-            <a:ext cx="10994410" cy="1090042"/>
-          </a:xfrm>
-          <a:prstGeom prst="rect">
-            <a:avLst/>
-          </a:prstGeom>
-        </p:spPr>
-        <p:txBody>
-          <a:bodyPr vert="horz" wrap="square" lIns="0" tIns="12700" rIns="0" bIns="0" rtlCol="0">
-            <a:spAutoFit/>
-          </a:bodyPr>
-          <a:lstStyle/>
-          <a:p>
-            <a:pPr marL="12700">
-              <a:lnSpc>
-                <a:spcPct val="100000"/>
-              </a:lnSpc>
-              <a:spcBef>
-                <a:spcPts val="100"/>
-              </a:spcBef>
-            </a:pPr>
-            <a:r>
-              <a:rPr lang="en-US" sz="2500" dirty="0"/>
-              <a:t>Learning outcome #5 – Bend waveguide radius vs. loss – deep</a:t>
-            </a:r>
-            <a:br>
-              <a:rPr lang="en-US" sz="2500" dirty="0"/>
-            </a:br>
-            <a:r>
-              <a:rPr lang="en-US" b="0" dirty="0"/>
-              <a:t>Find  neff_TE0 for </a:t>
-            </a:r>
-            <a:r>
-              <a:rPr lang="en-US" b="0" dirty="0" err="1"/>
-              <a:t>wvl</a:t>
-            </a:r>
-            <a:r>
-              <a:rPr lang="en-US" b="0" dirty="0"/>
-              <a:t> 1.55 µm, width 1.2 µm for R=25,50,75,100, 125,150 µm</a:t>
-            </a:r>
-            <a:br>
-              <a:rPr lang="en-US" sz="2500" dirty="0"/>
-            </a:br>
-            <a:endParaRPr lang="en-US" sz="2500" b="0" dirty="0">
-              <a:latin typeface="+mj-lt"/>
-              <a:cs typeface="Lucida Sans"/>
-            </a:endParaRPr>
-          </a:p>
-        </p:txBody>
-      </p:sp>
-      <p:pic>
-        <p:nvPicPr>
-          <p:cNvPr id="83" name="Gráfico 82">
-            <a:extLst>
-              <a:ext uri="{FF2B5EF4-FFF2-40B4-BE49-F238E27FC236}">
-                <a16:creationId xmlns:a16="http://schemas.microsoft.com/office/drawing/2014/main" id="{D688A609-F3DC-EE34-C536-683E70F32EAE}"/>
-              </a:ext>
-            </a:extLst>
-          </p:cNvPr>
-          <p:cNvPicPr>
-            <a:picLocks noChangeAspect="1"/>
-          </p:cNvPicPr>
-          <p:nvPr/>
-        </p:nvPicPr>
-        <p:blipFill>
-          <a:blip r:embed="rId3">
-            <a:extLst>
-              <a:ext uri="{96DAC541-7B7A-43D3-8B79-37D633B846F1}">
-                <asvg:svgBlip xmlns:asvg="http://schemas.microsoft.com/office/drawing/2016/SVG/main" r:embed="rId4"/>
-              </a:ext>
-            </a:extLst>
-          </a:blip>
-          <a:stretch>
-            <a:fillRect/>
-          </a:stretch>
-        </p:blipFill>
-        <p:spPr>
-          <a:xfrm>
-            <a:off x="5045006" y="6356057"/>
-            <a:ext cx="6409575" cy="363174"/>
-          </a:xfrm>
-          <a:prstGeom prst="rect">
-            <a:avLst/>
-          </a:prstGeom>
-        </p:spPr>
-      </p:pic>
-      <p:sp>
-        <p:nvSpPr>
-          <p:cNvPr id="84" name="Marcador de número de diapositiva 83">
-            <a:extLst>
-              <a:ext uri="{FF2B5EF4-FFF2-40B4-BE49-F238E27FC236}">
-                <a16:creationId xmlns:a16="http://schemas.microsoft.com/office/drawing/2014/main" id="{B6C672C6-89D4-7E67-2B94-811D081786A7}"/>
-              </a:ext>
-            </a:extLst>
-          </p:cNvPr>
-          <p:cNvSpPr>
-            <a:spLocks noGrp="1"/>
-          </p:cNvSpPr>
-          <p:nvPr>
-            <p:ph type="sldNum" sz="quarter" idx="7"/>
-          </p:nvPr>
-        </p:nvSpPr>
-        <p:spPr/>
-        <p:txBody>
-          <a:bodyPr/>
-          <a:lstStyle/>
-          <a:p>
-            <a:fld id="{B6F15528-21DE-4FAA-801E-634DDDAF4B2B}" type="slidenum">
-              <a:rPr lang="es-ES" smtClean="0"/>
-              <a:t>7</a:t>
-            </a:fld>
-            <a:endParaRPr lang="es-ES"/>
-          </a:p>
-        </p:txBody>
-      </p:sp>
-      <p:sp>
-        <p:nvSpPr>
-          <p:cNvPr id="3" name="Marcador de pie de página 2">
-            <a:extLst>
-              <a:ext uri="{FF2B5EF4-FFF2-40B4-BE49-F238E27FC236}">
-                <a16:creationId xmlns:a16="http://schemas.microsoft.com/office/drawing/2014/main" id="{AA1F4313-D710-7A3E-7A8F-EB77DEE3C1A7}"/>
-              </a:ext>
-            </a:extLst>
-          </p:cNvPr>
-          <p:cNvSpPr>
-            <a:spLocks noGrp="1"/>
-          </p:cNvSpPr>
-          <p:nvPr>
-            <p:ph type="ftr" sz="quarter" idx="5"/>
-          </p:nvPr>
-        </p:nvSpPr>
-        <p:spPr/>
-        <p:txBody>
-          <a:bodyPr/>
-          <a:lstStyle/>
-          <a:p>
-            <a:pPr marL="12700">
-              <a:spcBef>
-                <a:spcPts val="15"/>
-              </a:spcBef>
-            </a:pPr>
-            <a:r>
-              <a:rPr lang="es-ES" spc="-5"/>
-              <a:t>LAB 1.0 WAVEGUIDES</a:t>
-            </a:r>
-            <a:endParaRPr lang="es-ES" spc="-5" dirty="0"/>
-          </a:p>
-        </p:txBody>
-      </p:sp>
-      <p:sp>
-        <p:nvSpPr>
-          <p:cNvPr id="2" name="CuadroTexto 1">
-            <a:extLst>
-              <a:ext uri="{FF2B5EF4-FFF2-40B4-BE49-F238E27FC236}">
-                <a16:creationId xmlns:a16="http://schemas.microsoft.com/office/drawing/2014/main" id="{FDE3A197-9508-F9F1-1FEB-FF883D78C151}"/>
-              </a:ext>
-            </a:extLst>
-          </p:cNvPr>
-          <p:cNvSpPr txBox="1"/>
-          <p:nvPr/>
-        </p:nvSpPr>
-        <p:spPr>
-          <a:xfrm>
-            <a:off x="609441" y="4860334"/>
-            <a:ext cx="11199971" cy="1200329"/>
-          </a:xfrm>
-          <a:prstGeom prst="rect">
-            <a:avLst/>
-          </a:prstGeom>
-          <a:solidFill>
-            <a:schemeClr val="bg1">
-              <a:lumMod val="95000"/>
-            </a:schemeClr>
-          </a:solidFill>
-          <a:ln w="28575">
-            <a:solidFill>
-              <a:srgbClr val="E0700D"/>
-            </a:solidFill>
-          </a:ln>
-        </p:spPr>
-        <p:txBody>
-          <a:bodyPr wrap="square" rtlCol="0">
-            <a:spAutoFit/>
-          </a:bodyPr>
-          <a:lstStyle/>
-          <a:p>
-            <a:pPr algn="just"/>
-            <a:r>
-              <a:rPr lang="en-US" sz="1200" dirty="0">
-                <a:latin typeface="Arial" panose="020B0604020202020204" pitchFamily="34" charset="0"/>
-                <a:cs typeface="Arial" panose="020B0604020202020204" pitchFamily="34" charset="0"/>
-              </a:rPr>
-              <a:t>Comment results, which is the safe radius?, consider safe means less than 0.1 dB/90º.</a:t>
-            </a:r>
-          </a:p>
-          <a:p>
-            <a:pPr algn="just"/>
-            <a:endParaRPr lang="en-US" sz="1200" u="sng" dirty="0">
-              <a:latin typeface="Arial" panose="020B0604020202020204" pitchFamily="34" charset="0"/>
-              <a:cs typeface="Arial" panose="020B0604020202020204" pitchFamily="34" charset="0"/>
-            </a:endParaRPr>
-          </a:p>
-          <a:p>
-            <a:pPr algn="just"/>
-            <a:endParaRPr lang="en-US" sz="1200" dirty="0">
-              <a:latin typeface="Arial" panose="020B0604020202020204" pitchFamily="34" charset="0"/>
-              <a:cs typeface="Arial" panose="020B0604020202020204" pitchFamily="34" charset="0"/>
-            </a:endParaRPr>
-          </a:p>
-          <a:p>
-            <a:pPr algn="just"/>
-            <a:endParaRPr lang="en-US" sz="1200" dirty="0">
-              <a:latin typeface="Arial" panose="020B0604020202020204" pitchFamily="34" charset="0"/>
-              <a:cs typeface="Arial" panose="020B0604020202020204" pitchFamily="34" charset="0"/>
-            </a:endParaRPr>
-          </a:p>
-          <a:p>
-            <a:pPr algn="just"/>
-            <a:endParaRPr lang="en-US" sz="1200" dirty="0">
-              <a:latin typeface="Arial" panose="020B0604020202020204" pitchFamily="34" charset="0"/>
-              <a:cs typeface="Arial" panose="020B0604020202020204" pitchFamily="34" charset="0"/>
-            </a:endParaRPr>
-          </a:p>
-          <a:p>
-            <a:pPr algn="just"/>
-            <a:endParaRPr lang="en-US" sz="1200" dirty="0">
-              <a:latin typeface="Arial" panose="020B0604020202020204" pitchFamily="34" charset="0"/>
-              <a:cs typeface="Arial" panose="020B0604020202020204" pitchFamily="34" charset="0"/>
-            </a:endParaRPr>
-          </a:p>
-        </p:txBody>
-      </p:sp>
-      <p:sp>
-        <p:nvSpPr>
-          <p:cNvPr id="7" name="Rectángulo 6">
-            <a:extLst>
-              <a:ext uri="{FF2B5EF4-FFF2-40B4-BE49-F238E27FC236}">
-                <a16:creationId xmlns:a16="http://schemas.microsoft.com/office/drawing/2014/main" id="{B5FE8755-B0BF-14B7-64E6-4BBB2560B9A6}"/>
-              </a:ext>
-            </a:extLst>
-          </p:cNvPr>
-          <p:cNvSpPr/>
-          <p:nvPr/>
-        </p:nvSpPr>
-        <p:spPr>
-          <a:xfrm>
-            <a:off x="609441" y="1418373"/>
-            <a:ext cx="11199971" cy="3306028"/>
-          </a:xfrm>
-          <a:prstGeom prst="rect">
-            <a:avLst/>
-          </a:prstGeom>
-          <a:noFill/>
-          <a:ln w="28575">
-            <a:solidFill>
-              <a:srgbClr val="E0700D"/>
-            </a:solidFill>
-          </a:ln>
-        </p:spPr>
-        <p:style>
-          <a:lnRef idx="2">
-            <a:schemeClr val="accent1">
-              <a:shade val="15000"/>
-            </a:schemeClr>
-          </a:lnRef>
-          <a:fillRef idx="1">
-            <a:schemeClr val="accent1"/>
-          </a:fillRef>
-          <a:effectRef idx="0">
-            <a:schemeClr val="accent1"/>
-          </a:effectRef>
-          <a:fontRef idx="minor">
-            <a:schemeClr val="lt1"/>
-          </a:fontRef>
-        </p:style>
-        <p:txBody>
-          <a:bodyPr rtlCol="0" anchor="ctr"/>
-          <a:lstStyle/>
-          <a:p>
-            <a:pPr algn="ctr"/>
-            <a:endParaRPr lang="en-US"/>
-          </a:p>
-        </p:txBody>
-      </p:sp>
-      <p:sp>
-        <p:nvSpPr>
-          <p:cNvPr id="8" name="CuadroTexto 7">
-            <a:extLst>
-              <a:ext uri="{FF2B5EF4-FFF2-40B4-BE49-F238E27FC236}">
-                <a16:creationId xmlns:a16="http://schemas.microsoft.com/office/drawing/2014/main" id="{331EBD86-BA6C-68C9-2D38-FC8CFBA7ADC4}"/>
-              </a:ext>
-            </a:extLst>
-          </p:cNvPr>
-          <p:cNvSpPr txBox="1"/>
-          <p:nvPr/>
-        </p:nvSpPr>
-        <p:spPr>
-          <a:xfrm>
-            <a:off x="2978141" y="2784355"/>
-            <a:ext cx="6235717" cy="923330"/>
-          </a:xfrm>
-          <a:prstGeom prst="rect">
-            <a:avLst/>
-          </a:prstGeom>
-          <a:noFill/>
-        </p:spPr>
-        <p:txBody>
-          <a:bodyPr wrap="square" rtlCol="0">
-            <a:spAutoFit/>
-          </a:bodyPr>
-          <a:lstStyle/>
-          <a:p>
-            <a:pPr algn="ctr"/>
-            <a:r>
-              <a:rPr lang="en-US" b="1" dirty="0"/>
-              <a:t>deep</a:t>
-            </a:r>
-            <a:r>
-              <a:rPr lang="en-US" dirty="0"/>
-              <a:t> waveguide</a:t>
-            </a:r>
-          </a:p>
-          <a:p>
-            <a:pPr algn="ctr"/>
-            <a:endParaRPr lang="en-US" dirty="0"/>
-          </a:p>
-          <a:p>
-            <a:pPr algn="ctr"/>
-            <a:r>
-              <a:rPr lang="en-US" dirty="0"/>
-              <a:t>Paste Total Loss (dB/90º) vs R &amp; neff_TE0 vs R</a:t>
-            </a:r>
-          </a:p>
-        </p:txBody>
-      </p:sp>
-    </p:spTree>
-    <p:extLst>
-      <p:ext uri="{BB962C8B-B14F-4D97-AF65-F5344CB8AC3E}">
-        <p14:creationId xmlns:p14="http://schemas.microsoft.com/office/powerpoint/2010/main" val="3660438245"/>
-      </p:ext>
-    </p:extLst>
-  </p:cSld>
-  <p:clrMapOvr>
-    <a:masterClrMapping/>
-  </p:clrMapOvr>
-</p:sld>
-</file>
-
-<file path=ppt/slides/slide8.xml><?xml version="1.0" encoding="utf-8"?>
-<p:sld xmlns:a="http://schemas.openxmlformats.org/drawingml/2006/main" xmlns:r="http://schemas.openxmlformats.org/officeDocument/2006/relationships" xmlns:p="http://schemas.openxmlformats.org/presentationml/2006/main">
-  <p:cSld>
-    <p:spTree>
-      <p:nvGrpSpPr>
-        <p:cNvPr id="1" name=""/>
-        <p:cNvGrpSpPr/>
-        <p:nvPr/>
-      </p:nvGrpSpPr>
-      <p:grpSpPr>
-        <a:xfrm>
-          <a:off x="0" y="0"/>
-          <a:ext cx="0" cy="0"/>
-          <a:chOff x="0" y="0"/>
-          <a:chExt cx="0" cy="0"/>
-        </a:xfrm>
-      </p:grpSpPr>
-      <p:sp>
-        <p:nvSpPr>
-          <p:cNvPr id="3" name="object 3"/>
-          <p:cNvSpPr/>
-          <p:nvPr/>
-        </p:nvSpPr>
-        <p:spPr>
-          <a:xfrm>
-            <a:off x="3945635" y="2636520"/>
-            <a:ext cx="8246363" cy="1584959"/>
-          </a:xfrm>
-          <a:prstGeom prst="rect">
-            <a:avLst/>
-          </a:prstGeom>
-          <a:blipFill>
-            <a:blip r:embed="rId2" cstate="print"/>
-            <a:stretch>
-              <a:fillRect/>
-            </a:stretch>
-          </a:blipFill>
-        </p:spPr>
-        <p:txBody>
-          <a:bodyPr wrap="square" lIns="0" tIns="0" rIns="0" bIns="0" rtlCol="0"/>
-          <a:lstStyle/>
-          <a:p>
-            <a:endParaRPr/>
-          </a:p>
-        </p:txBody>
-      </p:sp>
-      <p:sp>
-        <p:nvSpPr>
-          <p:cNvPr id="4" name="object 4"/>
-          <p:cNvSpPr txBox="1">
-            <a:spLocks noGrp="1"/>
-          </p:cNvSpPr>
-          <p:nvPr>
-            <p:ph type="title"/>
-          </p:nvPr>
-        </p:nvSpPr>
-        <p:spPr>
-          <a:xfrm>
-            <a:off x="4513326" y="3165729"/>
-            <a:ext cx="2233295" cy="513715"/>
-          </a:xfrm>
-          <a:prstGeom prst="rect">
-            <a:avLst/>
-          </a:prstGeom>
-        </p:spPr>
-        <p:txBody>
-          <a:bodyPr vert="horz" wrap="square" lIns="0" tIns="13335" rIns="0" bIns="0" rtlCol="0">
-            <a:spAutoFit/>
-          </a:bodyPr>
-          <a:lstStyle/>
-          <a:p>
-            <a:pPr marL="12700">
-              <a:lnSpc>
-                <a:spcPct val="100000"/>
-              </a:lnSpc>
-              <a:spcBef>
-                <a:spcPts val="105"/>
-              </a:spcBef>
-            </a:pPr>
-            <a:r>
-              <a:rPr sz="3200" b="1" spc="-5" dirty="0">
-                <a:solidFill>
-                  <a:srgbClr val="FFFFFF"/>
-                </a:solidFill>
-                <a:latin typeface="Lucida Sans"/>
-                <a:cs typeface="Lucida Sans"/>
-              </a:rPr>
-              <a:t>Thank</a:t>
-            </a:r>
-            <a:r>
-              <a:rPr sz="3200" b="1" spc="-55" dirty="0">
-                <a:solidFill>
-                  <a:srgbClr val="FFFFFF"/>
-                </a:solidFill>
-                <a:latin typeface="Lucida Sans"/>
-                <a:cs typeface="Lucida Sans"/>
-              </a:rPr>
-              <a:t> </a:t>
-            </a:r>
-            <a:r>
-              <a:rPr sz="3200" b="1" dirty="0">
-                <a:solidFill>
-                  <a:srgbClr val="FFFFFF"/>
-                </a:solidFill>
-                <a:latin typeface="Lucida Sans"/>
-                <a:cs typeface="Lucida Sans"/>
-              </a:rPr>
-              <a:t>you</a:t>
-            </a:r>
-            <a:endParaRPr sz="3200">
-              <a:latin typeface="Lucida Sans"/>
-              <a:cs typeface="Lucida Sans"/>
-            </a:endParaRPr>
-          </a:p>
-        </p:txBody>
-      </p:sp>
-      <p:sp>
-        <p:nvSpPr>
-          <p:cNvPr id="5" name="Marcador de número de diapositiva 4">
-            <a:extLst>
-              <a:ext uri="{FF2B5EF4-FFF2-40B4-BE49-F238E27FC236}">
-                <a16:creationId xmlns:a16="http://schemas.microsoft.com/office/drawing/2014/main" id="{B052DA19-AD24-7D24-2AE9-51F8F5A7F5E0}"/>
-              </a:ext>
-            </a:extLst>
-          </p:cNvPr>
-          <p:cNvSpPr>
-            <a:spLocks noGrp="1"/>
-          </p:cNvSpPr>
-          <p:nvPr>
-            <p:ph type="sldNum" sz="quarter" idx="7"/>
-          </p:nvPr>
-        </p:nvSpPr>
-        <p:spPr/>
-        <p:txBody>
-          <a:bodyPr/>
-          <a:lstStyle/>
-          <a:p>
-            <a:fld id="{B6F15528-21DE-4FAA-801E-634DDDAF4B2B}" type="slidenum">
-              <a:rPr lang="es-ES" smtClean="0"/>
-              <a:t>8</a:t>
-            </a:fld>
-            <a:endParaRPr lang="es-ES"/>
-          </a:p>
-        </p:txBody>
-      </p:sp>
-    </p:spTree>
   </p:cSld>
   <p:clrMapOvr>
     <a:masterClrMapping/>
